--- a/vessel_seg_v2/CTA Seg V2/report/presentation_v2.pptx
+++ b/vessel_seg_v2/CTA Seg V2/report/presentation_v2.pptx
@@ -4,6 +4,9 @@
   <p:sldMasterIdLst>
     <p:sldMasterId id="2147483648" r:id="rId1"/>
   </p:sldMasterIdLst>
+  <p:notesMasterIdLst>
+    <p:notesMasterId r:id="rId23"/>
+  </p:notesMasterIdLst>
   <p:sldIdLst>
     <p:sldId id="256" r:id="rId2"/>
     <p:sldId id="257" r:id="rId3"/>
@@ -27,9 +30,6 @@
     <p:sldId id="275" r:id="rId21"/>
     <p:sldId id="276" r:id="rId22"/>
   </p:sldIdLst>
-  <p:notesMasterIdLst>
-    <p:notesMasterId r:id="rId23"/>
-  </p:notesMasterIdLst>
   <p:sldSz cx="12192000" cy="6858000"/>
   <p:notesSz cx="6858000" cy="12192000"/>
   <p:defaultTextStyle>
@@ -124,6 +124,11 @@
       </a:defRPr>
     </a:lvl9pPr>
   </p:defaultTextStyle>
+  <p:extLst>
+    <p:ext uri="{EFAFB233-063F-42B5-8137-9DF3F51BA10A}">
+      <p15:sldGuideLst xmlns:p15="http://schemas.microsoft.com/office/powerpoint/2012/main"/>
+    </p:ext>
+  </p:extLst>
 </p:presentation>
 </file>
 
@@ -149,234 +154,10 @@
           <a:chExt cx="0" cy="0"/>
         </a:xfrm>
       </p:grpSpPr>
-      <p:sp>
-        <p:nvSpPr>
-          <p:cNvPr id="2" name="Header Placeholder 1"/>
-          <p:cNvSpPr>
-            <a:spLocks noGrp="1"/>
-          </p:cNvSpPr>
-          <p:nvPr>
-            <p:ph type="hdr" sz="quarter"/>
-          </p:nvPr>
-        </p:nvSpPr>
-        <p:spPr>
-          <a:xfrm>
-            <a:off x="0" y="0"/>
-            <a:ext cx="2971800" cy="458788"/>
-          </a:xfrm>
-          <a:prstGeom prst="rect">
-            <a:avLst/>
-          </a:prstGeom>
-        </p:spPr>
-        <p:txBody>
-          <a:bodyPr vert="horz" lIns="91440" tIns="45720" rIns="91440" bIns="45720" rtlCol="0"/>
-          <a:lstStyle>
-            <a:lvl1pPr algn="l">
-              <a:defRPr sz="1200"/>
-            </a:lvl1pPr>
-          </a:lstStyle>
-          <a:p>
-            <a:endParaRPr lang="en-US"/>
-          </a:p>
-        </p:txBody>
-      </p:sp>
-      <p:sp>
-        <p:nvSpPr>
-          <p:cNvPr id="3" name="Date Placeholder 2"/>
-          <p:cNvSpPr>
-            <a:spLocks noGrp="1"/>
-          </p:cNvSpPr>
-          <p:nvPr>
-            <p:ph type="dt" idx="1"/>
-          </p:nvPr>
-        </p:nvSpPr>
-        <p:spPr>
-          <a:xfrm>
-            <a:off x="3884613" y="0"/>
-            <a:ext cx="2971800" cy="458788"/>
-          </a:xfrm>
-          <a:prstGeom prst="rect">
-            <a:avLst/>
-          </a:prstGeom>
-        </p:spPr>
-        <p:txBody>
-          <a:bodyPr vert="horz" lIns="91440" tIns="45720" rIns="91440" bIns="45720" rtlCol="0"/>
-          <a:lstStyle>
-            <a:lvl1pPr algn="r">
-              <a:defRPr sz="1200"/>
-            </a:lvl1pPr>
-          </a:lstStyle>
-          <a:p>
-            <a:fld id="{5282F153-3F37-0F45-9E97-73ACFA13230C}" type="datetimeFigureOut">
-              <a:rPr lang="en-US"/>
-              <a:t>7/23/19</a:t>
-            </a:fld>
-            <a:endParaRPr lang="en-US"/>
-          </a:p>
-        </p:txBody>
-      </p:sp>
-      <p:sp>
-        <p:nvSpPr>
-          <p:cNvPr id="4" name="Slide Image Placeholder 3"/>
-          <p:cNvSpPr>
-            <a:spLocks noGrp="1" noRot="1" noChangeAspect="1"/>
-          </p:cNvSpPr>
-          <p:nvPr>
-            <p:ph type="sldImg" idx="2"/>
-          </p:nvPr>
-        </p:nvSpPr>
-        <p:spPr>
-          <a:xfrm>
-            <a:off x="685800" y="1143000"/>
-            <a:ext cx="5486400" cy="3086100"/>
-          </a:xfrm>
-          <a:prstGeom prst="rect">
-            <a:avLst/>
-          </a:prstGeom>
-          <a:noFill/>
-          <a:ln w="12700">
-            <a:solidFill>
-              <a:prstClr val="black"/>
-            </a:solidFill>
-          </a:ln>
-        </p:spPr>
-        <p:txBody>
-          <a:bodyPr vert="horz" lIns="91440" tIns="45720" rIns="91440" bIns="45720" rtlCol="0" anchor="ctr"/>
-          <a:lstStyle/>
-          <a:p>
-            <a:endParaRPr lang="en-US"/>
-          </a:p>
-        </p:txBody>
-      </p:sp>
-      <p:sp>
-        <p:nvSpPr>
-          <p:cNvPr id="5" name="Notes Placeholder 4"/>
-          <p:cNvSpPr>
-            <a:spLocks noGrp="1"/>
-          </p:cNvSpPr>
-          <p:nvPr>
-            <p:ph type="body" sz="quarter" idx="3"/>
-          </p:nvPr>
-        </p:nvSpPr>
-        <p:spPr>
-          <a:xfrm>
-            <a:off x="685800" y="4400550"/>
-            <a:ext cx="5486400" cy="3600450"/>
-          </a:xfrm>
-          <a:prstGeom prst="rect">
-            <a:avLst/>
-          </a:prstGeom>
-        </p:spPr>
-        <p:txBody>
-          <a:bodyPr vert="horz" lIns="91440" tIns="45720" rIns="91440" bIns="45720" rtlCol="0"/>
-          <a:lstStyle/>
-          <a:p>
-            <a:pPr lvl="0"/>
-            <a:r>
-              <a:rPr lang="en-US"/>
-              <a:t>Click to edit Master text styles</a:t>
-            </a:r>
-          </a:p>
-          <a:p>
-            <a:pPr lvl="1"/>
-            <a:r>
-              <a:rPr lang="en-US"/>
-              <a:t>Second level</a:t>
-            </a:r>
-          </a:p>
-          <a:p>
-            <a:pPr lvl="2"/>
-            <a:r>
-              <a:rPr lang="en-US"/>
-              <a:t>Third level</a:t>
-            </a:r>
-          </a:p>
-          <a:p>
-            <a:pPr lvl="3"/>
-            <a:r>
-              <a:rPr lang="en-US"/>
-              <a:t>Fourth level</a:t>
-            </a:r>
-          </a:p>
-          <a:p>
-            <a:pPr lvl="4"/>
-            <a:r>
-              <a:rPr lang="en-US"/>
-              <a:t>Fifth level</a:t>
-            </a:r>
-          </a:p>
-        </p:txBody>
-      </p:sp>
-      <p:sp>
-        <p:nvSpPr>
-          <p:cNvPr id="6" name="Footer Placeholder 5"/>
-          <p:cNvSpPr>
-            <a:spLocks noGrp="1"/>
-          </p:cNvSpPr>
-          <p:nvPr>
-            <p:ph type="ftr" sz="quarter" idx="4"/>
-          </p:nvPr>
-        </p:nvSpPr>
-        <p:spPr>
-          <a:xfrm>
-            <a:off x="0" y="8685213"/>
-            <a:ext cx="2971800" cy="458787"/>
-          </a:xfrm>
-          <a:prstGeom prst="rect">
-            <a:avLst/>
-          </a:prstGeom>
-        </p:spPr>
-        <p:txBody>
-          <a:bodyPr vert="horz" lIns="91440" tIns="45720" rIns="91440" bIns="45720" rtlCol="0" anchor="b"/>
-          <a:lstStyle>
-            <a:lvl1pPr algn="l">
-              <a:defRPr sz="1200"/>
-            </a:lvl1pPr>
-          </a:lstStyle>
-          <a:p>
-            <a:endParaRPr lang="en-US"/>
-          </a:p>
-        </p:txBody>
-      </p:sp>
-      <p:sp>
-        <p:nvSpPr>
-          <p:cNvPr id="7" name="Slide Number Placeholder 6"/>
-          <p:cNvSpPr>
-            <a:spLocks noGrp="1"/>
-          </p:cNvSpPr>
-          <p:nvPr>
-            <p:ph type="sldNum" sz="quarter" idx="5"/>
-          </p:nvPr>
-        </p:nvSpPr>
-        <p:spPr>
-          <a:xfrm>
-            <a:off x="3884613" y="8685213"/>
-            <a:ext cx="2971800" cy="458787"/>
-          </a:xfrm>
-          <a:prstGeom prst="rect">
-            <a:avLst/>
-          </a:prstGeom>
-        </p:spPr>
-        <p:txBody>
-          <a:bodyPr vert="horz" lIns="91440" tIns="45720" rIns="91440" bIns="45720" rtlCol="0" anchor="b"/>
-          <a:lstStyle>
-            <a:lvl1pPr algn="r">
-              <a:defRPr sz="1200"/>
-            </a:lvl1pPr>
-          </a:lstStyle>
-          <a:p>
-            <a:fld id="{CE5E9CC1-C706-0F49-92D6-E571CC5EEA8F}" type="slidenum">
-              <a:rPr lang="en-US"/>
-              <a:t>‹#›</a:t>
-            </a:fld>
-            <a:endParaRPr lang="en-US"/>
-          </a:p>
-        </p:txBody>
-      </p:sp>
     </p:spTree>
     <p:extLst>
       <p:ext uri="{BB962C8B-B14F-4D97-AF65-F5344CB8AC3E}">
-        <p14:creationId xmlns:p14="http://schemas.microsoft.com/office/powerpoint/2010/main" val="1024086991"/>
+        <p14:creationId xmlns:p14="http://schemas.microsoft.com/office/powerpoint/2010/main" val="3535504374"/>
       </p:ext>
     </p:extLst>
   </p:cSld>
@@ -520,10 +301,6 @@
           <a:bodyPr/>
           <a:lstStyle/>
           <a:p>
-            <a:r>
-              <a:rPr lang="en-US" dirty="0"/>
-              <a:t/>
-            </a:r>
             <a:endParaRPr lang="en-US" dirty="0"/>
           </a:p>
         </p:txBody>
@@ -608,10 +385,6 @@
           <a:bodyPr/>
           <a:lstStyle/>
           <a:p>
-            <a:r>
-              <a:rPr lang="en-US" dirty="0"/>
-              <a:t/>
-            </a:r>
             <a:endParaRPr lang="en-US" dirty="0"/>
           </a:p>
         </p:txBody>
@@ -696,10 +469,6 @@
           <a:bodyPr/>
           <a:lstStyle/>
           <a:p>
-            <a:r>
-              <a:rPr lang="en-US" dirty="0"/>
-              <a:t/>
-            </a:r>
             <a:endParaRPr lang="en-US" dirty="0"/>
           </a:p>
         </p:txBody>
@@ -784,10 +553,6 @@
           <a:bodyPr/>
           <a:lstStyle/>
           <a:p>
-            <a:r>
-              <a:rPr lang="en-US" dirty="0"/>
-              <a:t/>
-            </a:r>
             <a:endParaRPr lang="en-US" dirty="0"/>
           </a:p>
         </p:txBody>
@@ -872,10 +637,6 @@
           <a:bodyPr/>
           <a:lstStyle/>
           <a:p>
-            <a:r>
-              <a:rPr lang="en-US" dirty="0"/>
-              <a:t/>
-            </a:r>
             <a:endParaRPr lang="en-US" dirty="0"/>
           </a:p>
         </p:txBody>
@@ -960,10 +721,6 @@
           <a:bodyPr/>
           <a:lstStyle/>
           <a:p>
-            <a:r>
-              <a:rPr lang="en-US" dirty="0"/>
-              <a:t/>
-            </a:r>
             <a:endParaRPr lang="en-US" dirty="0"/>
           </a:p>
         </p:txBody>
@@ -1048,10 +805,6 @@
           <a:bodyPr/>
           <a:lstStyle/>
           <a:p>
-            <a:r>
-              <a:rPr lang="en-US" dirty="0"/>
-              <a:t/>
-            </a:r>
             <a:endParaRPr lang="en-US" dirty="0"/>
           </a:p>
         </p:txBody>
@@ -1136,10 +889,6 @@
           <a:bodyPr/>
           <a:lstStyle/>
           <a:p>
-            <a:r>
-              <a:rPr lang="en-US" dirty="0"/>
-              <a:t/>
-            </a:r>
             <a:endParaRPr lang="en-US" dirty="0"/>
           </a:p>
         </p:txBody>
@@ -1224,10 +973,6 @@
           <a:bodyPr/>
           <a:lstStyle/>
           <a:p>
-            <a:r>
-              <a:rPr lang="en-US" dirty="0"/>
-              <a:t/>
-            </a:r>
             <a:endParaRPr lang="en-US" dirty="0"/>
           </a:p>
         </p:txBody>
@@ -1312,10 +1057,6 @@
           <a:bodyPr/>
           <a:lstStyle/>
           <a:p>
-            <a:r>
-              <a:rPr lang="en-US" dirty="0"/>
-              <a:t/>
-            </a:r>
             <a:endParaRPr lang="en-US" dirty="0"/>
           </a:p>
         </p:txBody>
@@ -1400,10 +1141,6 @@
           <a:bodyPr/>
           <a:lstStyle/>
           <a:p>
-            <a:r>
-              <a:rPr lang="en-US" dirty="0"/>
-              <a:t/>
-            </a:r>
             <a:endParaRPr lang="en-US" dirty="0"/>
           </a:p>
         </p:txBody>
@@ -1488,10 +1225,6 @@
           <a:bodyPr/>
           <a:lstStyle/>
           <a:p>
-            <a:r>
-              <a:rPr lang="en-US" dirty="0"/>
-              <a:t/>
-            </a:r>
             <a:endParaRPr lang="en-US" dirty="0"/>
           </a:p>
         </p:txBody>
@@ -1576,10 +1309,6 @@
           <a:bodyPr/>
           <a:lstStyle/>
           <a:p>
-            <a:r>
-              <a:rPr lang="en-US" dirty="0"/>
-              <a:t/>
-            </a:r>
             <a:endParaRPr lang="en-US" dirty="0"/>
           </a:p>
         </p:txBody>
@@ -1664,10 +1393,6 @@
           <a:bodyPr/>
           <a:lstStyle/>
           <a:p>
-            <a:r>
-              <a:rPr lang="en-US" dirty="0"/>
-              <a:t/>
-            </a:r>
             <a:endParaRPr lang="en-US" dirty="0"/>
           </a:p>
         </p:txBody>
@@ -1752,10 +1477,6 @@
           <a:bodyPr/>
           <a:lstStyle/>
           <a:p>
-            <a:r>
-              <a:rPr lang="en-US" dirty="0"/>
-              <a:t/>
-            </a:r>
             <a:endParaRPr lang="en-US" dirty="0"/>
           </a:p>
         </p:txBody>
@@ -1840,10 +1561,6 @@
           <a:bodyPr/>
           <a:lstStyle/>
           <a:p>
-            <a:r>
-              <a:rPr lang="en-US" dirty="0"/>
-              <a:t/>
-            </a:r>
             <a:endParaRPr lang="en-US" dirty="0"/>
           </a:p>
         </p:txBody>
@@ -1928,10 +1645,6 @@
           <a:bodyPr/>
           <a:lstStyle/>
           <a:p>
-            <a:r>
-              <a:rPr lang="en-US" dirty="0"/>
-              <a:t/>
-            </a:r>
             <a:endParaRPr lang="en-US" dirty="0"/>
           </a:p>
         </p:txBody>
@@ -2016,10 +1729,6 @@
           <a:bodyPr/>
           <a:lstStyle/>
           <a:p>
-            <a:r>
-              <a:rPr lang="en-US" dirty="0"/>
-              <a:t/>
-            </a:r>
             <a:endParaRPr lang="en-US" dirty="0"/>
           </a:p>
         </p:txBody>
@@ -2104,10 +1813,6 @@
           <a:bodyPr/>
           <a:lstStyle/>
           <a:p>
-            <a:r>
-              <a:rPr lang="en-US" dirty="0"/>
-              <a:t/>
-            </a:r>
             <a:endParaRPr lang="en-US" dirty="0"/>
           </a:p>
         </p:txBody>
@@ -2192,10 +1897,6 @@
           <a:bodyPr/>
           <a:lstStyle/>
           <a:p>
-            <a:r>
-              <a:rPr lang="en-US" dirty="0"/>
-              <a:t/>
-            </a:r>
             <a:endParaRPr lang="en-US" dirty="0"/>
           </a:p>
         </p:txBody>
@@ -2280,10 +1981,6 @@
           <a:bodyPr/>
           <a:lstStyle/>
           <a:p>
-            <a:r>
-              <a:rPr lang="en-US" dirty="0"/>
-              <a:t/>
-            </a:r>
             <a:endParaRPr lang="en-US" dirty="0"/>
           </a:p>
         </p:txBody>
@@ -2357,6 +2054,11 @@
 <file path=ppt/slideMasters/slideMaster1.xml><?xml version="1.0" encoding="utf-8"?>
 <p:sldMaster xmlns:a="http://schemas.openxmlformats.org/drawingml/2006/main" xmlns:r="http://schemas.openxmlformats.org/officeDocument/2006/relationships" xmlns:p="http://schemas.openxmlformats.org/presentationml/2006/main">
   <p:cSld>
+    <p:bg>
+      <p:bgRef idx="1001">
+        <a:schemeClr val="bg1"/>
+      </p:bgRef>
+    </p:bg>
     <p:spTree>
       <p:nvGrpSpPr>
         <p:cNvPr id="1" name=""/>
@@ -2639,6 +2341,7 @@
         <a:solidFill>
           <a:srgbClr val="131B2E"/>
         </a:solidFill>
+        <a:effectLst/>
       </p:bgPr>
     </p:bg>
     <p:spTree>
@@ -2674,6 +2377,13 @@
           </a:solidFill>
           <a:ln/>
         </p:spPr>
+        <p:txBody>
+          <a:bodyPr/>
+          <a:lstStyle/>
+          <a:p>
+            <a:endParaRPr lang="en-US"/>
+          </a:p>
+        </p:txBody>
       </p:sp>
       <p:sp>
         <p:nvSpPr>
@@ -2694,6 +2404,13 @@
           </a:solidFill>
           <a:ln/>
         </p:spPr>
+        <p:txBody>
+          <a:bodyPr/>
+          <a:lstStyle/>
+          <a:p>
+            <a:endParaRPr lang="en-US"/>
+          </a:p>
+        </p:txBody>
       </p:sp>
       <p:sp>
         <p:nvSpPr>
@@ -2716,7 +2433,7 @@
           <a:bodyPr wrap="square" lIns="0" tIns="0" rIns="0" bIns="0" rtlCol="0" anchor="ctr"/>
           <a:lstStyle/>
           <a:p>
-            <a:pPr indent="0" marL="0">
+            <a:pPr marL="0" indent="0">
               <a:lnSpc>
                 <a:spcPct val="110000"/>
               </a:lnSpc>
@@ -2736,7 +2453,7 @@
             <a:endParaRPr lang="en-US" sz="4000" dirty="0"/>
           </a:p>
           <a:p>
-            <a:pPr indent="0" marL="0">
+            <a:pPr marL="0" indent="0">
               <a:lnSpc>
                 <a:spcPct val="110000"/>
               </a:lnSpc>
@@ -2778,7 +2495,7 @@
           <a:bodyPr wrap="square" lIns="0" tIns="0" rIns="0" bIns="0" rtlCol="0" anchor="ctr"/>
           <a:lstStyle/>
           <a:p>
-            <a:pPr indent="0" marL="0">
+            <a:pPr marL="0" indent="0">
               <a:buNone/>
             </a:pPr>
             <a:r>
@@ -2817,7 +2534,7 @@
           <a:bodyPr wrap="square" lIns="0" tIns="0" rIns="0" bIns="0" rtlCol="0" anchor="ctr"/>
           <a:lstStyle/>
           <a:p>
-            <a:pPr indent="0" marL="0">
+            <a:pPr marL="0" indent="0">
               <a:buNone/>
             </a:pPr>
             <a:r>
@@ -2856,7 +2573,7 @@
           <a:bodyPr wrap="square" lIns="0" tIns="0" rIns="0" bIns="0" rtlCol="0" anchor="ctr"/>
           <a:lstStyle/>
           <a:p>
-            <a:pPr indent="0" marL="0">
+            <a:pPr marL="0" indent="0">
               <a:buNone/>
             </a:pPr>
             <a:r>
@@ -2873,7 +2590,7 @@
             <a:endParaRPr lang="en-US" sz="1400" dirty="0"/>
           </a:p>
           <a:p>
-            <a:pPr indent="0" marL="0">
+            <a:pPr marL="0" indent="0">
               <a:buNone/>
             </a:pPr>
             <a:r>
@@ -2907,6 +2624,7 @@
         <a:solidFill>
           <a:srgbClr val="131B2E"/>
         </a:solidFill>
+        <a:effectLst/>
       </p:bgPr>
     </p:bg>
     <p:spTree>
@@ -2942,6 +2660,13 @@
           </a:solidFill>
           <a:ln/>
         </p:spPr>
+        <p:txBody>
+          <a:bodyPr/>
+          <a:lstStyle/>
+          <a:p>
+            <a:endParaRPr lang="en-US"/>
+          </a:p>
+        </p:txBody>
       </p:sp>
       <p:sp>
         <p:nvSpPr>
@@ -2964,7 +2689,7 @@
           <a:bodyPr wrap="square" lIns="0" tIns="0" rIns="0" bIns="0" rtlCol="0" anchor="ctr"/>
           <a:lstStyle/>
           <a:p>
-            <a:pPr indent="0" marL="0">
+            <a:pPr marL="0" indent="0">
               <a:buNone/>
             </a:pPr>
             <a:r>
@@ -3003,7 +2728,7 @@
           <a:bodyPr wrap="square" lIns="0" tIns="0" rIns="0" bIns="0" rtlCol="0" anchor="ctr"/>
           <a:lstStyle/>
           <a:p>
-            <a:pPr indent="0" marL="0">
+            <a:pPr marL="0" indent="0">
               <a:buNone/>
             </a:pPr>
             <a:r>
@@ -3040,13 +2765,20 @@
           </a:solidFill>
           <a:ln/>
           <a:effectLst>
-            <a:outerShdw sx="100000" sy="100000" kx="0" ky="0" algn="bl" rotWithShape="0" blurRad="50800" dist="25400" dir="8100000">
+            <a:outerShdw blurRad="50800" dist="25400" dir="8100000" algn="bl" rotWithShape="0">
               <a:srgbClr val="000000">
                 <a:alpha val="20000"/>
               </a:srgbClr>
             </a:outerShdw>
           </a:effectLst>
         </p:spPr>
+        <p:txBody>
+          <a:bodyPr/>
+          <a:lstStyle/>
+          <a:p>
+            <a:endParaRPr lang="en-US"/>
+          </a:p>
+        </p:txBody>
       </p:sp>
       <p:sp>
         <p:nvSpPr>
@@ -3069,7 +2801,7 @@
           <a:bodyPr wrap="square" lIns="0" tIns="0" rIns="0" bIns="0" rtlCol="0" anchor="ctr"/>
           <a:lstStyle/>
           <a:p>
-            <a:pPr indent="0" marL="0">
+            <a:pPr marL="0" indent="0">
               <a:buNone/>
             </a:pPr>
             <a:r>
@@ -3106,6 +2838,13 @@
           </a:solidFill>
           <a:ln/>
         </p:spPr>
+        <p:txBody>
+          <a:bodyPr/>
+          <a:lstStyle/>
+          <a:p>
+            <a:endParaRPr lang="en-US"/>
+          </a:p>
+        </p:txBody>
       </p:sp>
       <p:sp>
         <p:nvSpPr>
@@ -3128,7 +2867,7 @@
           <a:bodyPr wrap="square" rtlCol="0" anchor="ctr"/>
           <a:lstStyle/>
           <a:p>
-            <a:pPr indent="0" marL="0">
+            <a:pPr marL="0" indent="0">
               <a:buNone/>
             </a:pPr>
             <a:r>
@@ -3145,7 +2884,7 @@
             <a:endParaRPr lang="en-US" sz="1400" dirty="0"/>
           </a:p>
           <a:p>
-            <a:pPr indent="0" marL="0">
+            <a:pPr marL="0" indent="0">
               <a:buNone/>
             </a:pPr>
             <a:r>
@@ -3159,9 +2898,6 @@
               </a:rPr>
               <a:t>         + Σ</a:t>
             </a:r>
-            <a:pPr indent="0" marL="0">
-              <a:buNone/>
-            </a:pPr>
             <a:r>
               <a:rPr lang="en-US" sz="1000" dirty="0">
                 <a:solidFill>
@@ -3173,9 +2909,6 @@
               </a:rPr>
               <a:t>k=1..K</a:t>
             </a:r>
-            <a:pPr indent="0" marL="0">
-              <a:buNone/>
-            </a:pPr>
             <a:r>
               <a:rPr lang="en-US" sz="1400" dirty="0">
                 <a:solidFill>
@@ -3187,9 +2920,6 @@
               </a:rPr>
               <a:t> ReLU(erode</a:t>
             </a:r>
-            <a:pPr indent="0" marL="0">
-              <a:buNone/>
-            </a:pPr>
             <a:r>
               <a:rPr lang="en-US" sz="1000" dirty="0">
                 <a:solidFill>
@@ -3201,9 +2931,6 @@
               </a:rPr>
               <a:t>k</a:t>
             </a:r>
-            <a:pPr indent="0" marL="0">
-              <a:buNone/>
-            </a:pPr>
             <a:r>
               <a:rPr lang="en-US" sz="1400" dirty="0">
                 <a:solidFill>
@@ -3215,9 +2942,6 @@
               </a:rPr>
               <a:t>(x) − open(erode</a:t>
             </a:r>
-            <a:pPr indent="0" marL="0">
-              <a:buNone/>
-            </a:pPr>
             <a:r>
               <a:rPr lang="en-US" sz="1000" dirty="0">
                 <a:solidFill>
@@ -3229,9 +2953,6 @@
               </a:rPr>
               <a:t>k</a:t>
             </a:r>
-            <a:pPr indent="0" marL="0">
-              <a:buNone/>
-            </a:pPr>
             <a:r>
               <a:rPr lang="en-US" sz="1400" dirty="0">
                 <a:solidFill>
@@ -3246,13 +2967,13 @@
             <a:endParaRPr lang="en-US" sz="1400" dirty="0"/>
           </a:p>
           <a:p>
-            <a:pPr indent="0" marL="0">
+            <a:pPr marL="0" indent="0">
               <a:buNone/>
             </a:pPr>
             <a:endParaRPr lang="en-US" sz="1400" dirty="0"/>
           </a:p>
           <a:p>
-            <a:pPr indent="0" marL="0">
+            <a:pPr marL="0" indent="0">
               <a:buNone/>
             </a:pPr>
             <a:r>
@@ -3266,13 +2987,10 @@
               </a:rPr>
               <a:t>erode(x) = −MaxPool3D(−x, k=3)    |    dilate(x) = MaxPool3D(x, k=3)</a:t>
             </a:r>
-            <a:pPr indent="0" marL="0">
-              <a:buNone/>
-            </a:pPr>
             <a:endParaRPr lang="en-US" sz="1400" dirty="0"/>
           </a:p>
           <a:p>
-            <a:pPr indent="0" marL="0">
+            <a:pPr marL="0" indent="0">
               <a:buNone/>
             </a:pPr>
             <a:r>
@@ -3309,13 +3027,20 @@
           </a:solidFill>
           <a:ln/>
           <a:effectLst>
-            <a:outerShdw sx="100000" sy="100000" kx="0" ky="0" algn="bl" rotWithShape="0" blurRad="50800" dist="25400" dir="8100000">
+            <a:outerShdw blurRad="50800" dist="25400" dir="8100000" algn="bl" rotWithShape="0">
               <a:srgbClr val="000000">
                 <a:alpha val="20000"/>
               </a:srgbClr>
             </a:outerShdw>
           </a:effectLst>
         </p:spPr>
+        <p:txBody>
+          <a:bodyPr/>
+          <a:lstStyle/>
+          <a:p>
+            <a:endParaRPr lang="en-US"/>
+          </a:p>
+        </p:txBody>
       </p:sp>
       <p:sp>
         <p:nvSpPr>
@@ -3338,7 +3063,7 @@
           <a:bodyPr wrap="square" lIns="0" tIns="0" rIns="0" bIns="0" rtlCol="0" anchor="ctr"/>
           <a:lstStyle/>
           <a:p>
-            <a:pPr indent="0" marL="0">
+            <a:pPr marL="0" indent="0">
               <a:buNone/>
             </a:pPr>
             <a:r>
@@ -3375,6 +3100,13 @@
           </a:solidFill>
           <a:ln/>
         </p:spPr>
+        <p:txBody>
+          <a:bodyPr/>
+          <a:lstStyle/>
+          <a:p>
+            <a:endParaRPr lang="en-US"/>
+          </a:p>
+        </p:txBody>
       </p:sp>
       <p:sp>
         <p:nvSpPr>
@@ -3397,7 +3129,7 @@
           <a:bodyPr wrap="square" rtlCol="0" anchor="ctr"/>
           <a:lstStyle/>
           <a:p>
-            <a:pPr indent="0" marL="0">
+            <a:pPr marL="0" indent="0">
               <a:buNone/>
             </a:pPr>
             <a:r>
@@ -3411,9 +3143,6 @@
               </a:rPr>
               <a:t>T</a:t>
             </a:r>
-            <a:pPr indent="0" marL="0">
-              <a:buNone/>
-            </a:pPr>
             <a:r>
               <a:rPr lang="en-US" sz="1000" dirty="0">
                 <a:solidFill>
@@ -3425,9 +3154,6 @@
               </a:rPr>
               <a:t>prec</a:t>
             </a:r>
-            <a:pPr indent="0" marL="0">
-              <a:buNone/>
-            </a:pPr>
             <a:r>
               <a:rPr lang="en-US" sz="1500" dirty="0">
                 <a:solidFill>
@@ -3442,13 +3168,13 @@
             <a:endParaRPr lang="en-US" sz="1500" dirty="0"/>
           </a:p>
           <a:p>
-            <a:pPr indent="0" marL="0">
+            <a:pPr marL="0" indent="0">
               <a:buNone/>
             </a:pPr>
             <a:endParaRPr lang="en-US" sz="1500" dirty="0"/>
           </a:p>
           <a:p>
-            <a:pPr indent="0" marL="0">
+            <a:pPr marL="0" indent="0">
               <a:buNone/>
             </a:pPr>
             <a:r>
@@ -3462,9 +3188,6 @@
               </a:rPr>
               <a:t>T</a:t>
             </a:r>
-            <a:pPr indent="0" marL="0">
-              <a:buNone/>
-            </a:pPr>
             <a:r>
               <a:rPr lang="en-US" sz="1000" dirty="0">
                 <a:solidFill>
@@ -3476,9 +3199,6 @@
               </a:rPr>
               <a:t>sens</a:t>
             </a:r>
-            <a:pPr indent="0" marL="0">
-              <a:buNone/>
-            </a:pPr>
             <a:r>
               <a:rPr lang="en-US" sz="1500" dirty="0">
                 <a:solidFill>
@@ -3493,13 +3213,13 @@
             <a:endParaRPr lang="en-US" sz="1500" dirty="0"/>
           </a:p>
           <a:p>
-            <a:pPr indent="0" marL="0">
+            <a:pPr marL="0" indent="0">
               <a:buNone/>
             </a:pPr>
             <a:endParaRPr lang="en-US" sz="1500" dirty="0"/>
           </a:p>
           <a:p>
-            <a:pPr indent="0" marL="0">
+            <a:pPr marL="0" indent="0">
               <a:buNone/>
             </a:pPr>
             <a:r>
@@ -3513,9 +3233,6 @@
               </a:rPr>
               <a:t>clDice = 2·T</a:t>
             </a:r>
-            <a:pPr indent="0" marL="0">
-              <a:buNone/>
-            </a:pPr>
             <a:r>
               <a:rPr lang="en-US" sz="1000" dirty="0">
                 <a:solidFill>
@@ -3527,9 +3244,6 @@
               </a:rPr>
               <a:t>prec</a:t>
             </a:r>
-            <a:pPr indent="0" marL="0">
-              <a:buNone/>
-            </a:pPr>
             <a:r>
               <a:rPr lang="en-US" sz="1500" dirty="0">
                 <a:solidFill>
@@ -3541,9 +3255,6 @@
               </a:rPr>
               <a:t>·T</a:t>
             </a:r>
-            <a:pPr indent="0" marL="0">
-              <a:buNone/>
-            </a:pPr>
             <a:r>
               <a:rPr lang="en-US" sz="1000" dirty="0">
                 <a:solidFill>
@@ -3555,9 +3266,6 @@
               </a:rPr>
               <a:t>sens</a:t>
             </a:r>
-            <a:pPr indent="0" marL="0">
-              <a:buNone/>
-            </a:pPr>
             <a:r>
               <a:rPr lang="en-US" sz="1500" dirty="0">
                 <a:solidFill>
@@ -3569,9 +3277,6 @@
               </a:rPr>
               <a:t> / (T</a:t>
             </a:r>
-            <a:pPr indent="0" marL="0">
-              <a:buNone/>
-            </a:pPr>
             <a:r>
               <a:rPr lang="en-US" sz="1000" dirty="0">
                 <a:solidFill>
@@ -3583,9 +3288,6 @@
               </a:rPr>
               <a:t>prec</a:t>
             </a:r>
-            <a:pPr indent="0" marL="0">
-              <a:buNone/>
-            </a:pPr>
             <a:r>
               <a:rPr lang="en-US" sz="1500" dirty="0">
                 <a:solidFill>
@@ -3597,9 +3299,6 @@
               </a:rPr>
               <a:t>+T</a:t>
             </a:r>
-            <a:pPr indent="0" marL="0">
-              <a:buNone/>
-            </a:pPr>
             <a:r>
               <a:rPr lang="en-US" sz="1000" dirty="0">
                 <a:solidFill>
@@ -3611,9 +3310,6 @@
               </a:rPr>
               <a:t>sens</a:t>
             </a:r>
-            <a:pPr indent="0" marL="0">
-              <a:buNone/>
-            </a:pPr>
             <a:r>
               <a:rPr lang="en-US" sz="1500" dirty="0">
                 <a:solidFill>
@@ -3648,6 +3344,13 @@
           </a:solidFill>
           <a:ln/>
         </p:spPr>
+        <p:txBody>
+          <a:bodyPr/>
+          <a:lstStyle/>
+          <a:p>
+            <a:endParaRPr lang="en-US"/>
+          </a:p>
+        </p:txBody>
       </p:sp>
       <p:sp>
         <p:nvSpPr>
@@ -3670,7 +3373,7 @@
           <a:bodyPr wrap="square" rtlCol="0" anchor="ctr"/>
           <a:lstStyle/>
           <a:p>
-            <a:pPr algn="ctr" indent="0" marL="0">
+            <a:pPr marL="0" indent="0" algn="ctr">
               <a:buNone/>
             </a:pPr>
             <a:r>
@@ -3684,9 +3387,6 @@
               </a:rPr>
               <a:t>Combined:   L</a:t>
             </a:r>
-            <a:pPr algn="ctr" indent="0" marL="0">
-              <a:buNone/>
-            </a:pPr>
             <a:r>
               <a:rPr lang="en-US" sz="1200" dirty="0">
                 <a:solidFill>
@@ -3698,9 +3398,6 @@
               </a:rPr>
               <a:t>clDice</a:t>
             </a:r>
-            <a:pPr algn="ctr" indent="0" marL="0">
-              <a:buNone/>
-            </a:pPr>
             <a:r>
               <a:rPr lang="en-US" sz="1800" dirty="0">
                 <a:solidFill>
@@ -3712,9 +3409,6 @@
               </a:rPr>
               <a:t> = (1 − α) · L</a:t>
             </a:r>
-            <a:pPr algn="ctr" indent="0" marL="0">
-              <a:buNone/>
-            </a:pPr>
             <a:r>
               <a:rPr lang="en-US" sz="1200" dirty="0">
                 <a:solidFill>
@@ -3726,9 +3420,6 @@
               </a:rPr>
               <a:t>base</a:t>
             </a:r>
-            <a:pPr algn="ctr" indent="0" marL="0">
-              <a:buNone/>
-            </a:pPr>
             <a:r>
               <a:rPr lang="en-US" sz="1800" dirty="0">
                 <a:solidFill>
@@ -3740,9 +3431,6 @@
               </a:rPr>
               <a:t> + α · (1 − clDice)        </a:t>
             </a:r>
-            <a:pPr algn="ctr" indent="0" marL="0">
-              <a:buNone/>
-            </a:pPr>
             <a:r>
               <a:rPr lang="en-US" sz="1600" b="1" dirty="0">
                 <a:solidFill>
@@ -3777,6 +3465,13 @@
           </a:solidFill>
           <a:ln/>
         </p:spPr>
+        <p:txBody>
+          <a:bodyPr/>
+          <a:lstStyle/>
+          <a:p>
+            <a:endParaRPr lang="en-US"/>
+          </a:p>
+        </p:txBody>
       </p:sp>
       <p:sp>
         <p:nvSpPr>
@@ -3799,7 +3494,7 @@
           <a:bodyPr wrap="square" rtlCol="0" anchor="ctr"/>
           <a:lstStyle/>
           <a:p>
-            <a:pPr indent="0" marL="0">
+            <a:pPr marL="0" indent="0">
               <a:buNone/>
             </a:pPr>
             <a:r>
@@ -3813,9 +3508,6 @@
               </a:rPr>
               <a:t>Intuition: </a:t>
             </a:r>
-            <a:pPr indent="0" marL="0">
-              <a:buNone/>
-            </a:pPr>
             <a:r>
               <a:rPr lang="en-US" sz="1400" dirty="0">
                 <a:solidFill>
@@ -3847,6 +3539,7 @@
         <a:solidFill>
           <a:srgbClr val="131B2E"/>
         </a:solidFill>
+        <a:effectLst/>
       </p:bgPr>
     </p:bg>
     <p:spTree>
@@ -3882,6 +3575,13 @@
           </a:solidFill>
           <a:ln/>
         </p:spPr>
+        <p:txBody>
+          <a:bodyPr/>
+          <a:lstStyle/>
+          <a:p>
+            <a:endParaRPr lang="en-US"/>
+          </a:p>
+        </p:txBody>
       </p:sp>
       <p:sp>
         <p:nvSpPr>
@@ -3904,7 +3604,7 @@
           <a:bodyPr wrap="square" lIns="0" tIns="0" rIns="0" bIns="0" rtlCol="0" anchor="ctr"/>
           <a:lstStyle/>
           <a:p>
-            <a:pPr indent="0" marL="0">
+            <a:pPr marL="0" indent="0">
               <a:buNone/>
             </a:pPr>
             <a:r>
@@ -3943,7 +3643,7 @@
           <a:bodyPr wrap="square" lIns="0" tIns="0" rIns="0" bIns="0" rtlCol="0" anchor="ctr"/>
           <a:lstStyle/>
           <a:p>
-            <a:pPr indent="0" marL="0">
+            <a:pPr marL="0" indent="0">
               <a:buNone/>
             </a:pPr>
             <a:r>
@@ -3980,13 +3680,20 @@
           </a:solidFill>
           <a:ln/>
           <a:effectLst>
-            <a:outerShdw sx="100000" sy="100000" kx="0" ky="0" algn="bl" rotWithShape="0" blurRad="50800" dist="25400" dir="8100000">
+            <a:outerShdw blurRad="50800" dist="25400" dir="8100000" algn="bl" rotWithShape="0">
               <a:srgbClr val="000000">
                 <a:alpha val="20000"/>
               </a:srgbClr>
             </a:outerShdw>
           </a:effectLst>
         </p:spPr>
+        <p:txBody>
+          <a:bodyPr/>
+          <a:lstStyle/>
+          <a:p>
+            <a:endParaRPr lang="en-US"/>
+          </a:p>
+        </p:txBody>
       </p:sp>
       <p:sp>
         <p:nvSpPr>
@@ -4009,7 +3716,7 @@
           <a:bodyPr wrap="square" lIns="0" tIns="0" rIns="0" bIns="0" rtlCol="0" anchor="ctr"/>
           <a:lstStyle/>
           <a:p>
-            <a:pPr indent="0" marL="0">
+            <a:pPr marL="0" indent="0">
               <a:buNone/>
             </a:pPr>
             <a:r>
@@ -4046,6 +3753,13 @@
           </a:solidFill>
           <a:ln/>
         </p:spPr>
+        <p:txBody>
+          <a:bodyPr/>
+          <a:lstStyle/>
+          <a:p>
+            <a:endParaRPr lang="en-US"/>
+          </a:p>
+        </p:txBody>
       </p:sp>
       <p:sp>
         <p:nvSpPr>
@@ -4068,7 +3782,7 @@
           <a:bodyPr wrap="square" rtlCol="0" anchor="ctr"/>
           <a:lstStyle/>
           <a:p>
-            <a:pPr algn="ctr" indent="0" marL="0">
+            <a:pPr marL="0" indent="0" algn="ctr">
               <a:buNone/>
             </a:pPr>
             <a:r>
@@ -4082,9 +3796,6 @@
               </a:rPr>
               <a:t>L</a:t>
             </a:r>
-            <a:pPr algn="ctr" indent="0" marL="0">
-              <a:buNone/>
-            </a:pPr>
             <a:r>
               <a:rPr lang="en-US" sz="1200" dirty="0">
                 <a:solidFill>
@@ -4096,9 +3807,6 @@
               </a:rPr>
               <a:t>skel</a:t>
             </a:r>
-            <a:pPr algn="ctr" indent="0" marL="0">
-              <a:buNone/>
-            </a:pPr>
             <a:r>
               <a:rPr lang="en-US" sz="1800" dirty="0">
                 <a:solidFill>
@@ -4110,9 +3818,6 @@
               </a:rPr>
               <a:t> = (1−α) · L</a:t>
             </a:r>
-            <a:pPr algn="ctr" indent="0" marL="0">
-              <a:buNone/>
-            </a:pPr>
             <a:r>
               <a:rPr lang="en-US" sz="1200" dirty="0">
                 <a:solidFill>
@@ -4124,9 +3829,6 @@
               </a:rPr>
               <a:t>base</a:t>
             </a:r>
-            <a:pPr algn="ctr" indent="0" marL="0">
-              <a:buNone/>
-            </a:pPr>
             <a:r>
               <a:rPr lang="en-US" sz="1800" dirty="0">
                 <a:solidFill>
@@ -4138,9 +3840,6 @@
               </a:rPr>
               <a:t> + α · (1 − </a:t>
             </a:r>
-            <a:pPr algn="ctr" indent="0" marL="0">
-              <a:buNone/>
-            </a:pPr>
             <a:r>
               <a:rPr lang="en-US" sz="1600" dirty="0">
                 <a:solidFill>
@@ -4152,9 +3851,6 @@
               </a:rPr>
               <a:t>∑ ŷ · skel(y) / ∑ skel(y)</a:t>
             </a:r>
-            <a:pPr algn="ctr" indent="0" marL="0">
-              <a:buNone/>
-            </a:pPr>
             <a:r>
               <a:rPr lang="en-US" sz="1800" dirty="0">
                 <a:solidFill>
@@ -4191,7 +3887,7 @@
           <a:bodyPr wrap="square" lIns="0" tIns="0" rIns="0" bIns="0" rtlCol="0" anchor="ctr"/>
           <a:lstStyle/>
           <a:p>
-            <a:pPr indent="0" marL="0">
+            <a:pPr marL="0" indent="0">
               <a:buNone/>
             </a:pPr>
             <a:r>
@@ -4208,7 +3904,7 @@
             <a:endParaRPr lang="en-US" sz="1200" dirty="0"/>
           </a:p>
           <a:p>
-            <a:pPr indent="0" marL="0">
+            <a:pPr marL="0" indent="0">
               <a:buNone/>
             </a:pPr>
             <a:r>
@@ -4225,7 +3921,7 @@
             <a:endParaRPr lang="en-US" sz="1200" dirty="0"/>
           </a:p>
           <a:p>
-            <a:pPr indent="0" marL="0">
+            <a:pPr marL="0" indent="0">
               <a:buNone/>
             </a:pPr>
             <a:r>
@@ -4262,13 +3958,20 @@
           </a:solidFill>
           <a:ln/>
           <a:effectLst>
-            <a:outerShdw sx="100000" sy="100000" kx="0" ky="0" algn="bl" rotWithShape="0" blurRad="50800" dist="25400" dir="8100000">
+            <a:outerShdw blurRad="50800" dist="25400" dir="8100000" algn="bl" rotWithShape="0">
               <a:srgbClr val="000000">
                 <a:alpha val="20000"/>
               </a:srgbClr>
             </a:outerShdw>
           </a:effectLst>
         </p:spPr>
+        <p:txBody>
+          <a:bodyPr/>
+          <a:lstStyle/>
+          <a:p>
+            <a:endParaRPr lang="en-US"/>
+          </a:p>
+        </p:txBody>
       </p:sp>
       <p:sp>
         <p:nvSpPr>
@@ -4291,7 +3994,7 @@
           <a:bodyPr wrap="square" lIns="0" tIns="0" rIns="0" bIns="0" rtlCol="0" anchor="ctr"/>
           <a:lstStyle/>
           <a:p>
-            <a:pPr indent="0" marL="0">
+            <a:pPr marL="0" indent="0">
               <a:buNone/>
             </a:pPr>
             <a:r>
@@ -4330,7 +4033,7 @@
           <a:bodyPr wrap="square" lIns="0" tIns="0" rIns="0" bIns="0" rtlCol="0" anchor="ctr"/>
           <a:lstStyle/>
           <a:p>
-            <a:pPr indent="0" marL="0">
+            <a:pPr marL="0" indent="0">
               <a:buNone/>
             </a:pPr>
             <a:r>
@@ -4369,7 +4072,7 @@
           <a:bodyPr wrap="square" lIns="0" tIns="0" rIns="0" bIns="0" rtlCol="0" anchor="ctr"/>
           <a:lstStyle/>
           <a:p>
-            <a:pPr indent="0" marL="0">
+            <a:pPr marL="0" indent="0">
               <a:buNone/>
             </a:pPr>
             <a:r>
@@ -4408,7 +4111,7 @@
           <a:bodyPr wrap="square" lIns="0" tIns="0" rIns="0" bIns="0" rtlCol="0" anchor="ctr"/>
           <a:lstStyle/>
           <a:p>
-            <a:pPr indent="0" marL="0">
+            <a:pPr marL="0" indent="0">
               <a:buNone/>
             </a:pPr>
             <a:r>
@@ -4447,7 +4150,7 @@
           <a:bodyPr wrap="square" lIns="0" tIns="0" rIns="0" bIns="0" rtlCol="0" anchor="ctr"/>
           <a:lstStyle/>
           <a:p>
-            <a:pPr indent="0" marL="0">
+            <a:pPr marL="0" indent="0">
               <a:buNone/>
             </a:pPr>
             <a:r>
@@ -4486,7 +4189,7 @@
           <a:bodyPr wrap="square" lIns="0" tIns="0" rIns="0" bIns="0" rtlCol="0" anchor="ctr"/>
           <a:lstStyle/>
           <a:p>
-            <a:pPr indent="0" marL="0">
+            <a:pPr marL="0" indent="0">
               <a:buNone/>
             </a:pPr>
             <a:r>
@@ -4525,7 +4228,7 @@
           <a:bodyPr wrap="square" lIns="0" tIns="0" rIns="0" bIns="0" rtlCol="0" anchor="ctr"/>
           <a:lstStyle/>
           <a:p>
-            <a:pPr indent="0" marL="0">
+            <a:pPr marL="0" indent="0">
               <a:buNone/>
             </a:pPr>
             <a:r>
@@ -4564,7 +4267,7 @@
           <a:bodyPr wrap="square" lIns="0" tIns="0" rIns="0" bIns="0" rtlCol="0" anchor="ctr"/>
           <a:lstStyle/>
           <a:p>
-            <a:pPr indent="0" marL="0">
+            <a:pPr marL="0" indent="0">
               <a:buNone/>
             </a:pPr>
             <a:r>
@@ -4603,7 +4306,7 @@
           <a:bodyPr wrap="square" lIns="0" tIns="0" rIns="0" bIns="0" rtlCol="0" anchor="ctr"/>
           <a:lstStyle/>
           <a:p>
-            <a:pPr indent="0" marL="0">
+            <a:pPr marL="0" indent="0">
               <a:buNone/>
             </a:pPr>
             <a:r>
@@ -4640,6 +4343,13 @@
           </a:solidFill>
           <a:ln/>
         </p:spPr>
+        <p:txBody>
+          <a:bodyPr/>
+          <a:lstStyle/>
+          <a:p>
+            <a:endParaRPr lang="en-US"/>
+          </a:p>
+        </p:txBody>
       </p:sp>
       <p:sp>
         <p:nvSpPr>
@@ -4662,7 +4372,7 @@
           <a:bodyPr wrap="square" rtlCol="0" anchor="ctr"/>
           <a:lstStyle/>
           <a:p>
-            <a:pPr indent="0" marL="0">
+            <a:pPr marL="0" indent="0">
               <a:buNone/>
             </a:pPr>
             <a:r>
@@ -4676,9 +4386,6 @@
               </a:rPr>
               <a:t>Intuition: </a:t>
             </a:r>
-            <a:pPr indent="0" marL="0">
-              <a:buNone/>
-            </a:pPr>
             <a:r>
               <a:rPr lang="en-US" sz="1400" dirty="0">
                 <a:solidFill>
@@ -4713,6 +4420,13 @@
           </a:solidFill>
           <a:ln/>
         </p:spPr>
+        <p:txBody>
+          <a:bodyPr/>
+          <a:lstStyle/>
+          <a:p>
+            <a:endParaRPr lang="en-US"/>
+          </a:p>
+        </p:txBody>
       </p:sp>
       <p:sp>
         <p:nvSpPr>
@@ -4735,7 +4449,7 @@
           <a:bodyPr wrap="square" lIns="0" tIns="0" rIns="0" bIns="0" rtlCol="0" anchor="ctr"/>
           <a:lstStyle/>
           <a:p>
-            <a:pPr indent="0" marL="0">
+            <a:pPr marL="0" indent="0">
               <a:buNone/>
             </a:pPr>
             <a:r>
@@ -4755,7 +4469,7 @@
       </p:sp>
       <p:graphicFrame>
         <p:nvGraphicFramePr>
-          <p:cNvPr id="12" name="Table 0"/>
+          <p:cNvPr id="24" name="Table 0"/>
           <p:cNvGraphicFramePr>
             <a:graphicFrameLocks noGrp="1"/>
           </p:cNvGraphicFramePr>
@@ -4769,17 +4483,41 @@
         </p:nvGraphicFramePr>
         <p:xfrm>
           <a:off x="822960" y="5760720"/>
-          <a:ext cx="10424160" cy="640080"/>
+          <a:ext cx="10515600" cy="1036320"/>
         </p:xfrm>
         <a:graphic>
           <a:graphicData uri="http://schemas.openxmlformats.org/drawingml/2006/table">
             <a:tbl>
               <a:tblPr/>
               <a:tblGrid>
-                <a:gridCol w="2286000"/>
-                <a:gridCol w="2743200"/>
-                <a:gridCol w="2743200"/>
-                <a:gridCol w="2743200"/>
+                <a:gridCol w="2286000">
+                  <a:extLst>
+                    <a:ext uri="{9D8B030D-6E8A-4147-A177-3AD203B41FA5}">
+                      <a16:colId xmlns:a16="http://schemas.microsoft.com/office/drawing/2014/main" val="20000"/>
+                    </a:ext>
+                  </a:extLst>
+                </a:gridCol>
+                <a:gridCol w="2743200">
+                  <a:extLst>
+                    <a:ext uri="{9D8B030D-6E8A-4147-A177-3AD203B41FA5}">
+                      <a16:colId xmlns:a16="http://schemas.microsoft.com/office/drawing/2014/main" val="20001"/>
+                    </a:ext>
+                  </a:extLst>
+                </a:gridCol>
+                <a:gridCol w="2743200">
+                  <a:extLst>
+                    <a:ext uri="{9D8B030D-6E8A-4147-A177-3AD203B41FA5}">
+                      <a16:colId xmlns:a16="http://schemas.microsoft.com/office/drawing/2014/main" val="20002"/>
+                    </a:ext>
+                  </a:extLst>
+                </a:gridCol>
+                <a:gridCol w="2743200">
+                  <a:extLst>
+                    <a:ext uri="{9D8B030D-6E8A-4147-A177-3AD203B41FA5}">
+                      <a16:colId xmlns:a16="http://schemas.microsoft.com/office/drawing/2014/main" val="20003"/>
+                    </a:ext>
+                  </a:extLst>
+                </a:gridCol>
               </a:tblGrid>
               <a:tr h="160020">
                 <a:tc>
@@ -4787,7 +4525,7 @@
                     <a:bodyPr/>
                     <a:lstStyle/>
                     <a:p>
-                      <a:pPr indent="0" marL="0">
+                      <a:pPr marL="0" indent="0">
                         <a:buNone/>
                       </a:pPr>
                       <a:r>
@@ -4801,7 +4539,7 @@
                       <a:endParaRPr lang="en-US" sz="1100" dirty="0"/>
                     </a:p>
                   </a:txBody>
-                  <a:tcPr marL="91440" marR="91440" marT="45720" marB="45720">
+                  <a:tcPr>
                     <a:lnL w="6350" cap="flat" cmpd="sng" algn="ctr">
                       <a:solidFill>
                         <a:srgbClr val="2A3558"/>
@@ -4848,7 +4586,7 @@
                     <a:bodyPr/>
                     <a:lstStyle/>
                     <a:p>
-                      <a:pPr indent="0" marL="0">
+                      <a:pPr marL="0" indent="0">
                         <a:buNone/>
                       </a:pPr>
                       <a:r>
@@ -4862,7 +4600,7 @@
                       <a:endParaRPr lang="en-US" sz="1100" dirty="0"/>
                     </a:p>
                   </a:txBody>
-                  <a:tcPr marL="91440" marR="91440" marT="45720" marB="45720">
+                  <a:tcPr>
                     <a:lnL w="6350" cap="flat" cmpd="sng" algn="ctr">
                       <a:solidFill>
                         <a:srgbClr val="2A3558"/>
@@ -4909,7 +4647,7 @@
                     <a:bodyPr/>
                     <a:lstStyle/>
                     <a:p>
-                      <a:pPr indent="0" marL="0">
+                      <a:pPr marL="0" indent="0">
                         <a:buNone/>
                       </a:pPr>
                       <a:r>
@@ -4923,7 +4661,7 @@
                       <a:endParaRPr lang="en-US" sz="1100" dirty="0"/>
                     </a:p>
                   </a:txBody>
-                  <a:tcPr marL="91440" marR="91440" marT="45720" marB="45720">
+                  <a:tcPr>
                     <a:lnL w="6350" cap="flat" cmpd="sng" algn="ctr">
                       <a:solidFill>
                         <a:srgbClr val="2A3558"/>
@@ -4970,7 +4708,7 @@
                     <a:bodyPr/>
                     <a:lstStyle/>
                     <a:p>
-                      <a:pPr indent="0" marL="0">
+                      <a:pPr marL="0" indent="0">
                         <a:buNone/>
                       </a:pPr>
                       <a:r>
@@ -4984,7 +4722,7 @@
                       <a:endParaRPr lang="en-US" sz="1100" dirty="0"/>
                     </a:p>
                   </a:txBody>
-                  <a:tcPr marL="91440" marR="91440" marT="45720" marB="45720">
+                  <a:tcPr>
                     <a:lnL w="6350" cap="flat" cmpd="sng" algn="ctr">
                       <a:solidFill>
                         <a:srgbClr val="2A3558"/>
@@ -5026,6 +4764,11 @@
                     </a:solidFill>
                   </a:tcPr>
                 </a:tc>
+                <a:extLst>
+                  <a:ext uri="{0D108BD9-81ED-4DB2-BD59-A6C34878D82A}">
+                    <a16:rowId xmlns:a16="http://schemas.microsoft.com/office/drawing/2014/main" val="10000"/>
+                  </a:ext>
+                </a:extLst>
               </a:tr>
               <a:tr h="160020">
                 <a:tc>
@@ -5033,7 +4776,7 @@
                     <a:bodyPr/>
                     <a:lstStyle/>
                     <a:p>
-                      <a:pPr indent="0" marL="0">
+                      <a:pPr marL="0" indent="0">
                         <a:buNone/>
                       </a:pPr>
                       <a:r>
@@ -5047,7 +4790,7 @@
                       <a:endParaRPr lang="en-US" sz="1100" dirty="0"/>
                     </a:p>
                   </a:txBody>
-                  <a:tcPr marL="91440" marR="91440" marT="45720" marB="45720">
+                  <a:tcPr>
                     <a:lnL w="6350" cap="flat" cmpd="sng" algn="ctr">
                       <a:solidFill>
                         <a:srgbClr val="2A3558"/>
@@ -5094,7 +4837,7 @@
                     <a:bodyPr/>
                     <a:lstStyle/>
                     <a:p>
-                      <a:pPr indent="0" marL="0">
+                      <a:pPr marL="0" indent="0">
                         <a:buNone/>
                       </a:pPr>
                       <a:r>
@@ -5108,7 +4851,7 @@
                       <a:endParaRPr lang="en-US" sz="1100" dirty="0"/>
                     </a:p>
                   </a:txBody>
-                  <a:tcPr marL="91440" marR="91440" marT="45720" marB="45720">
+                  <a:tcPr>
                     <a:lnL w="6350" cap="flat" cmpd="sng" algn="ctr">
                       <a:solidFill>
                         <a:srgbClr val="2A3558"/>
@@ -5155,7 +4898,7 @@
                     <a:bodyPr/>
                     <a:lstStyle/>
                     <a:p>
-                      <a:pPr indent="0" marL="0">
+                      <a:pPr marL="0" indent="0">
                         <a:buNone/>
                       </a:pPr>
                       <a:r>
@@ -5169,7 +4912,7 @@
                       <a:endParaRPr lang="en-US" sz="1100" dirty="0"/>
                     </a:p>
                   </a:txBody>
-                  <a:tcPr marL="91440" marR="91440" marT="45720" marB="45720">
+                  <a:tcPr>
                     <a:lnL w="6350" cap="flat" cmpd="sng" algn="ctr">
                       <a:solidFill>
                         <a:srgbClr val="2A3558"/>
@@ -5216,7 +4959,7 @@
                     <a:bodyPr/>
                     <a:lstStyle/>
                     <a:p>
-                      <a:pPr indent="0" marL="0">
+                      <a:pPr marL="0" indent="0">
                         <a:buNone/>
                       </a:pPr>
                       <a:r>
@@ -5230,7 +4973,7 @@
                       <a:endParaRPr lang="en-US" sz="1100" dirty="0"/>
                     </a:p>
                   </a:txBody>
-                  <a:tcPr marL="91440" marR="91440" marT="45720" marB="45720">
+                  <a:tcPr>
                     <a:lnL w="6350" cap="flat" cmpd="sng" algn="ctr">
                       <a:solidFill>
                         <a:srgbClr val="2A3558"/>
@@ -5272,6 +5015,11 @@
                     </a:solidFill>
                   </a:tcPr>
                 </a:tc>
+                <a:extLst>
+                  <a:ext uri="{0D108BD9-81ED-4DB2-BD59-A6C34878D82A}">
+                    <a16:rowId xmlns:a16="http://schemas.microsoft.com/office/drawing/2014/main" val="10001"/>
+                  </a:ext>
+                </a:extLst>
               </a:tr>
               <a:tr h="160020">
                 <a:tc>
@@ -5279,7 +5027,7 @@
                     <a:bodyPr/>
                     <a:lstStyle/>
                     <a:p>
-                      <a:pPr indent="0" marL="0">
+                      <a:pPr marL="0" indent="0">
                         <a:buNone/>
                       </a:pPr>
                       <a:r>
@@ -5293,7 +5041,7 @@
                       <a:endParaRPr lang="en-US" sz="1100" dirty="0"/>
                     </a:p>
                   </a:txBody>
-                  <a:tcPr marL="91440" marR="91440" marT="45720" marB="45720">
+                  <a:tcPr>
                     <a:lnL w="6350" cap="flat" cmpd="sng" algn="ctr">
                       <a:solidFill>
                         <a:srgbClr val="2A3558"/>
@@ -5340,7 +5088,7 @@
                     <a:bodyPr/>
                     <a:lstStyle/>
                     <a:p>
-                      <a:pPr indent="0" marL="0">
+                      <a:pPr marL="0" indent="0">
                         <a:buNone/>
                       </a:pPr>
                       <a:r>
@@ -5354,7 +5102,7 @@
                       <a:endParaRPr lang="en-US" sz="1100" dirty="0"/>
                     </a:p>
                   </a:txBody>
-                  <a:tcPr marL="91440" marR="91440" marT="45720" marB="45720">
+                  <a:tcPr>
                     <a:lnL w="6350" cap="flat" cmpd="sng" algn="ctr">
                       <a:solidFill>
                         <a:srgbClr val="2A3558"/>
@@ -5401,7 +5149,7 @@
                     <a:bodyPr/>
                     <a:lstStyle/>
                     <a:p>
-                      <a:pPr indent="0" marL="0">
+                      <a:pPr marL="0" indent="0">
                         <a:buNone/>
                       </a:pPr>
                       <a:r>
@@ -5415,7 +5163,7 @@
                       <a:endParaRPr lang="en-US" sz="1100" dirty="0"/>
                     </a:p>
                   </a:txBody>
-                  <a:tcPr marL="91440" marR="91440" marT="45720" marB="45720">
+                  <a:tcPr>
                     <a:lnL w="6350" cap="flat" cmpd="sng" algn="ctr">
                       <a:solidFill>
                         <a:srgbClr val="2A3558"/>
@@ -5462,7 +5210,7 @@
                     <a:bodyPr/>
                     <a:lstStyle/>
                     <a:p>
-                      <a:pPr indent="0" marL="0">
+                      <a:pPr marL="0" indent="0">
                         <a:buNone/>
                       </a:pPr>
                       <a:r>
@@ -5476,7 +5224,7 @@
                       <a:endParaRPr lang="en-US" sz="1100" dirty="0"/>
                     </a:p>
                   </a:txBody>
-                  <a:tcPr marL="91440" marR="91440" marT="45720" marB="45720">
+                  <a:tcPr>
                     <a:lnL w="6350" cap="flat" cmpd="sng" algn="ctr">
                       <a:solidFill>
                         <a:srgbClr val="2A3558"/>
@@ -5518,6 +5266,11 @@
                     </a:solidFill>
                   </a:tcPr>
                 </a:tc>
+                <a:extLst>
+                  <a:ext uri="{0D108BD9-81ED-4DB2-BD59-A6C34878D82A}">
+                    <a16:rowId xmlns:a16="http://schemas.microsoft.com/office/drawing/2014/main" val="10002"/>
+                  </a:ext>
+                </a:extLst>
               </a:tr>
               <a:tr h="160020">
                 <a:tc>
@@ -5525,7 +5278,7 @@
                     <a:bodyPr/>
                     <a:lstStyle/>
                     <a:p>
-                      <a:pPr indent="0" marL="0">
+                      <a:pPr marL="0" indent="0">
                         <a:buNone/>
                       </a:pPr>
                       <a:r>
@@ -5539,7 +5292,7 @@
                       <a:endParaRPr lang="en-US" sz="1100" dirty="0"/>
                     </a:p>
                   </a:txBody>
-                  <a:tcPr marL="91440" marR="91440" marT="45720" marB="45720">
+                  <a:tcPr>
                     <a:lnL w="6350" cap="flat" cmpd="sng" algn="ctr">
                       <a:solidFill>
                         <a:srgbClr val="2A3558"/>
@@ -5586,7 +5339,7 @@
                     <a:bodyPr/>
                     <a:lstStyle/>
                     <a:p>
-                      <a:pPr indent="0" marL="0">
+                      <a:pPr marL="0" indent="0">
                         <a:buNone/>
                       </a:pPr>
                       <a:r>
@@ -5600,7 +5353,7 @@
                       <a:endParaRPr lang="en-US" sz="1100" dirty="0"/>
                     </a:p>
                   </a:txBody>
-                  <a:tcPr marL="91440" marR="91440" marT="45720" marB="45720">
+                  <a:tcPr>
                     <a:lnL w="6350" cap="flat" cmpd="sng" algn="ctr">
                       <a:solidFill>
                         <a:srgbClr val="2A3558"/>
@@ -5647,7 +5400,7 @@
                     <a:bodyPr/>
                     <a:lstStyle/>
                     <a:p>
-                      <a:pPr indent="0" marL="0">
+                      <a:pPr marL="0" indent="0">
                         <a:buNone/>
                       </a:pPr>
                       <a:r>
@@ -5661,7 +5414,7 @@
                       <a:endParaRPr lang="en-US" sz="1100" dirty="0"/>
                     </a:p>
                   </a:txBody>
-                  <a:tcPr marL="91440" marR="91440" marT="45720" marB="45720">
+                  <a:tcPr>
                     <a:lnL w="6350" cap="flat" cmpd="sng" algn="ctr">
                       <a:solidFill>
                         <a:srgbClr val="2A3558"/>
@@ -5708,7 +5461,7 @@
                     <a:bodyPr/>
                     <a:lstStyle/>
                     <a:p>
-                      <a:pPr indent="0" marL="0">
+                      <a:pPr marL="0" indent="0">
                         <a:buNone/>
                       </a:pPr>
                       <a:r>
@@ -5722,7 +5475,7 @@
                       <a:endParaRPr lang="en-US" sz="1100" dirty="0"/>
                     </a:p>
                   </a:txBody>
-                  <a:tcPr marL="91440" marR="91440" marT="45720" marB="45720">
+                  <a:tcPr>
                     <a:lnL w="6350" cap="flat" cmpd="sng" algn="ctr">
                       <a:solidFill>
                         <a:srgbClr val="2A3558"/>
@@ -5764,6 +5517,11 @@
                     </a:solidFill>
                   </a:tcPr>
                 </a:tc>
+                <a:extLst>
+                  <a:ext uri="{0D108BD9-81ED-4DB2-BD59-A6C34878D82A}">
+                    <a16:rowId xmlns:a16="http://schemas.microsoft.com/office/drawing/2014/main" val="10003"/>
+                  </a:ext>
+                </a:extLst>
               </a:tr>
             </a:tbl>
           </a:graphicData>
@@ -5785,6 +5543,7 @@
         <a:solidFill>
           <a:srgbClr val="131B2E"/>
         </a:solidFill>
+        <a:effectLst/>
       </p:bgPr>
     </p:bg>
     <p:spTree>
@@ -5820,6 +5579,13 @@
           </a:solidFill>
           <a:ln/>
         </p:spPr>
+        <p:txBody>
+          <a:bodyPr/>
+          <a:lstStyle/>
+          <a:p>
+            <a:endParaRPr lang="en-US"/>
+          </a:p>
+        </p:txBody>
       </p:sp>
       <p:sp>
         <p:nvSpPr>
@@ -5842,7 +5608,7 @@
           <a:bodyPr wrap="square" lIns="0" tIns="0" rIns="0" bIns="0" rtlCol="0" anchor="ctr"/>
           <a:lstStyle/>
           <a:p>
-            <a:pPr indent="0" marL="0">
+            <a:pPr marL="0" indent="0">
               <a:buNone/>
             </a:pPr>
             <a:r>
@@ -5881,7 +5647,7 @@
           <a:bodyPr wrap="square" lIns="0" tIns="0" rIns="0" bIns="0" rtlCol="0" anchor="ctr"/>
           <a:lstStyle/>
           <a:p>
-            <a:pPr indent="0" marL="0">
+            <a:pPr marL="0" indent="0">
               <a:buNone/>
             </a:pPr>
             <a:r>
@@ -5918,6 +5684,13 @@
           </a:solidFill>
           <a:ln/>
         </p:spPr>
+        <p:txBody>
+          <a:bodyPr/>
+          <a:lstStyle/>
+          <a:p>
+            <a:endParaRPr lang="en-US"/>
+          </a:p>
+        </p:txBody>
       </p:sp>
       <p:sp>
         <p:nvSpPr>
@@ -5940,7 +5713,7 @@
           <a:bodyPr wrap="square" lIns="0" tIns="0" rIns="0" bIns="0" rtlCol="0" anchor="ctr"/>
           <a:lstStyle/>
           <a:p>
-            <a:pPr indent="0" marL="0">
+            <a:pPr marL="0" indent="0">
               <a:buNone/>
             </a:pPr>
             <a:r>
@@ -5979,7 +5752,7 @@
           <a:bodyPr wrap="square" lIns="0" tIns="0" rIns="0" bIns="0" rtlCol="0" anchor="ctr"/>
           <a:lstStyle/>
           <a:p>
-            <a:pPr indent="0" marL="0">
+            <a:pPr marL="0" indent="0">
               <a:buNone/>
             </a:pPr>
             <a:r>
@@ -6016,6 +5789,13 @@
           </a:solidFill>
           <a:ln/>
         </p:spPr>
+        <p:txBody>
+          <a:bodyPr/>
+          <a:lstStyle/>
+          <a:p>
+            <a:endParaRPr lang="en-US"/>
+          </a:p>
+        </p:txBody>
       </p:sp>
       <p:sp>
         <p:nvSpPr>
@@ -6038,7 +5818,7 @@
           <a:bodyPr wrap="square" lIns="0" tIns="0" rIns="0" bIns="0" rtlCol="0" anchor="ctr"/>
           <a:lstStyle/>
           <a:p>
-            <a:pPr indent="0" marL="0">
+            <a:pPr marL="0" indent="0">
               <a:buNone/>
             </a:pPr>
             <a:r>
@@ -6077,7 +5857,7 @@
           <a:bodyPr wrap="square" lIns="0" tIns="0" rIns="0" bIns="0" rtlCol="0" anchor="ctr"/>
           <a:lstStyle/>
           <a:p>
-            <a:pPr indent="0" marL="0">
+            <a:pPr marL="0" indent="0">
               <a:buNone/>
             </a:pPr>
             <a:r>
@@ -6114,6 +5894,13 @@
           </a:solidFill>
           <a:ln/>
         </p:spPr>
+        <p:txBody>
+          <a:bodyPr/>
+          <a:lstStyle/>
+          <a:p>
+            <a:endParaRPr lang="en-US"/>
+          </a:p>
+        </p:txBody>
       </p:sp>
       <p:sp>
         <p:nvSpPr>
@@ -6136,7 +5923,7 @@
           <a:bodyPr wrap="square" lIns="0" tIns="0" rIns="0" bIns="0" rtlCol="0" anchor="ctr"/>
           <a:lstStyle/>
           <a:p>
-            <a:pPr indent="0" marL="0">
+            <a:pPr marL="0" indent="0">
               <a:buNone/>
             </a:pPr>
             <a:r>
@@ -6175,7 +5962,7 @@
           <a:bodyPr wrap="square" lIns="0" tIns="0" rIns="0" bIns="0" rtlCol="0" anchor="ctr"/>
           <a:lstStyle/>
           <a:p>
-            <a:pPr indent="0" marL="0">
+            <a:pPr marL="0" indent="0">
               <a:buNone/>
             </a:pPr>
             <a:r>
@@ -6212,6 +5999,13 @@
           </a:solidFill>
           <a:ln/>
         </p:spPr>
+        <p:txBody>
+          <a:bodyPr/>
+          <a:lstStyle/>
+          <a:p>
+            <a:endParaRPr lang="en-US"/>
+          </a:p>
+        </p:txBody>
       </p:sp>
       <p:sp>
         <p:nvSpPr>
@@ -6234,7 +6028,7 @@
           <a:bodyPr wrap="square" lIns="0" tIns="0" rIns="0" bIns="0" rtlCol="0" anchor="ctr"/>
           <a:lstStyle/>
           <a:p>
-            <a:pPr indent="0" marL="0">
+            <a:pPr marL="0" indent="0">
               <a:buNone/>
             </a:pPr>
             <a:r>
@@ -6273,7 +6067,7 @@
           <a:bodyPr wrap="square" lIns="0" tIns="0" rIns="0" bIns="0" rtlCol="0" anchor="ctr"/>
           <a:lstStyle/>
           <a:p>
-            <a:pPr indent="0" marL="0">
+            <a:pPr marL="0" indent="0">
               <a:buNone/>
             </a:pPr>
             <a:r>
@@ -6310,6 +6104,13 @@
           </a:solidFill>
           <a:ln/>
         </p:spPr>
+        <p:txBody>
+          <a:bodyPr/>
+          <a:lstStyle/>
+          <a:p>
+            <a:endParaRPr lang="en-US"/>
+          </a:p>
+        </p:txBody>
       </p:sp>
       <p:sp>
         <p:nvSpPr>
@@ -6332,7 +6133,7 @@
           <a:bodyPr wrap="square" lIns="0" tIns="0" rIns="0" bIns="0" rtlCol="0" anchor="ctr"/>
           <a:lstStyle/>
           <a:p>
-            <a:pPr indent="0" marL="0">
+            <a:pPr marL="0" indent="0">
               <a:buNone/>
             </a:pPr>
             <a:r>
@@ -6371,7 +6172,7 @@
           <a:bodyPr wrap="square" lIns="0" tIns="0" rIns="0" bIns="0" rtlCol="0" anchor="ctr"/>
           <a:lstStyle/>
           <a:p>
-            <a:pPr indent="0" marL="0">
+            <a:pPr marL="0" indent="0">
               <a:buNone/>
             </a:pPr>
             <a:r>
@@ -6408,6 +6209,13 @@
           </a:solidFill>
           <a:ln/>
         </p:spPr>
+        <p:txBody>
+          <a:bodyPr/>
+          <a:lstStyle/>
+          <a:p>
+            <a:endParaRPr lang="en-US"/>
+          </a:p>
+        </p:txBody>
       </p:sp>
       <p:sp>
         <p:nvSpPr>
@@ -6430,7 +6238,7 @@
           <a:bodyPr wrap="square" lIns="0" tIns="0" rIns="0" bIns="0" rtlCol="0" anchor="ctr"/>
           <a:lstStyle/>
           <a:p>
-            <a:pPr indent="0" marL="0">
+            <a:pPr marL="0" indent="0">
               <a:buNone/>
             </a:pPr>
             <a:r>
@@ -6469,7 +6277,7 @@
           <a:bodyPr wrap="square" lIns="0" tIns="0" rIns="0" bIns="0" rtlCol="0" anchor="ctr"/>
           <a:lstStyle/>
           <a:p>
-            <a:pPr indent="0" marL="0">
+            <a:pPr marL="0" indent="0">
               <a:buNone/>
             </a:pPr>
             <a:r>
@@ -6506,6 +6314,13 @@
           </a:solidFill>
           <a:ln/>
         </p:spPr>
+        <p:txBody>
+          <a:bodyPr/>
+          <a:lstStyle/>
+          <a:p>
+            <a:endParaRPr lang="en-US"/>
+          </a:p>
+        </p:txBody>
       </p:sp>
       <p:sp>
         <p:nvSpPr>
@@ -6528,7 +6343,7 @@
           <a:bodyPr wrap="square" lIns="0" tIns="0" rIns="0" bIns="0" rtlCol="0" anchor="ctr"/>
           <a:lstStyle/>
           <a:p>
-            <a:pPr indent="0" marL="0">
+            <a:pPr marL="0" indent="0">
               <a:buNone/>
             </a:pPr>
             <a:r>
@@ -6567,7 +6382,7 @@
           <a:bodyPr wrap="square" lIns="0" tIns="0" rIns="0" bIns="0" rtlCol="0" anchor="ctr"/>
           <a:lstStyle/>
           <a:p>
-            <a:pPr indent="0" marL="0">
+            <a:pPr marL="0" indent="0">
               <a:buNone/>
             </a:pPr>
             <a:r>
@@ -6604,6 +6419,13 @@
           </a:solidFill>
           <a:ln/>
         </p:spPr>
+        <p:txBody>
+          <a:bodyPr/>
+          <a:lstStyle/>
+          <a:p>
+            <a:endParaRPr lang="en-US"/>
+          </a:p>
+        </p:txBody>
       </p:sp>
       <p:sp>
         <p:nvSpPr>
@@ -6626,7 +6448,7 @@
           <a:bodyPr wrap="square" lIns="0" tIns="0" rIns="0" bIns="0" rtlCol="0" anchor="ctr"/>
           <a:lstStyle/>
           <a:p>
-            <a:pPr indent="0" marL="0">
+            <a:pPr marL="0" indent="0">
               <a:buNone/>
             </a:pPr>
             <a:r>
@@ -6665,7 +6487,7 @@
           <a:bodyPr wrap="square" lIns="0" tIns="0" rIns="0" bIns="0" rtlCol="0" anchor="ctr"/>
           <a:lstStyle/>
           <a:p>
-            <a:pPr indent="0" marL="0">
+            <a:pPr marL="0" indent="0">
               <a:buNone/>
             </a:pPr>
             <a:r>
@@ -6702,6 +6524,13 @@
           </a:solidFill>
           <a:ln/>
         </p:spPr>
+        <p:txBody>
+          <a:bodyPr/>
+          <a:lstStyle/>
+          <a:p>
+            <a:endParaRPr lang="en-US"/>
+          </a:p>
+        </p:txBody>
       </p:sp>
       <p:sp>
         <p:nvSpPr>
@@ -6724,7 +6553,7 @@
           <a:bodyPr wrap="square" lIns="0" tIns="0" rIns="0" bIns="0" rtlCol="0" anchor="ctr"/>
           <a:lstStyle/>
           <a:p>
-            <a:pPr indent="0" marL="0">
+            <a:pPr marL="0" indent="0">
               <a:buNone/>
             </a:pPr>
             <a:r>
@@ -6763,7 +6592,7 @@
           <a:bodyPr wrap="square" lIns="0" tIns="0" rIns="0" bIns="0" rtlCol="0" anchor="ctr"/>
           <a:lstStyle/>
           <a:p>
-            <a:pPr indent="0" marL="0">
+            <a:pPr marL="0" indent="0">
               <a:buNone/>
             </a:pPr>
             <a:r>
@@ -6800,6 +6629,13 @@
           </a:solidFill>
           <a:ln/>
         </p:spPr>
+        <p:txBody>
+          <a:bodyPr/>
+          <a:lstStyle/>
+          <a:p>
+            <a:endParaRPr lang="en-US"/>
+          </a:p>
+        </p:txBody>
       </p:sp>
       <p:sp>
         <p:nvSpPr>
@@ -6820,6 +6656,13 @@
           </a:solidFill>
           <a:ln/>
         </p:spPr>
+        <p:txBody>
+          <a:bodyPr/>
+          <a:lstStyle/>
+          <a:p>
+            <a:endParaRPr lang="en-US"/>
+          </a:p>
+        </p:txBody>
       </p:sp>
       <p:sp>
         <p:nvSpPr>
@@ -6842,7 +6685,7 @@
           <a:bodyPr wrap="square" rtlCol="0" anchor="ctr"/>
           <a:lstStyle/>
           <a:p>
-            <a:pPr algn="ctr" indent="0" marL="0">
+            <a:pPr marL="0" indent="0" algn="ctr">
               <a:buNone/>
             </a:pPr>
             <a:r>
@@ -6876,6 +6719,7 @@
         <a:solidFill>
           <a:srgbClr val="131B2E"/>
         </a:solidFill>
+        <a:effectLst/>
       </p:bgPr>
     </p:bg>
     <p:spTree>
@@ -6911,6 +6755,13 @@
           </a:solidFill>
           <a:ln/>
         </p:spPr>
+        <p:txBody>
+          <a:bodyPr/>
+          <a:lstStyle/>
+          <a:p>
+            <a:endParaRPr lang="en-US"/>
+          </a:p>
+        </p:txBody>
       </p:sp>
       <p:sp>
         <p:nvSpPr>
@@ -6933,7 +6784,7 @@
           <a:bodyPr wrap="square" lIns="0" tIns="0" rIns="0" bIns="0" rtlCol="0" anchor="ctr"/>
           <a:lstStyle/>
           <a:p>
-            <a:pPr indent="0" marL="0">
+            <a:pPr marL="0" indent="0">
               <a:buNone/>
             </a:pPr>
             <a:r>
@@ -6972,7 +6823,7 @@
           <a:bodyPr wrap="square" lIns="0" tIns="0" rIns="0" bIns="0" rtlCol="0" anchor="ctr"/>
           <a:lstStyle/>
           <a:p>
-            <a:pPr indent="0" marL="0">
+            <a:pPr marL="0" indent="0">
               <a:buNone/>
             </a:pPr>
             <a:r>
@@ -6992,14 +6843,14 @@
       </p:sp>
       <p:pic>
         <p:nvPicPr>
-          <p:cNvPr id="5" name="Image 0" descr="/sessions/sweet-quirky-clarke/mnt/CTA Seg V2/report/figures_v2/learning_curves.png">    </p:cNvPr>
+          <p:cNvPr id="5" name="Image 0" descr="/sessions/sweet-quirky-clarke/mnt/CTA Seg V2/report/figures_v2/learning_curves.png"/>
           <p:cNvPicPr>
             <a:picLocks noChangeAspect="1"/>
           </p:cNvPicPr>
           <p:nvPr/>
         </p:nvPicPr>
         <p:blipFill>
-          <a:blip r:embed="rId1"/>
+          <a:blip r:embed="rId3"/>
           <a:stretch>
             <a:fillRect/>
           </a:stretch>
@@ -7033,13 +6884,20 @@
           </a:solidFill>
           <a:ln/>
           <a:effectLst>
-            <a:outerShdw sx="100000" sy="100000" kx="0" ky="0" algn="bl" rotWithShape="0" blurRad="50800" dist="25400" dir="8100000">
+            <a:outerShdw blurRad="50800" dist="25400" dir="8100000" algn="bl" rotWithShape="0">
               <a:srgbClr val="000000">
                 <a:alpha val="20000"/>
               </a:srgbClr>
             </a:outerShdw>
           </a:effectLst>
         </p:spPr>
+        <p:txBody>
+          <a:bodyPr/>
+          <a:lstStyle/>
+          <a:p>
+            <a:endParaRPr lang="en-US"/>
+          </a:p>
+        </p:txBody>
       </p:sp>
       <p:sp>
         <p:nvSpPr>
@@ -7062,7 +6920,7 @@
           <a:bodyPr wrap="square" rtlCol="0" anchor="ctr"/>
           <a:lstStyle/>
           <a:p>
-            <a:pPr indent="0" marL="0">
+            <a:pPr marL="0" indent="0">
               <a:buNone/>
             </a:pPr>
             <a:r>
@@ -7079,13 +6937,13 @@
             <a:endParaRPr lang="en-US" sz="1400" dirty="0"/>
           </a:p>
           <a:p>
-            <a:pPr indent="0" marL="0">
+            <a:pPr marL="0" indent="0">
               <a:buNone/>
             </a:pPr>
             <a:endParaRPr lang="en-US" sz="1400" dirty="0"/>
           </a:p>
           <a:p>
-            <a:pPr indent="0" marL="0">
+            <a:pPr marL="0" indent="0">
               <a:buNone/>
             </a:pPr>
             <a:r>
@@ -7102,7 +6960,7 @@
             <a:endParaRPr lang="en-US" sz="1400" dirty="0"/>
           </a:p>
           <a:p>
-            <a:pPr indent="0" marL="0">
+            <a:pPr marL="0" indent="0">
               <a:buNone/>
             </a:pPr>
             <a:r>
@@ -7119,13 +6977,13 @@
             <a:endParaRPr lang="en-US" sz="1400" dirty="0"/>
           </a:p>
           <a:p>
-            <a:pPr indent="0" marL="0">
+            <a:pPr marL="0" indent="0">
               <a:buNone/>
             </a:pPr>
             <a:endParaRPr lang="en-US" sz="1400" dirty="0"/>
           </a:p>
           <a:p>
-            <a:pPr indent="0" marL="0">
+            <a:pPr marL="0" indent="0">
               <a:buNone/>
             </a:pPr>
             <a:r>
@@ -7142,13 +7000,13 @@
             <a:endParaRPr lang="en-US" sz="1400" dirty="0"/>
           </a:p>
           <a:p>
-            <a:pPr indent="0" marL="0">
+            <a:pPr marL="0" indent="0">
               <a:buNone/>
             </a:pPr>
             <a:endParaRPr lang="en-US" sz="1400" dirty="0"/>
           </a:p>
           <a:p>
-            <a:pPr indent="0" marL="0">
+            <a:pPr marL="0" indent="0">
               <a:buNone/>
             </a:pPr>
             <a:r>
@@ -7165,13 +7023,13 @@
             <a:endParaRPr lang="en-US" sz="1400" dirty="0"/>
           </a:p>
           <a:p>
-            <a:pPr indent="0" marL="0">
+            <a:pPr marL="0" indent="0">
               <a:buNone/>
             </a:pPr>
             <a:endParaRPr lang="en-US" sz="1400" dirty="0"/>
           </a:p>
           <a:p>
-            <a:pPr indent="0" marL="0">
+            <a:pPr marL="0" indent="0">
               <a:buNone/>
             </a:pPr>
             <a:r>
@@ -7205,6 +7063,7 @@
         <a:solidFill>
           <a:srgbClr val="131B2E"/>
         </a:solidFill>
+        <a:effectLst/>
       </p:bgPr>
     </p:bg>
     <p:spTree>
@@ -7240,6 +7099,13 @@
           </a:solidFill>
           <a:ln/>
         </p:spPr>
+        <p:txBody>
+          <a:bodyPr/>
+          <a:lstStyle/>
+          <a:p>
+            <a:endParaRPr lang="en-US"/>
+          </a:p>
+        </p:txBody>
       </p:sp>
       <p:sp>
         <p:nvSpPr>
@@ -7262,7 +7128,7 @@
           <a:bodyPr wrap="square" lIns="0" tIns="0" rIns="0" bIns="0" rtlCol="0" anchor="ctr"/>
           <a:lstStyle/>
           <a:p>
-            <a:pPr indent="0" marL="0">
+            <a:pPr marL="0" indent="0">
               <a:buNone/>
             </a:pPr>
             <a:r>
@@ -7301,7 +7167,7 @@
           <a:bodyPr wrap="square" lIns="0" tIns="0" rIns="0" bIns="0" rtlCol="0" anchor="ctr"/>
           <a:lstStyle/>
           <a:p>
-            <a:pPr indent="0" marL="0">
+            <a:pPr marL="0" indent="0">
               <a:buNone/>
             </a:pPr>
             <a:r>
@@ -7321,14 +7187,14 @@
       </p:sp>
       <p:pic>
         <p:nvPicPr>
-          <p:cNvPr id="5" name="Image 0" descr="/sessions/sweet-quirky-clarke/mnt/CTA Seg V2/report/figures_v2/global_comparison.png">    </p:cNvPr>
+          <p:cNvPr id="5" name="Image 0" descr="/sessions/sweet-quirky-clarke/mnt/CTA Seg V2/report/figures_v2/global_comparison.png"/>
           <p:cNvPicPr>
             <a:picLocks noChangeAspect="1"/>
           </p:cNvPicPr>
           <p:nvPr/>
         </p:nvPicPr>
         <p:blipFill>
-          <a:blip r:embed="rId1"/>
+          <a:blip r:embed="rId3"/>
           <a:stretch>
             <a:fillRect/>
           </a:stretch>
@@ -7362,13 +7228,20 @@
           </a:solidFill>
           <a:ln/>
           <a:effectLst>
-            <a:outerShdw sx="100000" sy="100000" kx="0" ky="0" algn="bl" rotWithShape="0" blurRad="50800" dist="25400" dir="8100000">
+            <a:outerShdw blurRad="50800" dist="25400" dir="8100000" algn="bl" rotWithShape="0">
               <a:srgbClr val="000000">
                 <a:alpha val="20000"/>
               </a:srgbClr>
             </a:outerShdw>
           </a:effectLst>
         </p:spPr>
+        <p:txBody>
+          <a:bodyPr/>
+          <a:lstStyle/>
+          <a:p>
+            <a:endParaRPr lang="en-US"/>
+          </a:p>
+        </p:txBody>
       </p:sp>
       <p:sp>
         <p:nvSpPr>
@@ -7391,7 +7264,7 @@
           <a:bodyPr wrap="square" rtlCol="0" anchor="ctr"/>
           <a:lstStyle/>
           <a:p>
-            <a:pPr indent="0" marL="0">
+            <a:pPr marL="0" indent="0">
               <a:buNone/>
             </a:pPr>
             <a:r>
@@ -7408,7 +7281,7 @@
             <a:endParaRPr lang="en-US" sz="1500" dirty="0"/>
           </a:p>
           <a:p>
-            <a:pPr indent="0" marL="0">
+            <a:pPr marL="0" indent="0">
               <a:buNone/>
             </a:pPr>
             <a:r>
@@ -7425,7 +7298,7 @@
             <a:endParaRPr lang="en-US" sz="1500" dirty="0"/>
           </a:p>
           <a:p>
-            <a:pPr indent="0" marL="0">
+            <a:pPr marL="0" indent="0">
               <a:buNone/>
             </a:pPr>
             <a:r>
@@ -7462,13 +7335,20 @@
           </a:solidFill>
           <a:ln/>
           <a:effectLst>
-            <a:outerShdw sx="100000" sy="100000" kx="0" ky="0" algn="bl" rotWithShape="0" blurRad="50800" dist="25400" dir="8100000">
+            <a:outerShdw blurRad="50800" dist="25400" dir="8100000" algn="bl" rotWithShape="0">
               <a:srgbClr val="000000">
                 <a:alpha val="20000"/>
               </a:srgbClr>
             </a:outerShdw>
           </a:effectLst>
         </p:spPr>
+        <p:txBody>
+          <a:bodyPr/>
+          <a:lstStyle/>
+          <a:p>
+            <a:endParaRPr lang="en-US"/>
+          </a:p>
+        </p:txBody>
       </p:sp>
       <p:sp>
         <p:nvSpPr>
@@ -7491,7 +7371,7 @@
           <a:bodyPr wrap="square" rtlCol="0" anchor="ctr"/>
           <a:lstStyle/>
           <a:p>
-            <a:pPr indent="0" marL="0">
+            <a:pPr marL="0" indent="0">
               <a:buNone/>
             </a:pPr>
             <a:r>
@@ -7508,7 +7388,7 @@
             <a:endParaRPr lang="en-US" sz="1500" dirty="0"/>
           </a:p>
           <a:p>
-            <a:pPr indent="0" marL="0">
+            <a:pPr marL="0" indent="0">
               <a:buNone/>
             </a:pPr>
             <a:r>
@@ -7525,7 +7405,7 @@
             <a:endParaRPr lang="en-US" sz="1500" dirty="0"/>
           </a:p>
           <a:p>
-            <a:pPr indent="0" marL="0">
+            <a:pPr marL="0" indent="0">
               <a:buNone/>
             </a:pPr>
             <a:r>
@@ -7562,13 +7442,20 @@
           </a:solidFill>
           <a:ln/>
           <a:effectLst>
-            <a:outerShdw sx="100000" sy="100000" kx="0" ky="0" algn="bl" rotWithShape="0" blurRad="50800" dist="25400" dir="8100000">
+            <a:outerShdw blurRad="50800" dist="25400" dir="8100000" algn="bl" rotWithShape="0">
               <a:srgbClr val="000000">
                 <a:alpha val="20000"/>
               </a:srgbClr>
             </a:outerShdw>
           </a:effectLst>
         </p:spPr>
+        <p:txBody>
+          <a:bodyPr/>
+          <a:lstStyle/>
+          <a:p>
+            <a:endParaRPr lang="en-US"/>
+          </a:p>
+        </p:txBody>
       </p:sp>
       <p:sp>
         <p:nvSpPr>
@@ -7591,7 +7478,7 @@
           <a:bodyPr wrap="square" rtlCol="0" anchor="ctr"/>
           <a:lstStyle/>
           <a:p>
-            <a:pPr indent="0" marL="0">
+            <a:pPr marL="0" indent="0">
               <a:buNone/>
             </a:pPr>
             <a:r>
@@ -7608,7 +7495,7 @@
             <a:endParaRPr lang="en-US" sz="1500" dirty="0"/>
           </a:p>
           <a:p>
-            <a:pPr indent="0" marL="0">
+            <a:pPr marL="0" indent="0">
               <a:buNone/>
             </a:pPr>
             <a:r>
@@ -7625,7 +7512,7 @@
             <a:endParaRPr lang="en-US" sz="1500" dirty="0"/>
           </a:p>
           <a:p>
-            <a:pPr indent="0" marL="0">
+            <a:pPr marL="0" indent="0">
               <a:buNone/>
             </a:pPr>
             <a:r>
@@ -7659,6 +7546,7 @@
         <a:solidFill>
           <a:srgbClr val="131B2E"/>
         </a:solidFill>
+        <a:effectLst/>
       </p:bgPr>
     </p:bg>
     <p:spTree>
@@ -7694,6 +7582,13 @@
           </a:solidFill>
           <a:ln/>
         </p:spPr>
+        <p:txBody>
+          <a:bodyPr/>
+          <a:lstStyle/>
+          <a:p>
+            <a:endParaRPr lang="en-US"/>
+          </a:p>
+        </p:txBody>
       </p:sp>
       <p:sp>
         <p:nvSpPr>
@@ -7716,7 +7611,7 @@
           <a:bodyPr wrap="square" lIns="0" tIns="0" rIns="0" bIns="0" rtlCol="0" anchor="ctr"/>
           <a:lstStyle/>
           <a:p>
-            <a:pPr indent="0" marL="0">
+            <a:pPr marL="0" indent="0">
               <a:buNone/>
             </a:pPr>
             <a:r>
@@ -7755,7 +7650,7 @@
           <a:bodyPr wrap="square" lIns="0" tIns="0" rIns="0" bIns="0" rtlCol="0" anchor="ctr"/>
           <a:lstStyle/>
           <a:p>
-            <a:pPr indent="0" marL="0">
+            <a:pPr marL="0" indent="0">
               <a:buNone/>
             </a:pPr>
             <a:r>
@@ -7775,14 +7670,14 @@
       </p:sp>
       <p:pic>
         <p:nvPicPr>
-          <p:cNvPr id="5" name="Image 0" descr="/sessions/sweet-quirky-clarke/mnt/CTA Seg V2/report/figures_v2/vessel_gap.png">    </p:cNvPr>
+          <p:cNvPr id="5" name="Image 0" descr="/sessions/sweet-quirky-clarke/mnt/CTA Seg V2/report/figures_v2/vessel_gap.png"/>
           <p:cNvPicPr>
             <a:picLocks noChangeAspect="1"/>
           </p:cNvPicPr>
           <p:nvPr/>
         </p:nvPicPr>
         <p:blipFill>
-          <a:blip r:embed="rId1"/>
+          <a:blip r:embed="rId3"/>
           <a:stretch>
             <a:fillRect/>
           </a:stretch>
@@ -7816,13 +7711,20 @@
           </a:solidFill>
           <a:ln/>
           <a:effectLst>
-            <a:outerShdw sx="100000" sy="100000" kx="0" ky="0" algn="bl" rotWithShape="0" blurRad="50800" dist="25400" dir="8100000">
+            <a:outerShdw blurRad="50800" dist="25400" dir="8100000" algn="bl" rotWithShape="0">
               <a:srgbClr val="000000">
                 <a:alpha val="20000"/>
               </a:srgbClr>
             </a:outerShdw>
           </a:effectLst>
         </p:spPr>
+        <p:txBody>
+          <a:bodyPr/>
+          <a:lstStyle/>
+          <a:p>
+            <a:endParaRPr lang="en-US"/>
+          </a:p>
+        </p:txBody>
       </p:sp>
       <p:sp>
         <p:nvSpPr>
@@ -7845,7 +7747,7 @@
           <a:bodyPr wrap="square" lIns="0" tIns="0" rIns="0" bIns="0" rtlCol="0" anchor="ctr"/>
           <a:lstStyle/>
           <a:p>
-            <a:pPr indent="0" marL="0">
+            <a:pPr marL="0" indent="0">
               <a:buNone/>
             </a:pPr>
             <a:r>
@@ -7884,7 +7786,7 @@
           <a:bodyPr wrap="square" rtlCol="0" anchor="ctr"/>
           <a:lstStyle/>
           <a:p>
-            <a:pPr indent="0" marL="0">
+            <a:pPr marL="0" indent="0">
               <a:buNone/>
             </a:pPr>
             <a:r>
@@ -7898,9 +7800,6 @@
               </a:rPr>
               <a:t>R-Pcom: </a:t>
             </a:r>
-            <a:pPr indent="0" marL="0">
-              <a:buNone/>
-            </a:pPr>
             <a:r>
               <a:rPr lang="en-US" sz="1400" b="1" dirty="0">
                 <a:solidFill>
@@ -7912,9 +7811,6 @@
               </a:rPr>
               <a:t>0.511</a:t>
             </a:r>
-            <a:pPr indent="0" marL="0">
-              <a:buNone/>
-            </a:pPr>
             <a:r>
               <a:rPr lang="en-US" sz="1300" dirty="0">
                 <a:solidFill>
@@ -7929,7 +7825,7 @@
             <a:endParaRPr lang="en-US" sz="1400" dirty="0"/>
           </a:p>
           <a:p>
-            <a:pPr indent="0" marL="0">
+            <a:pPr marL="0" indent="0">
               <a:buNone/>
             </a:pPr>
             <a:r>
@@ -7943,9 +7839,6 @@
               </a:rPr>
               <a:t>L-Pcom: </a:t>
             </a:r>
-            <a:pPr indent="0" marL="0">
-              <a:buNone/>
-            </a:pPr>
             <a:r>
               <a:rPr lang="en-US" sz="1400" b="1" dirty="0">
                 <a:solidFill>
@@ -7957,9 +7850,6 @@
               </a:rPr>
               <a:t>0.479</a:t>
             </a:r>
-            <a:pPr indent="0" marL="0">
-              <a:buNone/>
-            </a:pPr>
             <a:r>
               <a:rPr lang="en-US" sz="1300" dirty="0">
                 <a:solidFill>
@@ -7996,7 +7886,7 @@
           <a:bodyPr wrap="square" lIns="0" tIns="0" rIns="0" bIns="0" rtlCol="0" anchor="ctr"/>
           <a:lstStyle/>
           <a:p>
-            <a:pPr indent="0" marL="0">
+            <a:pPr marL="0" indent="0">
               <a:buNone/>
             </a:pPr>
             <a:r>
@@ -8030,17 +7920,41 @@
         </p:nvGraphicFramePr>
         <p:xfrm>
           <a:off x="6858000" y="3383280"/>
-          <a:ext cx="4572000" cy="1371600"/>
+          <a:ext cx="4114800" cy="1371600"/>
         </p:xfrm>
         <a:graphic>
           <a:graphicData uri="http://schemas.openxmlformats.org/drawingml/2006/table">
             <a:tbl>
               <a:tblPr/>
               <a:tblGrid>
-                <a:gridCol w="1371600"/>
-                <a:gridCol w="914400"/>
-                <a:gridCol w="914400"/>
-                <a:gridCol w="914400"/>
+                <a:gridCol w="1371600">
+                  <a:extLst>
+                    <a:ext uri="{9D8B030D-6E8A-4147-A177-3AD203B41FA5}">
+                      <a16:colId xmlns:a16="http://schemas.microsoft.com/office/drawing/2014/main" val="20000"/>
+                    </a:ext>
+                  </a:extLst>
+                </a:gridCol>
+                <a:gridCol w="914400">
+                  <a:extLst>
+                    <a:ext uri="{9D8B030D-6E8A-4147-A177-3AD203B41FA5}">
+                      <a16:colId xmlns:a16="http://schemas.microsoft.com/office/drawing/2014/main" val="20001"/>
+                    </a:ext>
+                  </a:extLst>
+                </a:gridCol>
+                <a:gridCol w="914400">
+                  <a:extLst>
+                    <a:ext uri="{9D8B030D-6E8A-4147-A177-3AD203B41FA5}">
+                      <a16:colId xmlns:a16="http://schemas.microsoft.com/office/drawing/2014/main" val="20002"/>
+                    </a:ext>
+                  </a:extLst>
+                </a:gridCol>
+                <a:gridCol w="914400">
+                  <a:extLst>
+                    <a:ext uri="{9D8B030D-6E8A-4147-A177-3AD203B41FA5}">
+                      <a16:colId xmlns:a16="http://schemas.microsoft.com/office/drawing/2014/main" val="20003"/>
+                    </a:ext>
+                  </a:extLst>
+                </a:gridCol>
               </a:tblGrid>
               <a:tr h="342900">
                 <a:tc>
@@ -8048,7 +7962,7 @@
                     <a:bodyPr/>
                     <a:lstStyle/>
                     <a:p>
-                      <a:pPr indent="0" marL="0">
+                      <a:pPr marL="0" indent="0">
                         <a:buNone/>
                       </a:pPr>
                       <a:r>
@@ -8062,7 +7976,7 @@
                       <a:endParaRPr lang="en-US" sz="1200" dirty="0"/>
                     </a:p>
                   </a:txBody>
-                  <a:tcPr marL="91440" marR="91440" marT="45720" marB="45720">
+                  <a:tcPr>
                     <a:lnL w="6350" cap="flat" cmpd="sng" algn="ctr">
                       <a:solidFill>
                         <a:srgbClr val="2A3558"/>
@@ -8109,7 +8023,7 @@
                     <a:bodyPr/>
                     <a:lstStyle/>
                     <a:p>
-                      <a:pPr indent="0" marL="0">
+                      <a:pPr marL="0" indent="0">
                         <a:buNone/>
                       </a:pPr>
                       <a:r>
@@ -8123,7 +8037,7 @@
                       <a:endParaRPr lang="en-US" sz="1200" dirty="0"/>
                     </a:p>
                   </a:txBody>
-                  <a:tcPr marL="91440" marR="91440" marT="45720" marB="45720">
+                  <a:tcPr>
                     <a:lnL w="6350" cap="flat" cmpd="sng" algn="ctr">
                       <a:solidFill>
                         <a:srgbClr val="2A3558"/>
@@ -8170,7 +8084,7 @@
                     <a:bodyPr/>
                     <a:lstStyle/>
                     <a:p>
-                      <a:pPr indent="0" marL="0">
+                      <a:pPr marL="0" indent="0">
                         <a:buNone/>
                       </a:pPr>
                       <a:r>
@@ -8184,7 +8098,7 @@
                       <a:endParaRPr lang="en-US" sz="1200" dirty="0"/>
                     </a:p>
                   </a:txBody>
-                  <a:tcPr marL="91440" marR="91440" marT="45720" marB="45720">
+                  <a:tcPr>
                     <a:lnL w="6350" cap="flat" cmpd="sng" algn="ctr">
                       <a:solidFill>
                         <a:srgbClr val="2A3558"/>
@@ -8231,7 +8145,7 @@
                     <a:bodyPr/>
                     <a:lstStyle/>
                     <a:p>
-                      <a:pPr indent="0" marL="0">
+                      <a:pPr marL="0" indent="0">
                         <a:buNone/>
                       </a:pPr>
                       <a:r>
@@ -8245,7 +8159,7 @@
                       <a:endParaRPr lang="en-US" sz="1200" dirty="0"/>
                     </a:p>
                   </a:txBody>
-                  <a:tcPr marL="91440" marR="91440" marT="45720" marB="45720">
+                  <a:tcPr>
                     <a:lnL w="6350" cap="flat" cmpd="sng" algn="ctr">
                       <a:solidFill>
                         <a:srgbClr val="2A3558"/>
@@ -8287,6 +8201,11 @@
                     </a:solidFill>
                   </a:tcPr>
                 </a:tc>
+                <a:extLst>
+                  <a:ext uri="{0D108BD9-81ED-4DB2-BD59-A6C34878D82A}">
+                    <a16:rowId xmlns:a16="http://schemas.microsoft.com/office/drawing/2014/main" val="10000"/>
+                  </a:ext>
+                </a:extLst>
               </a:tr>
               <a:tr h="342900">
                 <a:tc>
@@ -8294,7 +8213,7 @@
                     <a:bodyPr/>
                     <a:lstStyle/>
                     <a:p>
-                      <a:pPr indent="0" marL="0">
+                      <a:pPr marL="0" indent="0">
                         <a:buNone/>
                       </a:pPr>
                       <a:r>
@@ -8308,7 +8227,7 @@
                       <a:endParaRPr lang="en-US" sz="1200" dirty="0"/>
                     </a:p>
                   </a:txBody>
-                  <a:tcPr marL="91440" marR="91440" marT="45720" marB="45720">
+                  <a:tcPr>
                     <a:lnL w="6350" cap="flat" cmpd="sng" algn="ctr">
                       <a:solidFill>
                         <a:srgbClr val="2A3558"/>
@@ -8355,7 +8274,7 @@
                     <a:bodyPr/>
                     <a:lstStyle/>
                     <a:p>
-                      <a:pPr indent="0" marL="0">
+                      <a:pPr marL="0" indent="0">
                         <a:buNone/>
                       </a:pPr>
                       <a:r>
@@ -8369,7 +8288,7 @@
                       <a:endParaRPr lang="en-US" sz="1200" dirty="0"/>
                     </a:p>
                   </a:txBody>
-                  <a:tcPr marL="91440" marR="91440" marT="45720" marB="45720">
+                  <a:tcPr>
                     <a:lnL w="6350" cap="flat" cmpd="sng" algn="ctr">
                       <a:solidFill>
                         <a:srgbClr val="2A3558"/>
@@ -8416,7 +8335,7 @@
                     <a:bodyPr/>
                     <a:lstStyle/>
                     <a:p>
-                      <a:pPr indent="0" marL="0">
+                      <a:pPr marL="0" indent="0">
                         <a:buNone/>
                       </a:pPr>
                       <a:r>
@@ -8430,7 +8349,7 @@
                       <a:endParaRPr lang="en-US" sz="1200" dirty="0"/>
                     </a:p>
                   </a:txBody>
-                  <a:tcPr marL="91440" marR="91440" marT="45720" marB="45720">
+                  <a:tcPr>
                     <a:lnL w="6350" cap="flat" cmpd="sng" algn="ctr">
                       <a:solidFill>
                         <a:srgbClr val="2A3558"/>
@@ -8477,7 +8396,7 @@
                     <a:bodyPr/>
                     <a:lstStyle/>
                     <a:p>
-                      <a:pPr indent="0" marL="0">
+                      <a:pPr marL="0" indent="0">
                         <a:buNone/>
                       </a:pPr>
                       <a:r>
@@ -8491,7 +8410,7 @@
                       <a:endParaRPr lang="en-US" sz="1200" dirty="0"/>
                     </a:p>
                   </a:txBody>
-                  <a:tcPr marL="91440" marR="91440" marT="45720" marB="45720">
+                  <a:tcPr>
                     <a:lnL w="6350" cap="flat" cmpd="sng" algn="ctr">
                       <a:solidFill>
                         <a:srgbClr val="2A3558"/>
@@ -8533,6 +8452,11 @@
                     </a:solidFill>
                   </a:tcPr>
                 </a:tc>
+                <a:extLst>
+                  <a:ext uri="{0D108BD9-81ED-4DB2-BD59-A6C34878D82A}">
+                    <a16:rowId xmlns:a16="http://schemas.microsoft.com/office/drawing/2014/main" val="10001"/>
+                  </a:ext>
+                </a:extLst>
               </a:tr>
               <a:tr h="342900">
                 <a:tc>
@@ -8540,7 +8464,7 @@
                     <a:bodyPr/>
                     <a:lstStyle/>
                     <a:p>
-                      <a:pPr indent="0" marL="0">
+                      <a:pPr marL="0" indent="0">
                         <a:buNone/>
                       </a:pPr>
                       <a:r>
@@ -8554,7 +8478,7 @@
                       <a:endParaRPr lang="en-US" sz="1200" dirty="0"/>
                     </a:p>
                   </a:txBody>
-                  <a:tcPr marL="91440" marR="91440" marT="45720" marB="45720">
+                  <a:tcPr>
                     <a:lnL w="6350" cap="flat" cmpd="sng" algn="ctr">
                       <a:solidFill>
                         <a:srgbClr val="2A3558"/>
@@ -8601,7 +8525,7 @@
                     <a:bodyPr/>
                     <a:lstStyle/>
                     <a:p>
-                      <a:pPr indent="0" marL="0">
+                      <a:pPr marL="0" indent="0">
                         <a:buNone/>
                       </a:pPr>
                       <a:r>
@@ -8615,7 +8539,7 @@
                       <a:endParaRPr lang="en-US" sz="1200" dirty="0"/>
                     </a:p>
                   </a:txBody>
-                  <a:tcPr marL="91440" marR="91440" marT="45720" marB="45720">
+                  <a:tcPr>
                     <a:lnL w="6350" cap="flat" cmpd="sng" algn="ctr">
                       <a:solidFill>
                         <a:srgbClr val="2A3558"/>
@@ -8662,7 +8586,7 @@
                     <a:bodyPr/>
                     <a:lstStyle/>
                     <a:p>
-                      <a:pPr indent="0" marL="0">
+                      <a:pPr marL="0" indent="0">
                         <a:buNone/>
                       </a:pPr>
                       <a:r>
@@ -8676,7 +8600,7 @@
                       <a:endParaRPr lang="en-US" sz="1200" dirty="0"/>
                     </a:p>
                   </a:txBody>
-                  <a:tcPr marL="91440" marR="91440" marT="45720" marB="45720">
+                  <a:tcPr>
                     <a:lnL w="6350" cap="flat" cmpd="sng" algn="ctr">
                       <a:solidFill>
                         <a:srgbClr val="2A3558"/>
@@ -8723,7 +8647,7 @@
                     <a:bodyPr/>
                     <a:lstStyle/>
                     <a:p>
-                      <a:pPr indent="0" marL="0">
+                      <a:pPr marL="0" indent="0">
                         <a:buNone/>
                       </a:pPr>
                       <a:r>
@@ -8737,7 +8661,7 @@
                       <a:endParaRPr lang="en-US" sz="1200" dirty="0"/>
                     </a:p>
                   </a:txBody>
-                  <a:tcPr marL="91440" marR="91440" marT="45720" marB="45720">
+                  <a:tcPr>
                     <a:lnL w="6350" cap="flat" cmpd="sng" algn="ctr">
                       <a:solidFill>
                         <a:srgbClr val="2A3558"/>
@@ -8779,6 +8703,11 @@
                     </a:solidFill>
                   </a:tcPr>
                 </a:tc>
+                <a:extLst>
+                  <a:ext uri="{0D108BD9-81ED-4DB2-BD59-A6C34878D82A}">
+                    <a16:rowId xmlns:a16="http://schemas.microsoft.com/office/drawing/2014/main" val="10002"/>
+                  </a:ext>
+                </a:extLst>
               </a:tr>
               <a:tr h="342900">
                 <a:tc>
@@ -8786,7 +8715,7 @@
                     <a:bodyPr/>
                     <a:lstStyle/>
                     <a:p>
-                      <a:pPr indent="0" marL="0">
+                      <a:pPr marL="0" indent="0">
                         <a:buNone/>
                       </a:pPr>
                       <a:r>
@@ -8800,7 +8729,7 @@
                       <a:endParaRPr lang="en-US" sz="1200" dirty="0"/>
                     </a:p>
                   </a:txBody>
-                  <a:tcPr marL="91440" marR="91440" marT="45720" marB="45720">
+                  <a:tcPr>
                     <a:lnL w="6350" cap="flat" cmpd="sng" algn="ctr">
                       <a:solidFill>
                         <a:srgbClr val="2A3558"/>
@@ -8847,7 +8776,7 @@
                     <a:bodyPr/>
                     <a:lstStyle/>
                     <a:p>
-                      <a:pPr indent="0" marL="0">
+                      <a:pPr marL="0" indent="0">
                         <a:buNone/>
                       </a:pPr>
                       <a:r>
@@ -8861,7 +8790,7 @@
                       <a:endParaRPr lang="en-US" sz="1200" dirty="0"/>
                     </a:p>
                   </a:txBody>
-                  <a:tcPr marL="91440" marR="91440" marT="45720" marB="45720">
+                  <a:tcPr>
                     <a:lnL w="6350" cap="flat" cmpd="sng" algn="ctr">
                       <a:solidFill>
                         <a:srgbClr val="2A3558"/>
@@ -8908,7 +8837,7 @@
                     <a:bodyPr/>
                     <a:lstStyle/>
                     <a:p>
-                      <a:pPr indent="0" marL="0">
+                      <a:pPr marL="0" indent="0">
                         <a:buNone/>
                       </a:pPr>
                       <a:r>
@@ -8922,7 +8851,7 @@
                       <a:endParaRPr lang="en-US" sz="1200" dirty="0"/>
                     </a:p>
                   </a:txBody>
-                  <a:tcPr marL="91440" marR="91440" marT="45720" marB="45720">
+                  <a:tcPr>
                     <a:lnL w="6350" cap="flat" cmpd="sng" algn="ctr">
                       <a:solidFill>
                         <a:srgbClr val="2A3558"/>
@@ -8969,7 +8898,7 @@
                     <a:bodyPr/>
                     <a:lstStyle/>
                     <a:p>
-                      <a:pPr indent="0" marL="0">
+                      <a:pPr marL="0" indent="0">
                         <a:buNone/>
                       </a:pPr>
                       <a:r>
@@ -8983,7 +8912,7 @@
                       <a:endParaRPr lang="en-US" sz="1200" dirty="0"/>
                     </a:p>
                   </a:txBody>
-                  <a:tcPr marL="91440" marR="91440" marT="45720" marB="45720">
+                  <a:tcPr>
                     <a:lnL w="6350" cap="flat" cmpd="sng" algn="ctr">
                       <a:solidFill>
                         <a:srgbClr val="2A3558"/>
@@ -9025,6 +8954,11 @@
                     </a:solidFill>
                   </a:tcPr>
                 </a:tc>
+                <a:extLst>
+                  <a:ext uri="{0D108BD9-81ED-4DB2-BD59-A6C34878D82A}">
+                    <a16:rowId xmlns:a16="http://schemas.microsoft.com/office/drawing/2014/main" val="10003"/>
+                  </a:ext>
+                </a:extLst>
               </a:tr>
             </a:tbl>
           </a:graphicData>
@@ -9051,7 +8985,7 @@
           <a:bodyPr wrap="square" lIns="0" tIns="0" rIns="0" bIns="0" rtlCol="0" anchor="ctr"/>
           <a:lstStyle/>
           <a:p>
-            <a:pPr indent="0" marL="0">
+            <a:pPr marL="0" indent="0">
               <a:buNone/>
             </a:pPr>
             <a:r>
@@ -9085,6 +9019,7 @@
         <a:solidFill>
           <a:srgbClr val="131B2E"/>
         </a:solidFill>
+        <a:effectLst/>
       </p:bgPr>
     </p:bg>
     <p:spTree>
@@ -9120,6 +9055,13 @@
           </a:solidFill>
           <a:ln/>
         </p:spPr>
+        <p:txBody>
+          <a:bodyPr/>
+          <a:lstStyle/>
+          <a:p>
+            <a:endParaRPr lang="en-US"/>
+          </a:p>
+        </p:txBody>
       </p:sp>
       <p:sp>
         <p:nvSpPr>
@@ -9142,7 +9084,7 @@
           <a:bodyPr wrap="square" lIns="0" tIns="0" rIns="0" bIns="0" rtlCol="0" anchor="ctr"/>
           <a:lstStyle/>
           <a:p>
-            <a:pPr indent="0" marL="0">
+            <a:pPr marL="0" indent="0">
               <a:buNone/>
             </a:pPr>
             <a:r>
@@ -9181,7 +9123,7 @@
           <a:bodyPr wrap="square" lIns="0" tIns="0" rIns="0" bIns="0" rtlCol="0" anchor="ctr"/>
           <a:lstStyle/>
           <a:p>
-            <a:pPr indent="0" marL="0">
+            <a:pPr marL="0" indent="0">
               <a:buNone/>
             </a:pPr>
             <a:r>
@@ -9201,14 +9143,14 @@
       </p:sp>
       <p:pic>
         <p:nvPicPr>
-          <p:cNvPr id="5" name="Image 0" descr="/sessions/sweet-quirky-clarke/mnt/CTA Seg V2/report/figures_v2/topbrain_comparison.png">    </p:cNvPr>
+          <p:cNvPr id="5" name="Image 0" descr="/sessions/sweet-quirky-clarke/mnt/CTA Seg V2/report/figures_v2/topbrain_comparison.png"/>
           <p:cNvPicPr>
             <a:picLocks noChangeAspect="1"/>
           </p:cNvPicPr>
           <p:nvPr/>
         </p:nvPicPr>
         <p:blipFill>
-          <a:blip r:embed="rId1"/>
+          <a:blip r:embed="rId3"/>
           <a:stretch>
             <a:fillRect/>
           </a:stretch>
@@ -9242,13 +9184,20 @@
           </a:solidFill>
           <a:ln/>
           <a:effectLst>
-            <a:outerShdw sx="100000" sy="100000" kx="0" ky="0" algn="bl" rotWithShape="0" blurRad="50800" dist="25400" dir="8100000">
+            <a:outerShdw blurRad="50800" dist="25400" dir="8100000" algn="bl" rotWithShape="0">
               <a:srgbClr val="000000">
                 <a:alpha val="20000"/>
               </a:srgbClr>
             </a:outerShdw>
           </a:effectLst>
         </p:spPr>
+        <p:txBody>
+          <a:bodyPr/>
+          <a:lstStyle/>
+          <a:p>
+            <a:endParaRPr lang="en-US"/>
+          </a:p>
+        </p:txBody>
       </p:sp>
       <p:sp>
         <p:nvSpPr>
@@ -9271,7 +9220,7 @@
           <a:bodyPr wrap="square" lIns="0" tIns="0" rIns="0" bIns="0" rtlCol="0" anchor="ctr"/>
           <a:lstStyle/>
           <a:p>
-            <a:pPr indent="0" marL="0">
+            <a:pPr marL="0" indent="0">
               <a:buNone/>
             </a:pPr>
             <a:r>
@@ -9310,7 +9259,7 @@
           <a:bodyPr wrap="square" lIns="0" tIns="0" rIns="0" bIns="0" rtlCol="0" anchor="ctr"/>
           <a:lstStyle/>
           <a:p>
-            <a:pPr indent="0" marL="0">
+            <a:pPr marL="0" indent="0">
               <a:buNone/>
             </a:pPr>
             <a:r>
@@ -9349,7 +9298,7 @@
           <a:bodyPr wrap="square" lIns="0" tIns="0" rIns="0" bIns="0" rtlCol="0" anchor="ctr"/>
           <a:lstStyle/>
           <a:p>
-            <a:pPr indent="0" marL="0">
+            <a:pPr marL="0" indent="0">
               <a:buNone/>
             </a:pPr>
             <a:r>
@@ -9388,7 +9337,7 @@
           <a:bodyPr wrap="square" lIns="0" tIns="0" rIns="0" bIns="0" rtlCol="0" anchor="ctr"/>
           <a:lstStyle/>
           <a:p>
-            <a:pPr indent="0" marL="0">
+            <a:pPr marL="0" indent="0">
               <a:buNone/>
             </a:pPr>
             <a:r>
@@ -9427,7 +9376,7 @@
           <a:bodyPr wrap="square" rtlCol="0" anchor="ctr"/>
           <a:lstStyle/>
           <a:p>
-            <a:pPr indent="0" marL="0">
+            <a:pPr marL="0" indent="0">
               <a:buNone/>
             </a:pPr>
             <a:r>
@@ -9444,7 +9393,7 @@
             <a:endParaRPr lang="en-US" sz="1400" dirty="0"/>
           </a:p>
           <a:p>
-            <a:pPr indent="0" marL="0">
+            <a:pPr marL="0" indent="0">
               <a:buNone/>
             </a:pPr>
             <a:r>
@@ -9481,13 +9430,20 @@
           </a:solidFill>
           <a:ln/>
           <a:effectLst>
-            <a:outerShdw sx="100000" sy="100000" kx="0" ky="0" algn="bl" rotWithShape="0" blurRad="50800" dist="25400" dir="8100000">
+            <a:outerShdw blurRad="50800" dist="25400" dir="8100000" algn="bl" rotWithShape="0">
               <a:srgbClr val="000000">
                 <a:alpha val="20000"/>
               </a:srgbClr>
             </a:outerShdw>
           </a:effectLst>
         </p:spPr>
+        <p:txBody>
+          <a:bodyPr/>
+          <a:lstStyle/>
+          <a:p>
+            <a:endParaRPr lang="en-US"/>
+          </a:p>
+        </p:txBody>
       </p:sp>
       <p:sp>
         <p:nvSpPr>
@@ -9510,7 +9466,7 @@
           <a:bodyPr wrap="square" rtlCol="0" anchor="ctr"/>
           <a:lstStyle/>
           <a:p>
-            <a:pPr indent="0" marL="0">
+            <a:pPr marL="0" indent="0">
               <a:buNone/>
             </a:pPr>
             <a:r>
@@ -9527,7 +9483,7 @@
             <a:endParaRPr lang="en-US" sz="1300" dirty="0"/>
           </a:p>
           <a:p>
-            <a:pPr indent="0" marL="0">
+            <a:pPr marL="0" indent="0">
               <a:buNone/>
             </a:pPr>
             <a:r>
@@ -9544,13 +9500,13 @@
             <a:endParaRPr lang="en-US" sz="1300" dirty="0"/>
           </a:p>
           <a:p>
-            <a:pPr indent="0" marL="0">
+            <a:pPr marL="0" indent="0">
               <a:buNone/>
             </a:pPr>
             <a:endParaRPr lang="en-US" sz="1300" dirty="0"/>
           </a:p>
           <a:p>
-            <a:pPr indent="0" marL="0">
+            <a:pPr marL="0" indent="0">
               <a:buNone/>
             </a:pPr>
             <a:r>
@@ -9567,7 +9523,7 @@
             <a:endParaRPr lang="en-US" sz="1300" dirty="0"/>
           </a:p>
           <a:p>
-            <a:pPr indent="0" marL="0">
+            <a:pPr marL="0" indent="0">
               <a:buNone/>
             </a:pPr>
             <a:r>
@@ -9584,13 +9540,13 @@
             <a:endParaRPr lang="en-US" sz="1300" dirty="0"/>
           </a:p>
           <a:p>
-            <a:pPr indent="0" marL="0">
+            <a:pPr marL="0" indent="0">
               <a:buNone/>
             </a:pPr>
             <a:endParaRPr lang="en-US" sz="1300" dirty="0"/>
           </a:p>
           <a:p>
-            <a:pPr indent="0" marL="0">
+            <a:pPr marL="0" indent="0">
               <a:buNone/>
             </a:pPr>
             <a:r>
@@ -9607,7 +9563,7 @@
             <a:endParaRPr lang="en-US" sz="1300" dirty="0"/>
           </a:p>
           <a:p>
-            <a:pPr indent="0" marL="0">
+            <a:pPr marL="0" indent="0">
               <a:buNone/>
             </a:pPr>
             <a:r>
@@ -9624,13 +9580,13 @@
             <a:endParaRPr lang="en-US" sz="1300" dirty="0"/>
           </a:p>
           <a:p>
-            <a:pPr indent="0" marL="0">
+            <a:pPr marL="0" indent="0">
               <a:buNone/>
             </a:pPr>
             <a:endParaRPr lang="en-US" sz="1300" dirty="0"/>
           </a:p>
           <a:p>
-            <a:pPr indent="0" marL="0">
+            <a:pPr marL="0" indent="0">
               <a:buNone/>
             </a:pPr>
             <a:r>
@@ -9647,7 +9603,7 @@
             <a:endParaRPr lang="en-US" sz="1300" dirty="0"/>
           </a:p>
           <a:p>
-            <a:pPr indent="0" marL="0">
+            <a:pPr marL="0" indent="0">
               <a:buNone/>
             </a:pPr>
             <a:r>
@@ -9684,6 +9640,13 @@
           </a:solidFill>
           <a:ln/>
         </p:spPr>
+        <p:txBody>
+          <a:bodyPr/>
+          <a:lstStyle/>
+          <a:p>
+            <a:endParaRPr lang="en-US"/>
+          </a:p>
+        </p:txBody>
       </p:sp>
       <p:sp>
         <p:nvSpPr>
@@ -9706,7 +9669,7 @@
           <a:bodyPr wrap="square" rtlCol="0" anchor="ctr"/>
           <a:lstStyle/>
           <a:p>
-            <a:pPr indent="0" marL="0">
+            <a:pPr marL="0" indent="0">
               <a:buNone/>
             </a:pPr>
             <a:r>
@@ -9740,6 +9703,7 @@
         <a:solidFill>
           <a:srgbClr val="131B2E"/>
         </a:solidFill>
+        <a:effectLst/>
       </p:bgPr>
     </p:bg>
     <p:spTree>
@@ -9775,6 +9739,13 @@
           </a:solidFill>
           <a:ln/>
         </p:spPr>
+        <p:txBody>
+          <a:bodyPr/>
+          <a:lstStyle/>
+          <a:p>
+            <a:endParaRPr lang="en-US"/>
+          </a:p>
+        </p:txBody>
       </p:sp>
       <p:sp>
         <p:nvSpPr>
@@ -9797,7 +9768,7 @@
           <a:bodyPr wrap="square" lIns="0" tIns="0" rIns="0" bIns="0" rtlCol="0" anchor="ctr"/>
           <a:lstStyle/>
           <a:p>
-            <a:pPr indent="0" marL="0">
+            <a:pPr marL="0" indent="0">
               <a:buNone/>
             </a:pPr>
             <a:r>
@@ -9836,7 +9807,7 @@
           <a:bodyPr wrap="square" lIns="0" tIns="0" rIns="0" bIns="0" rtlCol="0" anchor="ctr"/>
           <a:lstStyle/>
           <a:p>
-            <a:pPr indent="0" marL="0">
+            <a:pPr marL="0" indent="0">
               <a:buNone/>
             </a:pPr>
             <a:r>
@@ -9873,13 +9844,20 @@
           </a:solidFill>
           <a:ln/>
           <a:effectLst>
-            <a:outerShdw sx="100000" sy="100000" kx="0" ky="0" algn="bl" rotWithShape="0" blurRad="50800" dist="25400" dir="8100000">
+            <a:outerShdw blurRad="50800" dist="25400" dir="8100000" algn="bl" rotWithShape="0">
               <a:srgbClr val="000000">
                 <a:alpha val="20000"/>
               </a:srgbClr>
             </a:outerShdw>
           </a:effectLst>
         </p:spPr>
+        <p:txBody>
+          <a:bodyPr/>
+          <a:lstStyle/>
+          <a:p>
+            <a:endParaRPr lang="en-US"/>
+          </a:p>
+        </p:txBody>
       </p:sp>
       <p:sp>
         <p:nvSpPr>
@@ -9902,7 +9880,7 @@
           <a:bodyPr wrap="square" rtlCol="0" anchor="ctr"/>
           <a:lstStyle/>
           <a:p>
-            <a:pPr algn="ctr" indent="0" marL="0">
+            <a:pPr marL="0" indent="0" algn="ctr">
               <a:buNone/>
             </a:pPr>
             <a:r>
@@ -9941,7 +9919,7 @@
           <a:bodyPr wrap="square" rtlCol="0" anchor="ctr"/>
           <a:lstStyle/>
           <a:p>
-            <a:pPr algn="ctr" indent="0" marL="0">
+            <a:pPr marL="0" indent="0" algn="ctr">
               <a:buNone/>
             </a:pPr>
             <a:r>
@@ -9978,13 +9956,20 @@
           </a:solidFill>
           <a:ln/>
           <a:effectLst>
-            <a:outerShdw sx="100000" sy="100000" kx="0" ky="0" algn="bl" rotWithShape="0" blurRad="50800" dist="25400" dir="8100000">
+            <a:outerShdw blurRad="50800" dist="25400" dir="8100000" algn="bl" rotWithShape="0">
               <a:srgbClr val="000000">
                 <a:alpha val="20000"/>
               </a:srgbClr>
             </a:outerShdw>
           </a:effectLst>
         </p:spPr>
+        <p:txBody>
+          <a:bodyPr/>
+          <a:lstStyle/>
+          <a:p>
+            <a:endParaRPr lang="en-US"/>
+          </a:p>
+        </p:txBody>
       </p:sp>
       <p:sp>
         <p:nvSpPr>
@@ -10007,7 +9992,7 @@
           <a:bodyPr wrap="square" rtlCol="0" anchor="ctr"/>
           <a:lstStyle/>
           <a:p>
-            <a:pPr algn="ctr" indent="0" marL="0">
+            <a:pPr marL="0" indent="0" algn="ctr">
               <a:buNone/>
             </a:pPr>
             <a:r>
@@ -10046,7 +10031,7 @@
           <a:bodyPr wrap="square" rtlCol="0" anchor="ctr"/>
           <a:lstStyle/>
           <a:p>
-            <a:pPr algn="ctr" indent="0" marL="0">
+            <a:pPr marL="0" indent="0" algn="ctr">
               <a:buNone/>
             </a:pPr>
             <a:r>
@@ -10085,7 +10070,7 @@
           <a:bodyPr wrap="square" rtlCol="0" anchor="ctr"/>
           <a:lstStyle/>
           <a:p>
-            <a:pPr algn="ctr" indent="0" marL="0">
+            <a:pPr marL="0" indent="0" algn="ctr">
               <a:buNone/>
             </a:pPr>
             <a:r>
@@ -10119,6 +10104,7 @@
         <a:solidFill>
           <a:srgbClr val="131B2E"/>
         </a:solidFill>
+        <a:effectLst/>
       </p:bgPr>
     </p:bg>
     <p:spTree>
@@ -10154,6 +10140,13 @@
           </a:solidFill>
           <a:ln/>
         </p:spPr>
+        <p:txBody>
+          <a:bodyPr/>
+          <a:lstStyle/>
+          <a:p>
+            <a:endParaRPr lang="en-US"/>
+          </a:p>
+        </p:txBody>
       </p:sp>
       <p:sp>
         <p:nvSpPr>
@@ -10176,7 +10169,7 @@
           <a:bodyPr wrap="square" lIns="0" tIns="0" rIns="0" bIns="0" rtlCol="0" anchor="ctr"/>
           <a:lstStyle/>
           <a:p>
-            <a:pPr indent="0" marL="0">
+            <a:pPr marL="0" indent="0">
               <a:buNone/>
             </a:pPr>
             <a:r>
@@ -10215,7 +10208,7 @@
           <a:bodyPr wrap="square" lIns="0" tIns="0" rIns="0" bIns="0" rtlCol="0" anchor="ctr"/>
           <a:lstStyle/>
           <a:p>
-            <a:pPr indent="0" marL="0">
+            <a:pPr marL="0" indent="0">
               <a:buNone/>
             </a:pPr>
             <a:r>
@@ -10252,13 +10245,20 @@
           </a:solidFill>
           <a:ln/>
           <a:effectLst>
-            <a:outerShdw sx="100000" sy="100000" kx="0" ky="0" algn="bl" rotWithShape="0" blurRad="50800" dist="25400" dir="8100000">
+            <a:outerShdw blurRad="50800" dist="25400" dir="8100000" algn="bl" rotWithShape="0">
               <a:srgbClr val="000000">
                 <a:alpha val="20000"/>
               </a:srgbClr>
             </a:outerShdw>
           </a:effectLst>
         </p:spPr>
+        <p:txBody>
+          <a:bodyPr/>
+          <a:lstStyle/>
+          <a:p>
+            <a:endParaRPr lang="en-US"/>
+          </a:p>
+        </p:txBody>
       </p:sp>
       <p:sp>
         <p:nvSpPr>
@@ -10281,7 +10281,7 @@
           <a:bodyPr wrap="square" lIns="0" tIns="0" rIns="0" bIns="0" rtlCol="0" anchor="ctr"/>
           <a:lstStyle/>
           <a:p>
-            <a:pPr indent="0" marL="0">
+            <a:pPr marL="0" indent="0">
               <a:buNone/>
             </a:pPr>
             <a:r>
@@ -10320,7 +10320,7 @@
           <a:bodyPr wrap="square" lIns="0" tIns="0" rIns="0" bIns="0" rtlCol="0" anchor="ctr"/>
           <a:lstStyle/>
           <a:p>
-            <a:pPr indent="0" marL="0">
+            <a:pPr marL="0" indent="0">
               <a:buNone/>
             </a:pPr>
             <a:r>
@@ -10359,7 +10359,7 @@
           <a:bodyPr wrap="square" lIns="0" tIns="0" rIns="0" bIns="0" rtlCol="0" anchor="ctr"/>
           <a:lstStyle/>
           <a:p>
-            <a:pPr indent="0" marL="0">
+            <a:pPr marL="0" indent="0">
               <a:buNone/>
             </a:pPr>
             <a:r>
@@ -10398,7 +10398,7 @@
           <a:bodyPr wrap="square" lIns="0" tIns="0" rIns="0" bIns="0" rtlCol="0" anchor="ctr"/>
           <a:lstStyle/>
           <a:p>
-            <a:pPr indent="0" marL="0">
+            <a:pPr marL="0" indent="0">
               <a:buNone/>
             </a:pPr>
             <a:r>
@@ -10437,7 +10437,7 @@
           <a:bodyPr wrap="square" lIns="0" tIns="0" rIns="0" bIns="0" rtlCol="0" anchor="ctr"/>
           <a:lstStyle/>
           <a:p>
-            <a:pPr indent="0" marL="0">
+            <a:pPr marL="0" indent="0">
               <a:buNone/>
             </a:pPr>
             <a:r>
@@ -10476,7 +10476,7 @@
           <a:bodyPr wrap="square" lIns="0" tIns="0" rIns="0" bIns="0" rtlCol="0" anchor="ctr"/>
           <a:lstStyle/>
           <a:p>
-            <a:pPr indent="0" marL="0">
+            <a:pPr marL="0" indent="0">
               <a:buNone/>
             </a:pPr>
             <a:r>
@@ -10513,13 +10513,20 @@
           </a:solidFill>
           <a:ln/>
           <a:effectLst>
-            <a:outerShdw sx="100000" sy="100000" kx="0" ky="0" algn="bl" rotWithShape="0" blurRad="50800" dist="25400" dir="8100000">
+            <a:outerShdw blurRad="50800" dist="25400" dir="8100000" algn="bl" rotWithShape="0">
               <a:srgbClr val="000000">
                 <a:alpha val="20000"/>
               </a:srgbClr>
             </a:outerShdw>
           </a:effectLst>
         </p:spPr>
+        <p:txBody>
+          <a:bodyPr/>
+          <a:lstStyle/>
+          <a:p>
+            <a:endParaRPr lang="en-US"/>
+          </a:p>
+        </p:txBody>
       </p:sp>
       <p:sp>
         <p:nvSpPr>
@@ -10542,7 +10549,7 @@
           <a:bodyPr wrap="square" lIns="0" tIns="0" rIns="0" bIns="0" rtlCol="0" anchor="ctr"/>
           <a:lstStyle/>
           <a:p>
-            <a:pPr indent="0" marL="0">
+            <a:pPr marL="0" indent="0">
               <a:buNone/>
             </a:pPr>
             <a:r>
@@ -10581,7 +10588,7 @@
           <a:bodyPr wrap="square" lIns="0" tIns="0" rIns="0" bIns="0" rtlCol="0" anchor="ctr"/>
           <a:lstStyle/>
           <a:p>
-            <a:pPr indent="0" marL="0">
+            <a:pPr marL="0" indent="0">
               <a:buNone/>
             </a:pPr>
             <a:r>
@@ -10620,7 +10627,7 @@
           <a:bodyPr wrap="square" lIns="0" tIns="0" rIns="0" bIns="0" rtlCol="0" anchor="ctr"/>
           <a:lstStyle/>
           <a:p>
-            <a:pPr indent="0" marL="0">
+            <a:pPr marL="0" indent="0">
               <a:buNone/>
             </a:pPr>
             <a:r>
@@ -10659,7 +10666,7 @@
           <a:bodyPr wrap="square" lIns="0" tIns="0" rIns="0" bIns="0" rtlCol="0" anchor="ctr"/>
           <a:lstStyle/>
           <a:p>
-            <a:pPr indent="0" marL="0">
+            <a:pPr marL="0" indent="0">
               <a:buNone/>
             </a:pPr>
             <a:r>
@@ -10698,7 +10705,7 @@
           <a:bodyPr wrap="square" lIns="0" tIns="0" rIns="0" bIns="0" rtlCol="0" anchor="ctr"/>
           <a:lstStyle/>
           <a:p>
-            <a:pPr indent="0" marL="0">
+            <a:pPr marL="0" indent="0">
               <a:buNone/>
             </a:pPr>
             <a:r>
@@ -10737,7 +10744,7 @@
           <a:bodyPr wrap="square" lIns="0" tIns="0" rIns="0" bIns="0" rtlCol="0" anchor="ctr"/>
           <a:lstStyle/>
           <a:p>
-            <a:pPr indent="0" marL="0">
+            <a:pPr marL="0" indent="0">
               <a:buNone/>
             </a:pPr>
             <a:r>
@@ -10774,13 +10781,20 @@
           </a:solidFill>
           <a:ln/>
           <a:effectLst>
-            <a:outerShdw sx="100000" sy="100000" kx="0" ky="0" algn="bl" rotWithShape="0" blurRad="50800" dist="25400" dir="8100000">
+            <a:outerShdw blurRad="50800" dist="25400" dir="8100000" algn="bl" rotWithShape="0">
               <a:srgbClr val="000000">
                 <a:alpha val="20000"/>
               </a:srgbClr>
             </a:outerShdw>
           </a:effectLst>
         </p:spPr>
+        <p:txBody>
+          <a:bodyPr/>
+          <a:lstStyle/>
+          <a:p>
+            <a:endParaRPr lang="en-US"/>
+          </a:p>
+        </p:txBody>
       </p:sp>
       <p:sp>
         <p:nvSpPr>
@@ -10803,7 +10817,7 @@
           <a:bodyPr wrap="square" lIns="0" tIns="0" rIns="0" bIns="0" rtlCol="0" anchor="ctr"/>
           <a:lstStyle/>
           <a:p>
-            <a:pPr indent="0" marL="0">
+            <a:pPr marL="0" indent="0">
               <a:buNone/>
             </a:pPr>
             <a:r>
@@ -10842,7 +10856,7 @@
           <a:bodyPr wrap="square" rtlCol="0" anchor="ctr"/>
           <a:lstStyle/>
           <a:p>
-            <a:pPr indent="0" marL="0">
+            <a:pPr marL="0" indent="0">
               <a:buNone/>
             </a:pPr>
             <a:r>
@@ -10859,13 +10873,13 @@
             <a:endParaRPr lang="en-US" sz="1600" dirty="0"/>
           </a:p>
           <a:p>
-            <a:pPr indent="0" marL="0">
+            <a:pPr marL="0" indent="0">
               <a:buNone/>
             </a:pPr>
             <a:endParaRPr lang="en-US" sz="1600" dirty="0"/>
           </a:p>
           <a:p>
-            <a:pPr indent="0" marL="0">
+            <a:pPr marL="0" indent="0">
               <a:buNone/>
             </a:pPr>
             <a:r>
@@ -10899,6 +10913,7 @@
         <a:solidFill>
           <a:srgbClr val="131B2E"/>
         </a:solidFill>
+        <a:effectLst/>
       </p:bgPr>
     </p:bg>
     <p:spTree>
@@ -10934,6 +10949,13 @@
           </a:solidFill>
           <a:ln/>
         </p:spPr>
+        <p:txBody>
+          <a:bodyPr/>
+          <a:lstStyle/>
+          <a:p>
+            <a:endParaRPr lang="en-US"/>
+          </a:p>
+        </p:txBody>
       </p:sp>
       <p:sp>
         <p:nvSpPr>
@@ -10956,7 +10978,7 @@
           <a:bodyPr wrap="square" lIns="0" tIns="0" rIns="0" bIns="0" rtlCol="0" anchor="ctr"/>
           <a:lstStyle/>
           <a:p>
-            <a:pPr indent="0" marL="0">
+            <a:pPr marL="0" indent="0">
               <a:buNone/>
             </a:pPr>
             <a:r>
@@ -10995,7 +11017,7 @@
           <a:bodyPr wrap="square" lIns="0" tIns="0" rIns="0" bIns="0" rtlCol="0" anchor="ctr"/>
           <a:lstStyle/>
           <a:p>
-            <a:pPr indent="0" marL="0">
+            <a:pPr marL="0" indent="0">
               <a:buNone/>
             </a:pPr>
             <a:r>
@@ -11034,7 +11056,7 @@
           <a:bodyPr wrap="square" lIns="0" tIns="0" rIns="0" bIns="0" rtlCol="0" anchor="ctr"/>
           <a:lstStyle/>
           <a:p>
-            <a:pPr indent="0" marL="0">
+            <a:pPr marL="0" indent="0">
               <a:buNone/>
             </a:pPr>
             <a:r>
@@ -11071,6 +11093,13 @@
           </a:solidFill>
           <a:ln/>
         </p:spPr>
+        <p:txBody>
+          <a:bodyPr/>
+          <a:lstStyle/>
+          <a:p>
+            <a:endParaRPr lang="en-US"/>
+          </a:p>
+        </p:txBody>
       </p:sp>
       <p:sp>
         <p:nvSpPr>
@@ -11093,7 +11122,7 @@
           <a:bodyPr wrap="square" lIns="0" tIns="0" rIns="0" bIns="0" rtlCol="0" anchor="ctr"/>
           <a:lstStyle/>
           <a:p>
-            <a:pPr indent="0" marL="0">
+            <a:pPr marL="0" indent="0">
               <a:buNone/>
             </a:pPr>
             <a:r>
@@ -11132,7 +11161,7 @@
           <a:bodyPr wrap="square" lIns="0" tIns="0" rIns="0" bIns="0" rtlCol="0" anchor="ctr"/>
           <a:lstStyle/>
           <a:p>
-            <a:pPr indent="0" marL="0">
+            <a:pPr marL="0" indent="0">
               <a:buNone/>
             </a:pPr>
             <a:r>
@@ -11169,6 +11198,13 @@
           </a:solidFill>
           <a:ln/>
         </p:spPr>
+        <p:txBody>
+          <a:bodyPr/>
+          <a:lstStyle/>
+          <a:p>
+            <a:endParaRPr lang="en-US"/>
+          </a:p>
+        </p:txBody>
       </p:sp>
       <p:sp>
         <p:nvSpPr>
@@ -11191,7 +11227,7 @@
           <a:bodyPr wrap="square" lIns="0" tIns="0" rIns="0" bIns="0" rtlCol="0" anchor="ctr"/>
           <a:lstStyle/>
           <a:p>
-            <a:pPr indent="0" marL="0">
+            <a:pPr marL="0" indent="0">
               <a:buNone/>
             </a:pPr>
             <a:r>
@@ -11230,7 +11266,7 @@
           <a:bodyPr wrap="square" lIns="0" tIns="0" rIns="0" bIns="0" rtlCol="0" anchor="ctr"/>
           <a:lstStyle/>
           <a:p>
-            <a:pPr indent="0" marL="0">
+            <a:pPr marL="0" indent="0">
               <a:buNone/>
             </a:pPr>
             <a:r>
@@ -11267,6 +11303,13 @@
           </a:solidFill>
           <a:ln/>
         </p:spPr>
+        <p:txBody>
+          <a:bodyPr/>
+          <a:lstStyle/>
+          <a:p>
+            <a:endParaRPr lang="en-US"/>
+          </a:p>
+        </p:txBody>
       </p:sp>
       <p:sp>
         <p:nvSpPr>
@@ -11289,7 +11332,7 @@
           <a:bodyPr wrap="square" lIns="0" tIns="0" rIns="0" bIns="0" rtlCol="0" anchor="ctr"/>
           <a:lstStyle/>
           <a:p>
-            <a:pPr indent="0" marL="0">
+            <a:pPr marL="0" indent="0">
               <a:buNone/>
             </a:pPr>
             <a:r>
@@ -11328,7 +11371,7 @@
           <a:bodyPr wrap="square" lIns="0" tIns="0" rIns="0" bIns="0" rtlCol="0" anchor="ctr"/>
           <a:lstStyle/>
           <a:p>
-            <a:pPr indent="0" marL="0">
+            <a:pPr marL="0" indent="0">
               <a:buNone/>
             </a:pPr>
             <a:r>
@@ -11367,7 +11410,7 @@
           <a:bodyPr wrap="square" lIns="0" tIns="0" rIns="0" bIns="0" rtlCol="0" anchor="ctr"/>
           <a:lstStyle/>
           <a:p>
-            <a:pPr indent="0" marL="0">
+            <a:pPr marL="0" indent="0">
               <a:buNone/>
             </a:pPr>
             <a:r>
@@ -11404,6 +11447,13 @@
           </a:solidFill>
           <a:ln/>
         </p:spPr>
+        <p:txBody>
+          <a:bodyPr/>
+          <a:lstStyle/>
+          <a:p>
+            <a:endParaRPr lang="en-US"/>
+          </a:p>
+        </p:txBody>
       </p:sp>
       <p:sp>
         <p:nvSpPr>
@@ -11426,7 +11476,7 @@
           <a:bodyPr wrap="square" lIns="0" tIns="0" rIns="0" bIns="0" rtlCol="0" anchor="ctr"/>
           <a:lstStyle/>
           <a:p>
-            <a:pPr indent="0" marL="0">
+            <a:pPr marL="0" indent="0">
               <a:buNone/>
             </a:pPr>
             <a:r>
@@ -11465,7 +11515,7 @@
           <a:bodyPr wrap="square" lIns="0" tIns="0" rIns="0" bIns="0" rtlCol="0" anchor="ctr"/>
           <a:lstStyle/>
           <a:p>
-            <a:pPr indent="0" marL="0">
+            <a:pPr marL="0" indent="0">
               <a:buNone/>
             </a:pPr>
             <a:r>
@@ -11502,6 +11552,13 @@
           </a:solidFill>
           <a:ln/>
         </p:spPr>
+        <p:txBody>
+          <a:bodyPr/>
+          <a:lstStyle/>
+          <a:p>
+            <a:endParaRPr lang="en-US"/>
+          </a:p>
+        </p:txBody>
       </p:sp>
       <p:sp>
         <p:nvSpPr>
@@ -11524,7 +11581,7 @@
           <a:bodyPr wrap="square" lIns="0" tIns="0" rIns="0" bIns="0" rtlCol="0" anchor="ctr"/>
           <a:lstStyle/>
           <a:p>
-            <a:pPr indent="0" marL="0">
+            <a:pPr marL="0" indent="0">
               <a:buNone/>
             </a:pPr>
             <a:r>
@@ -11563,7 +11620,7 @@
           <a:bodyPr wrap="square" lIns="0" tIns="0" rIns="0" bIns="0" rtlCol="0" anchor="ctr"/>
           <a:lstStyle/>
           <a:p>
-            <a:pPr indent="0" marL="0">
+            <a:pPr marL="0" indent="0">
               <a:buNone/>
             </a:pPr>
             <a:r>
@@ -11600,6 +11657,13 @@
           </a:solidFill>
           <a:ln/>
         </p:spPr>
+        <p:txBody>
+          <a:bodyPr/>
+          <a:lstStyle/>
+          <a:p>
+            <a:endParaRPr lang="en-US"/>
+          </a:p>
+        </p:txBody>
       </p:sp>
       <p:sp>
         <p:nvSpPr>
@@ -11622,7 +11686,7 @@
           <a:bodyPr wrap="square" lIns="0" tIns="0" rIns="0" bIns="0" rtlCol="0" anchor="ctr"/>
           <a:lstStyle/>
           <a:p>
-            <a:pPr indent="0" marL="0">
+            <a:pPr marL="0" indent="0">
               <a:buNone/>
             </a:pPr>
             <a:r>
@@ -11661,7 +11725,7 @@
           <a:bodyPr wrap="square" lIns="0" tIns="0" rIns="0" bIns="0" rtlCol="0" anchor="ctr"/>
           <a:lstStyle/>
           <a:p>
-            <a:pPr indent="0" marL="0">
+            <a:pPr marL="0" indent="0">
               <a:buNone/>
             </a:pPr>
             <a:r>
@@ -11698,6 +11762,13 @@
           </a:solidFill>
           <a:ln/>
         </p:spPr>
+        <p:txBody>
+          <a:bodyPr/>
+          <a:lstStyle/>
+          <a:p>
+            <a:endParaRPr lang="en-US"/>
+          </a:p>
+        </p:txBody>
       </p:sp>
       <p:sp>
         <p:nvSpPr>
@@ -11720,7 +11791,7 @@
           <a:bodyPr wrap="square" lIns="0" tIns="0" rIns="0" bIns="0" rtlCol="0" anchor="ctr"/>
           <a:lstStyle/>
           <a:p>
-            <a:pPr indent="0" marL="0">
+            <a:pPr marL="0" indent="0">
               <a:buNone/>
             </a:pPr>
             <a:r>
@@ -11759,7 +11830,7 @@
           <a:bodyPr wrap="square" lIns="0" tIns="0" rIns="0" bIns="0" rtlCol="0" anchor="ctr"/>
           <a:lstStyle/>
           <a:p>
-            <a:pPr indent="0" marL="0">
+            <a:pPr marL="0" indent="0">
               <a:buNone/>
             </a:pPr>
             <a:r>
@@ -11793,6 +11864,7 @@
         <a:solidFill>
           <a:srgbClr val="131B2E"/>
         </a:solidFill>
+        <a:effectLst/>
       </p:bgPr>
     </p:bg>
     <p:spTree>
@@ -11828,6 +11900,13 @@
           </a:solidFill>
           <a:ln/>
         </p:spPr>
+        <p:txBody>
+          <a:bodyPr/>
+          <a:lstStyle/>
+          <a:p>
+            <a:endParaRPr lang="en-US"/>
+          </a:p>
+        </p:txBody>
       </p:sp>
       <p:sp>
         <p:nvSpPr>
@@ -11850,7 +11929,7 @@
           <a:bodyPr wrap="square" lIns="0" tIns="0" rIns="0" bIns="0" rtlCol="0" anchor="ctr"/>
           <a:lstStyle/>
           <a:p>
-            <a:pPr indent="0" marL="0">
+            <a:pPr marL="0" indent="0">
               <a:buNone/>
             </a:pPr>
             <a:r>
@@ -11889,7 +11968,7 @@
           <a:bodyPr wrap="square" lIns="0" tIns="0" rIns="0" bIns="0" rtlCol="0" anchor="ctr"/>
           <a:lstStyle/>
           <a:p>
-            <a:pPr indent="0" marL="0">
+            <a:pPr marL="0" indent="0">
               <a:buNone/>
             </a:pPr>
             <a:r>
@@ -11928,7 +12007,7 @@
           <a:bodyPr wrap="square" lIns="0" tIns="0" rIns="0" bIns="0" rtlCol="0" anchor="t"/>
           <a:lstStyle/>
           <a:p>
-            <a:pPr indent="0" marL="0">
+            <a:pPr marL="0" indent="0">
               <a:buNone/>
             </a:pPr>
             <a:r>
@@ -11945,7 +12024,7 @@
             <a:endParaRPr lang="en-US" sz="1600" dirty="0"/>
           </a:p>
           <a:p>
-            <a:pPr indent="0" marL="0">
+            <a:pPr marL="0" indent="0">
               <a:buNone/>
             </a:pPr>
             <a:r>
@@ -11962,13 +12041,13 @@
             <a:endParaRPr lang="en-US" sz="1600" dirty="0"/>
           </a:p>
           <a:p>
-            <a:pPr indent="0" marL="0">
+            <a:pPr marL="0" indent="0">
               <a:buNone/>
             </a:pPr>
             <a:endParaRPr lang="en-US" sz="1600" dirty="0"/>
           </a:p>
           <a:p>
-            <a:pPr indent="0" marL="0">
+            <a:pPr marL="0" indent="0">
               <a:buNone/>
             </a:pPr>
             <a:r>
@@ -11985,7 +12064,7 @@
             <a:endParaRPr lang="en-US" sz="1600" dirty="0"/>
           </a:p>
           <a:p>
-            <a:pPr indent="0" marL="0">
+            <a:pPr marL="0" indent="0">
               <a:buNone/>
             </a:pPr>
             <a:r>
@@ -12002,13 +12081,13 @@
             <a:endParaRPr lang="en-US" sz="1600" dirty="0"/>
           </a:p>
           <a:p>
-            <a:pPr indent="0" marL="0">
+            <a:pPr marL="0" indent="0">
               <a:buNone/>
             </a:pPr>
             <a:endParaRPr lang="en-US" sz="1600" dirty="0"/>
           </a:p>
           <a:p>
-            <a:pPr indent="0" marL="0">
+            <a:pPr marL="0" indent="0">
               <a:buNone/>
             </a:pPr>
             <a:r>
@@ -12025,7 +12104,7 @@
             <a:endParaRPr lang="en-US" sz="1600" dirty="0"/>
           </a:p>
           <a:p>
-            <a:pPr indent="0" marL="0">
+            <a:pPr marL="0" indent="0">
               <a:buNone/>
             </a:pPr>
             <a:r>
@@ -12062,13 +12141,20 @@
           </a:solidFill>
           <a:ln/>
           <a:effectLst>
-            <a:outerShdw sx="100000" sy="100000" kx="0" ky="0" algn="bl" rotWithShape="0" blurRad="50800" dist="25400" dir="8100000">
+            <a:outerShdw blurRad="50800" dist="25400" dir="8100000" algn="bl" rotWithShape="0">
               <a:srgbClr val="000000">
                 <a:alpha val="20000"/>
               </a:srgbClr>
             </a:outerShdw>
           </a:effectLst>
         </p:spPr>
+        <p:txBody>
+          <a:bodyPr/>
+          <a:lstStyle/>
+          <a:p>
+            <a:endParaRPr lang="en-US"/>
+          </a:p>
+        </p:txBody>
       </p:sp>
       <p:sp>
         <p:nvSpPr>
@@ -12091,7 +12177,7 @@
           <a:bodyPr wrap="square" rtlCol="0" anchor="ctr"/>
           <a:lstStyle/>
           <a:p>
-            <a:pPr algn="ctr" indent="0" marL="0">
+            <a:pPr marL="0" indent="0" algn="ctr">
               <a:buNone/>
             </a:pPr>
             <a:r>
@@ -12108,7 +12194,7 @@
             <a:endParaRPr lang="en-US" sz="1600" dirty="0"/>
           </a:p>
           <a:p>
-            <a:pPr algn="ctr" indent="0" marL="0">
+            <a:pPr marL="0" indent="0" algn="ctr">
               <a:buNone/>
             </a:pPr>
             <a:r>
@@ -12145,6 +12231,13 @@
           </a:solidFill>
           <a:ln/>
         </p:spPr>
+        <p:txBody>
+          <a:bodyPr/>
+          <a:lstStyle/>
+          <a:p>
+            <a:endParaRPr lang="en-US"/>
+          </a:p>
+        </p:txBody>
       </p:sp>
       <p:sp>
         <p:nvSpPr>
@@ -12167,7 +12260,7 @@
           <a:bodyPr wrap="square" rtlCol="0" anchor="ctr"/>
           <a:lstStyle/>
           <a:p>
-            <a:pPr algn="ctr" indent="0" marL="0">
+            <a:pPr marL="0" indent="0" algn="ctr">
               <a:buNone/>
             </a:pPr>
             <a:r>
@@ -12201,6 +12294,7 @@
         <a:solidFill>
           <a:srgbClr val="131B2E"/>
         </a:solidFill>
+        <a:effectLst/>
       </p:bgPr>
     </p:bg>
     <p:spTree>
@@ -12236,6 +12330,13 @@
           </a:solidFill>
           <a:ln/>
         </p:spPr>
+        <p:txBody>
+          <a:bodyPr/>
+          <a:lstStyle/>
+          <a:p>
+            <a:endParaRPr lang="en-US"/>
+          </a:p>
+        </p:txBody>
       </p:sp>
       <p:sp>
         <p:nvSpPr>
@@ -12258,7 +12359,7 @@
           <a:bodyPr wrap="square" lIns="0" tIns="0" rIns="0" bIns="0" rtlCol="0" anchor="ctr"/>
           <a:lstStyle/>
           <a:p>
-            <a:pPr indent="0" marL="0">
+            <a:pPr marL="0" indent="0">
               <a:buNone/>
             </a:pPr>
             <a:r>
@@ -12297,7 +12398,7 @@
           <a:bodyPr wrap="square" lIns="0" tIns="0" rIns="0" bIns="0" rtlCol="0" anchor="ctr"/>
           <a:lstStyle/>
           <a:p>
-            <a:pPr indent="0" marL="0">
+            <a:pPr marL="0" indent="0">
               <a:buNone/>
             </a:pPr>
             <a:r>
@@ -12334,6 +12435,13 @@
           </a:solidFill>
           <a:ln/>
         </p:spPr>
+        <p:txBody>
+          <a:bodyPr/>
+          <a:lstStyle/>
+          <a:p>
+            <a:endParaRPr lang="en-US"/>
+          </a:p>
+        </p:txBody>
       </p:sp>
       <p:sp>
         <p:nvSpPr>
@@ -12356,7 +12464,7 @@
           <a:bodyPr wrap="square" lIns="0" tIns="0" rIns="0" bIns="0" rtlCol="0" anchor="ctr"/>
           <a:lstStyle/>
           <a:p>
-            <a:pPr indent="0" marL="0">
+            <a:pPr marL="0" indent="0">
               <a:buNone/>
             </a:pPr>
             <a:r>
@@ -12395,7 +12503,7 @@
           <a:bodyPr wrap="square" lIns="0" tIns="0" rIns="0" bIns="0" rtlCol="0" anchor="ctr"/>
           <a:lstStyle/>
           <a:p>
-            <a:pPr indent="0" marL="0">
+            <a:pPr marL="0" indent="0">
               <a:buNone/>
             </a:pPr>
             <a:r>
@@ -12432,6 +12540,13 @@
           </a:solidFill>
           <a:ln/>
         </p:spPr>
+        <p:txBody>
+          <a:bodyPr/>
+          <a:lstStyle/>
+          <a:p>
+            <a:endParaRPr lang="en-US"/>
+          </a:p>
+        </p:txBody>
       </p:sp>
       <p:sp>
         <p:nvSpPr>
@@ -12454,7 +12569,7 @@
           <a:bodyPr wrap="square" lIns="0" tIns="0" rIns="0" bIns="0" rtlCol="0" anchor="ctr"/>
           <a:lstStyle/>
           <a:p>
-            <a:pPr indent="0" marL="0">
+            <a:pPr marL="0" indent="0">
               <a:buNone/>
             </a:pPr>
             <a:r>
@@ -12493,7 +12608,7 @@
           <a:bodyPr wrap="square" lIns="0" tIns="0" rIns="0" bIns="0" rtlCol="0" anchor="ctr"/>
           <a:lstStyle/>
           <a:p>
-            <a:pPr indent="0" marL="0">
+            <a:pPr marL="0" indent="0">
               <a:buNone/>
             </a:pPr>
             <a:r>
@@ -12530,6 +12645,13 @@
           </a:solidFill>
           <a:ln/>
         </p:spPr>
+        <p:txBody>
+          <a:bodyPr/>
+          <a:lstStyle/>
+          <a:p>
+            <a:endParaRPr lang="en-US"/>
+          </a:p>
+        </p:txBody>
       </p:sp>
       <p:sp>
         <p:nvSpPr>
@@ -12552,7 +12674,7 @@
           <a:bodyPr wrap="square" lIns="0" tIns="0" rIns="0" bIns="0" rtlCol="0" anchor="ctr"/>
           <a:lstStyle/>
           <a:p>
-            <a:pPr indent="0" marL="0">
+            <a:pPr marL="0" indent="0">
               <a:buNone/>
             </a:pPr>
             <a:r>
@@ -12591,7 +12713,7 @@
           <a:bodyPr wrap="square" lIns="0" tIns="0" rIns="0" bIns="0" rtlCol="0" anchor="ctr"/>
           <a:lstStyle/>
           <a:p>
-            <a:pPr indent="0" marL="0">
+            <a:pPr marL="0" indent="0">
               <a:buNone/>
             </a:pPr>
             <a:r>
@@ -12628,6 +12750,13 @@
           </a:solidFill>
           <a:ln/>
         </p:spPr>
+        <p:txBody>
+          <a:bodyPr/>
+          <a:lstStyle/>
+          <a:p>
+            <a:endParaRPr lang="en-US"/>
+          </a:p>
+        </p:txBody>
       </p:sp>
       <p:sp>
         <p:nvSpPr>
@@ -12650,7 +12779,7 @@
           <a:bodyPr wrap="square" lIns="0" tIns="0" rIns="0" bIns="0" rtlCol="0" anchor="ctr"/>
           <a:lstStyle/>
           <a:p>
-            <a:pPr indent="0" marL="0">
+            <a:pPr marL="0" indent="0">
               <a:buNone/>
             </a:pPr>
             <a:r>
@@ -12689,7 +12818,7 @@
           <a:bodyPr wrap="square" lIns="0" tIns="0" rIns="0" bIns="0" rtlCol="0" anchor="ctr"/>
           <a:lstStyle/>
           <a:p>
-            <a:pPr indent="0" marL="0">
+            <a:pPr marL="0" indent="0">
               <a:buNone/>
             </a:pPr>
             <a:r>
@@ -12726,6 +12855,13 @@
           </a:solidFill>
           <a:ln/>
         </p:spPr>
+        <p:txBody>
+          <a:bodyPr/>
+          <a:lstStyle/>
+          <a:p>
+            <a:endParaRPr lang="en-US"/>
+          </a:p>
+        </p:txBody>
       </p:sp>
       <p:sp>
         <p:nvSpPr>
@@ -12748,7 +12884,7 @@
           <a:bodyPr wrap="square" lIns="0" tIns="0" rIns="0" bIns="0" rtlCol="0" anchor="ctr"/>
           <a:lstStyle/>
           <a:p>
-            <a:pPr indent="0" marL="0">
+            <a:pPr marL="0" indent="0">
               <a:buNone/>
             </a:pPr>
             <a:r>
@@ -12787,7 +12923,7 @@
           <a:bodyPr wrap="square" lIns="0" tIns="0" rIns="0" bIns="0" rtlCol="0" anchor="ctr"/>
           <a:lstStyle/>
           <a:p>
-            <a:pPr indent="0" marL="0">
+            <a:pPr marL="0" indent="0">
               <a:buNone/>
             </a:pPr>
             <a:r>
@@ -12824,6 +12960,13 @@
           </a:solidFill>
           <a:ln/>
         </p:spPr>
+        <p:txBody>
+          <a:bodyPr/>
+          <a:lstStyle/>
+          <a:p>
+            <a:endParaRPr lang="en-US"/>
+          </a:p>
+        </p:txBody>
       </p:sp>
       <p:sp>
         <p:nvSpPr>
@@ -12846,7 +12989,7 @@
           <a:bodyPr wrap="square" rtlCol="0" anchor="ctr"/>
           <a:lstStyle/>
           <a:p>
-            <a:pPr algn="ctr" indent="0" marL="0">
+            <a:pPr marL="0" indent="0" algn="ctr">
               <a:buNone/>
             </a:pPr>
             <a:r>
@@ -12880,6 +13023,7 @@
         <a:solidFill>
           <a:srgbClr val="131B2E"/>
         </a:solidFill>
+        <a:effectLst/>
       </p:bgPr>
     </p:bg>
     <p:spTree>
@@ -12915,6 +13059,13 @@
           </a:solidFill>
           <a:ln/>
         </p:spPr>
+        <p:txBody>
+          <a:bodyPr/>
+          <a:lstStyle/>
+          <a:p>
+            <a:endParaRPr lang="en-US"/>
+          </a:p>
+        </p:txBody>
       </p:sp>
       <p:sp>
         <p:nvSpPr>
@@ -12935,6 +13086,13 @@
           </a:solidFill>
           <a:ln/>
         </p:spPr>
+        <p:txBody>
+          <a:bodyPr/>
+          <a:lstStyle/>
+          <a:p>
+            <a:endParaRPr lang="en-US"/>
+          </a:p>
+        </p:txBody>
       </p:sp>
       <p:sp>
         <p:nvSpPr>
@@ -12957,7 +13115,7 @@
           <a:bodyPr wrap="square" rtlCol="0" anchor="ctr"/>
           <a:lstStyle/>
           <a:p>
-            <a:pPr algn="ctr" indent="0" marL="0">
+            <a:pPr marL="0" indent="0" algn="ctr">
               <a:buNone/>
             </a:pPr>
             <a:r>
@@ -12996,7 +13154,7 @@
           <a:bodyPr wrap="square" rtlCol="0" anchor="ctr"/>
           <a:lstStyle/>
           <a:p>
-            <a:pPr algn="ctr" indent="0" marL="0">
+            <a:pPr marL="0" indent="0" algn="ctr">
               <a:buNone/>
             </a:pPr>
             <a:r>
@@ -13035,7 +13193,7 @@
           <a:bodyPr wrap="square" rtlCol="0" anchor="ctr"/>
           <a:lstStyle/>
           <a:p>
-            <a:pPr algn="ctr" indent="0" marL="0">
+            <a:pPr marL="0" indent="0" algn="ctr">
               <a:buNone/>
             </a:pPr>
             <a:r>
@@ -13052,7 +13210,7 @@
             <a:endParaRPr lang="en-US" sz="1500" dirty="0"/>
           </a:p>
           <a:p>
-            <a:pPr algn="ctr" indent="0" marL="0">
+            <a:pPr marL="0" indent="0" algn="ctr">
               <a:buNone/>
             </a:pPr>
             <a:r>
@@ -13086,6 +13244,7 @@
         <a:solidFill>
           <a:srgbClr val="131B2E"/>
         </a:solidFill>
+        <a:effectLst/>
       </p:bgPr>
     </p:bg>
     <p:spTree>
@@ -13121,6 +13280,13 @@
           </a:solidFill>
           <a:ln/>
         </p:spPr>
+        <p:txBody>
+          <a:bodyPr/>
+          <a:lstStyle/>
+          <a:p>
+            <a:endParaRPr lang="en-US"/>
+          </a:p>
+        </p:txBody>
       </p:sp>
       <p:sp>
         <p:nvSpPr>
@@ -13143,7 +13309,7 @@
           <a:bodyPr wrap="square" lIns="0" tIns="0" rIns="0" bIns="0" rtlCol="0" anchor="ctr"/>
           <a:lstStyle/>
           <a:p>
-            <a:pPr indent="0" marL="0">
+            <a:pPr marL="0" indent="0">
               <a:buNone/>
             </a:pPr>
             <a:r>
@@ -13182,7 +13348,7 @@
           <a:bodyPr wrap="square" lIns="0" tIns="0" rIns="0" bIns="0" rtlCol="0" anchor="ctr"/>
           <a:lstStyle/>
           <a:p>
-            <a:pPr indent="0" marL="0">
+            <a:pPr marL="0" indent="0">
               <a:buNone/>
             </a:pPr>
             <a:r>
@@ -13221,7 +13387,7 @@
           <a:bodyPr wrap="square" lIns="0" tIns="0" rIns="0" bIns="0" rtlCol="0" anchor="ctr"/>
           <a:lstStyle/>
           <a:p>
-            <a:pPr indent="0" marL="0">
+            <a:pPr marL="0" indent="0">
               <a:buNone/>
             </a:pPr>
             <a:r>
@@ -13235,9 +13401,6 @@
               </a:rPr>
               <a:t>Dice + Cross-Entropy loss </a:t>
             </a:r>
-            <a:pPr indent="0" marL="0">
-              <a:buNone/>
-            </a:pPr>
             <a:r>
               <a:rPr lang="en-US" sz="1700" dirty="0">
                 <a:solidFill>
@@ -13252,13 +13415,13 @@
             <a:endParaRPr lang="en-US" sz="1700" dirty="0"/>
           </a:p>
           <a:p>
-            <a:pPr indent="0" marL="0">
+            <a:pPr marL="0" indent="0">
               <a:buNone/>
             </a:pPr>
             <a:endParaRPr lang="en-US" sz="1700" dirty="0"/>
           </a:p>
           <a:p>
-            <a:pPr indent="0" marL="0">
+            <a:pPr marL="0" indent="0">
               <a:buNone/>
             </a:pPr>
             <a:r>
@@ -13272,9 +13435,6 @@
               </a:rPr>
               <a:t>A segmentation can have high Dice (0.87) </a:t>
             </a:r>
-            <a:pPr indent="0" marL="0">
-              <a:buNone/>
-            </a:pPr>
             <a:r>
               <a:rPr lang="en-US" sz="1700" dirty="0">
                 <a:solidFill>
@@ -13289,13 +13449,13 @@
             <a:endParaRPr lang="en-US" sz="1700" dirty="0"/>
           </a:p>
           <a:p>
-            <a:pPr indent="0" marL="0">
+            <a:pPr marL="0" indent="0">
               <a:buNone/>
             </a:pPr>
             <a:endParaRPr lang="en-US" sz="1700" dirty="0"/>
           </a:p>
           <a:p>
-            <a:pPr indent="0" marL="0">
+            <a:pPr marL="0" indent="0">
               <a:buNone/>
             </a:pPr>
             <a:r>
@@ -13309,9 +13469,6 @@
               </a:rPr>
               <a:t>Aggregate metrics </a:t>
             </a:r>
-            <a:pPr indent="0" marL="0">
-              <a:buNone/>
-            </a:pPr>
             <a:r>
               <a:rPr lang="en-US" sz="1700" dirty="0">
                 <a:solidFill>
@@ -13346,13 +13503,20 @@
           </a:solidFill>
           <a:ln/>
           <a:effectLst>
-            <a:outerShdw sx="100000" sy="100000" kx="0" ky="0" algn="bl" rotWithShape="0" blurRad="50800" dist="25400" dir="8100000">
+            <a:outerShdw blurRad="50800" dist="25400" dir="8100000" algn="bl" rotWithShape="0">
               <a:srgbClr val="000000">
                 <a:alpha val="20000"/>
               </a:srgbClr>
             </a:outerShdw>
           </a:effectLst>
         </p:spPr>
+        <p:txBody>
+          <a:bodyPr/>
+          <a:lstStyle/>
+          <a:p>
+            <a:endParaRPr lang="en-US"/>
+          </a:p>
+        </p:txBody>
       </p:sp>
       <p:sp>
         <p:nvSpPr>
@@ -13375,7 +13539,7 @@
           <a:bodyPr wrap="square" rtlCol="0" anchor="ctr"/>
           <a:lstStyle/>
           <a:p>
-            <a:pPr indent="0" marL="0">
+            <a:pPr marL="0" indent="0">
               <a:buNone/>
             </a:pPr>
             <a:r>
@@ -13414,7 +13578,7 @@
           <a:bodyPr wrap="square" rtlCol="0" anchor="ctr"/>
           <a:lstStyle/>
           <a:p>
-            <a:pPr indent="0" marL="0">
+            <a:pPr marL="0" indent="0">
               <a:buNone/>
             </a:pPr>
             <a:r>
@@ -13428,9 +13592,6 @@
               </a:rPr>
               <a:t>Global DSC: 0.87   </a:t>
             </a:r>
-            <a:pPr indent="0" marL="0">
-              <a:buNone/>
-            </a:pPr>
             <a:r>
               <a:rPr lang="en-US" sz="1800" b="1" dirty="0">
                 <a:solidFill>
@@ -13440,21 +13601,7 @@
                 <a:ea typeface="Calibri" pitchFamily="34" charset="-122"/>
                 <a:cs typeface="Calibri" pitchFamily="34" charset="-120"/>
               </a:rPr>
-              <a:t>R-Pcom DSC: 0.42   </a:t>
-            </a:r>
-            <a:pPr indent="0" marL="0">
-              <a:buNone/>
-            </a:pPr>
-            <a:r>
-              <a:rPr lang="en-US" sz="1800" b="1" dirty="0">
-                <a:solidFill>
-                  <a:srgbClr val="EF4444"/>
-                </a:solidFill>
-                <a:latin typeface="Calibri" pitchFamily="34" charset="0"/>
-                <a:ea typeface="Calibri" pitchFamily="34" charset="-122"/>
-                <a:cs typeface="Calibri" pitchFamily="34" charset="-120"/>
-              </a:rPr>
-              <a:t>L-ACA DSC: 0.46</a:t>
+              <a:t>R-Pcom DSC: 0.42   L-ACA DSC: 0.46</a:t>
             </a:r>
             <a:endParaRPr lang="en-US" sz="1800" dirty="0"/>
           </a:p>
@@ -13476,6 +13623,7 @@
         <a:solidFill>
           <a:srgbClr val="131B2E"/>
         </a:solidFill>
+        <a:effectLst/>
       </p:bgPr>
     </p:bg>
     <p:spTree>
@@ -13511,6 +13659,13 @@
           </a:solidFill>
           <a:ln/>
         </p:spPr>
+        <p:txBody>
+          <a:bodyPr/>
+          <a:lstStyle/>
+          <a:p>
+            <a:endParaRPr lang="en-US"/>
+          </a:p>
+        </p:txBody>
       </p:sp>
       <p:sp>
         <p:nvSpPr>
@@ -13533,7 +13688,7 @@
           <a:bodyPr wrap="square" lIns="0" tIns="0" rIns="0" bIns="0" rtlCol="0" anchor="ctr"/>
           <a:lstStyle/>
           <a:p>
-            <a:pPr indent="0" marL="0">
+            <a:pPr marL="0" indent="0">
               <a:buNone/>
             </a:pPr>
             <a:r>
@@ -13572,7 +13727,7 @@
           <a:bodyPr wrap="square" lIns="0" tIns="0" rIns="0" bIns="0" rtlCol="0" anchor="ctr"/>
           <a:lstStyle/>
           <a:p>
-            <a:pPr indent="0" marL="0">
+            <a:pPr marL="0" indent="0">
               <a:buNone/>
             </a:pPr>
             <a:r>
@@ -13609,13 +13764,20 @@
           </a:solidFill>
           <a:ln/>
           <a:effectLst>
-            <a:outerShdw sx="100000" sy="100000" kx="0" ky="0" algn="bl" rotWithShape="0" blurRad="50800" dist="25400" dir="8100000">
+            <a:outerShdw blurRad="50800" dist="25400" dir="8100000" algn="bl" rotWithShape="0">
               <a:srgbClr val="000000">
                 <a:alpha val="20000"/>
               </a:srgbClr>
             </a:outerShdw>
           </a:effectLst>
         </p:spPr>
+        <p:txBody>
+          <a:bodyPr/>
+          <a:lstStyle/>
+          <a:p>
+            <a:endParaRPr lang="en-US"/>
+          </a:p>
+        </p:txBody>
       </p:sp>
       <p:sp>
         <p:nvSpPr>
@@ -13638,7 +13800,7 @@
           <a:bodyPr wrap="square" lIns="0" tIns="0" rIns="0" bIns="0" rtlCol="0" anchor="ctr"/>
           <a:lstStyle/>
           <a:p>
-            <a:pPr indent="0" marL="0">
+            <a:pPr marL="0" indent="0">
               <a:buNone/>
             </a:pPr>
             <a:r>
@@ -13677,7 +13839,7 @@
           <a:bodyPr wrap="square" lIns="0" tIns="0" rIns="0" bIns="0" rtlCol="0" anchor="ctr"/>
           <a:lstStyle/>
           <a:p>
-            <a:pPr indent="0" marL="0">
+            <a:pPr marL="0" indent="0">
               <a:buNone/>
             </a:pPr>
             <a:r>
@@ -13694,7 +13856,7 @@
             <a:endParaRPr lang="en-US" sz="1500" dirty="0"/>
           </a:p>
           <a:p>
-            <a:pPr indent="0" marL="0">
+            <a:pPr marL="0" indent="0">
               <a:buNone/>
             </a:pPr>
             <a:r>
@@ -13711,13 +13873,13 @@
             <a:endParaRPr lang="en-US" sz="1500" dirty="0"/>
           </a:p>
           <a:p>
-            <a:pPr indent="0" marL="0">
+            <a:pPr marL="0" indent="0">
               <a:buNone/>
             </a:pPr>
             <a:endParaRPr lang="en-US" sz="1500" dirty="0"/>
           </a:p>
           <a:p>
-            <a:pPr indent="0" marL="0">
+            <a:pPr marL="0" indent="0">
               <a:buNone/>
             </a:pPr>
             <a:r>
@@ -13734,7 +13896,7 @@
             <a:endParaRPr lang="en-US" sz="1500" dirty="0"/>
           </a:p>
           <a:p>
-            <a:pPr indent="0" marL="0">
+            <a:pPr marL="0" indent="0">
               <a:buNone/>
             </a:pPr>
             <a:r>
@@ -13751,13 +13913,13 @@
             <a:endParaRPr lang="en-US" sz="1500" dirty="0"/>
           </a:p>
           <a:p>
-            <a:pPr indent="0" marL="0">
+            <a:pPr marL="0" indent="0">
               <a:buNone/>
             </a:pPr>
             <a:endParaRPr lang="en-US" sz="1500" dirty="0"/>
           </a:p>
           <a:p>
-            <a:pPr indent="0" marL="0">
+            <a:pPr marL="0" indent="0">
               <a:buNone/>
             </a:pPr>
             <a:r>
@@ -13774,7 +13936,7 @@
             <a:endParaRPr lang="en-US" sz="1500" dirty="0"/>
           </a:p>
           <a:p>
-            <a:pPr indent="0" marL="0">
+            <a:pPr marL="0" indent="0">
               <a:buNone/>
             </a:pPr>
             <a:r>
@@ -13811,13 +13973,20 @@
           </a:solidFill>
           <a:ln/>
           <a:effectLst>
-            <a:outerShdw sx="100000" sy="100000" kx="0" ky="0" algn="bl" rotWithShape="0" blurRad="50800" dist="25400" dir="8100000">
+            <a:outerShdw blurRad="50800" dist="25400" dir="8100000" algn="bl" rotWithShape="0">
               <a:srgbClr val="000000">
                 <a:alpha val="20000"/>
               </a:srgbClr>
             </a:outerShdw>
           </a:effectLst>
         </p:spPr>
+        <p:txBody>
+          <a:bodyPr/>
+          <a:lstStyle/>
+          <a:p>
+            <a:endParaRPr lang="en-US"/>
+          </a:p>
+        </p:txBody>
       </p:sp>
       <p:sp>
         <p:nvSpPr>
@@ -13840,7 +14009,7 @@
           <a:bodyPr wrap="square" lIns="0" tIns="0" rIns="0" bIns="0" rtlCol="0" anchor="ctr"/>
           <a:lstStyle/>
           <a:p>
-            <a:pPr indent="0" marL="0">
+            <a:pPr marL="0" indent="0">
               <a:buNone/>
             </a:pPr>
             <a:r>
@@ -13877,6 +14046,13 @@
           </a:solidFill>
           <a:ln/>
         </p:spPr>
+        <p:txBody>
+          <a:bodyPr/>
+          <a:lstStyle/>
+          <a:p>
+            <a:endParaRPr lang="en-US"/>
+          </a:p>
+        </p:txBody>
       </p:sp>
       <p:sp>
         <p:nvSpPr>
@@ -13899,7 +14075,7 @@
           <a:bodyPr wrap="square" lIns="0" tIns="0" rIns="0" bIns="0" rtlCol="0" anchor="ctr"/>
           <a:lstStyle/>
           <a:p>
-            <a:pPr indent="0" marL="0">
+            <a:pPr marL="0" indent="0">
               <a:buNone/>
             </a:pPr>
             <a:r>
@@ -13938,7 +14114,7 @@
           <a:bodyPr wrap="square" lIns="0" tIns="0" rIns="0" bIns="0" rtlCol="0" anchor="ctr"/>
           <a:lstStyle/>
           <a:p>
-            <a:pPr indent="0" marL="0">
+            <a:pPr marL="0" indent="0">
               <a:buNone/>
             </a:pPr>
             <a:r>
@@ -13975,6 +14151,13 @@
           </a:solidFill>
           <a:ln/>
         </p:spPr>
+        <p:txBody>
+          <a:bodyPr/>
+          <a:lstStyle/>
+          <a:p>
+            <a:endParaRPr lang="en-US"/>
+          </a:p>
+        </p:txBody>
       </p:sp>
       <p:sp>
         <p:nvSpPr>
@@ -13997,7 +14180,7 @@
           <a:bodyPr wrap="square" lIns="0" tIns="0" rIns="0" bIns="0" rtlCol="0" anchor="ctr"/>
           <a:lstStyle/>
           <a:p>
-            <a:pPr indent="0" marL="0">
+            <a:pPr marL="0" indent="0">
               <a:buNone/>
             </a:pPr>
             <a:r>
@@ -14036,7 +14219,7 @@
           <a:bodyPr wrap="square" lIns="0" tIns="0" rIns="0" bIns="0" rtlCol="0" anchor="ctr"/>
           <a:lstStyle/>
           <a:p>
-            <a:pPr indent="0" marL="0">
+            <a:pPr marL="0" indent="0">
               <a:buNone/>
             </a:pPr>
             <a:r>
@@ -14073,6 +14256,13 @@
           </a:solidFill>
           <a:ln/>
         </p:spPr>
+        <p:txBody>
+          <a:bodyPr/>
+          <a:lstStyle/>
+          <a:p>
+            <a:endParaRPr lang="en-US"/>
+          </a:p>
+        </p:txBody>
       </p:sp>
       <p:sp>
         <p:nvSpPr>
@@ -14095,7 +14285,7 @@
           <a:bodyPr wrap="square" lIns="0" tIns="0" rIns="0" bIns="0" rtlCol="0" anchor="ctr"/>
           <a:lstStyle/>
           <a:p>
-            <a:pPr indent="0" marL="0">
+            <a:pPr marL="0" indent="0">
               <a:buNone/>
             </a:pPr>
             <a:r>
@@ -14134,7 +14324,7 @@
           <a:bodyPr wrap="square" lIns="0" tIns="0" rIns="0" bIns="0" rtlCol="0" anchor="ctr"/>
           <a:lstStyle/>
           <a:p>
-            <a:pPr indent="0" marL="0">
+            <a:pPr marL="0" indent="0">
               <a:buNone/>
             </a:pPr>
             <a:r>
@@ -14171,6 +14361,13 @@
           </a:solidFill>
           <a:ln/>
         </p:spPr>
+        <p:txBody>
+          <a:bodyPr/>
+          <a:lstStyle/>
+          <a:p>
+            <a:endParaRPr lang="en-US"/>
+          </a:p>
+        </p:txBody>
       </p:sp>
       <p:sp>
         <p:nvSpPr>
@@ -14193,7 +14390,7 @@
           <a:bodyPr wrap="square" lIns="0" tIns="0" rIns="0" bIns="0" rtlCol="0" anchor="ctr"/>
           <a:lstStyle/>
           <a:p>
-            <a:pPr indent="0" marL="0">
+            <a:pPr marL="0" indent="0">
               <a:buNone/>
             </a:pPr>
             <a:r>
@@ -14232,7 +14429,7 @@
           <a:bodyPr wrap="square" lIns="0" tIns="0" rIns="0" bIns="0" rtlCol="0" anchor="ctr"/>
           <a:lstStyle/>
           <a:p>
-            <a:pPr indent="0" marL="0">
+            <a:pPr marL="0" indent="0">
               <a:buNone/>
             </a:pPr>
             <a:r>
@@ -14266,6 +14463,7 @@
         <a:solidFill>
           <a:srgbClr val="131B2E"/>
         </a:solidFill>
+        <a:effectLst/>
       </p:bgPr>
     </p:bg>
     <p:spTree>
@@ -14301,6 +14499,13 @@
           </a:solidFill>
           <a:ln/>
         </p:spPr>
+        <p:txBody>
+          <a:bodyPr/>
+          <a:lstStyle/>
+          <a:p>
+            <a:endParaRPr lang="en-US"/>
+          </a:p>
+        </p:txBody>
       </p:sp>
       <p:sp>
         <p:nvSpPr>
@@ -14323,7 +14528,7 @@
           <a:bodyPr wrap="square" lIns="0" tIns="0" rIns="0" bIns="0" rtlCol="0" anchor="ctr"/>
           <a:lstStyle/>
           <a:p>
-            <a:pPr indent="0" marL="0">
+            <a:pPr marL="0" indent="0">
               <a:buNone/>
             </a:pPr>
             <a:r>
@@ -14362,7 +14567,7 @@
           <a:bodyPr wrap="square" lIns="0" tIns="0" rIns="0" bIns="0" rtlCol="0" anchor="ctr"/>
           <a:lstStyle/>
           <a:p>
-            <a:pPr indent="0" marL="0">
+            <a:pPr marL="0" indent="0">
               <a:buNone/>
             </a:pPr>
             <a:r>
@@ -14399,13 +14604,20 @@
           </a:solidFill>
           <a:ln/>
           <a:effectLst>
-            <a:outerShdw sx="100000" sy="100000" kx="0" ky="0" algn="bl" rotWithShape="0" blurRad="50800" dist="25400" dir="8100000">
+            <a:outerShdw blurRad="50800" dist="25400" dir="8100000" algn="bl" rotWithShape="0">
               <a:srgbClr val="000000">
                 <a:alpha val="20000"/>
               </a:srgbClr>
             </a:outerShdw>
           </a:effectLst>
         </p:spPr>
+        <p:txBody>
+          <a:bodyPr/>
+          <a:lstStyle/>
+          <a:p>
+            <a:endParaRPr lang="en-US"/>
+          </a:p>
+        </p:txBody>
       </p:sp>
       <p:sp>
         <p:nvSpPr>
@@ -14428,7 +14640,7 @@
           <a:bodyPr wrap="square" lIns="0" tIns="0" rIns="0" bIns="0" rtlCol="0" anchor="ctr"/>
           <a:lstStyle/>
           <a:p>
-            <a:pPr indent="0" marL="0">
+            <a:pPr marL="0" indent="0">
               <a:buNone/>
             </a:pPr>
             <a:r>
@@ -14467,7 +14679,7 @@
           <a:bodyPr wrap="square" lIns="0" tIns="0" rIns="0" bIns="0" rtlCol="0" anchor="ctr"/>
           <a:lstStyle/>
           <a:p>
-            <a:pPr indent="0" marL="0">
+            <a:pPr marL="0" indent="0">
               <a:buNone/>
             </a:pPr>
             <a:r>
@@ -14506,7 +14718,7 @@
           <a:bodyPr wrap="square" lIns="0" tIns="0" rIns="0" bIns="0" rtlCol="0" anchor="ctr"/>
           <a:lstStyle/>
           <a:p>
-            <a:pPr indent="0" marL="0">
+            <a:pPr marL="0" indent="0">
               <a:buNone/>
             </a:pPr>
             <a:r>
@@ -14545,7 +14757,7 @@
           <a:bodyPr wrap="square" lIns="0" tIns="0" rIns="0" bIns="0" rtlCol="0" anchor="ctr"/>
           <a:lstStyle/>
           <a:p>
-            <a:pPr indent="0" marL="0">
+            <a:pPr marL="0" indent="0">
               <a:buNone/>
             </a:pPr>
             <a:r>
@@ -14584,7 +14796,7 @@
           <a:bodyPr wrap="square" lIns="0" tIns="0" rIns="0" bIns="0" rtlCol="0" anchor="ctr"/>
           <a:lstStyle/>
           <a:p>
-            <a:pPr indent="0" marL="0">
+            <a:pPr marL="0" indent="0">
               <a:buNone/>
             </a:pPr>
             <a:r>
@@ -14623,7 +14835,7 @@
           <a:bodyPr wrap="square" lIns="0" tIns="0" rIns="0" bIns="0" rtlCol="0" anchor="ctr"/>
           <a:lstStyle/>
           <a:p>
-            <a:pPr indent="0" marL="0">
+            <a:pPr marL="0" indent="0">
               <a:buNone/>
             </a:pPr>
             <a:r>
@@ -14662,7 +14874,7 @@
           <a:bodyPr wrap="square" lIns="0" tIns="0" rIns="0" bIns="0" rtlCol="0" anchor="ctr"/>
           <a:lstStyle/>
           <a:p>
-            <a:pPr indent="0" marL="0">
+            <a:pPr marL="0" indent="0">
               <a:buNone/>
             </a:pPr>
             <a:r>
@@ -14699,13 +14911,20 @@
           </a:solidFill>
           <a:ln/>
           <a:effectLst>
-            <a:outerShdw sx="100000" sy="100000" kx="0" ky="0" algn="bl" rotWithShape="0" blurRad="50800" dist="25400" dir="8100000">
+            <a:outerShdw blurRad="50800" dist="25400" dir="8100000" algn="bl" rotWithShape="0">
               <a:srgbClr val="000000">
                 <a:alpha val="20000"/>
               </a:srgbClr>
             </a:outerShdw>
           </a:effectLst>
         </p:spPr>
+        <p:txBody>
+          <a:bodyPr/>
+          <a:lstStyle/>
+          <a:p>
+            <a:endParaRPr lang="en-US"/>
+          </a:p>
+        </p:txBody>
       </p:sp>
       <p:sp>
         <p:nvSpPr>
@@ -14728,7 +14947,7 @@
           <a:bodyPr wrap="square" lIns="0" tIns="0" rIns="0" bIns="0" rtlCol="0" anchor="ctr"/>
           <a:lstStyle/>
           <a:p>
-            <a:pPr indent="0" marL="0">
+            <a:pPr marL="0" indent="0">
               <a:buNone/>
             </a:pPr>
             <a:r>
@@ -14767,7 +14986,7 @@
           <a:bodyPr wrap="square" lIns="0" tIns="0" rIns="0" bIns="0" rtlCol="0" anchor="ctr"/>
           <a:lstStyle/>
           <a:p>
-            <a:pPr indent="0" marL="0">
+            <a:pPr marL="0" indent="0">
               <a:buNone/>
             </a:pPr>
             <a:r>
@@ -14806,7 +15025,7 @@
           <a:bodyPr wrap="square" lIns="0" tIns="0" rIns="0" bIns="0" rtlCol="0" anchor="ctr"/>
           <a:lstStyle/>
           <a:p>
-            <a:pPr indent="0" marL="0">
+            <a:pPr marL="0" indent="0">
               <a:buNone/>
             </a:pPr>
             <a:r>
@@ -14845,7 +15064,7 @@
           <a:bodyPr wrap="square" lIns="0" tIns="0" rIns="0" bIns="0" rtlCol="0" anchor="ctr"/>
           <a:lstStyle/>
           <a:p>
-            <a:pPr indent="0" marL="0">
+            <a:pPr marL="0" indent="0">
               <a:buNone/>
             </a:pPr>
             <a:r>
@@ -14884,7 +15103,7 @@
           <a:bodyPr wrap="square" lIns="0" tIns="0" rIns="0" bIns="0" rtlCol="0" anchor="ctr"/>
           <a:lstStyle/>
           <a:p>
-            <a:pPr indent="0" marL="0">
+            <a:pPr marL="0" indent="0">
               <a:buNone/>
             </a:pPr>
             <a:r>
@@ -14923,7 +15142,7 @@
           <a:bodyPr wrap="square" lIns="0" tIns="0" rIns="0" bIns="0" rtlCol="0" anchor="ctr"/>
           <a:lstStyle/>
           <a:p>
-            <a:pPr indent="0" marL="0">
+            <a:pPr marL="0" indent="0">
               <a:buNone/>
             </a:pPr>
             <a:r>
@@ -14962,7 +15181,7 @@
           <a:bodyPr wrap="square" lIns="0" tIns="0" rIns="0" bIns="0" rtlCol="0" anchor="ctr"/>
           <a:lstStyle/>
           <a:p>
-            <a:pPr indent="0" marL="0">
+            <a:pPr marL="0" indent="0">
               <a:buNone/>
             </a:pPr>
             <a:r>
@@ -15001,7 +15220,7 @@
           <a:bodyPr wrap="square" lIns="0" tIns="0" rIns="0" bIns="0" rtlCol="0" anchor="ctr"/>
           <a:lstStyle/>
           <a:p>
-            <a:pPr indent="0" marL="0">
+            <a:pPr marL="0" indent="0">
               <a:buNone/>
             </a:pPr>
             <a:r>
@@ -15040,7 +15259,7 @@
           <a:bodyPr wrap="square" lIns="0" tIns="0" rIns="0" bIns="0" rtlCol="0" anchor="ctr"/>
           <a:lstStyle/>
           <a:p>
-            <a:pPr indent="0" marL="0">
+            <a:pPr marL="0" indent="0">
               <a:buNone/>
             </a:pPr>
             <a:r>
@@ -15079,7 +15298,7 @@
           <a:bodyPr wrap="square" lIns="0" tIns="0" rIns="0" bIns="0" rtlCol="0" anchor="ctr"/>
           <a:lstStyle/>
           <a:p>
-            <a:pPr indent="0" marL="0">
+            <a:pPr marL="0" indent="0">
               <a:buNone/>
             </a:pPr>
             <a:r>
@@ -15116,13 +15335,20 @@
           </a:solidFill>
           <a:ln/>
           <a:effectLst>
-            <a:outerShdw sx="100000" sy="100000" kx="0" ky="0" algn="bl" rotWithShape="0" blurRad="50800" dist="25400" dir="8100000">
+            <a:outerShdw blurRad="50800" dist="25400" dir="8100000" algn="bl" rotWithShape="0">
               <a:srgbClr val="000000">
                 <a:alpha val="20000"/>
               </a:srgbClr>
             </a:outerShdw>
           </a:effectLst>
         </p:spPr>
+        <p:txBody>
+          <a:bodyPr/>
+          <a:lstStyle/>
+          <a:p>
+            <a:endParaRPr lang="en-US"/>
+          </a:p>
+        </p:txBody>
       </p:sp>
       <p:sp>
         <p:nvSpPr>
@@ -15145,7 +15371,7 @@
           <a:bodyPr wrap="square" lIns="0" tIns="0" rIns="0" bIns="0" rtlCol="0" anchor="ctr"/>
           <a:lstStyle/>
           <a:p>
-            <a:pPr indent="0" marL="0">
+            <a:pPr marL="0" indent="0">
               <a:buNone/>
             </a:pPr>
             <a:r>
@@ -15184,7 +15410,7 @@
           <a:bodyPr wrap="square" lIns="0" tIns="0" rIns="0" bIns="0" rtlCol="0" anchor="ctr"/>
           <a:lstStyle/>
           <a:p>
-            <a:pPr indent="0" marL="0">
+            <a:pPr marL="0" indent="0">
               <a:buNone/>
             </a:pPr>
             <a:r>
@@ -15223,7 +15449,7 @@
           <a:bodyPr wrap="square" lIns="0" tIns="0" rIns="0" bIns="0" rtlCol="0" anchor="ctr"/>
           <a:lstStyle/>
           <a:p>
-            <a:pPr indent="0" marL="0">
+            <a:pPr marL="0" indent="0">
               <a:buNone/>
             </a:pPr>
             <a:r>
@@ -15262,7 +15488,7 @@
           <a:bodyPr wrap="square" lIns="0" tIns="0" rIns="0" bIns="0" rtlCol="0" anchor="ctr"/>
           <a:lstStyle/>
           <a:p>
-            <a:pPr indent="0" marL="0">
+            <a:pPr marL="0" indent="0">
               <a:buNone/>
             </a:pPr>
             <a:r>
@@ -15301,7 +15527,7 @@
           <a:bodyPr wrap="square" lIns="0" tIns="0" rIns="0" bIns="0" rtlCol="0" anchor="ctr"/>
           <a:lstStyle/>
           <a:p>
-            <a:pPr indent="0" marL="0">
+            <a:pPr marL="0" indent="0">
               <a:buNone/>
             </a:pPr>
             <a:r>
@@ -15340,7 +15566,7 @@
           <a:bodyPr wrap="square" lIns="0" tIns="0" rIns="0" bIns="0" rtlCol="0" anchor="ctr"/>
           <a:lstStyle/>
           <a:p>
-            <a:pPr indent="0" marL="0">
+            <a:pPr marL="0" indent="0">
               <a:buNone/>
             </a:pPr>
             <a:r>
@@ -15379,7 +15605,7 @@
           <a:bodyPr wrap="square" lIns="0" tIns="0" rIns="0" bIns="0" rtlCol="0" anchor="ctr"/>
           <a:lstStyle/>
           <a:p>
-            <a:pPr indent="0" marL="0">
+            <a:pPr marL="0" indent="0">
               <a:buNone/>
             </a:pPr>
             <a:r>
@@ -15418,7 +15644,7 @@
           <a:bodyPr wrap="square" lIns="0" tIns="0" rIns="0" bIns="0" rtlCol="0" anchor="ctr"/>
           <a:lstStyle/>
           <a:p>
-            <a:pPr indent="0" marL="0">
+            <a:pPr marL="0" indent="0">
               <a:buNone/>
             </a:pPr>
             <a:r>
@@ -15457,7 +15683,7 @@
           <a:bodyPr wrap="square" lIns="0" tIns="0" rIns="0" bIns="0" rtlCol="0" anchor="ctr"/>
           <a:lstStyle/>
           <a:p>
-            <a:pPr indent="0" marL="0">
+            <a:pPr marL="0" indent="0">
               <a:buNone/>
             </a:pPr>
             <a:r>
@@ -15496,7 +15722,7 @@
           <a:bodyPr wrap="square" lIns="0" tIns="0" rIns="0" bIns="0" rtlCol="0" anchor="ctr"/>
           <a:lstStyle/>
           <a:p>
-            <a:pPr indent="0" marL="0">
+            <a:pPr marL="0" indent="0">
               <a:buNone/>
             </a:pPr>
             <a:r>
@@ -15533,6 +15759,13 @@
           </a:solidFill>
           <a:ln/>
         </p:spPr>
+        <p:txBody>
+          <a:bodyPr/>
+          <a:lstStyle/>
+          <a:p>
+            <a:endParaRPr lang="en-US"/>
+          </a:p>
+        </p:txBody>
       </p:sp>
       <p:sp>
         <p:nvSpPr>
@@ -15555,7 +15788,7 @@
           <a:bodyPr wrap="square" rtlCol="0" anchor="ctr"/>
           <a:lstStyle/>
           <a:p>
-            <a:pPr algn="ctr" indent="0" marL="0">
+            <a:pPr marL="0" indent="0" algn="ctr">
               <a:buNone/>
             </a:pPr>
             <a:r>
@@ -15589,6 +15822,7 @@
         <a:solidFill>
           <a:srgbClr val="131B2E"/>
         </a:solidFill>
+        <a:effectLst/>
       </p:bgPr>
     </p:bg>
     <p:spTree>
@@ -15624,6 +15858,13 @@
           </a:solidFill>
           <a:ln/>
         </p:spPr>
+        <p:txBody>
+          <a:bodyPr/>
+          <a:lstStyle/>
+          <a:p>
+            <a:endParaRPr lang="en-US"/>
+          </a:p>
+        </p:txBody>
       </p:sp>
       <p:sp>
         <p:nvSpPr>
@@ -15646,7 +15887,7 @@
           <a:bodyPr wrap="square" lIns="0" tIns="0" rIns="0" bIns="0" rtlCol="0" anchor="ctr"/>
           <a:lstStyle/>
           <a:p>
-            <a:pPr indent="0" marL="0">
+            <a:pPr marL="0" indent="0">
               <a:buNone/>
             </a:pPr>
             <a:r>
@@ -15685,7 +15926,7 @@
           <a:bodyPr wrap="square" lIns="0" tIns="0" rIns="0" bIns="0" rtlCol="0" anchor="ctr"/>
           <a:lstStyle/>
           <a:p>
-            <a:pPr indent="0" marL="0">
+            <a:pPr marL="0" indent="0">
               <a:buNone/>
             </a:pPr>
             <a:r>
@@ -15722,13 +15963,20 @@
           </a:solidFill>
           <a:ln/>
           <a:effectLst>
-            <a:outerShdw sx="100000" sy="100000" kx="0" ky="0" algn="bl" rotWithShape="0" blurRad="50800" dist="25400" dir="8100000">
+            <a:outerShdw blurRad="50800" dist="25400" dir="8100000" algn="bl" rotWithShape="0">
               <a:srgbClr val="000000">
                 <a:alpha val="20000"/>
               </a:srgbClr>
             </a:outerShdw>
           </a:effectLst>
         </p:spPr>
+        <p:txBody>
+          <a:bodyPr/>
+          <a:lstStyle/>
+          <a:p>
+            <a:endParaRPr lang="en-US"/>
+          </a:p>
+        </p:txBody>
       </p:sp>
       <p:sp>
         <p:nvSpPr>
@@ -15751,7 +15999,7 @@
           <a:bodyPr wrap="square" lIns="0" tIns="0" rIns="0" bIns="0" rtlCol="0" anchor="ctr"/>
           <a:lstStyle/>
           <a:p>
-            <a:pPr indent="0" marL="0">
+            <a:pPr marL="0" indent="0">
               <a:buNone/>
             </a:pPr>
             <a:r>
@@ -15790,7 +16038,7 @@
           <a:bodyPr wrap="square" lIns="0" tIns="0" rIns="0" bIns="0" rtlCol="0" anchor="ctr"/>
           <a:lstStyle/>
           <a:p>
-            <a:pPr indent="0" marL="0">
+            <a:pPr marL="0" indent="0">
               <a:buNone/>
             </a:pPr>
             <a:r>
@@ -15807,7 +16055,7 @@
             <a:endParaRPr lang="en-US" sz="2000" dirty="0"/>
           </a:p>
           <a:p>
-            <a:pPr indent="0" marL="0">
+            <a:pPr marL="0" indent="0">
               <a:buNone/>
             </a:pPr>
             <a:r>
@@ -15844,13 +16092,20 @@
           </a:solidFill>
           <a:ln/>
           <a:effectLst>
-            <a:outerShdw sx="100000" sy="100000" kx="0" ky="0" algn="bl" rotWithShape="0" blurRad="50800" dist="25400" dir="8100000">
+            <a:outerShdw blurRad="50800" dist="25400" dir="8100000" algn="bl" rotWithShape="0">
               <a:srgbClr val="000000">
                 <a:alpha val="20000"/>
               </a:srgbClr>
             </a:outerShdw>
           </a:effectLst>
         </p:spPr>
+        <p:txBody>
+          <a:bodyPr/>
+          <a:lstStyle/>
+          <a:p>
+            <a:endParaRPr lang="en-US"/>
+          </a:p>
+        </p:txBody>
       </p:sp>
       <p:sp>
         <p:nvSpPr>
@@ -15873,7 +16128,7 @@
           <a:bodyPr wrap="square" lIns="0" tIns="0" rIns="0" bIns="0" rtlCol="0" anchor="ctr"/>
           <a:lstStyle/>
           <a:p>
-            <a:pPr indent="0" marL="0">
+            <a:pPr marL="0" indent="0">
               <a:buNone/>
             </a:pPr>
             <a:r>
@@ -15912,7 +16167,7 @@
           <a:bodyPr wrap="square" lIns="0" tIns="0" rIns="0" bIns="0" rtlCol="0" anchor="ctr"/>
           <a:lstStyle/>
           <a:p>
-            <a:pPr indent="0" marL="0">
+            <a:pPr marL="0" indent="0">
               <a:buNone/>
             </a:pPr>
             <a:r>
@@ -15951,7 +16206,7 @@
           <a:bodyPr wrap="square" lIns="0" tIns="0" rIns="0" bIns="0" rtlCol="0" anchor="ctr"/>
           <a:lstStyle/>
           <a:p>
-            <a:pPr indent="0" marL="0">
+            <a:pPr marL="0" indent="0">
               <a:buNone/>
             </a:pPr>
             <a:r>
@@ -15968,7 +16223,7 @@
             <a:endParaRPr lang="en-US" sz="1300" dirty="0"/>
           </a:p>
           <a:p>
-            <a:pPr indent="0" marL="0">
+            <a:pPr marL="0" indent="0">
               <a:buNone/>
             </a:pPr>
             <a:r>
@@ -16005,13 +16260,20 @@
           </a:solidFill>
           <a:ln/>
           <a:effectLst>
-            <a:outerShdw sx="100000" sy="100000" kx="0" ky="0" algn="bl" rotWithShape="0" blurRad="50800" dist="25400" dir="8100000">
+            <a:outerShdw blurRad="50800" dist="25400" dir="8100000" algn="bl" rotWithShape="0">
               <a:srgbClr val="000000">
                 <a:alpha val="20000"/>
               </a:srgbClr>
             </a:outerShdw>
           </a:effectLst>
         </p:spPr>
+        <p:txBody>
+          <a:bodyPr/>
+          <a:lstStyle/>
+          <a:p>
+            <a:endParaRPr lang="en-US"/>
+          </a:p>
+        </p:txBody>
       </p:sp>
       <p:sp>
         <p:nvSpPr>
@@ -16034,7 +16296,7 @@
           <a:bodyPr wrap="square" lIns="0" tIns="0" rIns="0" bIns="0" rtlCol="0" anchor="ctr"/>
           <a:lstStyle/>
           <a:p>
-            <a:pPr indent="0" marL="0">
+            <a:pPr marL="0" indent="0">
               <a:buNone/>
             </a:pPr>
             <a:r>
@@ -16073,7 +16335,7 @@
           <a:bodyPr wrap="square" lIns="0" tIns="0" rIns="0" bIns="0" rtlCol="0" anchor="ctr"/>
           <a:lstStyle/>
           <a:p>
-            <a:pPr indent="0" marL="0">
+            <a:pPr marL="0" indent="0">
               <a:buNone/>
             </a:pPr>
             <a:r>
@@ -16112,7 +16374,7 @@
           <a:bodyPr wrap="square" lIns="0" tIns="0" rIns="0" bIns="0" rtlCol="0" anchor="ctr"/>
           <a:lstStyle/>
           <a:p>
-            <a:pPr indent="0" marL="0">
+            <a:pPr marL="0" indent="0">
               <a:buNone/>
             </a:pPr>
             <a:r>
@@ -16129,7 +16391,7 @@
             <a:endParaRPr lang="en-US" sz="1300" dirty="0"/>
           </a:p>
           <a:p>
-            <a:pPr indent="0" marL="0">
+            <a:pPr marL="0" indent="0">
               <a:buNone/>
             </a:pPr>
             <a:r>
@@ -16166,13 +16428,20 @@
           </a:solidFill>
           <a:ln/>
           <a:effectLst>
-            <a:outerShdw sx="100000" sy="100000" kx="0" ky="0" algn="bl" rotWithShape="0" blurRad="50800" dist="25400" dir="8100000">
+            <a:outerShdw blurRad="50800" dist="25400" dir="8100000" algn="bl" rotWithShape="0">
               <a:srgbClr val="000000">
                 <a:alpha val="20000"/>
               </a:srgbClr>
             </a:outerShdw>
           </a:effectLst>
         </p:spPr>
+        <p:txBody>
+          <a:bodyPr/>
+          <a:lstStyle/>
+          <a:p>
+            <a:endParaRPr lang="en-US"/>
+          </a:p>
+        </p:txBody>
       </p:sp>
       <p:sp>
         <p:nvSpPr>
@@ -16195,7 +16464,7 @@
           <a:bodyPr wrap="square" lIns="0" tIns="0" rIns="0" bIns="0" rtlCol="0" anchor="ctr"/>
           <a:lstStyle/>
           <a:p>
-            <a:pPr indent="0" marL="0">
+            <a:pPr marL="0" indent="0">
               <a:buNone/>
             </a:pPr>
             <a:r>
@@ -16234,7 +16503,7 @@
           <a:bodyPr wrap="square" lIns="0" tIns="0" rIns="0" bIns="0" rtlCol="0" anchor="ctr"/>
           <a:lstStyle/>
           <a:p>
-            <a:pPr indent="0" marL="0">
+            <a:pPr marL="0" indent="0">
               <a:buNone/>
             </a:pPr>
             <a:r>
@@ -16273,7 +16542,7 @@
           <a:bodyPr wrap="square" lIns="0" tIns="0" rIns="0" bIns="0" rtlCol="0" anchor="ctr"/>
           <a:lstStyle/>
           <a:p>
-            <a:pPr indent="0" marL="0">
+            <a:pPr marL="0" indent="0">
               <a:buNone/>
             </a:pPr>
             <a:r>
@@ -16290,7 +16559,7 @@
             <a:endParaRPr lang="en-US" sz="1300" dirty="0"/>
           </a:p>
           <a:p>
-            <a:pPr indent="0" marL="0">
+            <a:pPr marL="0" indent="0">
               <a:buNone/>
             </a:pPr>
             <a:r>
@@ -16329,7 +16598,7 @@
           <a:bodyPr wrap="square" rtlCol="0" anchor="ctr"/>
           <a:lstStyle/>
           <a:p>
-            <a:pPr algn="ctr" indent="0" marL="0">
+            <a:pPr marL="0" indent="0" algn="ctr">
               <a:buNone/>
             </a:pPr>
             <a:r>
@@ -16363,6 +16632,7 @@
         <a:solidFill>
           <a:srgbClr val="131B2E"/>
         </a:solidFill>
+        <a:effectLst/>
       </p:bgPr>
     </p:bg>
     <p:spTree>
@@ -16398,6 +16668,13 @@
           </a:solidFill>
           <a:ln/>
         </p:spPr>
+        <p:txBody>
+          <a:bodyPr/>
+          <a:lstStyle/>
+          <a:p>
+            <a:endParaRPr lang="en-US"/>
+          </a:p>
+        </p:txBody>
       </p:sp>
       <p:sp>
         <p:nvSpPr>
@@ -16420,7 +16697,7 @@
           <a:bodyPr wrap="square" lIns="0" tIns="0" rIns="0" bIns="0" rtlCol="0" anchor="ctr"/>
           <a:lstStyle/>
           <a:p>
-            <a:pPr indent="0" marL="0">
+            <a:pPr marL="0" indent="0">
               <a:buNone/>
             </a:pPr>
             <a:r>
@@ -16459,7 +16736,7 @@
           <a:bodyPr wrap="square" lIns="0" tIns="0" rIns="0" bIns="0" rtlCol="0" anchor="ctr"/>
           <a:lstStyle/>
           <a:p>
-            <a:pPr indent="0" marL="0">
+            <a:pPr marL="0" indent="0">
               <a:buNone/>
             </a:pPr>
             <a:r>
@@ -16496,13 +16773,20 @@
           </a:solidFill>
           <a:ln/>
           <a:effectLst>
-            <a:outerShdw sx="100000" sy="100000" kx="0" ky="0" algn="bl" rotWithShape="0" blurRad="50800" dist="25400" dir="8100000">
+            <a:outerShdw blurRad="50800" dist="25400" dir="8100000" algn="bl" rotWithShape="0">
               <a:srgbClr val="000000">
                 <a:alpha val="20000"/>
               </a:srgbClr>
             </a:outerShdw>
           </a:effectLst>
         </p:spPr>
+        <p:txBody>
+          <a:bodyPr/>
+          <a:lstStyle/>
+          <a:p>
+            <a:endParaRPr lang="en-US"/>
+          </a:p>
+        </p:txBody>
       </p:sp>
       <p:sp>
         <p:nvSpPr>
@@ -16525,7 +16809,7 @@
           <a:bodyPr wrap="square" lIns="0" tIns="0" rIns="0" bIns="0" rtlCol="0" anchor="ctr"/>
           <a:lstStyle/>
           <a:p>
-            <a:pPr indent="0" marL="0">
+            <a:pPr marL="0" indent="0">
               <a:buNone/>
             </a:pPr>
             <a:r>
@@ -16564,7 +16848,7 @@
           <a:bodyPr wrap="square" lIns="0" tIns="0" rIns="0" bIns="0" rtlCol="0" anchor="ctr"/>
           <a:lstStyle/>
           <a:p>
-            <a:pPr indent="0" marL="0">
+            <a:pPr marL="0" indent="0">
               <a:buNone/>
             </a:pPr>
             <a:r>
@@ -16603,7 +16887,7 @@
           <a:bodyPr wrap="square" lIns="0" tIns="0" rIns="0" bIns="0" rtlCol="0" anchor="ctr"/>
           <a:lstStyle/>
           <a:p>
-            <a:pPr indent="0" marL="0">
+            <a:pPr marL="0" indent="0">
               <a:buNone/>
             </a:pPr>
             <a:r>
@@ -16642,7 +16926,7 @@
           <a:bodyPr wrap="square" lIns="0" tIns="0" rIns="0" bIns="0" rtlCol="0" anchor="ctr"/>
           <a:lstStyle/>
           <a:p>
-            <a:pPr indent="0" marL="0">
+            <a:pPr marL="0" indent="0">
               <a:buNone/>
             </a:pPr>
             <a:r>
@@ -16681,7 +16965,7 @@
           <a:bodyPr wrap="square" lIns="0" tIns="0" rIns="0" bIns="0" rtlCol="0" anchor="ctr"/>
           <a:lstStyle/>
           <a:p>
-            <a:pPr indent="0" marL="0">
+            <a:pPr marL="0" indent="0">
               <a:buNone/>
             </a:pPr>
             <a:r>
@@ -16720,7 +17004,7 @@
           <a:bodyPr wrap="square" lIns="0" tIns="0" rIns="0" bIns="0" rtlCol="0" anchor="ctr"/>
           <a:lstStyle/>
           <a:p>
-            <a:pPr indent="0" marL="0">
+            <a:pPr marL="0" indent="0">
               <a:buNone/>
             </a:pPr>
             <a:r>
@@ -16759,7 +17043,7 @@
           <a:bodyPr wrap="square" lIns="0" tIns="0" rIns="0" bIns="0" rtlCol="0" anchor="ctr"/>
           <a:lstStyle/>
           <a:p>
-            <a:pPr indent="0" marL="0">
+            <a:pPr marL="0" indent="0">
               <a:buNone/>
             </a:pPr>
             <a:r>
@@ -16798,7 +17082,7 @@
           <a:bodyPr wrap="square" lIns="0" tIns="0" rIns="0" bIns="0" rtlCol="0" anchor="ctr"/>
           <a:lstStyle/>
           <a:p>
-            <a:pPr indent="0" marL="0">
+            <a:pPr marL="0" indent="0">
               <a:buNone/>
             </a:pPr>
             <a:r>
@@ -16837,7 +17121,7 @@
           <a:bodyPr wrap="square" lIns="0" tIns="0" rIns="0" bIns="0" rtlCol="0" anchor="ctr"/>
           <a:lstStyle/>
           <a:p>
-            <a:pPr indent="0" marL="0">
+            <a:pPr marL="0" indent="0">
               <a:buNone/>
             </a:pPr>
             <a:r>
@@ -16876,7 +17160,7 @@
           <a:bodyPr wrap="square" lIns="0" tIns="0" rIns="0" bIns="0" rtlCol="0" anchor="ctr"/>
           <a:lstStyle/>
           <a:p>
-            <a:pPr indent="0" marL="0">
+            <a:pPr marL="0" indent="0">
               <a:buNone/>
             </a:pPr>
             <a:r>
@@ -16915,7 +17199,7 @@
           <a:bodyPr wrap="square" lIns="0" tIns="0" rIns="0" bIns="0" rtlCol="0" anchor="ctr"/>
           <a:lstStyle/>
           <a:p>
-            <a:pPr indent="0" marL="0">
+            <a:pPr marL="0" indent="0">
               <a:buNone/>
             </a:pPr>
             <a:r>
@@ -16954,7 +17238,7 @@
           <a:bodyPr wrap="square" lIns="0" tIns="0" rIns="0" bIns="0" rtlCol="0" anchor="ctr"/>
           <a:lstStyle/>
           <a:p>
-            <a:pPr indent="0" marL="0">
+            <a:pPr marL="0" indent="0">
               <a:buNone/>
             </a:pPr>
             <a:r>
@@ -16991,13 +17275,20 @@
           </a:solidFill>
           <a:ln/>
           <a:effectLst>
-            <a:outerShdw sx="100000" sy="100000" kx="0" ky="0" algn="bl" rotWithShape="0" blurRad="50800" dist="25400" dir="8100000">
+            <a:outerShdw blurRad="50800" dist="25400" dir="8100000" algn="bl" rotWithShape="0">
               <a:srgbClr val="000000">
                 <a:alpha val="20000"/>
               </a:srgbClr>
             </a:outerShdw>
           </a:effectLst>
         </p:spPr>
+        <p:txBody>
+          <a:bodyPr/>
+          <a:lstStyle/>
+          <a:p>
+            <a:endParaRPr lang="en-US"/>
+          </a:p>
+        </p:txBody>
       </p:sp>
       <p:sp>
         <p:nvSpPr>
@@ -17020,7 +17311,7 @@
           <a:bodyPr wrap="square" lIns="0" tIns="0" rIns="0" bIns="0" rtlCol="0" anchor="ctr"/>
           <a:lstStyle/>
           <a:p>
-            <a:pPr indent="0" marL="0">
+            <a:pPr marL="0" indent="0">
               <a:buNone/>
             </a:pPr>
             <a:r>
@@ -17059,7 +17350,7 @@
           <a:bodyPr wrap="square" lIns="0" tIns="0" rIns="0" bIns="0" rtlCol="0" anchor="ctr"/>
           <a:lstStyle/>
           <a:p>
-            <a:pPr indent="0" marL="0">
+            <a:pPr marL="0" indent="0">
               <a:buNone/>
             </a:pPr>
             <a:r>
@@ -17098,7 +17389,7 @@
           <a:bodyPr wrap="square" lIns="0" tIns="0" rIns="0" bIns="0" rtlCol="0" anchor="ctr"/>
           <a:lstStyle/>
           <a:p>
-            <a:pPr indent="0" marL="0">
+            <a:pPr marL="0" indent="0">
               <a:buNone/>
             </a:pPr>
             <a:r>
@@ -17137,7 +17428,7 @@
           <a:bodyPr wrap="square" lIns="0" tIns="0" rIns="0" bIns="0" rtlCol="0" anchor="ctr"/>
           <a:lstStyle/>
           <a:p>
-            <a:pPr indent="0" marL="0">
+            <a:pPr marL="0" indent="0">
               <a:buNone/>
             </a:pPr>
             <a:r>
@@ -17176,7 +17467,7 @@
           <a:bodyPr wrap="square" lIns="0" tIns="0" rIns="0" bIns="0" rtlCol="0" anchor="ctr"/>
           <a:lstStyle/>
           <a:p>
-            <a:pPr indent="0" marL="0">
+            <a:pPr marL="0" indent="0">
               <a:buNone/>
             </a:pPr>
             <a:r>
@@ -17215,7 +17506,7 @@
           <a:bodyPr wrap="square" lIns="0" tIns="0" rIns="0" bIns="0" rtlCol="0" anchor="ctr"/>
           <a:lstStyle/>
           <a:p>
-            <a:pPr indent="0" marL="0">
+            <a:pPr marL="0" indent="0">
               <a:buNone/>
             </a:pPr>
             <a:r>
@@ -17254,7 +17545,7 @@
           <a:bodyPr wrap="square" lIns="0" tIns="0" rIns="0" bIns="0" rtlCol="0" anchor="ctr"/>
           <a:lstStyle/>
           <a:p>
-            <a:pPr indent="0" marL="0">
+            <a:pPr marL="0" indent="0">
               <a:buNone/>
             </a:pPr>
             <a:r>
@@ -17293,7 +17584,7 @@
           <a:bodyPr wrap="square" lIns="0" tIns="0" rIns="0" bIns="0" rtlCol="0" anchor="ctr"/>
           <a:lstStyle/>
           <a:p>
-            <a:pPr indent="0" marL="0">
+            <a:pPr marL="0" indent="0">
               <a:buNone/>
             </a:pPr>
             <a:r>
@@ -17332,7 +17623,7 @@
           <a:bodyPr wrap="square" lIns="0" tIns="0" rIns="0" bIns="0" rtlCol="0" anchor="ctr"/>
           <a:lstStyle/>
           <a:p>
-            <a:pPr indent="0" marL="0">
+            <a:pPr marL="0" indent="0">
               <a:buNone/>
             </a:pPr>
             <a:r>
@@ -17371,7 +17662,7 @@
           <a:bodyPr wrap="square" lIns="0" tIns="0" rIns="0" bIns="0" rtlCol="0" anchor="ctr"/>
           <a:lstStyle/>
           <a:p>
-            <a:pPr indent="0" marL="0">
+            <a:pPr marL="0" indent="0">
               <a:buNone/>
             </a:pPr>
             <a:r>
@@ -17410,7 +17701,7 @@
           <a:bodyPr wrap="square" lIns="0" tIns="0" rIns="0" bIns="0" rtlCol="0" anchor="ctr"/>
           <a:lstStyle/>
           <a:p>
-            <a:pPr indent="0" marL="0">
+            <a:pPr marL="0" indent="0">
               <a:buNone/>
             </a:pPr>
             <a:r>
@@ -17449,7 +17740,7 @@
           <a:bodyPr wrap="square" lIns="0" tIns="0" rIns="0" bIns="0" rtlCol="0" anchor="ctr"/>
           <a:lstStyle/>
           <a:p>
-            <a:pPr indent="0" marL="0">
+            <a:pPr marL="0" indent="0">
               <a:buNone/>
             </a:pPr>
             <a:r>
@@ -17483,6 +17774,7 @@
         <a:solidFill>
           <a:srgbClr val="131B2E"/>
         </a:solidFill>
+        <a:effectLst/>
       </p:bgPr>
     </p:bg>
     <p:spTree>
@@ -17518,6 +17810,13 @@
           </a:solidFill>
           <a:ln/>
         </p:spPr>
+        <p:txBody>
+          <a:bodyPr/>
+          <a:lstStyle/>
+          <a:p>
+            <a:endParaRPr lang="en-US"/>
+          </a:p>
+        </p:txBody>
       </p:sp>
       <p:sp>
         <p:nvSpPr>
@@ -17540,7 +17839,7 @@
           <a:bodyPr wrap="square" lIns="0" tIns="0" rIns="0" bIns="0" rtlCol="0" anchor="ctr"/>
           <a:lstStyle/>
           <a:p>
-            <a:pPr indent="0" marL="0">
+            <a:pPr marL="0" indent="0">
               <a:buNone/>
             </a:pPr>
             <a:r>
@@ -17579,7 +17878,7 @@
           <a:bodyPr wrap="square" lIns="0" tIns="0" rIns="0" bIns="0" rtlCol="0" anchor="ctr"/>
           <a:lstStyle/>
           <a:p>
-            <a:pPr indent="0" marL="0">
+            <a:pPr marL="0" indent="0">
               <a:buNone/>
             </a:pPr>
             <a:r>
@@ -17599,14 +17898,14 @@
       </p:sp>
       <p:pic>
         <p:nvPicPr>
-          <p:cNvPr id="5" name="Image 0" descr="/sessions/sweet-quirky-clarke/mnt/CTA Seg V2/report/figures/unet3d_architecture.png">    </p:cNvPr>
+          <p:cNvPr id="5" name="Image 0" descr="/sessions/sweet-quirky-clarke/mnt/CTA Seg V2/report/figures/unet3d_architecture.png"/>
           <p:cNvPicPr>
             <a:picLocks noChangeAspect="1"/>
           </p:cNvPicPr>
           <p:nvPr/>
         </p:nvPicPr>
         <p:blipFill>
-          <a:blip r:embed="rId1"/>
+          <a:blip r:embed="rId3"/>
           <a:stretch>
             <a:fillRect/>
           </a:stretch>
@@ -17640,6 +17939,13 @@
           </a:solidFill>
           <a:ln/>
         </p:spPr>
+        <p:txBody>
+          <a:bodyPr/>
+          <a:lstStyle/>
+          <a:p>
+            <a:endParaRPr lang="en-US"/>
+          </a:p>
+        </p:txBody>
       </p:sp>
       <p:sp>
         <p:nvSpPr>
@@ -17662,7 +17968,7 @@
           <a:bodyPr wrap="square" lIns="0" tIns="0" rIns="0" bIns="0" rtlCol="0" anchor="ctr"/>
           <a:lstStyle/>
           <a:p>
-            <a:pPr indent="0" marL="0">
+            <a:pPr marL="0" indent="0">
               <a:buNone/>
             </a:pPr>
             <a:r>
@@ -17701,7 +18007,7 @@
           <a:bodyPr wrap="square" lIns="0" tIns="0" rIns="0" bIns="0" rtlCol="0" anchor="ctr"/>
           <a:lstStyle/>
           <a:p>
-            <a:pPr indent="0" marL="0">
+            <a:pPr marL="0" indent="0">
               <a:buNone/>
             </a:pPr>
             <a:r>
@@ -17738,6 +18044,13 @@
           </a:solidFill>
           <a:ln/>
         </p:spPr>
+        <p:txBody>
+          <a:bodyPr/>
+          <a:lstStyle/>
+          <a:p>
+            <a:endParaRPr lang="en-US"/>
+          </a:p>
+        </p:txBody>
       </p:sp>
       <p:sp>
         <p:nvSpPr>
@@ -17760,7 +18073,7 @@
           <a:bodyPr wrap="square" lIns="0" tIns="0" rIns="0" bIns="0" rtlCol="0" anchor="ctr"/>
           <a:lstStyle/>
           <a:p>
-            <a:pPr indent="0" marL="0">
+            <a:pPr marL="0" indent="0">
               <a:buNone/>
             </a:pPr>
             <a:r>
@@ -17799,7 +18112,7 @@
           <a:bodyPr wrap="square" lIns="0" tIns="0" rIns="0" bIns="0" rtlCol="0" anchor="ctr"/>
           <a:lstStyle/>
           <a:p>
-            <a:pPr indent="0" marL="0">
+            <a:pPr marL="0" indent="0">
               <a:buNone/>
             </a:pPr>
             <a:r>
@@ -17836,6 +18149,13 @@
           </a:solidFill>
           <a:ln/>
         </p:spPr>
+        <p:txBody>
+          <a:bodyPr/>
+          <a:lstStyle/>
+          <a:p>
+            <a:endParaRPr lang="en-US"/>
+          </a:p>
+        </p:txBody>
       </p:sp>
       <p:sp>
         <p:nvSpPr>
@@ -17858,7 +18178,7 @@
           <a:bodyPr wrap="square" lIns="0" tIns="0" rIns="0" bIns="0" rtlCol="0" anchor="ctr"/>
           <a:lstStyle/>
           <a:p>
-            <a:pPr indent="0" marL="0">
+            <a:pPr marL="0" indent="0">
               <a:buNone/>
             </a:pPr>
             <a:r>
@@ -17897,7 +18217,7 @@
           <a:bodyPr wrap="square" lIns="0" tIns="0" rIns="0" bIns="0" rtlCol="0" anchor="ctr"/>
           <a:lstStyle/>
           <a:p>
-            <a:pPr indent="0" marL="0">
+            <a:pPr marL="0" indent="0">
               <a:buNone/>
             </a:pPr>
             <a:r>
@@ -17934,6 +18254,13 @@
           </a:solidFill>
           <a:ln/>
         </p:spPr>
+        <p:txBody>
+          <a:bodyPr/>
+          <a:lstStyle/>
+          <a:p>
+            <a:endParaRPr lang="en-US"/>
+          </a:p>
+        </p:txBody>
       </p:sp>
       <p:sp>
         <p:nvSpPr>
@@ -17956,7 +18283,7 @@
           <a:bodyPr wrap="square" lIns="0" tIns="0" rIns="0" bIns="0" rtlCol="0" anchor="ctr"/>
           <a:lstStyle/>
           <a:p>
-            <a:pPr indent="0" marL="0">
+            <a:pPr marL="0" indent="0">
               <a:buNone/>
             </a:pPr>
             <a:r>
@@ -17995,7 +18322,7 @@
           <a:bodyPr wrap="square" lIns="0" tIns="0" rIns="0" bIns="0" rtlCol="0" anchor="ctr"/>
           <a:lstStyle/>
           <a:p>
-            <a:pPr indent="0" marL="0">
+            <a:pPr marL="0" indent="0">
               <a:buNone/>
             </a:pPr>
             <a:r>
@@ -18032,6 +18359,13 @@
           </a:solidFill>
           <a:ln/>
         </p:spPr>
+        <p:txBody>
+          <a:bodyPr/>
+          <a:lstStyle/>
+          <a:p>
+            <a:endParaRPr lang="en-US"/>
+          </a:p>
+        </p:txBody>
       </p:sp>
       <p:sp>
         <p:nvSpPr>
@@ -18054,7 +18388,7 @@
           <a:bodyPr wrap="square" lIns="0" tIns="0" rIns="0" bIns="0" rtlCol="0" anchor="ctr"/>
           <a:lstStyle/>
           <a:p>
-            <a:pPr indent="0" marL="0">
+            <a:pPr marL="0" indent="0">
               <a:buNone/>
             </a:pPr>
             <a:r>
@@ -18093,7 +18427,7 @@
           <a:bodyPr wrap="square" lIns="0" tIns="0" rIns="0" bIns="0" rtlCol="0" anchor="ctr"/>
           <a:lstStyle/>
           <a:p>
-            <a:pPr indent="0" marL="0">
+            <a:pPr marL="0" indent="0">
               <a:buNone/>
             </a:pPr>
             <a:r>
@@ -18130,6 +18464,13 @@
           </a:solidFill>
           <a:ln/>
         </p:spPr>
+        <p:txBody>
+          <a:bodyPr/>
+          <a:lstStyle/>
+          <a:p>
+            <a:endParaRPr lang="en-US"/>
+          </a:p>
+        </p:txBody>
       </p:sp>
       <p:sp>
         <p:nvSpPr>
@@ -18152,7 +18493,7 @@
           <a:bodyPr wrap="square" lIns="0" tIns="0" rIns="0" bIns="0" rtlCol="0" anchor="ctr"/>
           <a:lstStyle/>
           <a:p>
-            <a:pPr indent="0" marL="0">
+            <a:pPr marL="0" indent="0">
               <a:buNone/>
             </a:pPr>
             <a:r>
@@ -18191,7 +18532,7 @@
           <a:bodyPr wrap="square" lIns="0" tIns="0" rIns="0" bIns="0" rtlCol="0" anchor="ctr"/>
           <a:lstStyle/>
           <a:p>
-            <a:pPr indent="0" marL="0">
+            <a:pPr marL="0" indent="0">
               <a:buNone/>
             </a:pPr>
             <a:r>
@@ -18228,6 +18569,13 @@
           </a:solidFill>
           <a:ln/>
         </p:spPr>
+        <p:txBody>
+          <a:bodyPr/>
+          <a:lstStyle/>
+          <a:p>
+            <a:endParaRPr lang="en-US"/>
+          </a:p>
+        </p:txBody>
       </p:sp>
       <p:sp>
         <p:nvSpPr>
@@ -18250,7 +18598,7 @@
           <a:bodyPr wrap="square" lIns="0" tIns="0" rIns="0" bIns="0" rtlCol="0" anchor="ctr"/>
           <a:lstStyle/>
           <a:p>
-            <a:pPr indent="0" marL="0">
+            <a:pPr marL="0" indent="0">
               <a:buNone/>
             </a:pPr>
             <a:r>
@@ -18289,7 +18637,7 @@
           <a:bodyPr wrap="square" lIns="0" tIns="0" rIns="0" bIns="0" rtlCol="0" anchor="ctr"/>
           <a:lstStyle/>
           <a:p>
-            <a:pPr indent="0" marL="0">
+            <a:pPr marL="0" indent="0">
               <a:buNone/>
             </a:pPr>
             <a:r>
@@ -18326,6 +18674,13 @@
           </a:solidFill>
           <a:ln/>
         </p:spPr>
+        <p:txBody>
+          <a:bodyPr/>
+          <a:lstStyle/>
+          <a:p>
+            <a:endParaRPr lang="en-US"/>
+          </a:p>
+        </p:txBody>
       </p:sp>
       <p:sp>
         <p:nvSpPr>
@@ -18348,7 +18703,7 @@
           <a:bodyPr wrap="square" rtlCol="0" anchor="ctr"/>
           <a:lstStyle/>
           <a:p>
-            <a:pPr algn="ctr" indent="0" marL="0">
+            <a:pPr marL="0" indent="0" algn="ctr">
               <a:buNone/>
             </a:pPr>
             <a:r>
@@ -18382,6 +18737,7 @@
         <a:solidFill>
           <a:srgbClr val="131B2E"/>
         </a:solidFill>
+        <a:effectLst/>
       </p:bgPr>
     </p:bg>
     <p:spTree>
@@ -18417,6 +18773,13 @@
           </a:solidFill>
           <a:ln/>
         </p:spPr>
+        <p:txBody>
+          <a:bodyPr/>
+          <a:lstStyle/>
+          <a:p>
+            <a:endParaRPr lang="en-US"/>
+          </a:p>
+        </p:txBody>
       </p:sp>
       <p:sp>
         <p:nvSpPr>
@@ -18439,7 +18802,7 @@
           <a:bodyPr wrap="square" lIns="0" tIns="0" rIns="0" bIns="0" rtlCol="0" anchor="ctr"/>
           <a:lstStyle/>
           <a:p>
-            <a:pPr indent="0" marL="0">
+            <a:pPr marL="0" indent="0">
               <a:buNone/>
             </a:pPr>
             <a:r>
@@ -18478,7 +18841,7 @@
           <a:bodyPr wrap="square" lIns="0" tIns="0" rIns="0" bIns="0" rtlCol="0" anchor="ctr"/>
           <a:lstStyle/>
           <a:p>
-            <a:pPr indent="0" marL="0">
+            <a:pPr marL="0" indent="0">
               <a:buNone/>
             </a:pPr>
             <a:r>
@@ -18515,13 +18878,20 @@
           </a:solidFill>
           <a:ln/>
           <a:effectLst>
-            <a:outerShdw sx="100000" sy="100000" kx="0" ky="0" algn="bl" rotWithShape="0" blurRad="50800" dist="25400" dir="8100000">
+            <a:outerShdw blurRad="50800" dist="25400" dir="8100000" algn="bl" rotWithShape="0">
               <a:srgbClr val="000000">
                 <a:alpha val="20000"/>
               </a:srgbClr>
             </a:outerShdw>
           </a:effectLst>
         </p:spPr>
+        <p:txBody>
+          <a:bodyPr/>
+          <a:lstStyle/>
+          <a:p>
+            <a:endParaRPr lang="en-US"/>
+          </a:p>
+        </p:txBody>
       </p:sp>
       <p:sp>
         <p:nvSpPr>
@@ -18544,7 +18914,7 @@
           <a:bodyPr wrap="square" lIns="0" tIns="0" rIns="0" bIns="0" rtlCol="0" anchor="ctr"/>
           <a:lstStyle/>
           <a:p>
-            <a:pPr indent="0" marL="0">
+            <a:pPr marL="0" indent="0">
               <a:buNone/>
             </a:pPr>
             <a:r>
@@ -18581,6 +18951,13 @@
           </a:solidFill>
           <a:ln/>
         </p:spPr>
+        <p:txBody>
+          <a:bodyPr/>
+          <a:lstStyle/>
+          <a:p>
+            <a:endParaRPr lang="en-US"/>
+          </a:p>
+        </p:txBody>
       </p:sp>
       <p:sp>
         <p:nvSpPr>
@@ -18603,7 +18980,7 @@
           <a:bodyPr wrap="square" rtlCol="0" anchor="ctr"/>
           <a:lstStyle/>
           <a:p>
-            <a:pPr algn="ctr" indent="0" marL="0">
+            <a:pPr marL="0" indent="0" algn="ctr">
               <a:buNone/>
             </a:pPr>
             <a:r>
@@ -18617,9 +18994,6 @@
               </a:rPr>
               <a:t>L</a:t>
             </a:r>
-            <a:pPr algn="ctr" indent="0" marL="0">
-              <a:buNone/>
-            </a:pPr>
             <a:r>
               <a:rPr lang="en-US" sz="1200" dirty="0">
                 <a:solidFill>
@@ -18631,9 +19005,6 @@
               </a:rPr>
               <a:t>Dice</a:t>
             </a:r>
-            <a:pPr algn="ctr" indent="0" marL="0">
-              <a:buNone/>
-            </a:pPr>
             <a:r>
               <a:rPr lang="en-US" sz="1800" dirty="0">
                 <a:solidFill>
@@ -18645,9 +19016,6 @@
               </a:rPr>
               <a:t> = 1 − </a:t>
             </a:r>
-            <a:pPr algn="ctr" indent="0" marL="0">
-              <a:buNone/>
-            </a:pPr>
             <a:r>
               <a:rPr lang="en-US" sz="1600" dirty="0">
                 <a:solidFill>
@@ -18659,9 +19027,6 @@
               </a:rPr>
               <a:t>2 ∑ pᵢ · gᵢ + ε</a:t>
             </a:r>
-            <a:pPr algn="ctr" indent="0" marL="0">
-              <a:buNone/>
-            </a:pPr>
             <a:r>
               <a:rPr lang="en-US" sz="1800" dirty="0">
                 <a:solidFill>
@@ -18673,9 +19038,6 @@
               </a:rPr>
               <a:t> / </a:t>
             </a:r>
-            <a:pPr algn="ctr" indent="0" marL="0">
-              <a:buNone/>
-            </a:pPr>
             <a:r>
               <a:rPr lang="en-US" sz="1600" dirty="0">
                 <a:solidFill>
@@ -18712,7 +19074,7 @@
           <a:bodyPr wrap="square" lIns="0" tIns="0" rIns="0" bIns="0" rtlCol="0" anchor="ctr"/>
           <a:lstStyle/>
           <a:p>
-            <a:pPr indent="0" marL="0">
+            <a:pPr marL="0" indent="0">
               <a:buNone/>
             </a:pPr>
             <a:r>
@@ -18729,7 +19091,7 @@
             <a:endParaRPr lang="en-US" sz="1200" dirty="0"/>
           </a:p>
           <a:p>
-            <a:pPr indent="0" marL="0">
+            <a:pPr marL="0" indent="0">
               <a:buNone/>
             </a:pPr>
             <a:r>
@@ -18746,7 +19108,7 @@
             <a:endParaRPr lang="en-US" sz="1200" dirty="0"/>
           </a:p>
           <a:p>
-            <a:pPr indent="0" marL="0">
+            <a:pPr marL="0" indent="0">
               <a:buNone/>
             </a:pPr>
             <a:r>
@@ -18785,7 +19147,7 @@
           <a:bodyPr wrap="square" lIns="0" tIns="0" rIns="0" bIns="0" rtlCol="0" anchor="ctr"/>
           <a:lstStyle/>
           <a:p>
-            <a:pPr indent="0" marL="0">
+            <a:pPr marL="0" indent="0">
               <a:buNone/>
             </a:pPr>
             <a:r>
@@ -18822,13 +19184,20 @@
           </a:solidFill>
           <a:ln/>
           <a:effectLst>
-            <a:outerShdw sx="100000" sy="100000" kx="0" ky="0" algn="bl" rotWithShape="0" blurRad="50800" dist="25400" dir="8100000">
+            <a:outerShdw blurRad="50800" dist="25400" dir="8100000" algn="bl" rotWithShape="0">
               <a:srgbClr val="000000">
                 <a:alpha val="20000"/>
               </a:srgbClr>
             </a:outerShdw>
           </a:effectLst>
         </p:spPr>
+        <p:txBody>
+          <a:bodyPr/>
+          <a:lstStyle/>
+          <a:p>
+            <a:endParaRPr lang="en-US"/>
+          </a:p>
+        </p:txBody>
       </p:sp>
       <p:sp>
         <p:nvSpPr>
@@ -18851,7 +19220,7 @@
           <a:bodyPr wrap="square" lIns="0" tIns="0" rIns="0" bIns="0" rtlCol="0" anchor="ctr"/>
           <a:lstStyle/>
           <a:p>
-            <a:pPr indent="0" marL="0">
+            <a:pPr marL="0" indent="0">
               <a:buNone/>
             </a:pPr>
             <a:r>
@@ -18888,6 +19257,13 @@
           </a:solidFill>
           <a:ln/>
         </p:spPr>
+        <p:txBody>
+          <a:bodyPr/>
+          <a:lstStyle/>
+          <a:p>
+            <a:endParaRPr lang="en-US"/>
+          </a:p>
+        </p:txBody>
       </p:sp>
       <p:sp>
         <p:nvSpPr>
@@ -18910,7 +19286,7 @@
           <a:bodyPr wrap="square" rtlCol="0" anchor="ctr"/>
           <a:lstStyle/>
           <a:p>
-            <a:pPr algn="ctr" indent="0" marL="0">
+            <a:pPr marL="0" indent="0" algn="ctr">
               <a:buNone/>
             </a:pPr>
             <a:r>
@@ -18924,9 +19300,6 @@
               </a:rPr>
               <a:t>L</a:t>
             </a:r>
-            <a:pPr algn="ctr" indent="0" marL="0">
-              <a:buNone/>
-            </a:pPr>
             <a:r>
               <a:rPr lang="en-US" sz="1200" dirty="0">
                 <a:solidFill>
@@ -18938,9 +19311,6 @@
               </a:rPr>
               <a:t>CE</a:t>
             </a:r>
-            <a:pPr algn="ctr" indent="0" marL="0">
-              <a:buNone/>
-            </a:pPr>
             <a:r>
               <a:rPr lang="en-US" sz="1800" dirty="0">
                 <a:solidFill>
@@ -18977,7 +19347,7 @@
           <a:bodyPr wrap="square" lIns="0" tIns="0" rIns="0" bIns="0" rtlCol="0" anchor="ctr"/>
           <a:lstStyle/>
           <a:p>
-            <a:pPr indent="0" marL="0">
+            <a:pPr marL="0" indent="0">
               <a:buNone/>
             </a:pPr>
             <a:r>
@@ -19014,6 +19384,13 @@
           </a:solidFill>
           <a:ln/>
         </p:spPr>
+        <p:txBody>
+          <a:bodyPr/>
+          <a:lstStyle/>
+          <a:p>
+            <a:endParaRPr lang="en-US"/>
+          </a:p>
+        </p:txBody>
       </p:sp>
       <p:sp>
         <p:nvSpPr>
@@ -19036,7 +19413,7 @@
           <a:bodyPr wrap="square" rtlCol="0" anchor="ctr"/>
           <a:lstStyle/>
           <a:p>
-            <a:pPr algn="ctr" indent="0" marL="0">
+            <a:pPr marL="0" indent="0" algn="ctr">
               <a:buNone/>
             </a:pPr>
             <a:r>
@@ -19050,9 +19427,6 @@
               </a:rPr>
               <a:t>L</a:t>
             </a:r>
-            <a:pPr algn="ctr" indent="0" marL="0">
-              <a:buNone/>
-            </a:pPr>
             <a:r>
               <a:rPr lang="en-US" sz="1100" dirty="0">
                 <a:solidFill>
@@ -19064,9 +19438,6 @@
               </a:rPr>
               <a:t>base</a:t>
             </a:r>
-            <a:pPr algn="ctr" indent="0" marL="0">
-              <a:buNone/>
-            </a:pPr>
             <a:r>
               <a:rPr lang="en-US" sz="1700" dirty="0">
                 <a:solidFill>
@@ -19078,9 +19449,6 @@
               </a:rPr>
               <a:t> = L</a:t>
             </a:r>
-            <a:pPr algn="ctr" indent="0" marL="0">
-              <a:buNone/>
-            </a:pPr>
             <a:r>
               <a:rPr lang="en-US" sz="1100" dirty="0">
                 <a:solidFill>
@@ -19092,9 +19460,6 @@
               </a:rPr>
               <a:t>CE</a:t>
             </a:r>
-            <a:pPr algn="ctr" indent="0" marL="0">
-              <a:buNone/>
-            </a:pPr>
             <a:r>
               <a:rPr lang="en-US" sz="1700" dirty="0">
                 <a:solidFill>
@@ -19106,9 +19471,6 @@
               </a:rPr>
               <a:t> + L</a:t>
             </a:r>
-            <a:pPr algn="ctr" indent="0" marL="0">
-              <a:buNone/>
-            </a:pPr>
             <a:r>
               <a:rPr lang="en-US" sz="1100" dirty="0">
                 <a:solidFill>
@@ -19143,6 +19505,13 @@
           </a:solidFill>
           <a:ln/>
         </p:spPr>
+        <p:txBody>
+          <a:bodyPr/>
+          <a:lstStyle/>
+          <a:p>
+            <a:endParaRPr lang="en-US"/>
+          </a:p>
+        </p:txBody>
       </p:sp>
       <p:sp>
         <p:nvSpPr>
@@ -19165,7 +19534,7 @@
           <a:bodyPr wrap="square" rtlCol="0" anchor="ctr"/>
           <a:lstStyle/>
           <a:p>
-            <a:pPr algn="ctr" indent="0" marL="0">
+            <a:pPr marL="0" indent="0" algn="ctr">
               <a:buNone/>
             </a:pPr>
             <a:r>
@@ -19484,4 +19853,319 @@
     </a:ext>
   </a:extLst>
 </a:theme>
+</file>
+
+<file path=ppt/theme/theme2.xml><?xml version="1.0" encoding="utf-8"?>
+<a:theme xmlns:a="http://schemas.openxmlformats.org/drawingml/2006/main" name="Office Theme">
+  <a:themeElements>
+    <a:clrScheme name="Office">
+      <a:dk1>
+        <a:sysClr val="windowText" lastClr="000000"/>
+      </a:dk1>
+      <a:lt1>
+        <a:sysClr val="window" lastClr="FFFFFF"/>
+      </a:lt1>
+      <a:dk2>
+        <a:srgbClr val="0E2841"/>
+      </a:dk2>
+      <a:lt2>
+        <a:srgbClr val="E8E8E8"/>
+      </a:lt2>
+      <a:accent1>
+        <a:srgbClr val="156082"/>
+      </a:accent1>
+      <a:accent2>
+        <a:srgbClr val="E97132"/>
+      </a:accent2>
+      <a:accent3>
+        <a:srgbClr val="196B24"/>
+      </a:accent3>
+      <a:accent4>
+        <a:srgbClr val="0F9ED5"/>
+      </a:accent4>
+      <a:accent5>
+        <a:srgbClr val="A02B93"/>
+      </a:accent5>
+      <a:accent6>
+        <a:srgbClr val="4EA72E"/>
+      </a:accent6>
+      <a:hlink>
+        <a:srgbClr val="467886"/>
+      </a:hlink>
+      <a:folHlink>
+        <a:srgbClr val="96607D"/>
+      </a:folHlink>
+    </a:clrScheme>
+    <a:fontScheme name="Office">
+      <a:majorFont>
+        <a:latin typeface="Aptos Display" panose="02110004020202020204"/>
+        <a:ea typeface=""/>
+        <a:cs typeface=""/>
+        <a:font script="Jpan" typeface="游ゴシック Light"/>
+        <a:font script="Hang" typeface="맑은 고딕"/>
+        <a:font script="Hans" typeface="等线 Light"/>
+        <a:font script="Hant" typeface="新細明體"/>
+        <a:font script="Arab" typeface="Times New Roman"/>
+        <a:font script="Hebr" typeface="Times New Roman"/>
+        <a:font script="Thai" typeface="Angsana New"/>
+        <a:font script="Ethi" typeface="Nyala"/>
+        <a:font script="Beng" typeface="Vrinda"/>
+        <a:font script="Gujr" typeface="Shruti"/>
+        <a:font script="Khmr" typeface="MoolBoran"/>
+        <a:font script="Knda" typeface="Tunga"/>
+        <a:font script="Guru" typeface="Raavi"/>
+        <a:font script="Cans" typeface="Euphemia"/>
+        <a:font script="Cher" typeface="Plantagenet Cherokee"/>
+        <a:font script="Yiii" typeface="Microsoft Yi Baiti"/>
+        <a:font script="Tibt" typeface="Microsoft Himalaya"/>
+        <a:font script="Thaa" typeface="MV Boli"/>
+        <a:font script="Deva" typeface="Mangal"/>
+        <a:font script="Telu" typeface="Gautami"/>
+        <a:font script="Taml" typeface="Latha"/>
+        <a:font script="Syrc" typeface="Estrangelo Edessa"/>
+        <a:font script="Orya" typeface="Kalinga"/>
+        <a:font script="Mlym" typeface="Kartika"/>
+        <a:font script="Laoo" typeface="DokChampa"/>
+        <a:font script="Sinh" typeface="Iskoola Pota"/>
+        <a:font script="Mong" typeface="Mongolian Baiti"/>
+        <a:font script="Viet" typeface="Times New Roman"/>
+        <a:font script="Uigh" typeface="Microsoft Uighur"/>
+        <a:font script="Geor" typeface="Sylfaen"/>
+        <a:font script="Armn" typeface="Arial"/>
+        <a:font script="Bugi" typeface="Leelawadee UI"/>
+        <a:font script="Bopo" typeface="Microsoft JhengHei"/>
+        <a:font script="Java" typeface="Javanese Text"/>
+        <a:font script="Lisu" typeface="Segoe UI"/>
+        <a:font script="Mymr" typeface="Myanmar Text"/>
+        <a:font script="Nkoo" typeface="Ebrima"/>
+        <a:font script="Olck" typeface="Nirmala UI"/>
+        <a:font script="Osma" typeface="Ebrima"/>
+        <a:font script="Phag" typeface="Phagspa"/>
+        <a:font script="Syrn" typeface="Estrangelo Edessa"/>
+        <a:font script="Syrj" typeface="Estrangelo Edessa"/>
+        <a:font script="Syre" typeface="Estrangelo Edessa"/>
+        <a:font script="Sora" typeface="Nirmala UI"/>
+        <a:font script="Tale" typeface="Microsoft Tai Le"/>
+        <a:font script="Talu" typeface="Microsoft New Tai Lue"/>
+        <a:font script="Tfng" typeface="Ebrima"/>
+      </a:majorFont>
+      <a:minorFont>
+        <a:latin typeface="Aptos" panose="02110004020202020204"/>
+        <a:ea typeface=""/>
+        <a:cs typeface=""/>
+        <a:font script="Jpan" typeface="游ゴシック"/>
+        <a:font script="Hang" typeface="맑은 고딕"/>
+        <a:font script="Hans" typeface="等线"/>
+        <a:font script="Hant" typeface="新細明體"/>
+        <a:font script="Arab" typeface="Arial"/>
+        <a:font script="Hebr" typeface="Arial"/>
+        <a:font script="Thai" typeface="Cordia New"/>
+        <a:font script="Ethi" typeface="Nyala"/>
+        <a:font script="Beng" typeface="Vrinda"/>
+        <a:font script="Gujr" typeface="Shruti"/>
+        <a:font script="Khmr" typeface="DaunPenh"/>
+        <a:font script="Knda" typeface="Tunga"/>
+        <a:font script="Guru" typeface="Raavi"/>
+        <a:font script="Cans" typeface="Euphemia"/>
+        <a:font script="Cher" typeface="Plantagenet Cherokee"/>
+        <a:font script="Yiii" typeface="Microsoft Yi Baiti"/>
+        <a:font script="Tibt" typeface="Microsoft Himalaya"/>
+        <a:font script="Thaa" typeface="MV Boli"/>
+        <a:font script="Deva" typeface="Mangal"/>
+        <a:font script="Telu" typeface="Gautami"/>
+        <a:font script="Taml" typeface="Latha"/>
+        <a:font script="Syrc" typeface="Estrangelo Edessa"/>
+        <a:font script="Orya" typeface="Kalinga"/>
+        <a:font script="Mlym" typeface="Kartika"/>
+        <a:font script="Laoo" typeface="DokChampa"/>
+        <a:font script="Sinh" typeface="Iskoola Pota"/>
+        <a:font script="Mong" typeface="Mongolian Baiti"/>
+        <a:font script="Viet" typeface="Arial"/>
+        <a:font script="Uigh" typeface="Microsoft Uighur"/>
+        <a:font script="Geor" typeface="Sylfaen"/>
+        <a:font script="Armn" typeface="Arial"/>
+        <a:font script="Bugi" typeface="Leelawadee UI"/>
+        <a:font script="Bopo" typeface="Microsoft JhengHei"/>
+        <a:font script="Java" typeface="Javanese Text"/>
+        <a:font script="Lisu" typeface="Segoe UI"/>
+        <a:font script="Mymr" typeface="Myanmar Text"/>
+        <a:font script="Nkoo" typeface="Ebrima"/>
+        <a:font script="Olck" typeface="Nirmala UI"/>
+        <a:font script="Osma" typeface="Ebrima"/>
+        <a:font script="Phag" typeface="Phagspa"/>
+        <a:font script="Syrn" typeface="Estrangelo Edessa"/>
+        <a:font script="Syrj" typeface="Estrangelo Edessa"/>
+        <a:font script="Syre" typeface="Estrangelo Edessa"/>
+        <a:font script="Sora" typeface="Nirmala UI"/>
+        <a:font script="Tale" typeface="Microsoft Tai Le"/>
+        <a:font script="Talu" typeface="Microsoft New Tai Lue"/>
+        <a:font script="Tfng" typeface="Ebrima"/>
+      </a:minorFont>
+    </a:fontScheme>
+    <a:fmtScheme name="Office">
+      <a:fillStyleLst>
+        <a:solidFill>
+          <a:schemeClr val="phClr"/>
+        </a:solidFill>
+        <a:gradFill rotWithShape="1">
+          <a:gsLst>
+            <a:gs pos="0">
+              <a:schemeClr val="phClr">
+                <a:lumMod val="110000"/>
+                <a:satMod val="105000"/>
+                <a:tint val="67000"/>
+              </a:schemeClr>
+            </a:gs>
+            <a:gs pos="50000">
+              <a:schemeClr val="phClr">
+                <a:lumMod val="105000"/>
+                <a:satMod val="103000"/>
+                <a:tint val="73000"/>
+              </a:schemeClr>
+            </a:gs>
+            <a:gs pos="100000">
+              <a:schemeClr val="phClr">
+                <a:lumMod val="105000"/>
+                <a:satMod val="109000"/>
+                <a:tint val="81000"/>
+              </a:schemeClr>
+            </a:gs>
+          </a:gsLst>
+          <a:lin ang="5400000" scaled="0"/>
+        </a:gradFill>
+        <a:gradFill rotWithShape="1">
+          <a:gsLst>
+            <a:gs pos="0">
+              <a:schemeClr val="phClr">
+                <a:satMod val="103000"/>
+                <a:lumMod val="102000"/>
+                <a:tint val="94000"/>
+              </a:schemeClr>
+            </a:gs>
+            <a:gs pos="50000">
+              <a:schemeClr val="phClr">
+                <a:satMod val="110000"/>
+                <a:lumMod val="100000"/>
+                <a:shade val="100000"/>
+              </a:schemeClr>
+            </a:gs>
+            <a:gs pos="100000">
+              <a:schemeClr val="phClr">
+                <a:lumMod val="99000"/>
+                <a:satMod val="120000"/>
+                <a:shade val="78000"/>
+              </a:schemeClr>
+            </a:gs>
+          </a:gsLst>
+          <a:lin ang="5400000" scaled="0"/>
+        </a:gradFill>
+      </a:fillStyleLst>
+      <a:lnStyleLst>
+        <a:ln w="12700" cap="flat" cmpd="sng" algn="ctr">
+          <a:solidFill>
+            <a:schemeClr val="phClr"/>
+          </a:solidFill>
+          <a:prstDash val="solid"/>
+          <a:miter lim="800000"/>
+        </a:ln>
+        <a:ln w="19050" cap="flat" cmpd="sng" algn="ctr">
+          <a:solidFill>
+            <a:schemeClr val="phClr"/>
+          </a:solidFill>
+          <a:prstDash val="solid"/>
+          <a:miter lim="800000"/>
+        </a:ln>
+        <a:ln w="25400" cap="flat" cmpd="sng" algn="ctr">
+          <a:solidFill>
+            <a:schemeClr val="phClr"/>
+          </a:solidFill>
+          <a:prstDash val="solid"/>
+          <a:miter lim="800000"/>
+        </a:ln>
+      </a:lnStyleLst>
+      <a:effectStyleLst>
+        <a:effectStyle>
+          <a:effectLst/>
+        </a:effectStyle>
+        <a:effectStyle>
+          <a:effectLst/>
+        </a:effectStyle>
+        <a:effectStyle>
+          <a:effectLst>
+            <a:outerShdw blurRad="57150" dist="19050" dir="5400000" algn="ctr" rotWithShape="0">
+              <a:srgbClr val="000000">
+                <a:alpha val="63000"/>
+              </a:srgbClr>
+            </a:outerShdw>
+          </a:effectLst>
+        </a:effectStyle>
+      </a:effectStyleLst>
+      <a:bgFillStyleLst>
+        <a:solidFill>
+          <a:schemeClr val="phClr"/>
+        </a:solidFill>
+        <a:solidFill>
+          <a:schemeClr val="phClr">
+            <a:tint val="95000"/>
+            <a:satMod val="170000"/>
+          </a:schemeClr>
+        </a:solidFill>
+        <a:gradFill rotWithShape="1">
+          <a:gsLst>
+            <a:gs pos="0">
+              <a:schemeClr val="phClr">
+                <a:tint val="93000"/>
+                <a:satMod val="150000"/>
+                <a:shade val="98000"/>
+                <a:lumMod val="102000"/>
+              </a:schemeClr>
+            </a:gs>
+            <a:gs pos="50000">
+              <a:schemeClr val="phClr">
+                <a:tint val="98000"/>
+                <a:satMod val="130000"/>
+                <a:shade val="90000"/>
+                <a:lumMod val="103000"/>
+              </a:schemeClr>
+            </a:gs>
+            <a:gs pos="100000">
+              <a:schemeClr val="phClr">
+                <a:shade val="63000"/>
+                <a:satMod val="120000"/>
+              </a:schemeClr>
+            </a:gs>
+          </a:gsLst>
+          <a:lin ang="5400000" scaled="0"/>
+        </a:gradFill>
+      </a:bgFillStyleLst>
+    </a:fmtScheme>
+  </a:themeElements>
+  <a:objectDefaults>
+    <a:lnDef>
+      <a:spPr/>
+      <a:bodyPr/>
+      <a:lstStyle/>
+      <a:style>
+        <a:lnRef idx="2">
+          <a:schemeClr val="accent1"/>
+        </a:lnRef>
+        <a:fillRef idx="0">
+          <a:schemeClr val="accent1"/>
+        </a:fillRef>
+        <a:effectRef idx="1">
+          <a:schemeClr val="accent1"/>
+        </a:effectRef>
+        <a:fontRef idx="minor">
+          <a:schemeClr val="tx1"/>
+        </a:fontRef>
+      </a:style>
+    </a:lnDef>
+  </a:objectDefaults>
+  <a:extraClrSchemeLst/>
+  <a:extLst>
+    <a:ext uri="{05A4C25C-085E-4340-85A3-A5531E510DB2}">
+      <thm15:themeFamily xmlns:thm15="http://schemas.microsoft.com/office/thememl/2012/main" name="Office Theme" id="{2E142A2C-CD16-42D6-873A-C26D2A0506FA}" vid="{1BDDFF52-6CD6-40A5-AB3C-68EB2F1E4D0A}"/>
+    </a:ext>
+  </a:extLst>
+</a:theme>
 </file>
--- a/vessel_seg_v2/CTA Seg V2/report/presentation_v2.pptx
+++ b/vessel_seg_v2/CTA Seg V2/report/presentation_v2.pptx
@@ -4,9 +4,6 @@
   <p:sldMasterIdLst>
     <p:sldMasterId id="2147483648" r:id="rId1"/>
   </p:sldMasterIdLst>
-  <p:notesMasterIdLst>
-    <p:notesMasterId r:id="rId23"/>
-  </p:notesMasterIdLst>
   <p:sldIdLst>
     <p:sldId id="256" r:id="rId2"/>
     <p:sldId id="257" r:id="rId3"/>
@@ -30,6 +27,9 @@
     <p:sldId id="275" r:id="rId21"/>
     <p:sldId id="276" r:id="rId22"/>
   </p:sldIdLst>
+  <p:notesMasterIdLst>
+    <p:notesMasterId r:id="rId23"/>
+  </p:notesMasterIdLst>
   <p:sldSz cx="12192000" cy="6858000"/>
   <p:notesSz cx="6858000" cy="12192000"/>
   <p:defaultTextStyle>
@@ -124,11 +124,6 @@
       </a:defRPr>
     </a:lvl9pPr>
   </p:defaultTextStyle>
-  <p:extLst>
-    <p:ext uri="{EFAFB233-063F-42B5-8137-9DF3F51BA10A}">
-      <p15:sldGuideLst xmlns:p15="http://schemas.microsoft.com/office/powerpoint/2012/main"/>
-    </p:ext>
-  </p:extLst>
 </p:presentation>
 </file>
 
@@ -154,10 +149,234 @@
           <a:chExt cx="0" cy="0"/>
         </a:xfrm>
       </p:grpSpPr>
+      <p:sp>
+        <p:nvSpPr>
+          <p:cNvPr id="2" name="Header Placeholder 1"/>
+          <p:cNvSpPr>
+            <a:spLocks noGrp="1"/>
+          </p:cNvSpPr>
+          <p:nvPr>
+            <p:ph type="hdr" sz="quarter"/>
+          </p:nvPr>
+        </p:nvSpPr>
+        <p:spPr>
+          <a:xfrm>
+            <a:off x="0" y="0"/>
+            <a:ext cx="2971800" cy="458788"/>
+          </a:xfrm>
+          <a:prstGeom prst="rect">
+            <a:avLst/>
+          </a:prstGeom>
+        </p:spPr>
+        <p:txBody>
+          <a:bodyPr vert="horz" lIns="91440" tIns="45720" rIns="91440" bIns="45720" rtlCol="0"/>
+          <a:lstStyle>
+            <a:lvl1pPr algn="l">
+              <a:defRPr sz="1200"/>
+            </a:lvl1pPr>
+          </a:lstStyle>
+          <a:p>
+            <a:endParaRPr lang="en-US"/>
+          </a:p>
+        </p:txBody>
+      </p:sp>
+      <p:sp>
+        <p:nvSpPr>
+          <p:cNvPr id="3" name="Date Placeholder 2"/>
+          <p:cNvSpPr>
+            <a:spLocks noGrp="1"/>
+          </p:cNvSpPr>
+          <p:nvPr>
+            <p:ph type="dt" idx="1"/>
+          </p:nvPr>
+        </p:nvSpPr>
+        <p:spPr>
+          <a:xfrm>
+            <a:off x="3884613" y="0"/>
+            <a:ext cx="2971800" cy="458788"/>
+          </a:xfrm>
+          <a:prstGeom prst="rect">
+            <a:avLst/>
+          </a:prstGeom>
+        </p:spPr>
+        <p:txBody>
+          <a:bodyPr vert="horz" lIns="91440" tIns="45720" rIns="91440" bIns="45720" rtlCol="0"/>
+          <a:lstStyle>
+            <a:lvl1pPr algn="r">
+              <a:defRPr sz="1200"/>
+            </a:lvl1pPr>
+          </a:lstStyle>
+          <a:p>
+            <a:fld id="{5282F153-3F37-0F45-9E97-73ACFA13230C}" type="datetimeFigureOut">
+              <a:rPr lang="en-US"/>
+              <a:t>7/23/19</a:t>
+            </a:fld>
+            <a:endParaRPr lang="en-US"/>
+          </a:p>
+        </p:txBody>
+      </p:sp>
+      <p:sp>
+        <p:nvSpPr>
+          <p:cNvPr id="4" name="Slide Image Placeholder 3"/>
+          <p:cNvSpPr>
+            <a:spLocks noGrp="1" noRot="1" noChangeAspect="1"/>
+          </p:cNvSpPr>
+          <p:nvPr>
+            <p:ph type="sldImg" idx="2"/>
+          </p:nvPr>
+        </p:nvSpPr>
+        <p:spPr>
+          <a:xfrm>
+            <a:off x="685800" y="1143000"/>
+            <a:ext cx="5486400" cy="3086100"/>
+          </a:xfrm>
+          <a:prstGeom prst="rect">
+            <a:avLst/>
+          </a:prstGeom>
+          <a:noFill/>
+          <a:ln w="12700">
+            <a:solidFill>
+              <a:prstClr val="black"/>
+            </a:solidFill>
+          </a:ln>
+        </p:spPr>
+        <p:txBody>
+          <a:bodyPr vert="horz" lIns="91440" tIns="45720" rIns="91440" bIns="45720" rtlCol="0" anchor="ctr"/>
+          <a:lstStyle/>
+          <a:p>
+            <a:endParaRPr lang="en-US"/>
+          </a:p>
+        </p:txBody>
+      </p:sp>
+      <p:sp>
+        <p:nvSpPr>
+          <p:cNvPr id="5" name="Notes Placeholder 4"/>
+          <p:cNvSpPr>
+            <a:spLocks noGrp="1"/>
+          </p:cNvSpPr>
+          <p:nvPr>
+            <p:ph type="body" sz="quarter" idx="3"/>
+          </p:nvPr>
+        </p:nvSpPr>
+        <p:spPr>
+          <a:xfrm>
+            <a:off x="685800" y="4400550"/>
+            <a:ext cx="5486400" cy="3600450"/>
+          </a:xfrm>
+          <a:prstGeom prst="rect">
+            <a:avLst/>
+          </a:prstGeom>
+        </p:spPr>
+        <p:txBody>
+          <a:bodyPr vert="horz" lIns="91440" tIns="45720" rIns="91440" bIns="45720" rtlCol="0"/>
+          <a:lstStyle/>
+          <a:p>
+            <a:pPr lvl="0"/>
+            <a:r>
+              <a:rPr lang="en-US"/>
+              <a:t>Click to edit Master text styles</a:t>
+            </a:r>
+          </a:p>
+          <a:p>
+            <a:pPr lvl="1"/>
+            <a:r>
+              <a:rPr lang="en-US"/>
+              <a:t>Second level</a:t>
+            </a:r>
+          </a:p>
+          <a:p>
+            <a:pPr lvl="2"/>
+            <a:r>
+              <a:rPr lang="en-US"/>
+              <a:t>Third level</a:t>
+            </a:r>
+          </a:p>
+          <a:p>
+            <a:pPr lvl="3"/>
+            <a:r>
+              <a:rPr lang="en-US"/>
+              <a:t>Fourth level</a:t>
+            </a:r>
+          </a:p>
+          <a:p>
+            <a:pPr lvl="4"/>
+            <a:r>
+              <a:rPr lang="en-US"/>
+              <a:t>Fifth level</a:t>
+            </a:r>
+          </a:p>
+        </p:txBody>
+      </p:sp>
+      <p:sp>
+        <p:nvSpPr>
+          <p:cNvPr id="6" name="Footer Placeholder 5"/>
+          <p:cNvSpPr>
+            <a:spLocks noGrp="1"/>
+          </p:cNvSpPr>
+          <p:nvPr>
+            <p:ph type="ftr" sz="quarter" idx="4"/>
+          </p:nvPr>
+        </p:nvSpPr>
+        <p:spPr>
+          <a:xfrm>
+            <a:off x="0" y="8685213"/>
+            <a:ext cx="2971800" cy="458787"/>
+          </a:xfrm>
+          <a:prstGeom prst="rect">
+            <a:avLst/>
+          </a:prstGeom>
+        </p:spPr>
+        <p:txBody>
+          <a:bodyPr vert="horz" lIns="91440" tIns="45720" rIns="91440" bIns="45720" rtlCol="0" anchor="b"/>
+          <a:lstStyle>
+            <a:lvl1pPr algn="l">
+              <a:defRPr sz="1200"/>
+            </a:lvl1pPr>
+          </a:lstStyle>
+          <a:p>
+            <a:endParaRPr lang="en-US"/>
+          </a:p>
+        </p:txBody>
+      </p:sp>
+      <p:sp>
+        <p:nvSpPr>
+          <p:cNvPr id="7" name="Slide Number Placeholder 6"/>
+          <p:cNvSpPr>
+            <a:spLocks noGrp="1"/>
+          </p:cNvSpPr>
+          <p:nvPr>
+            <p:ph type="sldNum" sz="quarter" idx="5"/>
+          </p:nvPr>
+        </p:nvSpPr>
+        <p:spPr>
+          <a:xfrm>
+            <a:off x="3884613" y="8685213"/>
+            <a:ext cx="2971800" cy="458787"/>
+          </a:xfrm>
+          <a:prstGeom prst="rect">
+            <a:avLst/>
+          </a:prstGeom>
+        </p:spPr>
+        <p:txBody>
+          <a:bodyPr vert="horz" lIns="91440" tIns="45720" rIns="91440" bIns="45720" rtlCol="0" anchor="b"/>
+          <a:lstStyle>
+            <a:lvl1pPr algn="r">
+              <a:defRPr sz="1200"/>
+            </a:lvl1pPr>
+          </a:lstStyle>
+          <a:p>
+            <a:fld id="{CE5E9CC1-C706-0F49-92D6-E571CC5EEA8F}" type="slidenum">
+              <a:rPr lang="en-US"/>
+              <a:t>‹#›</a:t>
+            </a:fld>
+            <a:endParaRPr lang="en-US"/>
+          </a:p>
+        </p:txBody>
+      </p:sp>
     </p:spTree>
     <p:extLst>
       <p:ext uri="{BB962C8B-B14F-4D97-AF65-F5344CB8AC3E}">
-        <p14:creationId xmlns:p14="http://schemas.microsoft.com/office/powerpoint/2010/main" val="3535504374"/>
+        <p14:creationId xmlns:p14="http://schemas.microsoft.com/office/powerpoint/2010/main" val="1024086991"/>
       </p:ext>
     </p:extLst>
   </p:cSld>
@@ -301,6 +520,10 @@
           <a:bodyPr/>
           <a:lstStyle/>
           <a:p>
+            <a:r>
+              <a:rPr lang="en-US" dirty="0"/>
+              <a:t/>
+            </a:r>
             <a:endParaRPr lang="en-US" dirty="0"/>
           </a:p>
         </p:txBody>
@@ -385,6 +608,10 @@
           <a:bodyPr/>
           <a:lstStyle/>
           <a:p>
+            <a:r>
+              <a:rPr lang="en-US" dirty="0"/>
+              <a:t/>
+            </a:r>
             <a:endParaRPr lang="en-US" dirty="0"/>
           </a:p>
         </p:txBody>
@@ -469,6 +696,10 @@
           <a:bodyPr/>
           <a:lstStyle/>
           <a:p>
+            <a:r>
+              <a:rPr lang="en-US" dirty="0"/>
+              <a:t/>
+            </a:r>
             <a:endParaRPr lang="en-US" dirty="0"/>
           </a:p>
         </p:txBody>
@@ -553,6 +784,10 @@
           <a:bodyPr/>
           <a:lstStyle/>
           <a:p>
+            <a:r>
+              <a:rPr lang="en-US" dirty="0"/>
+              <a:t/>
+            </a:r>
             <a:endParaRPr lang="en-US" dirty="0"/>
           </a:p>
         </p:txBody>
@@ -637,6 +872,10 @@
           <a:bodyPr/>
           <a:lstStyle/>
           <a:p>
+            <a:r>
+              <a:rPr lang="en-US" dirty="0"/>
+              <a:t/>
+            </a:r>
             <a:endParaRPr lang="en-US" dirty="0"/>
           </a:p>
         </p:txBody>
@@ -721,6 +960,10 @@
           <a:bodyPr/>
           <a:lstStyle/>
           <a:p>
+            <a:r>
+              <a:rPr lang="en-US" dirty="0"/>
+              <a:t/>
+            </a:r>
             <a:endParaRPr lang="en-US" dirty="0"/>
           </a:p>
         </p:txBody>
@@ -805,6 +1048,10 @@
           <a:bodyPr/>
           <a:lstStyle/>
           <a:p>
+            <a:r>
+              <a:rPr lang="en-US" dirty="0"/>
+              <a:t/>
+            </a:r>
             <a:endParaRPr lang="en-US" dirty="0"/>
           </a:p>
         </p:txBody>
@@ -889,6 +1136,10 @@
           <a:bodyPr/>
           <a:lstStyle/>
           <a:p>
+            <a:r>
+              <a:rPr lang="en-US" dirty="0"/>
+              <a:t/>
+            </a:r>
             <a:endParaRPr lang="en-US" dirty="0"/>
           </a:p>
         </p:txBody>
@@ -973,6 +1224,10 @@
           <a:bodyPr/>
           <a:lstStyle/>
           <a:p>
+            <a:r>
+              <a:rPr lang="en-US" dirty="0"/>
+              <a:t/>
+            </a:r>
             <a:endParaRPr lang="en-US" dirty="0"/>
           </a:p>
         </p:txBody>
@@ -1057,6 +1312,10 @@
           <a:bodyPr/>
           <a:lstStyle/>
           <a:p>
+            <a:r>
+              <a:rPr lang="en-US" dirty="0"/>
+              <a:t/>
+            </a:r>
             <a:endParaRPr lang="en-US" dirty="0"/>
           </a:p>
         </p:txBody>
@@ -1141,6 +1400,10 @@
           <a:bodyPr/>
           <a:lstStyle/>
           <a:p>
+            <a:r>
+              <a:rPr lang="en-US" dirty="0"/>
+              <a:t/>
+            </a:r>
             <a:endParaRPr lang="en-US" dirty="0"/>
           </a:p>
         </p:txBody>
@@ -1225,6 +1488,10 @@
           <a:bodyPr/>
           <a:lstStyle/>
           <a:p>
+            <a:r>
+              <a:rPr lang="en-US" dirty="0"/>
+              <a:t/>
+            </a:r>
             <a:endParaRPr lang="en-US" dirty="0"/>
           </a:p>
         </p:txBody>
@@ -1309,6 +1576,10 @@
           <a:bodyPr/>
           <a:lstStyle/>
           <a:p>
+            <a:r>
+              <a:rPr lang="en-US" dirty="0"/>
+              <a:t/>
+            </a:r>
             <a:endParaRPr lang="en-US" dirty="0"/>
           </a:p>
         </p:txBody>
@@ -1393,6 +1664,10 @@
           <a:bodyPr/>
           <a:lstStyle/>
           <a:p>
+            <a:r>
+              <a:rPr lang="en-US" dirty="0"/>
+              <a:t/>
+            </a:r>
             <a:endParaRPr lang="en-US" dirty="0"/>
           </a:p>
         </p:txBody>
@@ -1477,6 +1752,10 @@
           <a:bodyPr/>
           <a:lstStyle/>
           <a:p>
+            <a:r>
+              <a:rPr lang="en-US" dirty="0"/>
+              <a:t/>
+            </a:r>
             <a:endParaRPr lang="en-US" dirty="0"/>
           </a:p>
         </p:txBody>
@@ -1561,6 +1840,10 @@
           <a:bodyPr/>
           <a:lstStyle/>
           <a:p>
+            <a:r>
+              <a:rPr lang="en-US" dirty="0"/>
+              <a:t/>
+            </a:r>
             <a:endParaRPr lang="en-US" dirty="0"/>
           </a:p>
         </p:txBody>
@@ -1645,6 +1928,10 @@
           <a:bodyPr/>
           <a:lstStyle/>
           <a:p>
+            <a:r>
+              <a:rPr lang="en-US" dirty="0"/>
+              <a:t/>
+            </a:r>
             <a:endParaRPr lang="en-US" dirty="0"/>
           </a:p>
         </p:txBody>
@@ -1729,6 +2016,10 @@
           <a:bodyPr/>
           <a:lstStyle/>
           <a:p>
+            <a:r>
+              <a:rPr lang="en-US" dirty="0"/>
+              <a:t/>
+            </a:r>
             <a:endParaRPr lang="en-US" dirty="0"/>
           </a:p>
         </p:txBody>
@@ -1813,6 +2104,10 @@
           <a:bodyPr/>
           <a:lstStyle/>
           <a:p>
+            <a:r>
+              <a:rPr lang="en-US" dirty="0"/>
+              <a:t/>
+            </a:r>
             <a:endParaRPr lang="en-US" dirty="0"/>
           </a:p>
         </p:txBody>
@@ -1897,6 +2192,10 @@
           <a:bodyPr/>
           <a:lstStyle/>
           <a:p>
+            <a:r>
+              <a:rPr lang="en-US" dirty="0"/>
+              <a:t/>
+            </a:r>
             <a:endParaRPr lang="en-US" dirty="0"/>
           </a:p>
         </p:txBody>
@@ -1981,6 +2280,10 @@
           <a:bodyPr/>
           <a:lstStyle/>
           <a:p>
+            <a:r>
+              <a:rPr lang="en-US" dirty="0"/>
+              <a:t/>
+            </a:r>
             <a:endParaRPr lang="en-US" dirty="0"/>
           </a:p>
         </p:txBody>
@@ -2054,11 +2357,6 @@
 <file path=ppt/slideMasters/slideMaster1.xml><?xml version="1.0" encoding="utf-8"?>
 <p:sldMaster xmlns:a="http://schemas.openxmlformats.org/drawingml/2006/main" xmlns:r="http://schemas.openxmlformats.org/officeDocument/2006/relationships" xmlns:p="http://schemas.openxmlformats.org/presentationml/2006/main">
   <p:cSld>
-    <p:bg>
-      <p:bgRef idx="1001">
-        <a:schemeClr val="bg1"/>
-      </p:bgRef>
-    </p:bg>
     <p:spTree>
       <p:nvGrpSpPr>
         <p:cNvPr id="1" name=""/>
@@ -2341,7 +2639,6 @@
         <a:solidFill>
           <a:srgbClr val="131B2E"/>
         </a:solidFill>
-        <a:effectLst/>
       </p:bgPr>
     </p:bg>
     <p:spTree>
@@ -2377,13 +2674,6 @@
           </a:solidFill>
           <a:ln/>
         </p:spPr>
-        <p:txBody>
-          <a:bodyPr/>
-          <a:lstStyle/>
-          <a:p>
-            <a:endParaRPr lang="en-US"/>
-          </a:p>
-        </p:txBody>
       </p:sp>
       <p:sp>
         <p:nvSpPr>
@@ -2404,13 +2694,6 @@
           </a:solidFill>
           <a:ln/>
         </p:spPr>
-        <p:txBody>
-          <a:bodyPr/>
-          <a:lstStyle/>
-          <a:p>
-            <a:endParaRPr lang="en-US"/>
-          </a:p>
-        </p:txBody>
       </p:sp>
       <p:sp>
         <p:nvSpPr>
@@ -2433,7 +2716,7 @@
           <a:bodyPr wrap="square" lIns="0" tIns="0" rIns="0" bIns="0" rtlCol="0" anchor="ctr"/>
           <a:lstStyle/>
           <a:p>
-            <a:pPr marL="0" indent="0">
+            <a:pPr indent="0" marL="0">
               <a:lnSpc>
                 <a:spcPct val="110000"/>
               </a:lnSpc>
@@ -2453,7 +2736,7 @@
             <a:endParaRPr lang="en-US" sz="4000" dirty="0"/>
           </a:p>
           <a:p>
-            <a:pPr marL="0" indent="0">
+            <a:pPr indent="0" marL="0">
               <a:lnSpc>
                 <a:spcPct val="110000"/>
               </a:lnSpc>
@@ -2495,7 +2778,7 @@
           <a:bodyPr wrap="square" lIns="0" tIns="0" rIns="0" bIns="0" rtlCol="0" anchor="ctr"/>
           <a:lstStyle/>
           <a:p>
-            <a:pPr marL="0" indent="0">
+            <a:pPr indent="0" marL="0">
               <a:buNone/>
             </a:pPr>
             <a:r>
@@ -2534,7 +2817,7 @@
           <a:bodyPr wrap="square" lIns="0" tIns="0" rIns="0" bIns="0" rtlCol="0" anchor="ctr"/>
           <a:lstStyle/>
           <a:p>
-            <a:pPr marL="0" indent="0">
+            <a:pPr indent="0" marL="0">
               <a:buNone/>
             </a:pPr>
             <a:r>
@@ -2573,7 +2856,7 @@
           <a:bodyPr wrap="square" lIns="0" tIns="0" rIns="0" bIns="0" rtlCol="0" anchor="ctr"/>
           <a:lstStyle/>
           <a:p>
-            <a:pPr marL="0" indent="0">
+            <a:pPr indent="0" marL="0">
               <a:buNone/>
             </a:pPr>
             <a:r>
@@ -2590,7 +2873,7 @@
             <a:endParaRPr lang="en-US" sz="1400" dirty="0"/>
           </a:p>
           <a:p>
-            <a:pPr marL="0" indent="0">
+            <a:pPr indent="0" marL="0">
               <a:buNone/>
             </a:pPr>
             <a:r>
@@ -2624,7 +2907,6 @@
         <a:solidFill>
           <a:srgbClr val="131B2E"/>
         </a:solidFill>
-        <a:effectLst/>
       </p:bgPr>
     </p:bg>
     <p:spTree>
@@ -2660,13 +2942,6 @@
           </a:solidFill>
           <a:ln/>
         </p:spPr>
-        <p:txBody>
-          <a:bodyPr/>
-          <a:lstStyle/>
-          <a:p>
-            <a:endParaRPr lang="en-US"/>
-          </a:p>
-        </p:txBody>
       </p:sp>
       <p:sp>
         <p:nvSpPr>
@@ -2689,7 +2964,7 @@
           <a:bodyPr wrap="square" lIns="0" tIns="0" rIns="0" bIns="0" rtlCol="0" anchor="ctr"/>
           <a:lstStyle/>
           <a:p>
-            <a:pPr marL="0" indent="0">
+            <a:pPr indent="0" marL="0">
               <a:buNone/>
             </a:pPr>
             <a:r>
@@ -2728,7 +3003,7 @@
           <a:bodyPr wrap="square" lIns="0" tIns="0" rIns="0" bIns="0" rtlCol="0" anchor="ctr"/>
           <a:lstStyle/>
           <a:p>
-            <a:pPr marL="0" indent="0">
+            <a:pPr indent="0" marL="0">
               <a:buNone/>
             </a:pPr>
             <a:r>
@@ -2765,20 +3040,13 @@
           </a:solidFill>
           <a:ln/>
           <a:effectLst>
-            <a:outerShdw blurRad="50800" dist="25400" dir="8100000" algn="bl" rotWithShape="0">
+            <a:outerShdw sx="100000" sy="100000" kx="0" ky="0" algn="bl" rotWithShape="0" blurRad="50800" dist="25400" dir="8100000">
               <a:srgbClr val="000000">
                 <a:alpha val="20000"/>
               </a:srgbClr>
             </a:outerShdw>
           </a:effectLst>
         </p:spPr>
-        <p:txBody>
-          <a:bodyPr/>
-          <a:lstStyle/>
-          <a:p>
-            <a:endParaRPr lang="en-US"/>
-          </a:p>
-        </p:txBody>
       </p:sp>
       <p:sp>
         <p:nvSpPr>
@@ -2801,7 +3069,7 @@
           <a:bodyPr wrap="square" lIns="0" tIns="0" rIns="0" bIns="0" rtlCol="0" anchor="ctr"/>
           <a:lstStyle/>
           <a:p>
-            <a:pPr marL="0" indent="0">
+            <a:pPr indent="0" marL="0">
               <a:buNone/>
             </a:pPr>
             <a:r>
@@ -2838,13 +3106,6 @@
           </a:solidFill>
           <a:ln/>
         </p:spPr>
-        <p:txBody>
-          <a:bodyPr/>
-          <a:lstStyle/>
-          <a:p>
-            <a:endParaRPr lang="en-US"/>
-          </a:p>
-        </p:txBody>
       </p:sp>
       <p:sp>
         <p:nvSpPr>
@@ -2867,7 +3128,7 @@
           <a:bodyPr wrap="square" rtlCol="0" anchor="ctr"/>
           <a:lstStyle/>
           <a:p>
-            <a:pPr marL="0" indent="0">
+            <a:pPr indent="0" marL="0">
               <a:buNone/>
             </a:pPr>
             <a:r>
@@ -2884,7 +3145,7 @@
             <a:endParaRPr lang="en-US" sz="1400" dirty="0"/>
           </a:p>
           <a:p>
-            <a:pPr marL="0" indent="0">
+            <a:pPr indent="0" marL="0">
               <a:buNone/>
             </a:pPr>
             <a:r>
@@ -2898,6 +3159,9 @@
               </a:rPr>
               <a:t>         + Σ</a:t>
             </a:r>
+            <a:pPr indent="0" marL="0">
+              <a:buNone/>
+            </a:pPr>
             <a:r>
               <a:rPr lang="en-US" sz="1000" dirty="0">
                 <a:solidFill>
@@ -2909,6 +3173,9 @@
               </a:rPr>
               <a:t>k=1..K</a:t>
             </a:r>
+            <a:pPr indent="0" marL="0">
+              <a:buNone/>
+            </a:pPr>
             <a:r>
               <a:rPr lang="en-US" sz="1400" dirty="0">
                 <a:solidFill>
@@ -2920,6 +3187,9 @@
               </a:rPr>
               <a:t> ReLU(erode</a:t>
             </a:r>
+            <a:pPr indent="0" marL="0">
+              <a:buNone/>
+            </a:pPr>
             <a:r>
               <a:rPr lang="en-US" sz="1000" dirty="0">
                 <a:solidFill>
@@ -2931,6 +3201,9 @@
               </a:rPr>
               <a:t>k</a:t>
             </a:r>
+            <a:pPr indent="0" marL="0">
+              <a:buNone/>
+            </a:pPr>
             <a:r>
               <a:rPr lang="en-US" sz="1400" dirty="0">
                 <a:solidFill>
@@ -2942,6 +3215,9 @@
               </a:rPr>
               <a:t>(x) − open(erode</a:t>
             </a:r>
+            <a:pPr indent="0" marL="0">
+              <a:buNone/>
+            </a:pPr>
             <a:r>
               <a:rPr lang="en-US" sz="1000" dirty="0">
                 <a:solidFill>
@@ -2953,6 +3229,9 @@
               </a:rPr>
               <a:t>k</a:t>
             </a:r>
+            <a:pPr indent="0" marL="0">
+              <a:buNone/>
+            </a:pPr>
             <a:r>
               <a:rPr lang="en-US" sz="1400" dirty="0">
                 <a:solidFill>
@@ -2967,13 +3246,13 @@
             <a:endParaRPr lang="en-US" sz="1400" dirty="0"/>
           </a:p>
           <a:p>
-            <a:pPr marL="0" indent="0">
+            <a:pPr indent="0" marL="0">
               <a:buNone/>
             </a:pPr>
             <a:endParaRPr lang="en-US" sz="1400" dirty="0"/>
           </a:p>
           <a:p>
-            <a:pPr marL="0" indent="0">
+            <a:pPr indent="0" marL="0">
               <a:buNone/>
             </a:pPr>
             <a:r>
@@ -2987,10 +3266,13 @@
               </a:rPr>
               <a:t>erode(x) = −MaxPool3D(−x, k=3)    |    dilate(x) = MaxPool3D(x, k=3)</a:t>
             </a:r>
+            <a:pPr indent="0" marL="0">
+              <a:buNone/>
+            </a:pPr>
             <a:endParaRPr lang="en-US" sz="1400" dirty="0"/>
           </a:p>
           <a:p>
-            <a:pPr marL="0" indent="0">
+            <a:pPr indent="0" marL="0">
               <a:buNone/>
             </a:pPr>
             <a:r>
@@ -3027,20 +3309,13 @@
           </a:solidFill>
           <a:ln/>
           <a:effectLst>
-            <a:outerShdw blurRad="50800" dist="25400" dir="8100000" algn="bl" rotWithShape="0">
+            <a:outerShdw sx="100000" sy="100000" kx="0" ky="0" algn="bl" rotWithShape="0" blurRad="50800" dist="25400" dir="8100000">
               <a:srgbClr val="000000">
                 <a:alpha val="20000"/>
               </a:srgbClr>
             </a:outerShdw>
           </a:effectLst>
         </p:spPr>
-        <p:txBody>
-          <a:bodyPr/>
-          <a:lstStyle/>
-          <a:p>
-            <a:endParaRPr lang="en-US"/>
-          </a:p>
-        </p:txBody>
       </p:sp>
       <p:sp>
         <p:nvSpPr>
@@ -3063,7 +3338,7 @@
           <a:bodyPr wrap="square" lIns="0" tIns="0" rIns="0" bIns="0" rtlCol="0" anchor="ctr"/>
           <a:lstStyle/>
           <a:p>
-            <a:pPr marL="0" indent="0">
+            <a:pPr indent="0" marL="0">
               <a:buNone/>
             </a:pPr>
             <a:r>
@@ -3100,13 +3375,6 @@
           </a:solidFill>
           <a:ln/>
         </p:spPr>
-        <p:txBody>
-          <a:bodyPr/>
-          <a:lstStyle/>
-          <a:p>
-            <a:endParaRPr lang="en-US"/>
-          </a:p>
-        </p:txBody>
       </p:sp>
       <p:sp>
         <p:nvSpPr>
@@ -3129,7 +3397,7 @@
           <a:bodyPr wrap="square" rtlCol="0" anchor="ctr"/>
           <a:lstStyle/>
           <a:p>
-            <a:pPr marL="0" indent="0">
+            <a:pPr indent="0" marL="0">
               <a:buNone/>
             </a:pPr>
             <a:r>
@@ -3143,6 +3411,9 @@
               </a:rPr>
               <a:t>T</a:t>
             </a:r>
+            <a:pPr indent="0" marL="0">
+              <a:buNone/>
+            </a:pPr>
             <a:r>
               <a:rPr lang="en-US" sz="1000" dirty="0">
                 <a:solidFill>
@@ -3154,6 +3425,9 @@
               </a:rPr>
               <a:t>prec</a:t>
             </a:r>
+            <a:pPr indent="0" marL="0">
+              <a:buNone/>
+            </a:pPr>
             <a:r>
               <a:rPr lang="en-US" sz="1500" dirty="0">
                 <a:solidFill>
@@ -3168,13 +3442,13 @@
             <a:endParaRPr lang="en-US" sz="1500" dirty="0"/>
           </a:p>
           <a:p>
-            <a:pPr marL="0" indent="0">
+            <a:pPr indent="0" marL="0">
               <a:buNone/>
             </a:pPr>
             <a:endParaRPr lang="en-US" sz="1500" dirty="0"/>
           </a:p>
           <a:p>
-            <a:pPr marL="0" indent="0">
+            <a:pPr indent="0" marL="0">
               <a:buNone/>
             </a:pPr>
             <a:r>
@@ -3188,6 +3462,9 @@
               </a:rPr>
               <a:t>T</a:t>
             </a:r>
+            <a:pPr indent="0" marL="0">
+              <a:buNone/>
+            </a:pPr>
             <a:r>
               <a:rPr lang="en-US" sz="1000" dirty="0">
                 <a:solidFill>
@@ -3199,6 +3476,9 @@
               </a:rPr>
               <a:t>sens</a:t>
             </a:r>
+            <a:pPr indent="0" marL="0">
+              <a:buNone/>
+            </a:pPr>
             <a:r>
               <a:rPr lang="en-US" sz="1500" dirty="0">
                 <a:solidFill>
@@ -3213,13 +3493,13 @@
             <a:endParaRPr lang="en-US" sz="1500" dirty="0"/>
           </a:p>
           <a:p>
-            <a:pPr marL="0" indent="0">
+            <a:pPr indent="0" marL="0">
               <a:buNone/>
             </a:pPr>
             <a:endParaRPr lang="en-US" sz="1500" dirty="0"/>
           </a:p>
           <a:p>
-            <a:pPr marL="0" indent="0">
+            <a:pPr indent="0" marL="0">
               <a:buNone/>
             </a:pPr>
             <a:r>
@@ -3233,6 +3513,9 @@
               </a:rPr>
               <a:t>clDice = 2·T</a:t>
             </a:r>
+            <a:pPr indent="0" marL="0">
+              <a:buNone/>
+            </a:pPr>
             <a:r>
               <a:rPr lang="en-US" sz="1000" dirty="0">
                 <a:solidFill>
@@ -3244,6 +3527,9 @@
               </a:rPr>
               <a:t>prec</a:t>
             </a:r>
+            <a:pPr indent="0" marL="0">
+              <a:buNone/>
+            </a:pPr>
             <a:r>
               <a:rPr lang="en-US" sz="1500" dirty="0">
                 <a:solidFill>
@@ -3255,6 +3541,9 @@
               </a:rPr>
               <a:t>·T</a:t>
             </a:r>
+            <a:pPr indent="0" marL="0">
+              <a:buNone/>
+            </a:pPr>
             <a:r>
               <a:rPr lang="en-US" sz="1000" dirty="0">
                 <a:solidFill>
@@ -3266,6 +3555,9 @@
               </a:rPr>
               <a:t>sens</a:t>
             </a:r>
+            <a:pPr indent="0" marL="0">
+              <a:buNone/>
+            </a:pPr>
             <a:r>
               <a:rPr lang="en-US" sz="1500" dirty="0">
                 <a:solidFill>
@@ -3277,6 +3569,9 @@
               </a:rPr>
               <a:t> / (T</a:t>
             </a:r>
+            <a:pPr indent="0" marL="0">
+              <a:buNone/>
+            </a:pPr>
             <a:r>
               <a:rPr lang="en-US" sz="1000" dirty="0">
                 <a:solidFill>
@@ -3288,6 +3583,9 @@
               </a:rPr>
               <a:t>prec</a:t>
             </a:r>
+            <a:pPr indent="0" marL="0">
+              <a:buNone/>
+            </a:pPr>
             <a:r>
               <a:rPr lang="en-US" sz="1500" dirty="0">
                 <a:solidFill>
@@ -3299,6 +3597,9 @@
               </a:rPr>
               <a:t>+T</a:t>
             </a:r>
+            <a:pPr indent="0" marL="0">
+              <a:buNone/>
+            </a:pPr>
             <a:r>
               <a:rPr lang="en-US" sz="1000" dirty="0">
                 <a:solidFill>
@@ -3310,6 +3611,9 @@
               </a:rPr>
               <a:t>sens</a:t>
             </a:r>
+            <a:pPr indent="0" marL="0">
+              <a:buNone/>
+            </a:pPr>
             <a:r>
               <a:rPr lang="en-US" sz="1500" dirty="0">
                 <a:solidFill>
@@ -3344,13 +3648,6 @@
           </a:solidFill>
           <a:ln/>
         </p:spPr>
-        <p:txBody>
-          <a:bodyPr/>
-          <a:lstStyle/>
-          <a:p>
-            <a:endParaRPr lang="en-US"/>
-          </a:p>
-        </p:txBody>
       </p:sp>
       <p:sp>
         <p:nvSpPr>
@@ -3373,7 +3670,7 @@
           <a:bodyPr wrap="square" rtlCol="0" anchor="ctr"/>
           <a:lstStyle/>
           <a:p>
-            <a:pPr marL="0" indent="0" algn="ctr">
+            <a:pPr algn="ctr" indent="0" marL="0">
               <a:buNone/>
             </a:pPr>
             <a:r>
@@ -3387,6 +3684,9 @@
               </a:rPr>
               <a:t>Combined:   L</a:t>
             </a:r>
+            <a:pPr algn="ctr" indent="0" marL="0">
+              <a:buNone/>
+            </a:pPr>
             <a:r>
               <a:rPr lang="en-US" sz="1200" dirty="0">
                 <a:solidFill>
@@ -3398,6 +3698,9 @@
               </a:rPr>
               <a:t>clDice</a:t>
             </a:r>
+            <a:pPr algn="ctr" indent="0" marL="0">
+              <a:buNone/>
+            </a:pPr>
             <a:r>
               <a:rPr lang="en-US" sz="1800" dirty="0">
                 <a:solidFill>
@@ -3409,6 +3712,9 @@
               </a:rPr>
               <a:t> = (1 − α) · L</a:t>
             </a:r>
+            <a:pPr algn="ctr" indent="0" marL="0">
+              <a:buNone/>
+            </a:pPr>
             <a:r>
               <a:rPr lang="en-US" sz="1200" dirty="0">
                 <a:solidFill>
@@ -3420,6 +3726,9 @@
               </a:rPr>
               <a:t>base</a:t>
             </a:r>
+            <a:pPr algn="ctr" indent="0" marL="0">
+              <a:buNone/>
+            </a:pPr>
             <a:r>
               <a:rPr lang="en-US" sz="1800" dirty="0">
                 <a:solidFill>
@@ -3431,6 +3740,9 @@
               </a:rPr>
               <a:t> + α · (1 − clDice)        </a:t>
             </a:r>
+            <a:pPr algn="ctr" indent="0" marL="0">
+              <a:buNone/>
+            </a:pPr>
             <a:r>
               <a:rPr lang="en-US" sz="1600" b="1" dirty="0">
                 <a:solidFill>
@@ -3465,13 +3777,6 @@
           </a:solidFill>
           <a:ln/>
         </p:spPr>
-        <p:txBody>
-          <a:bodyPr/>
-          <a:lstStyle/>
-          <a:p>
-            <a:endParaRPr lang="en-US"/>
-          </a:p>
-        </p:txBody>
       </p:sp>
       <p:sp>
         <p:nvSpPr>
@@ -3494,7 +3799,7 @@
           <a:bodyPr wrap="square" rtlCol="0" anchor="ctr"/>
           <a:lstStyle/>
           <a:p>
-            <a:pPr marL="0" indent="0">
+            <a:pPr indent="0" marL="0">
               <a:buNone/>
             </a:pPr>
             <a:r>
@@ -3508,6 +3813,9 @@
               </a:rPr>
               <a:t>Intuition: </a:t>
             </a:r>
+            <a:pPr indent="0" marL="0">
+              <a:buNone/>
+            </a:pPr>
             <a:r>
               <a:rPr lang="en-US" sz="1400" dirty="0">
                 <a:solidFill>
@@ -3539,7 +3847,6 @@
         <a:solidFill>
           <a:srgbClr val="131B2E"/>
         </a:solidFill>
-        <a:effectLst/>
       </p:bgPr>
     </p:bg>
     <p:spTree>
@@ -3575,13 +3882,6 @@
           </a:solidFill>
           <a:ln/>
         </p:spPr>
-        <p:txBody>
-          <a:bodyPr/>
-          <a:lstStyle/>
-          <a:p>
-            <a:endParaRPr lang="en-US"/>
-          </a:p>
-        </p:txBody>
       </p:sp>
       <p:sp>
         <p:nvSpPr>
@@ -3604,7 +3904,7 @@
           <a:bodyPr wrap="square" lIns="0" tIns="0" rIns="0" bIns="0" rtlCol="0" anchor="ctr"/>
           <a:lstStyle/>
           <a:p>
-            <a:pPr marL="0" indent="0">
+            <a:pPr indent="0" marL="0">
               <a:buNone/>
             </a:pPr>
             <a:r>
@@ -3643,7 +3943,7 @@
           <a:bodyPr wrap="square" lIns="0" tIns="0" rIns="0" bIns="0" rtlCol="0" anchor="ctr"/>
           <a:lstStyle/>
           <a:p>
-            <a:pPr marL="0" indent="0">
+            <a:pPr indent="0" marL="0">
               <a:buNone/>
             </a:pPr>
             <a:r>
@@ -3680,20 +3980,13 @@
           </a:solidFill>
           <a:ln/>
           <a:effectLst>
-            <a:outerShdw blurRad="50800" dist="25400" dir="8100000" algn="bl" rotWithShape="0">
+            <a:outerShdw sx="100000" sy="100000" kx="0" ky="0" algn="bl" rotWithShape="0" blurRad="50800" dist="25400" dir="8100000">
               <a:srgbClr val="000000">
                 <a:alpha val="20000"/>
               </a:srgbClr>
             </a:outerShdw>
           </a:effectLst>
         </p:spPr>
-        <p:txBody>
-          <a:bodyPr/>
-          <a:lstStyle/>
-          <a:p>
-            <a:endParaRPr lang="en-US"/>
-          </a:p>
-        </p:txBody>
       </p:sp>
       <p:sp>
         <p:nvSpPr>
@@ -3716,7 +4009,7 @@
           <a:bodyPr wrap="square" lIns="0" tIns="0" rIns="0" bIns="0" rtlCol="0" anchor="ctr"/>
           <a:lstStyle/>
           <a:p>
-            <a:pPr marL="0" indent="0">
+            <a:pPr indent="0" marL="0">
               <a:buNone/>
             </a:pPr>
             <a:r>
@@ -3753,13 +4046,6 @@
           </a:solidFill>
           <a:ln/>
         </p:spPr>
-        <p:txBody>
-          <a:bodyPr/>
-          <a:lstStyle/>
-          <a:p>
-            <a:endParaRPr lang="en-US"/>
-          </a:p>
-        </p:txBody>
       </p:sp>
       <p:sp>
         <p:nvSpPr>
@@ -3782,7 +4068,7 @@
           <a:bodyPr wrap="square" rtlCol="0" anchor="ctr"/>
           <a:lstStyle/>
           <a:p>
-            <a:pPr marL="0" indent="0" algn="ctr">
+            <a:pPr algn="ctr" indent="0" marL="0">
               <a:buNone/>
             </a:pPr>
             <a:r>
@@ -3796,6 +4082,9 @@
               </a:rPr>
               <a:t>L</a:t>
             </a:r>
+            <a:pPr algn="ctr" indent="0" marL="0">
+              <a:buNone/>
+            </a:pPr>
             <a:r>
               <a:rPr lang="en-US" sz="1200" dirty="0">
                 <a:solidFill>
@@ -3807,6 +4096,9 @@
               </a:rPr>
               <a:t>skel</a:t>
             </a:r>
+            <a:pPr algn="ctr" indent="0" marL="0">
+              <a:buNone/>
+            </a:pPr>
             <a:r>
               <a:rPr lang="en-US" sz="1800" dirty="0">
                 <a:solidFill>
@@ -3818,6 +4110,9 @@
               </a:rPr>
               <a:t> = (1−α) · L</a:t>
             </a:r>
+            <a:pPr algn="ctr" indent="0" marL="0">
+              <a:buNone/>
+            </a:pPr>
             <a:r>
               <a:rPr lang="en-US" sz="1200" dirty="0">
                 <a:solidFill>
@@ -3829,6 +4124,9 @@
               </a:rPr>
               <a:t>base</a:t>
             </a:r>
+            <a:pPr algn="ctr" indent="0" marL="0">
+              <a:buNone/>
+            </a:pPr>
             <a:r>
               <a:rPr lang="en-US" sz="1800" dirty="0">
                 <a:solidFill>
@@ -3840,6 +4138,9 @@
               </a:rPr>
               <a:t> + α · (1 − </a:t>
             </a:r>
+            <a:pPr algn="ctr" indent="0" marL="0">
+              <a:buNone/>
+            </a:pPr>
             <a:r>
               <a:rPr lang="en-US" sz="1600" dirty="0">
                 <a:solidFill>
@@ -3851,6 +4152,9 @@
               </a:rPr>
               <a:t>∑ ŷ · skel(y) / ∑ skel(y)</a:t>
             </a:r>
+            <a:pPr algn="ctr" indent="0" marL="0">
+              <a:buNone/>
+            </a:pPr>
             <a:r>
               <a:rPr lang="en-US" sz="1800" dirty="0">
                 <a:solidFill>
@@ -3887,7 +4191,7 @@
           <a:bodyPr wrap="square" lIns="0" tIns="0" rIns="0" bIns="0" rtlCol="0" anchor="ctr"/>
           <a:lstStyle/>
           <a:p>
-            <a:pPr marL="0" indent="0">
+            <a:pPr indent="0" marL="0">
               <a:buNone/>
             </a:pPr>
             <a:r>
@@ -3904,7 +4208,7 @@
             <a:endParaRPr lang="en-US" sz="1200" dirty="0"/>
           </a:p>
           <a:p>
-            <a:pPr marL="0" indent="0">
+            <a:pPr indent="0" marL="0">
               <a:buNone/>
             </a:pPr>
             <a:r>
@@ -3921,7 +4225,7 @@
             <a:endParaRPr lang="en-US" sz="1200" dirty="0"/>
           </a:p>
           <a:p>
-            <a:pPr marL="0" indent="0">
+            <a:pPr indent="0" marL="0">
               <a:buNone/>
             </a:pPr>
             <a:r>
@@ -3958,20 +4262,13 @@
           </a:solidFill>
           <a:ln/>
           <a:effectLst>
-            <a:outerShdw blurRad="50800" dist="25400" dir="8100000" algn="bl" rotWithShape="0">
+            <a:outerShdw sx="100000" sy="100000" kx="0" ky="0" algn="bl" rotWithShape="0" blurRad="50800" dist="25400" dir="8100000">
               <a:srgbClr val="000000">
                 <a:alpha val="20000"/>
               </a:srgbClr>
             </a:outerShdw>
           </a:effectLst>
         </p:spPr>
-        <p:txBody>
-          <a:bodyPr/>
-          <a:lstStyle/>
-          <a:p>
-            <a:endParaRPr lang="en-US"/>
-          </a:p>
-        </p:txBody>
       </p:sp>
       <p:sp>
         <p:nvSpPr>
@@ -3994,7 +4291,7 @@
           <a:bodyPr wrap="square" lIns="0" tIns="0" rIns="0" bIns="0" rtlCol="0" anchor="ctr"/>
           <a:lstStyle/>
           <a:p>
-            <a:pPr marL="0" indent="0">
+            <a:pPr indent="0" marL="0">
               <a:buNone/>
             </a:pPr>
             <a:r>
@@ -4033,7 +4330,7 @@
           <a:bodyPr wrap="square" lIns="0" tIns="0" rIns="0" bIns="0" rtlCol="0" anchor="ctr"/>
           <a:lstStyle/>
           <a:p>
-            <a:pPr marL="0" indent="0">
+            <a:pPr indent="0" marL="0">
               <a:buNone/>
             </a:pPr>
             <a:r>
@@ -4072,7 +4369,7 @@
           <a:bodyPr wrap="square" lIns="0" tIns="0" rIns="0" bIns="0" rtlCol="0" anchor="ctr"/>
           <a:lstStyle/>
           <a:p>
-            <a:pPr marL="0" indent="0">
+            <a:pPr indent="0" marL="0">
               <a:buNone/>
             </a:pPr>
             <a:r>
@@ -4111,7 +4408,7 @@
           <a:bodyPr wrap="square" lIns="0" tIns="0" rIns="0" bIns="0" rtlCol="0" anchor="ctr"/>
           <a:lstStyle/>
           <a:p>
-            <a:pPr marL="0" indent="0">
+            <a:pPr indent="0" marL="0">
               <a:buNone/>
             </a:pPr>
             <a:r>
@@ -4150,7 +4447,7 @@
           <a:bodyPr wrap="square" lIns="0" tIns="0" rIns="0" bIns="0" rtlCol="0" anchor="ctr"/>
           <a:lstStyle/>
           <a:p>
-            <a:pPr marL="0" indent="0">
+            <a:pPr indent="0" marL="0">
               <a:buNone/>
             </a:pPr>
             <a:r>
@@ -4189,7 +4486,7 @@
           <a:bodyPr wrap="square" lIns="0" tIns="0" rIns="0" bIns="0" rtlCol="0" anchor="ctr"/>
           <a:lstStyle/>
           <a:p>
-            <a:pPr marL="0" indent="0">
+            <a:pPr indent="0" marL="0">
               <a:buNone/>
             </a:pPr>
             <a:r>
@@ -4228,7 +4525,7 @@
           <a:bodyPr wrap="square" lIns="0" tIns="0" rIns="0" bIns="0" rtlCol="0" anchor="ctr"/>
           <a:lstStyle/>
           <a:p>
-            <a:pPr marL="0" indent="0">
+            <a:pPr indent="0" marL="0">
               <a:buNone/>
             </a:pPr>
             <a:r>
@@ -4267,7 +4564,7 @@
           <a:bodyPr wrap="square" lIns="0" tIns="0" rIns="0" bIns="0" rtlCol="0" anchor="ctr"/>
           <a:lstStyle/>
           <a:p>
-            <a:pPr marL="0" indent="0">
+            <a:pPr indent="0" marL="0">
               <a:buNone/>
             </a:pPr>
             <a:r>
@@ -4306,7 +4603,7 @@
           <a:bodyPr wrap="square" lIns="0" tIns="0" rIns="0" bIns="0" rtlCol="0" anchor="ctr"/>
           <a:lstStyle/>
           <a:p>
-            <a:pPr marL="0" indent="0">
+            <a:pPr indent="0" marL="0">
               <a:buNone/>
             </a:pPr>
             <a:r>
@@ -4343,13 +4640,6 @@
           </a:solidFill>
           <a:ln/>
         </p:spPr>
-        <p:txBody>
-          <a:bodyPr/>
-          <a:lstStyle/>
-          <a:p>
-            <a:endParaRPr lang="en-US"/>
-          </a:p>
-        </p:txBody>
       </p:sp>
       <p:sp>
         <p:nvSpPr>
@@ -4372,7 +4662,7 @@
           <a:bodyPr wrap="square" rtlCol="0" anchor="ctr"/>
           <a:lstStyle/>
           <a:p>
-            <a:pPr marL="0" indent="0">
+            <a:pPr indent="0" marL="0">
               <a:buNone/>
             </a:pPr>
             <a:r>
@@ -4386,6 +4676,9 @@
               </a:rPr>
               <a:t>Intuition: </a:t>
             </a:r>
+            <a:pPr indent="0" marL="0">
+              <a:buNone/>
+            </a:pPr>
             <a:r>
               <a:rPr lang="en-US" sz="1400" dirty="0">
                 <a:solidFill>
@@ -4420,13 +4713,6 @@
           </a:solidFill>
           <a:ln/>
         </p:spPr>
-        <p:txBody>
-          <a:bodyPr/>
-          <a:lstStyle/>
-          <a:p>
-            <a:endParaRPr lang="en-US"/>
-          </a:p>
-        </p:txBody>
       </p:sp>
       <p:sp>
         <p:nvSpPr>
@@ -4449,7 +4735,7 @@
           <a:bodyPr wrap="square" lIns="0" tIns="0" rIns="0" bIns="0" rtlCol="0" anchor="ctr"/>
           <a:lstStyle/>
           <a:p>
-            <a:pPr marL="0" indent="0">
+            <a:pPr indent="0" marL="0">
               <a:buNone/>
             </a:pPr>
             <a:r>
@@ -4469,7 +4755,7 @@
       </p:sp>
       <p:graphicFrame>
         <p:nvGraphicFramePr>
-          <p:cNvPr id="24" name="Table 0"/>
+          <p:cNvPr id="12" name="Table 0"/>
           <p:cNvGraphicFramePr>
             <a:graphicFrameLocks noGrp="1"/>
           </p:cNvGraphicFramePr>
@@ -4483,41 +4769,17 @@
         </p:nvGraphicFramePr>
         <p:xfrm>
           <a:off x="822960" y="5760720"/>
-          <a:ext cx="10515600" cy="1036320"/>
+          <a:ext cx="10424160" cy="640080"/>
         </p:xfrm>
         <a:graphic>
           <a:graphicData uri="http://schemas.openxmlformats.org/drawingml/2006/table">
             <a:tbl>
               <a:tblPr/>
               <a:tblGrid>
-                <a:gridCol w="2286000">
-                  <a:extLst>
-                    <a:ext uri="{9D8B030D-6E8A-4147-A177-3AD203B41FA5}">
-                      <a16:colId xmlns:a16="http://schemas.microsoft.com/office/drawing/2014/main" val="20000"/>
-                    </a:ext>
-                  </a:extLst>
-                </a:gridCol>
-                <a:gridCol w="2743200">
-                  <a:extLst>
-                    <a:ext uri="{9D8B030D-6E8A-4147-A177-3AD203B41FA5}">
-                      <a16:colId xmlns:a16="http://schemas.microsoft.com/office/drawing/2014/main" val="20001"/>
-                    </a:ext>
-                  </a:extLst>
-                </a:gridCol>
-                <a:gridCol w="2743200">
-                  <a:extLst>
-                    <a:ext uri="{9D8B030D-6E8A-4147-A177-3AD203B41FA5}">
-                      <a16:colId xmlns:a16="http://schemas.microsoft.com/office/drawing/2014/main" val="20002"/>
-                    </a:ext>
-                  </a:extLst>
-                </a:gridCol>
-                <a:gridCol w="2743200">
-                  <a:extLst>
-                    <a:ext uri="{9D8B030D-6E8A-4147-A177-3AD203B41FA5}">
-                      <a16:colId xmlns:a16="http://schemas.microsoft.com/office/drawing/2014/main" val="20003"/>
-                    </a:ext>
-                  </a:extLst>
-                </a:gridCol>
+                <a:gridCol w="2286000"/>
+                <a:gridCol w="2743200"/>
+                <a:gridCol w="2743200"/>
+                <a:gridCol w="2743200"/>
               </a:tblGrid>
               <a:tr h="160020">
                 <a:tc>
@@ -4525,7 +4787,7 @@
                     <a:bodyPr/>
                     <a:lstStyle/>
                     <a:p>
-                      <a:pPr marL="0" indent="0">
+                      <a:pPr indent="0" marL="0">
                         <a:buNone/>
                       </a:pPr>
                       <a:r>
@@ -4539,7 +4801,7 @@
                       <a:endParaRPr lang="en-US" sz="1100" dirty="0"/>
                     </a:p>
                   </a:txBody>
-                  <a:tcPr>
+                  <a:tcPr marL="91440" marR="91440" marT="45720" marB="45720">
                     <a:lnL w="6350" cap="flat" cmpd="sng" algn="ctr">
                       <a:solidFill>
                         <a:srgbClr val="2A3558"/>
@@ -4586,7 +4848,7 @@
                     <a:bodyPr/>
                     <a:lstStyle/>
                     <a:p>
-                      <a:pPr marL="0" indent="0">
+                      <a:pPr indent="0" marL="0">
                         <a:buNone/>
                       </a:pPr>
                       <a:r>
@@ -4600,7 +4862,7 @@
                       <a:endParaRPr lang="en-US" sz="1100" dirty="0"/>
                     </a:p>
                   </a:txBody>
-                  <a:tcPr>
+                  <a:tcPr marL="91440" marR="91440" marT="45720" marB="45720">
                     <a:lnL w="6350" cap="flat" cmpd="sng" algn="ctr">
                       <a:solidFill>
                         <a:srgbClr val="2A3558"/>
@@ -4647,7 +4909,7 @@
                     <a:bodyPr/>
                     <a:lstStyle/>
                     <a:p>
-                      <a:pPr marL="0" indent="0">
+                      <a:pPr indent="0" marL="0">
                         <a:buNone/>
                       </a:pPr>
                       <a:r>
@@ -4661,7 +4923,7 @@
                       <a:endParaRPr lang="en-US" sz="1100" dirty="0"/>
                     </a:p>
                   </a:txBody>
-                  <a:tcPr>
+                  <a:tcPr marL="91440" marR="91440" marT="45720" marB="45720">
                     <a:lnL w="6350" cap="flat" cmpd="sng" algn="ctr">
                       <a:solidFill>
                         <a:srgbClr val="2A3558"/>
@@ -4708,7 +4970,7 @@
                     <a:bodyPr/>
                     <a:lstStyle/>
                     <a:p>
-                      <a:pPr marL="0" indent="0">
+                      <a:pPr indent="0" marL="0">
                         <a:buNone/>
                       </a:pPr>
                       <a:r>
@@ -4722,7 +4984,7 @@
                       <a:endParaRPr lang="en-US" sz="1100" dirty="0"/>
                     </a:p>
                   </a:txBody>
-                  <a:tcPr>
+                  <a:tcPr marL="91440" marR="91440" marT="45720" marB="45720">
                     <a:lnL w="6350" cap="flat" cmpd="sng" algn="ctr">
                       <a:solidFill>
                         <a:srgbClr val="2A3558"/>
@@ -4764,11 +5026,6 @@
                     </a:solidFill>
                   </a:tcPr>
                 </a:tc>
-                <a:extLst>
-                  <a:ext uri="{0D108BD9-81ED-4DB2-BD59-A6C34878D82A}">
-                    <a16:rowId xmlns:a16="http://schemas.microsoft.com/office/drawing/2014/main" val="10000"/>
-                  </a:ext>
-                </a:extLst>
               </a:tr>
               <a:tr h="160020">
                 <a:tc>
@@ -4776,7 +5033,7 @@
                     <a:bodyPr/>
                     <a:lstStyle/>
                     <a:p>
-                      <a:pPr marL="0" indent="0">
+                      <a:pPr indent="0" marL="0">
                         <a:buNone/>
                       </a:pPr>
                       <a:r>
@@ -4790,7 +5047,7 @@
                       <a:endParaRPr lang="en-US" sz="1100" dirty="0"/>
                     </a:p>
                   </a:txBody>
-                  <a:tcPr>
+                  <a:tcPr marL="91440" marR="91440" marT="45720" marB="45720">
                     <a:lnL w="6350" cap="flat" cmpd="sng" algn="ctr">
                       <a:solidFill>
                         <a:srgbClr val="2A3558"/>
@@ -4837,7 +5094,7 @@
                     <a:bodyPr/>
                     <a:lstStyle/>
                     <a:p>
-                      <a:pPr marL="0" indent="0">
+                      <a:pPr indent="0" marL="0">
                         <a:buNone/>
                       </a:pPr>
                       <a:r>
@@ -4851,7 +5108,7 @@
                       <a:endParaRPr lang="en-US" sz="1100" dirty="0"/>
                     </a:p>
                   </a:txBody>
-                  <a:tcPr>
+                  <a:tcPr marL="91440" marR="91440" marT="45720" marB="45720">
                     <a:lnL w="6350" cap="flat" cmpd="sng" algn="ctr">
                       <a:solidFill>
                         <a:srgbClr val="2A3558"/>
@@ -4898,7 +5155,7 @@
                     <a:bodyPr/>
                     <a:lstStyle/>
                     <a:p>
-                      <a:pPr marL="0" indent="0">
+                      <a:pPr indent="0" marL="0">
                         <a:buNone/>
                       </a:pPr>
                       <a:r>
@@ -4912,7 +5169,7 @@
                       <a:endParaRPr lang="en-US" sz="1100" dirty="0"/>
                     </a:p>
                   </a:txBody>
-                  <a:tcPr>
+                  <a:tcPr marL="91440" marR="91440" marT="45720" marB="45720">
                     <a:lnL w="6350" cap="flat" cmpd="sng" algn="ctr">
                       <a:solidFill>
                         <a:srgbClr val="2A3558"/>
@@ -4959,7 +5216,7 @@
                     <a:bodyPr/>
                     <a:lstStyle/>
                     <a:p>
-                      <a:pPr marL="0" indent="0">
+                      <a:pPr indent="0" marL="0">
                         <a:buNone/>
                       </a:pPr>
                       <a:r>
@@ -4973,7 +5230,7 @@
                       <a:endParaRPr lang="en-US" sz="1100" dirty="0"/>
                     </a:p>
                   </a:txBody>
-                  <a:tcPr>
+                  <a:tcPr marL="91440" marR="91440" marT="45720" marB="45720">
                     <a:lnL w="6350" cap="flat" cmpd="sng" algn="ctr">
                       <a:solidFill>
                         <a:srgbClr val="2A3558"/>
@@ -5015,11 +5272,6 @@
                     </a:solidFill>
                   </a:tcPr>
                 </a:tc>
-                <a:extLst>
-                  <a:ext uri="{0D108BD9-81ED-4DB2-BD59-A6C34878D82A}">
-                    <a16:rowId xmlns:a16="http://schemas.microsoft.com/office/drawing/2014/main" val="10001"/>
-                  </a:ext>
-                </a:extLst>
               </a:tr>
               <a:tr h="160020">
                 <a:tc>
@@ -5027,7 +5279,7 @@
                     <a:bodyPr/>
                     <a:lstStyle/>
                     <a:p>
-                      <a:pPr marL="0" indent="0">
+                      <a:pPr indent="0" marL="0">
                         <a:buNone/>
                       </a:pPr>
                       <a:r>
@@ -5041,7 +5293,7 @@
                       <a:endParaRPr lang="en-US" sz="1100" dirty="0"/>
                     </a:p>
                   </a:txBody>
-                  <a:tcPr>
+                  <a:tcPr marL="91440" marR="91440" marT="45720" marB="45720">
                     <a:lnL w="6350" cap="flat" cmpd="sng" algn="ctr">
                       <a:solidFill>
                         <a:srgbClr val="2A3558"/>
@@ -5088,7 +5340,7 @@
                     <a:bodyPr/>
                     <a:lstStyle/>
                     <a:p>
-                      <a:pPr marL="0" indent="0">
+                      <a:pPr indent="0" marL="0">
                         <a:buNone/>
                       </a:pPr>
                       <a:r>
@@ -5102,7 +5354,7 @@
                       <a:endParaRPr lang="en-US" sz="1100" dirty="0"/>
                     </a:p>
                   </a:txBody>
-                  <a:tcPr>
+                  <a:tcPr marL="91440" marR="91440" marT="45720" marB="45720">
                     <a:lnL w="6350" cap="flat" cmpd="sng" algn="ctr">
                       <a:solidFill>
                         <a:srgbClr val="2A3558"/>
@@ -5149,7 +5401,7 @@
                     <a:bodyPr/>
                     <a:lstStyle/>
                     <a:p>
-                      <a:pPr marL="0" indent="0">
+                      <a:pPr indent="0" marL="0">
                         <a:buNone/>
                       </a:pPr>
                       <a:r>
@@ -5163,7 +5415,7 @@
                       <a:endParaRPr lang="en-US" sz="1100" dirty="0"/>
                     </a:p>
                   </a:txBody>
-                  <a:tcPr>
+                  <a:tcPr marL="91440" marR="91440" marT="45720" marB="45720">
                     <a:lnL w="6350" cap="flat" cmpd="sng" algn="ctr">
                       <a:solidFill>
                         <a:srgbClr val="2A3558"/>
@@ -5210,7 +5462,7 @@
                     <a:bodyPr/>
                     <a:lstStyle/>
                     <a:p>
-                      <a:pPr marL="0" indent="0">
+                      <a:pPr indent="0" marL="0">
                         <a:buNone/>
                       </a:pPr>
                       <a:r>
@@ -5224,7 +5476,7 @@
                       <a:endParaRPr lang="en-US" sz="1100" dirty="0"/>
                     </a:p>
                   </a:txBody>
-                  <a:tcPr>
+                  <a:tcPr marL="91440" marR="91440" marT="45720" marB="45720">
                     <a:lnL w="6350" cap="flat" cmpd="sng" algn="ctr">
                       <a:solidFill>
                         <a:srgbClr val="2A3558"/>
@@ -5266,11 +5518,6 @@
                     </a:solidFill>
                   </a:tcPr>
                 </a:tc>
-                <a:extLst>
-                  <a:ext uri="{0D108BD9-81ED-4DB2-BD59-A6C34878D82A}">
-                    <a16:rowId xmlns:a16="http://schemas.microsoft.com/office/drawing/2014/main" val="10002"/>
-                  </a:ext>
-                </a:extLst>
               </a:tr>
               <a:tr h="160020">
                 <a:tc>
@@ -5278,7 +5525,7 @@
                     <a:bodyPr/>
                     <a:lstStyle/>
                     <a:p>
-                      <a:pPr marL="0" indent="0">
+                      <a:pPr indent="0" marL="0">
                         <a:buNone/>
                       </a:pPr>
                       <a:r>
@@ -5292,7 +5539,7 @@
                       <a:endParaRPr lang="en-US" sz="1100" dirty="0"/>
                     </a:p>
                   </a:txBody>
-                  <a:tcPr>
+                  <a:tcPr marL="91440" marR="91440" marT="45720" marB="45720">
                     <a:lnL w="6350" cap="flat" cmpd="sng" algn="ctr">
                       <a:solidFill>
                         <a:srgbClr val="2A3558"/>
@@ -5339,7 +5586,7 @@
                     <a:bodyPr/>
                     <a:lstStyle/>
                     <a:p>
-                      <a:pPr marL="0" indent="0">
+                      <a:pPr indent="0" marL="0">
                         <a:buNone/>
                       </a:pPr>
                       <a:r>
@@ -5353,7 +5600,7 @@
                       <a:endParaRPr lang="en-US" sz="1100" dirty="0"/>
                     </a:p>
                   </a:txBody>
-                  <a:tcPr>
+                  <a:tcPr marL="91440" marR="91440" marT="45720" marB="45720">
                     <a:lnL w="6350" cap="flat" cmpd="sng" algn="ctr">
                       <a:solidFill>
                         <a:srgbClr val="2A3558"/>
@@ -5400,7 +5647,7 @@
                     <a:bodyPr/>
                     <a:lstStyle/>
                     <a:p>
-                      <a:pPr marL="0" indent="0">
+                      <a:pPr indent="0" marL="0">
                         <a:buNone/>
                       </a:pPr>
                       <a:r>
@@ -5414,7 +5661,7 @@
                       <a:endParaRPr lang="en-US" sz="1100" dirty="0"/>
                     </a:p>
                   </a:txBody>
-                  <a:tcPr>
+                  <a:tcPr marL="91440" marR="91440" marT="45720" marB="45720">
                     <a:lnL w="6350" cap="flat" cmpd="sng" algn="ctr">
                       <a:solidFill>
                         <a:srgbClr val="2A3558"/>
@@ -5461,7 +5708,7 @@
                     <a:bodyPr/>
                     <a:lstStyle/>
                     <a:p>
-                      <a:pPr marL="0" indent="0">
+                      <a:pPr indent="0" marL="0">
                         <a:buNone/>
                       </a:pPr>
                       <a:r>
@@ -5475,7 +5722,7 @@
                       <a:endParaRPr lang="en-US" sz="1100" dirty="0"/>
                     </a:p>
                   </a:txBody>
-                  <a:tcPr>
+                  <a:tcPr marL="91440" marR="91440" marT="45720" marB="45720">
                     <a:lnL w="6350" cap="flat" cmpd="sng" algn="ctr">
                       <a:solidFill>
                         <a:srgbClr val="2A3558"/>
@@ -5517,11 +5764,6 @@
                     </a:solidFill>
                   </a:tcPr>
                 </a:tc>
-                <a:extLst>
-                  <a:ext uri="{0D108BD9-81ED-4DB2-BD59-A6C34878D82A}">
-                    <a16:rowId xmlns:a16="http://schemas.microsoft.com/office/drawing/2014/main" val="10003"/>
-                  </a:ext>
-                </a:extLst>
               </a:tr>
             </a:tbl>
           </a:graphicData>
@@ -5543,7 +5785,6 @@
         <a:solidFill>
           <a:srgbClr val="131B2E"/>
         </a:solidFill>
-        <a:effectLst/>
       </p:bgPr>
     </p:bg>
     <p:spTree>
@@ -5579,13 +5820,6 @@
           </a:solidFill>
           <a:ln/>
         </p:spPr>
-        <p:txBody>
-          <a:bodyPr/>
-          <a:lstStyle/>
-          <a:p>
-            <a:endParaRPr lang="en-US"/>
-          </a:p>
-        </p:txBody>
       </p:sp>
       <p:sp>
         <p:nvSpPr>
@@ -5608,7 +5842,7 @@
           <a:bodyPr wrap="square" lIns="0" tIns="0" rIns="0" bIns="0" rtlCol="0" anchor="ctr"/>
           <a:lstStyle/>
           <a:p>
-            <a:pPr marL="0" indent="0">
+            <a:pPr indent="0" marL="0">
               <a:buNone/>
             </a:pPr>
             <a:r>
@@ -5647,7 +5881,7 @@
           <a:bodyPr wrap="square" lIns="0" tIns="0" rIns="0" bIns="0" rtlCol="0" anchor="ctr"/>
           <a:lstStyle/>
           <a:p>
-            <a:pPr marL="0" indent="0">
+            <a:pPr indent="0" marL="0">
               <a:buNone/>
             </a:pPr>
             <a:r>
@@ -5684,13 +5918,6 @@
           </a:solidFill>
           <a:ln/>
         </p:spPr>
-        <p:txBody>
-          <a:bodyPr/>
-          <a:lstStyle/>
-          <a:p>
-            <a:endParaRPr lang="en-US"/>
-          </a:p>
-        </p:txBody>
       </p:sp>
       <p:sp>
         <p:nvSpPr>
@@ -5713,7 +5940,7 @@
           <a:bodyPr wrap="square" lIns="0" tIns="0" rIns="0" bIns="0" rtlCol="0" anchor="ctr"/>
           <a:lstStyle/>
           <a:p>
-            <a:pPr marL="0" indent="0">
+            <a:pPr indent="0" marL="0">
               <a:buNone/>
             </a:pPr>
             <a:r>
@@ -5752,7 +5979,7 @@
           <a:bodyPr wrap="square" lIns="0" tIns="0" rIns="0" bIns="0" rtlCol="0" anchor="ctr"/>
           <a:lstStyle/>
           <a:p>
-            <a:pPr marL="0" indent="0">
+            <a:pPr indent="0" marL="0">
               <a:buNone/>
             </a:pPr>
             <a:r>
@@ -5789,13 +6016,6 @@
           </a:solidFill>
           <a:ln/>
         </p:spPr>
-        <p:txBody>
-          <a:bodyPr/>
-          <a:lstStyle/>
-          <a:p>
-            <a:endParaRPr lang="en-US"/>
-          </a:p>
-        </p:txBody>
       </p:sp>
       <p:sp>
         <p:nvSpPr>
@@ -5818,7 +6038,7 @@
           <a:bodyPr wrap="square" lIns="0" tIns="0" rIns="0" bIns="0" rtlCol="0" anchor="ctr"/>
           <a:lstStyle/>
           <a:p>
-            <a:pPr marL="0" indent="0">
+            <a:pPr indent="0" marL="0">
               <a:buNone/>
             </a:pPr>
             <a:r>
@@ -5857,7 +6077,7 @@
           <a:bodyPr wrap="square" lIns="0" tIns="0" rIns="0" bIns="0" rtlCol="0" anchor="ctr"/>
           <a:lstStyle/>
           <a:p>
-            <a:pPr marL="0" indent="0">
+            <a:pPr indent="0" marL="0">
               <a:buNone/>
             </a:pPr>
             <a:r>
@@ -5894,13 +6114,6 @@
           </a:solidFill>
           <a:ln/>
         </p:spPr>
-        <p:txBody>
-          <a:bodyPr/>
-          <a:lstStyle/>
-          <a:p>
-            <a:endParaRPr lang="en-US"/>
-          </a:p>
-        </p:txBody>
       </p:sp>
       <p:sp>
         <p:nvSpPr>
@@ -5923,7 +6136,7 @@
           <a:bodyPr wrap="square" lIns="0" tIns="0" rIns="0" bIns="0" rtlCol="0" anchor="ctr"/>
           <a:lstStyle/>
           <a:p>
-            <a:pPr marL="0" indent="0">
+            <a:pPr indent="0" marL="0">
               <a:buNone/>
             </a:pPr>
             <a:r>
@@ -5962,7 +6175,7 @@
           <a:bodyPr wrap="square" lIns="0" tIns="0" rIns="0" bIns="0" rtlCol="0" anchor="ctr"/>
           <a:lstStyle/>
           <a:p>
-            <a:pPr marL="0" indent="0">
+            <a:pPr indent="0" marL="0">
               <a:buNone/>
             </a:pPr>
             <a:r>
@@ -5999,13 +6212,6 @@
           </a:solidFill>
           <a:ln/>
         </p:spPr>
-        <p:txBody>
-          <a:bodyPr/>
-          <a:lstStyle/>
-          <a:p>
-            <a:endParaRPr lang="en-US"/>
-          </a:p>
-        </p:txBody>
       </p:sp>
       <p:sp>
         <p:nvSpPr>
@@ -6028,7 +6234,7 @@
           <a:bodyPr wrap="square" lIns="0" tIns="0" rIns="0" bIns="0" rtlCol="0" anchor="ctr"/>
           <a:lstStyle/>
           <a:p>
-            <a:pPr marL="0" indent="0">
+            <a:pPr indent="0" marL="0">
               <a:buNone/>
             </a:pPr>
             <a:r>
@@ -6067,7 +6273,7 @@
           <a:bodyPr wrap="square" lIns="0" tIns="0" rIns="0" bIns="0" rtlCol="0" anchor="ctr"/>
           <a:lstStyle/>
           <a:p>
-            <a:pPr marL="0" indent="0">
+            <a:pPr indent="0" marL="0">
               <a:buNone/>
             </a:pPr>
             <a:r>
@@ -6104,13 +6310,6 @@
           </a:solidFill>
           <a:ln/>
         </p:spPr>
-        <p:txBody>
-          <a:bodyPr/>
-          <a:lstStyle/>
-          <a:p>
-            <a:endParaRPr lang="en-US"/>
-          </a:p>
-        </p:txBody>
       </p:sp>
       <p:sp>
         <p:nvSpPr>
@@ -6133,7 +6332,7 @@
           <a:bodyPr wrap="square" lIns="0" tIns="0" rIns="0" bIns="0" rtlCol="0" anchor="ctr"/>
           <a:lstStyle/>
           <a:p>
-            <a:pPr marL="0" indent="0">
+            <a:pPr indent="0" marL="0">
               <a:buNone/>
             </a:pPr>
             <a:r>
@@ -6172,7 +6371,7 @@
           <a:bodyPr wrap="square" lIns="0" tIns="0" rIns="0" bIns="0" rtlCol="0" anchor="ctr"/>
           <a:lstStyle/>
           <a:p>
-            <a:pPr marL="0" indent="0">
+            <a:pPr indent="0" marL="0">
               <a:buNone/>
             </a:pPr>
             <a:r>
@@ -6209,13 +6408,6 @@
           </a:solidFill>
           <a:ln/>
         </p:spPr>
-        <p:txBody>
-          <a:bodyPr/>
-          <a:lstStyle/>
-          <a:p>
-            <a:endParaRPr lang="en-US"/>
-          </a:p>
-        </p:txBody>
       </p:sp>
       <p:sp>
         <p:nvSpPr>
@@ -6238,7 +6430,7 @@
           <a:bodyPr wrap="square" lIns="0" tIns="0" rIns="0" bIns="0" rtlCol="0" anchor="ctr"/>
           <a:lstStyle/>
           <a:p>
-            <a:pPr marL="0" indent="0">
+            <a:pPr indent="0" marL="0">
               <a:buNone/>
             </a:pPr>
             <a:r>
@@ -6277,7 +6469,7 @@
           <a:bodyPr wrap="square" lIns="0" tIns="0" rIns="0" bIns="0" rtlCol="0" anchor="ctr"/>
           <a:lstStyle/>
           <a:p>
-            <a:pPr marL="0" indent="0">
+            <a:pPr indent="0" marL="0">
               <a:buNone/>
             </a:pPr>
             <a:r>
@@ -6314,13 +6506,6 @@
           </a:solidFill>
           <a:ln/>
         </p:spPr>
-        <p:txBody>
-          <a:bodyPr/>
-          <a:lstStyle/>
-          <a:p>
-            <a:endParaRPr lang="en-US"/>
-          </a:p>
-        </p:txBody>
       </p:sp>
       <p:sp>
         <p:nvSpPr>
@@ -6343,7 +6528,7 @@
           <a:bodyPr wrap="square" lIns="0" tIns="0" rIns="0" bIns="0" rtlCol="0" anchor="ctr"/>
           <a:lstStyle/>
           <a:p>
-            <a:pPr marL="0" indent="0">
+            <a:pPr indent="0" marL="0">
               <a:buNone/>
             </a:pPr>
             <a:r>
@@ -6382,7 +6567,7 @@
           <a:bodyPr wrap="square" lIns="0" tIns="0" rIns="0" bIns="0" rtlCol="0" anchor="ctr"/>
           <a:lstStyle/>
           <a:p>
-            <a:pPr marL="0" indent="0">
+            <a:pPr indent="0" marL="0">
               <a:buNone/>
             </a:pPr>
             <a:r>
@@ -6419,13 +6604,6 @@
           </a:solidFill>
           <a:ln/>
         </p:spPr>
-        <p:txBody>
-          <a:bodyPr/>
-          <a:lstStyle/>
-          <a:p>
-            <a:endParaRPr lang="en-US"/>
-          </a:p>
-        </p:txBody>
       </p:sp>
       <p:sp>
         <p:nvSpPr>
@@ -6448,7 +6626,7 @@
           <a:bodyPr wrap="square" lIns="0" tIns="0" rIns="0" bIns="0" rtlCol="0" anchor="ctr"/>
           <a:lstStyle/>
           <a:p>
-            <a:pPr marL="0" indent="0">
+            <a:pPr indent="0" marL="0">
               <a:buNone/>
             </a:pPr>
             <a:r>
@@ -6487,7 +6665,7 @@
           <a:bodyPr wrap="square" lIns="0" tIns="0" rIns="0" bIns="0" rtlCol="0" anchor="ctr"/>
           <a:lstStyle/>
           <a:p>
-            <a:pPr marL="0" indent="0">
+            <a:pPr indent="0" marL="0">
               <a:buNone/>
             </a:pPr>
             <a:r>
@@ -6524,13 +6702,6 @@
           </a:solidFill>
           <a:ln/>
         </p:spPr>
-        <p:txBody>
-          <a:bodyPr/>
-          <a:lstStyle/>
-          <a:p>
-            <a:endParaRPr lang="en-US"/>
-          </a:p>
-        </p:txBody>
       </p:sp>
       <p:sp>
         <p:nvSpPr>
@@ -6553,7 +6724,7 @@
           <a:bodyPr wrap="square" lIns="0" tIns="0" rIns="0" bIns="0" rtlCol="0" anchor="ctr"/>
           <a:lstStyle/>
           <a:p>
-            <a:pPr marL="0" indent="0">
+            <a:pPr indent="0" marL="0">
               <a:buNone/>
             </a:pPr>
             <a:r>
@@ -6592,7 +6763,7 @@
           <a:bodyPr wrap="square" lIns="0" tIns="0" rIns="0" bIns="0" rtlCol="0" anchor="ctr"/>
           <a:lstStyle/>
           <a:p>
-            <a:pPr marL="0" indent="0">
+            <a:pPr indent="0" marL="0">
               <a:buNone/>
             </a:pPr>
             <a:r>
@@ -6629,13 +6800,6 @@
           </a:solidFill>
           <a:ln/>
         </p:spPr>
-        <p:txBody>
-          <a:bodyPr/>
-          <a:lstStyle/>
-          <a:p>
-            <a:endParaRPr lang="en-US"/>
-          </a:p>
-        </p:txBody>
       </p:sp>
       <p:sp>
         <p:nvSpPr>
@@ -6656,13 +6820,6 @@
           </a:solidFill>
           <a:ln/>
         </p:spPr>
-        <p:txBody>
-          <a:bodyPr/>
-          <a:lstStyle/>
-          <a:p>
-            <a:endParaRPr lang="en-US"/>
-          </a:p>
-        </p:txBody>
       </p:sp>
       <p:sp>
         <p:nvSpPr>
@@ -6685,7 +6842,7 @@
           <a:bodyPr wrap="square" rtlCol="0" anchor="ctr"/>
           <a:lstStyle/>
           <a:p>
-            <a:pPr marL="0" indent="0" algn="ctr">
+            <a:pPr algn="ctr" indent="0" marL="0">
               <a:buNone/>
             </a:pPr>
             <a:r>
@@ -6719,7 +6876,6 @@
         <a:solidFill>
           <a:srgbClr val="131B2E"/>
         </a:solidFill>
-        <a:effectLst/>
       </p:bgPr>
     </p:bg>
     <p:spTree>
@@ -6755,13 +6911,6 @@
           </a:solidFill>
           <a:ln/>
         </p:spPr>
-        <p:txBody>
-          <a:bodyPr/>
-          <a:lstStyle/>
-          <a:p>
-            <a:endParaRPr lang="en-US"/>
-          </a:p>
-        </p:txBody>
       </p:sp>
       <p:sp>
         <p:nvSpPr>
@@ -6784,7 +6933,7 @@
           <a:bodyPr wrap="square" lIns="0" tIns="0" rIns="0" bIns="0" rtlCol="0" anchor="ctr"/>
           <a:lstStyle/>
           <a:p>
-            <a:pPr marL="0" indent="0">
+            <a:pPr indent="0" marL="0">
               <a:buNone/>
             </a:pPr>
             <a:r>
@@ -6823,7 +6972,7 @@
           <a:bodyPr wrap="square" lIns="0" tIns="0" rIns="0" bIns="0" rtlCol="0" anchor="ctr"/>
           <a:lstStyle/>
           <a:p>
-            <a:pPr marL="0" indent="0">
+            <a:pPr indent="0" marL="0">
               <a:buNone/>
             </a:pPr>
             <a:r>
@@ -6843,14 +6992,14 @@
       </p:sp>
       <p:pic>
         <p:nvPicPr>
-          <p:cNvPr id="5" name="Image 0" descr="/sessions/sweet-quirky-clarke/mnt/CTA Seg V2/report/figures_v2/learning_curves.png"/>
+          <p:cNvPr id="5" name="Image 0" descr="/sessions/sweet-quirky-clarke/mnt/CTA Seg V2/report/figures_v2/learning_curves.png">    </p:cNvPr>
           <p:cNvPicPr>
             <a:picLocks noChangeAspect="1"/>
           </p:cNvPicPr>
           <p:nvPr/>
         </p:nvPicPr>
         <p:blipFill>
-          <a:blip r:embed="rId3"/>
+          <a:blip r:embed="rId1"/>
           <a:stretch>
             <a:fillRect/>
           </a:stretch>
@@ -6884,20 +7033,13 @@
           </a:solidFill>
           <a:ln/>
           <a:effectLst>
-            <a:outerShdw blurRad="50800" dist="25400" dir="8100000" algn="bl" rotWithShape="0">
+            <a:outerShdw sx="100000" sy="100000" kx="0" ky="0" algn="bl" rotWithShape="0" blurRad="50800" dist="25400" dir="8100000">
               <a:srgbClr val="000000">
                 <a:alpha val="20000"/>
               </a:srgbClr>
             </a:outerShdw>
           </a:effectLst>
         </p:spPr>
-        <p:txBody>
-          <a:bodyPr/>
-          <a:lstStyle/>
-          <a:p>
-            <a:endParaRPr lang="en-US"/>
-          </a:p>
-        </p:txBody>
       </p:sp>
       <p:sp>
         <p:nvSpPr>
@@ -6920,7 +7062,7 @@
           <a:bodyPr wrap="square" rtlCol="0" anchor="ctr"/>
           <a:lstStyle/>
           <a:p>
-            <a:pPr marL="0" indent="0">
+            <a:pPr indent="0" marL="0">
               <a:buNone/>
             </a:pPr>
             <a:r>
@@ -6937,13 +7079,13 @@
             <a:endParaRPr lang="en-US" sz="1400" dirty="0"/>
           </a:p>
           <a:p>
-            <a:pPr marL="0" indent="0">
+            <a:pPr indent="0" marL="0">
               <a:buNone/>
             </a:pPr>
             <a:endParaRPr lang="en-US" sz="1400" dirty="0"/>
           </a:p>
           <a:p>
-            <a:pPr marL="0" indent="0">
+            <a:pPr indent="0" marL="0">
               <a:buNone/>
             </a:pPr>
             <a:r>
@@ -6960,7 +7102,7 @@
             <a:endParaRPr lang="en-US" sz="1400" dirty="0"/>
           </a:p>
           <a:p>
-            <a:pPr marL="0" indent="0">
+            <a:pPr indent="0" marL="0">
               <a:buNone/>
             </a:pPr>
             <a:r>
@@ -6977,13 +7119,13 @@
             <a:endParaRPr lang="en-US" sz="1400" dirty="0"/>
           </a:p>
           <a:p>
-            <a:pPr marL="0" indent="0">
+            <a:pPr indent="0" marL="0">
               <a:buNone/>
             </a:pPr>
             <a:endParaRPr lang="en-US" sz="1400" dirty="0"/>
           </a:p>
           <a:p>
-            <a:pPr marL="0" indent="0">
+            <a:pPr indent="0" marL="0">
               <a:buNone/>
             </a:pPr>
             <a:r>
@@ -7000,13 +7142,13 @@
             <a:endParaRPr lang="en-US" sz="1400" dirty="0"/>
           </a:p>
           <a:p>
-            <a:pPr marL="0" indent="0">
+            <a:pPr indent="0" marL="0">
               <a:buNone/>
             </a:pPr>
             <a:endParaRPr lang="en-US" sz="1400" dirty="0"/>
           </a:p>
           <a:p>
-            <a:pPr marL="0" indent="0">
+            <a:pPr indent="0" marL="0">
               <a:buNone/>
             </a:pPr>
             <a:r>
@@ -7023,13 +7165,13 @@
             <a:endParaRPr lang="en-US" sz="1400" dirty="0"/>
           </a:p>
           <a:p>
-            <a:pPr marL="0" indent="0">
+            <a:pPr indent="0" marL="0">
               <a:buNone/>
             </a:pPr>
             <a:endParaRPr lang="en-US" sz="1400" dirty="0"/>
           </a:p>
           <a:p>
-            <a:pPr marL="0" indent="0">
+            <a:pPr indent="0" marL="0">
               <a:buNone/>
             </a:pPr>
             <a:r>
@@ -7063,7 +7205,6 @@
         <a:solidFill>
           <a:srgbClr val="131B2E"/>
         </a:solidFill>
-        <a:effectLst/>
       </p:bgPr>
     </p:bg>
     <p:spTree>
@@ -7099,13 +7240,6 @@
           </a:solidFill>
           <a:ln/>
         </p:spPr>
-        <p:txBody>
-          <a:bodyPr/>
-          <a:lstStyle/>
-          <a:p>
-            <a:endParaRPr lang="en-US"/>
-          </a:p>
-        </p:txBody>
       </p:sp>
       <p:sp>
         <p:nvSpPr>
@@ -7128,7 +7262,7 @@
           <a:bodyPr wrap="square" lIns="0" tIns="0" rIns="0" bIns="0" rtlCol="0" anchor="ctr"/>
           <a:lstStyle/>
           <a:p>
-            <a:pPr marL="0" indent="0">
+            <a:pPr indent="0" marL="0">
               <a:buNone/>
             </a:pPr>
             <a:r>
@@ -7167,7 +7301,7 @@
           <a:bodyPr wrap="square" lIns="0" tIns="0" rIns="0" bIns="0" rtlCol="0" anchor="ctr"/>
           <a:lstStyle/>
           <a:p>
-            <a:pPr marL="0" indent="0">
+            <a:pPr indent="0" marL="0">
               <a:buNone/>
             </a:pPr>
             <a:r>
@@ -7187,14 +7321,14 @@
       </p:sp>
       <p:pic>
         <p:nvPicPr>
-          <p:cNvPr id="5" name="Image 0" descr="/sessions/sweet-quirky-clarke/mnt/CTA Seg V2/report/figures_v2/global_comparison.png"/>
+          <p:cNvPr id="5" name="Image 0" descr="/sessions/sweet-quirky-clarke/mnt/CTA Seg V2/report/figures_v2/global_comparison.png">    </p:cNvPr>
           <p:cNvPicPr>
             <a:picLocks noChangeAspect="1"/>
           </p:cNvPicPr>
           <p:nvPr/>
         </p:nvPicPr>
         <p:blipFill>
-          <a:blip r:embed="rId3"/>
+          <a:blip r:embed="rId1"/>
           <a:stretch>
             <a:fillRect/>
           </a:stretch>
@@ -7228,20 +7362,13 @@
           </a:solidFill>
           <a:ln/>
           <a:effectLst>
-            <a:outerShdw blurRad="50800" dist="25400" dir="8100000" algn="bl" rotWithShape="0">
+            <a:outerShdw sx="100000" sy="100000" kx="0" ky="0" algn="bl" rotWithShape="0" blurRad="50800" dist="25400" dir="8100000">
               <a:srgbClr val="000000">
                 <a:alpha val="20000"/>
               </a:srgbClr>
             </a:outerShdw>
           </a:effectLst>
         </p:spPr>
-        <p:txBody>
-          <a:bodyPr/>
-          <a:lstStyle/>
-          <a:p>
-            <a:endParaRPr lang="en-US"/>
-          </a:p>
-        </p:txBody>
       </p:sp>
       <p:sp>
         <p:nvSpPr>
@@ -7264,7 +7391,7 @@
           <a:bodyPr wrap="square" rtlCol="0" anchor="ctr"/>
           <a:lstStyle/>
           <a:p>
-            <a:pPr marL="0" indent="0">
+            <a:pPr indent="0" marL="0">
               <a:buNone/>
             </a:pPr>
             <a:r>
@@ -7281,7 +7408,7 @@
             <a:endParaRPr lang="en-US" sz="1500" dirty="0"/>
           </a:p>
           <a:p>
-            <a:pPr marL="0" indent="0">
+            <a:pPr indent="0" marL="0">
               <a:buNone/>
             </a:pPr>
             <a:r>
@@ -7298,7 +7425,7 @@
             <a:endParaRPr lang="en-US" sz="1500" dirty="0"/>
           </a:p>
           <a:p>
-            <a:pPr marL="0" indent="0">
+            <a:pPr indent="0" marL="0">
               <a:buNone/>
             </a:pPr>
             <a:r>
@@ -7335,20 +7462,13 @@
           </a:solidFill>
           <a:ln/>
           <a:effectLst>
-            <a:outerShdw blurRad="50800" dist="25400" dir="8100000" algn="bl" rotWithShape="0">
+            <a:outerShdw sx="100000" sy="100000" kx="0" ky="0" algn="bl" rotWithShape="0" blurRad="50800" dist="25400" dir="8100000">
               <a:srgbClr val="000000">
                 <a:alpha val="20000"/>
               </a:srgbClr>
             </a:outerShdw>
           </a:effectLst>
         </p:spPr>
-        <p:txBody>
-          <a:bodyPr/>
-          <a:lstStyle/>
-          <a:p>
-            <a:endParaRPr lang="en-US"/>
-          </a:p>
-        </p:txBody>
       </p:sp>
       <p:sp>
         <p:nvSpPr>
@@ -7371,7 +7491,7 @@
           <a:bodyPr wrap="square" rtlCol="0" anchor="ctr"/>
           <a:lstStyle/>
           <a:p>
-            <a:pPr marL="0" indent="0">
+            <a:pPr indent="0" marL="0">
               <a:buNone/>
             </a:pPr>
             <a:r>
@@ -7388,7 +7508,7 @@
             <a:endParaRPr lang="en-US" sz="1500" dirty="0"/>
           </a:p>
           <a:p>
-            <a:pPr marL="0" indent="0">
+            <a:pPr indent="0" marL="0">
               <a:buNone/>
             </a:pPr>
             <a:r>
@@ -7405,7 +7525,7 @@
             <a:endParaRPr lang="en-US" sz="1500" dirty="0"/>
           </a:p>
           <a:p>
-            <a:pPr marL="0" indent="0">
+            <a:pPr indent="0" marL="0">
               <a:buNone/>
             </a:pPr>
             <a:r>
@@ -7442,20 +7562,13 @@
           </a:solidFill>
           <a:ln/>
           <a:effectLst>
-            <a:outerShdw blurRad="50800" dist="25400" dir="8100000" algn="bl" rotWithShape="0">
+            <a:outerShdw sx="100000" sy="100000" kx="0" ky="0" algn="bl" rotWithShape="0" blurRad="50800" dist="25400" dir="8100000">
               <a:srgbClr val="000000">
                 <a:alpha val="20000"/>
               </a:srgbClr>
             </a:outerShdw>
           </a:effectLst>
         </p:spPr>
-        <p:txBody>
-          <a:bodyPr/>
-          <a:lstStyle/>
-          <a:p>
-            <a:endParaRPr lang="en-US"/>
-          </a:p>
-        </p:txBody>
       </p:sp>
       <p:sp>
         <p:nvSpPr>
@@ -7478,7 +7591,7 @@
           <a:bodyPr wrap="square" rtlCol="0" anchor="ctr"/>
           <a:lstStyle/>
           <a:p>
-            <a:pPr marL="0" indent="0">
+            <a:pPr indent="0" marL="0">
               <a:buNone/>
             </a:pPr>
             <a:r>
@@ -7495,7 +7608,7 @@
             <a:endParaRPr lang="en-US" sz="1500" dirty="0"/>
           </a:p>
           <a:p>
-            <a:pPr marL="0" indent="0">
+            <a:pPr indent="0" marL="0">
               <a:buNone/>
             </a:pPr>
             <a:r>
@@ -7512,7 +7625,7 @@
             <a:endParaRPr lang="en-US" sz="1500" dirty="0"/>
           </a:p>
           <a:p>
-            <a:pPr marL="0" indent="0">
+            <a:pPr indent="0" marL="0">
               <a:buNone/>
             </a:pPr>
             <a:r>
@@ -7546,7 +7659,6 @@
         <a:solidFill>
           <a:srgbClr val="131B2E"/>
         </a:solidFill>
-        <a:effectLst/>
       </p:bgPr>
     </p:bg>
     <p:spTree>
@@ -7582,13 +7694,6 @@
           </a:solidFill>
           <a:ln/>
         </p:spPr>
-        <p:txBody>
-          <a:bodyPr/>
-          <a:lstStyle/>
-          <a:p>
-            <a:endParaRPr lang="en-US"/>
-          </a:p>
-        </p:txBody>
       </p:sp>
       <p:sp>
         <p:nvSpPr>
@@ -7611,7 +7716,7 @@
           <a:bodyPr wrap="square" lIns="0" tIns="0" rIns="0" bIns="0" rtlCol="0" anchor="ctr"/>
           <a:lstStyle/>
           <a:p>
-            <a:pPr marL="0" indent="0">
+            <a:pPr indent="0" marL="0">
               <a:buNone/>
             </a:pPr>
             <a:r>
@@ -7650,7 +7755,7 @@
           <a:bodyPr wrap="square" lIns="0" tIns="0" rIns="0" bIns="0" rtlCol="0" anchor="ctr"/>
           <a:lstStyle/>
           <a:p>
-            <a:pPr marL="0" indent="0">
+            <a:pPr indent="0" marL="0">
               <a:buNone/>
             </a:pPr>
             <a:r>
@@ -7670,14 +7775,14 @@
       </p:sp>
       <p:pic>
         <p:nvPicPr>
-          <p:cNvPr id="5" name="Image 0" descr="/sessions/sweet-quirky-clarke/mnt/CTA Seg V2/report/figures_v2/vessel_gap.png"/>
+          <p:cNvPr id="5" name="Image 0" descr="/sessions/sweet-quirky-clarke/mnt/CTA Seg V2/report/figures_v2/vessel_gap.png">    </p:cNvPr>
           <p:cNvPicPr>
             <a:picLocks noChangeAspect="1"/>
           </p:cNvPicPr>
           <p:nvPr/>
         </p:nvPicPr>
         <p:blipFill>
-          <a:blip r:embed="rId3"/>
+          <a:blip r:embed="rId1"/>
           <a:stretch>
             <a:fillRect/>
           </a:stretch>
@@ -7711,20 +7816,13 @@
           </a:solidFill>
           <a:ln/>
           <a:effectLst>
-            <a:outerShdw blurRad="50800" dist="25400" dir="8100000" algn="bl" rotWithShape="0">
+            <a:outerShdw sx="100000" sy="100000" kx="0" ky="0" algn="bl" rotWithShape="0" blurRad="50800" dist="25400" dir="8100000">
               <a:srgbClr val="000000">
                 <a:alpha val="20000"/>
               </a:srgbClr>
             </a:outerShdw>
           </a:effectLst>
         </p:spPr>
-        <p:txBody>
-          <a:bodyPr/>
-          <a:lstStyle/>
-          <a:p>
-            <a:endParaRPr lang="en-US"/>
-          </a:p>
-        </p:txBody>
       </p:sp>
       <p:sp>
         <p:nvSpPr>
@@ -7747,7 +7845,7 @@
           <a:bodyPr wrap="square" lIns="0" tIns="0" rIns="0" bIns="0" rtlCol="0" anchor="ctr"/>
           <a:lstStyle/>
           <a:p>
-            <a:pPr marL="0" indent="0">
+            <a:pPr indent="0" marL="0">
               <a:buNone/>
             </a:pPr>
             <a:r>
@@ -7786,7 +7884,7 @@
           <a:bodyPr wrap="square" rtlCol="0" anchor="ctr"/>
           <a:lstStyle/>
           <a:p>
-            <a:pPr marL="0" indent="0">
+            <a:pPr indent="0" marL="0">
               <a:buNone/>
             </a:pPr>
             <a:r>
@@ -7800,6 +7898,9 @@
               </a:rPr>
               <a:t>R-Pcom: </a:t>
             </a:r>
+            <a:pPr indent="0" marL="0">
+              <a:buNone/>
+            </a:pPr>
             <a:r>
               <a:rPr lang="en-US" sz="1400" b="1" dirty="0">
                 <a:solidFill>
@@ -7811,6 +7912,9 @@
               </a:rPr>
               <a:t>0.511</a:t>
             </a:r>
+            <a:pPr indent="0" marL="0">
+              <a:buNone/>
+            </a:pPr>
             <a:r>
               <a:rPr lang="en-US" sz="1300" dirty="0">
                 <a:solidFill>
@@ -7825,7 +7929,7 @@
             <a:endParaRPr lang="en-US" sz="1400" dirty="0"/>
           </a:p>
           <a:p>
-            <a:pPr marL="0" indent="0">
+            <a:pPr indent="0" marL="0">
               <a:buNone/>
             </a:pPr>
             <a:r>
@@ -7839,6 +7943,9 @@
               </a:rPr>
               <a:t>L-Pcom: </a:t>
             </a:r>
+            <a:pPr indent="0" marL="0">
+              <a:buNone/>
+            </a:pPr>
             <a:r>
               <a:rPr lang="en-US" sz="1400" b="1" dirty="0">
                 <a:solidFill>
@@ -7850,6 +7957,9 @@
               </a:rPr>
               <a:t>0.479</a:t>
             </a:r>
+            <a:pPr indent="0" marL="0">
+              <a:buNone/>
+            </a:pPr>
             <a:r>
               <a:rPr lang="en-US" sz="1300" dirty="0">
                 <a:solidFill>
@@ -7886,7 +7996,7 @@
           <a:bodyPr wrap="square" lIns="0" tIns="0" rIns="0" bIns="0" rtlCol="0" anchor="ctr"/>
           <a:lstStyle/>
           <a:p>
-            <a:pPr marL="0" indent="0">
+            <a:pPr indent="0" marL="0">
               <a:buNone/>
             </a:pPr>
             <a:r>
@@ -7920,41 +8030,17 @@
         </p:nvGraphicFramePr>
         <p:xfrm>
           <a:off x="6858000" y="3383280"/>
-          <a:ext cx="4114800" cy="1371600"/>
+          <a:ext cx="4572000" cy="1371600"/>
         </p:xfrm>
         <a:graphic>
           <a:graphicData uri="http://schemas.openxmlformats.org/drawingml/2006/table">
             <a:tbl>
               <a:tblPr/>
               <a:tblGrid>
-                <a:gridCol w="1371600">
-                  <a:extLst>
-                    <a:ext uri="{9D8B030D-6E8A-4147-A177-3AD203B41FA5}">
-                      <a16:colId xmlns:a16="http://schemas.microsoft.com/office/drawing/2014/main" val="20000"/>
-                    </a:ext>
-                  </a:extLst>
-                </a:gridCol>
-                <a:gridCol w="914400">
-                  <a:extLst>
-                    <a:ext uri="{9D8B030D-6E8A-4147-A177-3AD203B41FA5}">
-                      <a16:colId xmlns:a16="http://schemas.microsoft.com/office/drawing/2014/main" val="20001"/>
-                    </a:ext>
-                  </a:extLst>
-                </a:gridCol>
-                <a:gridCol w="914400">
-                  <a:extLst>
-                    <a:ext uri="{9D8B030D-6E8A-4147-A177-3AD203B41FA5}">
-                      <a16:colId xmlns:a16="http://schemas.microsoft.com/office/drawing/2014/main" val="20002"/>
-                    </a:ext>
-                  </a:extLst>
-                </a:gridCol>
-                <a:gridCol w="914400">
-                  <a:extLst>
-                    <a:ext uri="{9D8B030D-6E8A-4147-A177-3AD203B41FA5}">
-                      <a16:colId xmlns:a16="http://schemas.microsoft.com/office/drawing/2014/main" val="20003"/>
-                    </a:ext>
-                  </a:extLst>
-                </a:gridCol>
+                <a:gridCol w="1371600"/>
+                <a:gridCol w="914400"/>
+                <a:gridCol w="914400"/>
+                <a:gridCol w="914400"/>
               </a:tblGrid>
               <a:tr h="342900">
                 <a:tc>
@@ -7962,7 +8048,7 @@
                     <a:bodyPr/>
                     <a:lstStyle/>
                     <a:p>
-                      <a:pPr marL="0" indent="0">
+                      <a:pPr indent="0" marL="0">
                         <a:buNone/>
                       </a:pPr>
                       <a:r>
@@ -7976,7 +8062,7 @@
                       <a:endParaRPr lang="en-US" sz="1200" dirty="0"/>
                     </a:p>
                   </a:txBody>
-                  <a:tcPr>
+                  <a:tcPr marL="91440" marR="91440" marT="45720" marB="45720">
                     <a:lnL w="6350" cap="flat" cmpd="sng" algn="ctr">
                       <a:solidFill>
                         <a:srgbClr val="2A3558"/>
@@ -8023,7 +8109,7 @@
                     <a:bodyPr/>
                     <a:lstStyle/>
                     <a:p>
-                      <a:pPr marL="0" indent="0">
+                      <a:pPr indent="0" marL="0">
                         <a:buNone/>
                       </a:pPr>
                       <a:r>
@@ -8037,7 +8123,7 @@
                       <a:endParaRPr lang="en-US" sz="1200" dirty="0"/>
                     </a:p>
                   </a:txBody>
-                  <a:tcPr>
+                  <a:tcPr marL="91440" marR="91440" marT="45720" marB="45720">
                     <a:lnL w="6350" cap="flat" cmpd="sng" algn="ctr">
                       <a:solidFill>
                         <a:srgbClr val="2A3558"/>
@@ -8084,7 +8170,7 @@
                     <a:bodyPr/>
                     <a:lstStyle/>
                     <a:p>
-                      <a:pPr marL="0" indent="0">
+                      <a:pPr indent="0" marL="0">
                         <a:buNone/>
                       </a:pPr>
                       <a:r>
@@ -8098,7 +8184,7 @@
                       <a:endParaRPr lang="en-US" sz="1200" dirty="0"/>
                     </a:p>
                   </a:txBody>
-                  <a:tcPr>
+                  <a:tcPr marL="91440" marR="91440" marT="45720" marB="45720">
                     <a:lnL w="6350" cap="flat" cmpd="sng" algn="ctr">
                       <a:solidFill>
                         <a:srgbClr val="2A3558"/>
@@ -8145,7 +8231,7 @@
                     <a:bodyPr/>
                     <a:lstStyle/>
                     <a:p>
-                      <a:pPr marL="0" indent="0">
+                      <a:pPr indent="0" marL="0">
                         <a:buNone/>
                       </a:pPr>
                       <a:r>
@@ -8159,7 +8245,7 @@
                       <a:endParaRPr lang="en-US" sz="1200" dirty="0"/>
                     </a:p>
                   </a:txBody>
-                  <a:tcPr>
+                  <a:tcPr marL="91440" marR="91440" marT="45720" marB="45720">
                     <a:lnL w="6350" cap="flat" cmpd="sng" algn="ctr">
                       <a:solidFill>
                         <a:srgbClr val="2A3558"/>
@@ -8201,11 +8287,6 @@
                     </a:solidFill>
                   </a:tcPr>
                 </a:tc>
-                <a:extLst>
-                  <a:ext uri="{0D108BD9-81ED-4DB2-BD59-A6C34878D82A}">
-                    <a16:rowId xmlns:a16="http://schemas.microsoft.com/office/drawing/2014/main" val="10000"/>
-                  </a:ext>
-                </a:extLst>
               </a:tr>
               <a:tr h="342900">
                 <a:tc>
@@ -8213,7 +8294,7 @@
                     <a:bodyPr/>
                     <a:lstStyle/>
                     <a:p>
-                      <a:pPr marL="0" indent="0">
+                      <a:pPr indent="0" marL="0">
                         <a:buNone/>
                       </a:pPr>
                       <a:r>
@@ -8227,7 +8308,7 @@
                       <a:endParaRPr lang="en-US" sz="1200" dirty="0"/>
                     </a:p>
                   </a:txBody>
-                  <a:tcPr>
+                  <a:tcPr marL="91440" marR="91440" marT="45720" marB="45720">
                     <a:lnL w="6350" cap="flat" cmpd="sng" algn="ctr">
                       <a:solidFill>
                         <a:srgbClr val="2A3558"/>
@@ -8274,7 +8355,7 @@
                     <a:bodyPr/>
                     <a:lstStyle/>
                     <a:p>
-                      <a:pPr marL="0" indent="0">
+                      <a:pPr indent="0" marL="0">
                         <a:buNone/>
                       </a:pPr>
                       <a:r>
@@ -8288,7 +8369,7 @@
                       <a:endParaRPr lang="en-US" sz="1200" dirty="0"/>
                     </a:p>
                   </a:txBody>
-                  <a:tcPr>
+                  <a:tcPr marL="91440" marR="91440" marT="45720" marB="45720">
                     <a:lnL w="6350" cap="flat" cmpd="sng" algn="ctr">
                       <a:solidFill>
                         <a:srgbClr val="2A3558"/>
@@ -8335,7 +8416,7 @@
                     <a:bodyPr/>
                     <a:lstStyle/>
                     <a:p>
-                      <a:pPr marL="0" indent="0">
+                      <a:pPr indent="0" marL="0">
                         <a:buNone/>
                       </a:pPr>
                       <a:r>
@@ -8349,7 +8430,7 @@
                       <a:endParaRPr lang="en-US" sz="1200" dirty="0"/>
                     </a:p>
                   </a:txBody>
-                  <a:tcPr>
+                  <a:tcPr marL="91440" marR="91440" marT="45720" marB="45720">
                     <a:lnL w="6350" cap="flat" cmpd="sng" algn="ctr">
                       <a:solidFill>
                         <a:srgbClr val="2A3558"/>
@@ -8396,7 +8477,7 @@
                     <a:bodyPr/>
                     <a:lstStyle/>
                     <a:p>
-                      <a:pPr marL="0" indent="0">
+                      <a:pPr indent="0" marL="0">
                         <a:buNone/>
                       </a:pPr>
                       <a:r>
@@ -8410,7 +8491,7 @@
                       <a:endParaRPr lang="en-US" sz="1200" dirty="0"/>
                     </a:p>
                   </a:txBody>
-                  <a:tcPr>
+                  <a:tcPr marL="91440" marR="91440" marT="45720" marB="45720">
                     <a:lnL w="6350" cap="flat" cmpd="sng" algn="ctr">
                       <a:solidFill>
                         <a:srgbClr val="2A3558"/>
@@ -8452,11 +8533,6 @@
                     </a:solidFill>
                   </a:tcPr>
                 </a:tc>
-                <a:extLst>
-                  <a:ext uri="{0D108BD9-81ED-4DB2-BD59-A6C34878D82A}">
-                    <a16:rowId xmlns:a16="http://schemas.microsoft.com/office/drawing/2014/main" val="10001"/>
-                  </a:ext>
-                </a:extLst>
               </a:tr>
               <a:tr h="342900">
                 <a:tc>
@@ -8464,7 +8540,7 @@
                     <a:bodyPr/>
                     <a:lstStyle/>
                     <a:p>
-                      <a:pPr marL="0" indent="0">
+                      <a:pPr indent="0" marL="0">
                         <a:buNone/>
                       </a:pPr>
                       <a:r>
@@ -8478,7 +8554,7 @@
                       <a:endParaRPr lang="en-US" sz="1200" dirty="0"/>
                     </a:p>
                   </a:txBody>
-                  <a:tcPr>
+                  <a:tcPr marL="91440" marR="91440" marT="45720" marB="45720">
                     <a:lnL w="6350" cap="flat" cmpd="sng" algn="ctr">
                       <a:solidFill>
                         <a:srgbClr val="2A3558"/>
@@ -8525,7 +8601,7 @@
                     <a:bodyPr/>
                     <a:lstStyle/>
                     <a:p>
-                      <a:pPr marL="0" indent="0">
+                      <a:pPr indent="0" marL="0">
                         <a:buNone/>
                       </a:pPr>
                       <a:r>
@@ -8539,7 +8615,7 @@
                       <a:endParaRPr lang="en-US" sz="1200" dirty="0"/>
                     </a:p>
                   </a:txBody>
-                  <a:tcPr>
+                  <a:tcPr marL="91440" marR="91440" marT="45720" marB="45720">
                     <a:lnL w="6350" cap="flat" cmpd="sng" algn="ctr">
                       <a:solidFill>
                         <a:srgbClr val="2A3558"/>
@@ -8586,7 +8662,7 @@
                     <a:bodyPr/>
                     <a:lstStyle/>
                     <a:p>
-                      <a:pPr marL="0" indent="0">
+                      <a:pPr indent="0" marL="0">
                         <a:buNone/>
                       </a:pPr>
                       <a:r>
@@ -8600,7 +8676,7 @@
                       <a:endParaRPr lang="en-US" sz="1200" dirty="0"/>
                     </a:p>
                   </a:txBody>
-                  <a:tcPr>
+                  <a:tcPr marL="91440" marR="91440" marT="45720" marB="45720">
                     <a:lnL w="6350" cap="flat" cmpd="sng" algn="ctr">
                       <a:solidFill>
                         <a:srgbClr val="2A3558"/>
@@ -8647,7 +8723,7 @@
                     <a:bodyPr/>
                     <a:lstStyle/>
                     <a:p>
-                      <a:pPr marL="0" indent="0">
+                      <a:pPr indent="0" marL="0">
                         <a:buNone/>
                       </a:pPr>
                       <a:r>
@@ -8661,7 +8737,7 @@
                       <a:endParaRPr lang="en-US" sz="1200" dirty="0"/>
                     </a:p>
                   </a:txBody>
-                  <a:tcPr>
+                  <a:tcPr marL="91440" marR="91440" marT="45720" marB="45720">
                     <a:lnL w="6350" cap="flat" cmpd="sng" algn="ctr">
                       <a:solidFill>
                         <a:srgbClr val="2A3558"/>
@@ -8703,11 +8779,6 @@
                     </a:solidFill>
                   </a:tcPr>
                 </a:tc>
-                <a:extLst>
-                  <a:ext uri="{0D108BD9-81ED-4DB2-BD59-A6C34878D82A}">
-                    <a16:rowId xmlns:a16="http://schemas.microsoft.com/office/drawing/2014/main" val="10002"/>
-                  </a:ext>
-                </a:extLst>
               </a:tr>
               <a:tr h="342900">
                 <a:tc>
@@ -8715,7 +8786,7 @@
                     <a:bodyPr/>
                     <a:lstStyle/>
                     <a:p>
-                      <a:pPr marL="0" indent="0">
+                      <a:pPr indent="0" marL="0">
                         <a:buNone/>
                       </a:pPr>
                       <a:r>
@@ -8729,7 +8800,7 @@
                       <a:endParaRPr lang="en-US" sz="1200" dirty="0"/>
                     </a:p>
                   </a:txBody>
-                  <a:tcPr>
+                  <a:tcPr marL="91440" marR="91440" marT="45720" marB="45720">
                     <a:lnL w="6350" cap="flat" cmpd="sng" algn="ctr">
                       <a:solidFill>
                         <a:srgbClr val="2A3558"/>
@@ -8776,7 +8847,7 @@
                     <a:bodyPr/>
                     <a:lstStyle/>
                     <a:p>
-                      <a:pPr marL="0" indent="0">
+                      <a:pPr indent="0" marL="0">
                         <a:buNone/>
                       </a:pPr>
                       <a:r>
@@ -8790,7 +8861,7 @@
                       <a:endParaRPr lang="en-US" sz="1200" dirty="0"/>
                     </a:p>
                   </a:txBody>
-                  <a:tcPr>
+                  <a:tcPr marL="91440" marR="91440" marT="45720" marB="45720">
                     <a:lnL w="6350" cap="flat" cmpd="sng" algn="ctr">
                       <a:solidFill>
                         <a:srgbClr val="2A3558"/>
@@ -8837,7 +8908,7 @@
                     <a:bodyPr/>
                     <a:lstStyle/>
                     <a:p>
-                      <a:pPr marL="0" indent="0">
+                      <a:pPr indent="0" marL="0">
                         <a:buNone/>
                       </a:pPr>
                       <a:r>
@@ -8851,7 +8922,7 @@
                       <a:endParaRPr lang="en-US" sz="1200" dirty="0"/>
                     </a:p>
                   </a:txBody>
-                  <a:tcPr>
+                  <a:tcPr marL="91440" marR="91440" marT="45720" marB="45720">
                     <a:lnL w="6350" cap="flat" cmpd="sng" algn="ctr">
                       <a:solidFill>
                         <a:srgbClr val="2A3558"/>
@@ -8898,7 +8969,7 @@
                     <a:bodyPr/>
                     <a:lstStyle/>
                     <a:p>
-                      <a:pPr marL="0" indent="0">
+                      <a:pPr indent="0" marL="0">
                         <a:buNone/>
                       </a:pPr>
                       <a:r>
@@ -8912,7 +8983,7 @@
                       <a:endParaRPr lang="en-US" sz="1200" dirty="0"/>
                     </a:p>
                   </a:txBody>
-                  <a:tcPr>
+                  <a:tcPr marL="91440" marR="91440" marT="45720" marB="45720">
                     <a:lnL w="6350" cap="flat" cmpd="sng" algn="ctr">
                       <a:solidFill>
                         <a:srgbClr val="2A3558"/>
@@ -8954,11 +9025,6 @@
                     </a:solidFill>
                   </a:tcPr>
                 </a:tc>
-                <a:extLst>
-                  <a:ext uri="{0D108BD9-81ED-4DB2-BD59-A6C34878D82A}">
-                    <a16:rowId xmlns:a16="http://schemas.microsoft.com/office/drawing/2014/main" val="10003"/>
-                  </a:ext>
-                </a:extLst>
               </a:tr>
             </a:tbl>
           </a:graphicData>
@@ -8985,7 +9051,7 @@
           <a:bodyPr wrap="square" lIns="0" tIns="0" rIns="0" bIns="0" rtlCol="0" anchor="ctr"/>
           <a:lstStyle/>
           <a:p>
-            <a:pPr marL="0" indent="0">
+            <a:pPr indent="0" marL="0">
               <a:buNone/>
             </a:pPr>
             <a:r>
@@ -9019,7 +9085,6 @@
         <a:solidFill>
           <a:srgbClr val="131B2E"/>
         </a:solidFill>
-        <a:effectLst/>
       </p:bgPr>
     </p:bg>
     <p:spTree>
@@ -9055,13 +9120,6 @@
           </a:solidFill>
           <a:ln/>
         </p:spPr>
-        <p:txBody>
-          <a:bodyPr/>
-          <a:lstStyle/>
-          <a:p>
-            <a:endParaRPr lang="en-US"/>
-          </a:p>
-        </p:txBody>
       </p:sp>
       <p:sp>
         <p:nvSpPr>
@@ -9084,7 +9142,7 @@
           <a:bodyPr wrap="square" lIns="0" tIns="0" rIns="0" bIns="0" rtlCol="0" anchor="ctr"/>
           <a:lstStyle/>
           <a:p>
-            <a:pPr marL="0" indent="0">
+            <a:pPr indent="0" marL="0">
               <a:buNone/>
             </a:pPr>
             <a:r>
@@ -9123,7 +9181,7 @@
           <a:bodyPr wrap="square" lIns="0" tIns="0" rIns="0" bIns="0" rtlCol="0" anchor="ctr"/>
           <a:lstStyle/>
           <a:p>
-            <a:pPr marL="0" indent="0">
+            <a:pPr indent="0" marL="0">
               <a:buNone/>
             </a:pPr>
             <a:r>
@@ -9143,14 +9201,14 @@
       </p:sp>
       <p:pic>
         <p:nvPicPr>
-          <p:cNvPr id="5" name="Image 0" descr="/sessions/sweet-quirky-clarke/mnt/CTA Seg V2/report/figures_v2/topbrain_comparison.png"/>
+          <p:cNvPr id="5" name="Image 0" descr="/sessions/sweet-quirky-clarke/mnt/CTA Seg V2/report/figures_v2/topbrain_comparison.png">    </p:cNvPr>
           <p:cNvPicPr>
             <a:picLocks noChangeAspect="1"/>
           </p:cNvPicPr>
           <p:nvPr/>
         </p:nvPicPr>
         <p:blipFill>
-          <a:blip r:embed="rId3"/>
+          <a:blip r:embed="rId1"/>
           <a:stretch>
             <a:fillRect/>
           </a:stretch>
@@ -9184,20 +9242,13 @@
           </a:solidFill>
           <a:ln/>
           <a:effectLst>
-            <a:outerShdw blurRad="50800" dist="25400" dir="8100000" algn="bl" rotWithShape="0">
+            <a:outerShdw sx="100000" sy="100000" kx="0" ky="0" algn="bl" rotWithShape="0" blurRad="50800" dist="25400" dir="8100000">
               <a:srgbClr val="000000">
                 <a:alpha val="20000"/>
               </a:srgbClr>
             </a:outerShdw>
           </a:effectLst>
         </p:spPr>
-        <p:txBody>
-          <a:bodyPr/>
-          <a:lstStyle/>
-          <a:p>
-            <a:endParaRPr lang="en-US"/>
-          </a:p>
-        </p:txBody>
       </p:sp>
       <p:sp>
         <p:nvSpPr>
@@ -9220,7 +9271,7 @@
           <a:bodyPr wrap="square" lIns="0" tIns="0" rIns="0" bIns="0" rtlCol="0" anchor="ctr"/>
           <a:lstStyle/>
           <a:p>
-            <a:pPr marL="0" indent="0">
+            <a:pPr indent="0" marL="0">
               <a:buNone/>
             </a:pPr>
             <a:r>
@@ -9259,7 +9310,7 @@
           <a:bodyPr wrap="square" lIns="0" tIns="0" rIns="0" bIns="0" rtlCol="0" anchor="ctr"/>
           <a:lstStyle/>
           <a:p>
-            <a:pPr marL="0" indent="0">
+            <a:pPr indent="0" marL="0">
               <a:buNone/>
             </a:pPr>
             <a:r>
@@ -9298,7 +9349,7 @@
           <a:bodyPr wrap="square" lIns="0" tIns="0" rIns="0" bIns="0" rtlCol="0" anchor="ctr"/>
           <a:lstStyle/>
           <a:p>
-            <a:pPr marL="0" indent="0">
+            <a:pPr indent="0" marL="0">
               <a:buNone/>
             </a:pPr>
             <a:r>
@@ -9337,7 +9388,7 @@
           <a:bodyPr wrap="square" lIns="0" tIns="0" rIns="0" bIns="0" rtlCol="0" anchor="ctr"/>
           <a:lstStyle/>
           <a:p>
-            <a:pPr marL="0" indent="0">
+            <a:pPr indent="0" marL="0">
               <a:buNone/>
             </a:pPr>
             <a:r>
@@ -9376,7 +9427,7 @@
           <a:bodyPr wrap="square" rtlCol="0" anchor="ctr"/>
           <a:lstStyle/>
           <a:p>
-            <a:pPr marL="0" indent="0">
+            <a:pPr indent="0" marL="0">
               <a:buNone/>
             </a:pPr>
             <a:r>
@@ -9393,7 +9444,7 @@
             <a:endParaRPr lang="en-US" sz="1400" dirty="0"/>
           </a:p>
           <a:p>
-            <a:pPr marL="0" indent="0">
+            <a:pPr indent="0" marL="0">
               <a:buNone/>
             </a:pPr>
             <a:r>
@@ -9430,20 +9481,13 @@
           </a:solidFill>
           <a:ln/>
           <a:effectLst>
-            <a:outerShdw blurRad="50800" dist="25400" dir="8100000" algn="bl" rotWithShape="0">
+            <a:outerShdw sx="100000" sy="100000" kx="0" ky="0" algn="bl" rotWithShape="0" blurRad="50800" dist="25400" dir="8100000">
               <a:srgbClr val="000000">
                 <a:alpha val="20000"/>
               </a:srgbClr>
             </a:outerShdw>
           </a:effectLst>
         </p:spPr>
-        <p:txBody>
-          <a:bodyPr/>
-          <a:lstStyle/>
-          <a:p>
-            <a:endParaRPr lang="en-US"/>
-          </a:p>
-        </p:txBody>
       </p:sp>
       <p:sp>
         <p:nvSpPr>
@@ -9466,7 +9510,7 @@
           <a:bodyPr wrap="square" rtlCol="0" anchor="ctr"/>
           <a:lstStyle/>
           <a:p>
-            <a:pPr marL="0" indent="0">
+            <a:pPr indent="0" marL="0">
               <a:buNone/>
             </a:pPr>
             <a:r>
@@ -9483,7 +9527,7 @@
             <a:endParaRPr lang="en-US" sz="1300" dirty="0"/>
           </a:p>
           <a:p>
-            <a:pPr marL="0" indent="0">
+            <a:pPr indent="0" marL="0">
               <a:buNone/>
             </a:pPr>
             <a:r>
@@ -9500,13 +9544,13 @@
             <a:endParaRPr lang="en-US" sz="1300" dirty="0"/>
           </a:p>
           <a:p>
-            <a:pPr marL="0" indent="0">
+            <a:pPr indent="0" marL="0">
               <a:buNone/>
             </a:pPr>
             <a:endParaRPr lang="en-US" sz="1300" dirty="0"/>
           </a:p>
           <a:p>
-            <a:pPr marL="0" indent="0">
+            <a:pPr indent="0" marL="0">
               <a:buNone/>
             </a:pPr>
             <a:r>
@@ -9523,7 +9567,7 @@
             <a:endParaRPr lang="en-US" sz="1300" dirty="0"/>
           </a:p>
           <a:p>
-            <a:pPr marL="0" indent="0">
+            <a:pPr indent="0" marL="0">
               <a:buNone/>
             </a:pPr>
             <a:r>
@@ -9540,13 +9584,13 @@
             <a:endParaRPr lang="en-US" sz="1300" dirty="0"/>
           </a:p>
           <a:p>
-            <a:pPr marL="0" indent="0">
+            <a:pPr indent="0" marL="0">
               <a:buNone/>
             </a:pPr>
             <a:endParaRPr lang="en-US" sz="1300" dirty="0"/>
           </a:p>
           <a:p>
-            <a:pPr marL="0" indent="0">
+            <a:pPr indent="0" marL="0">
               <a:buNone/>
             </a:pPr>
             <a:r>
@@ -9563,7 +9607,7 @@
             <a:endParaRPr lang="en-US" sz="1300" dirty="0"/>
           </a:p>
           <a:p>
-            <a:pPr marL="0" indent="0">
+            <a:pPr indent="0" marL="0">
               <a:buNone/>
             </a:pPr>
             <a:r>
@@ -9580,13 +9624,13 @@
             <a:endParaRPr lang="en-US" sz="1300" dirty="0"/>
           </a:p>
           <a:p>
-            <a:pPr marL="0" indent="0">
+            <a:pPr indent="0" marL="0">
               <a:buNone/>
             </a:pPr>
             <a:endParaRPr lang="en-US" sz="1300" dirty="0"/>
           </a:p>
           <a:p>
-            <a:pPr marL="0" indent="0">
+            <a:pPr indent="0" marL="0">
               <a:buNone/>
             </a:pPr>
             <a:r>
@@ -9603,7 +9647,7 @@
             <a:endParaRPr lang="en-US" sz="1300" dirty="0"/>
           </a:p>
           <a:p>
-            <a:pPr marL="0" indent="0">
+            <a:pPr indent="0" marL="0">
               <a:buNone/>
             </a:pPr>
             <a:r>
@@ -9640,13 +9684,6 @@
           </a:solidFill>
           <a:ln/>
         </p:spPr>
-        <p:txBody>
-          <a:bodyPr/>
-          <a:lstStyle/>
-          <a:p>
-            <a:endParaRPr lang="en-US"/>
-          </a:p>
-        </p:txBody>
       </p:sp>
       <p:sp>
         <p:nvSpPr>
@@ -9669,7 +9706,7 @@
           <a:bodyPr wrap="square" rtlCol="0" anchor="ctr"/>
           <a:lstStyle/>
           <a:p>
-            <a:pPr marL="0" indent="0">
+            <a:pPr indent="0" marL="0">
               <a:buNone/>
             </a:pPr>
             <a:r>
@@ -9703,7 +9740,6 @@
         <a:solidFill>
           <a:srgbClr val="131B2E"/>
         </a:solidFill>
-        <a:effectLst/>
       </p:bgPr>
     </p:bg>
     <p:spTree>
@@ -9739,13 +9775,6 @@
           </a:solidFill>
           <a:ln/>
         </p:spPr>
-        <p:txBody>
-          <a:bodyPr/>
-          <a:lstStyle/>
-          <a:p>
-            <a:endParaRPr lang="en-US"/>
-          </a:p>
-        </p:txBody>
       </p:sp>
       <p:sp>
         <p:nvSpPr>
@@ -9768,7 +9797,7 @@
           <a:bodyPr wrap="square" lIns="0" tIns="0" rIns="0" bIns="0" rtlCol="0" anchor="ctr"/>
           <a:lstStyle/>
           <a:p>
-            <a:pPr marL="0" indent="0">
+            <a:pPr indent="0" marL="0">
               <a:buNone/>
             </a:pPr>
             <a:r>
@@ -9807,7 +9836,7 @@
           <a:bodyPr wrap="square" lIns="0" tIns="0" rIns="0" bIns="0" rtlCol="0" anchor="ctr"/>
           <a:lstStyle/>
           <a:p>
-            <a:pPr marL="0" indent="0">
+            <a:pPr indent="0" marL="0">
               <a:buNone/>
             </a:pPr>
             <a:r>
@@ -9844,20 +9873,13 @@
           </a:solidFill>
           <a:ln/>
           <a:effectLst>
-            <a:outerShdw blurRad="50800" dist="25400" dir="8100000" algn="bl" rotWithShape="0">
+            <a:outerShdw sx="100000" sy="100000" kx="0" ky="0" algn="bl" rotWithShape="0" blurRad="50800" dist="25400" dir="8100000">
               <a:srgbClr val="000000">
                 <a:alpha val="20000"/>
               </a:srgbClr>
             </a:outerShdw>
           </a:effectLst>
         </p:spPr>
-        <p:txBody>
-          <a:bodyPr/>
-          <a:lstStyle/>
-          <a:p>
-            <a:endParaRPr lang="en-US"/>
-          </a:p>
-        </p:txBody>
       </p:sp>
       <p:sp>
         <p:nvSpPr>
@@ -9880,7 +9902,7 @@
           <a:bodyPr wrap="square" rtlCol="0" anchor="ctr"/>
           <a:lstStyle/>
           <a:p>
-            <a:pPr marL="0" indent="0" algn="ctr">
+            <a:pPr algn="ctr" indent="0" marL="0">
               <a:buNone/>
             </a:pPr>
             <a:r>
@@ -9919,7 +9941,7 @@
           <a:bodyPr wrap="square" rtlCol="0" anchor="ctr"/>
           <a:lstStyle/>
           <a:p>
-            <a:pPr marL="0" indent="0" algn="ctr">
+            <a:pPr algn="ctr" indent="0" marL="0">
               <a:buNone/>
             </a:pPr>
             <a:r>
@@ -9956,20 +9978,13 @@
           </a:solidFill>
           <a:ln/>
           <a:effectLst>
-            <a:outerShdw blurRad="50800" dist="25400" dir="8100000" algn="bl" rotWithShape="0">
+            <a:outerShdw sx="100000" sy="100000" kx="0" ky="0" algn="bl" rotWithShape="0" blurRad="50800" dist="25400" dir="8100000">
               <a:srgbClr val="000000">
                 <a:alpha val="20000"/>
               </a:srgbClr>
             </a:outerShdw>
           </a:effectLst>
         </p:spPr>
-        <p:txBody>
-          <a:bodyPr/>
-          <a:lstStyle/>
-          <a:p>
-            <a:endParaRPr lang="en-US"/>
-          </a:p>
-        </p:txBody>
       </p:sp>
       <p:sp>
         <p:nvSpPr>
@@ -9992,7 +10007,7 @@
           <a:bodyPr wrap="square" rtlCol="0" anchor="ctr"/>
           <a:lstStyle/>
           <a:p>
-            <a:pPr marL="0" indent="0" algn="ctr">
+            <a:pPr algn="ctr" indent="0" marL="0">
               <a:buNone/>
             </a:pPr>
             <a:r>
@@ -10031,7 +10046,7 @@
           <a:bodyPr wrap="square" rtlCol="0" anchor="ctr"/>
           <a:lstStyle/>
           <a:p>
-            <a:pPr marL="0" indent="0" algn="ctr">
+            <a:pPr algn="ctr" indent="0" marL="0">
               <a:buNone/>
             </a:pPr>
             <a:r>
@@ -10070,7 +10085,7 @@
           <a:bodyPr wrap="square" rtlCol="0" anchor="ctr"/>
           <a:lstStyle/>
           <a:p>
-            <a:pPr marL="0" indent="0" algn="ctr">
+            <a:pPr algn="ctr" indent="0" marL="0">
               <a:buNone/>
             </a:pPr>
             <a:r>
@@ -10104,7 +10119,6 @@
         <a:solidFill>
           <a:srgbClr val="131B2E"/>
         </a:solidFill>
-        <a:effectLst/>
       </p:bgPr>
     </p:bg>
     <p:spTree>
@@ -10140,13 +10154,6 @@
           </a:solidFill>
           <a:ln/>
         </p:spPr>
-        <p:txBody>
-          <a:bodyPr/>
-          <a:lstStyle/>
-          <a:p>
-            <a:endParaRPr lang="en-US"/>
-          </a:p>
-        </p:txBody>
       </p:sp>
       <p:sp>
         <p:nvSpPr>
@@ -10169,7 +10176,7 @@
           <a:bodyPr wrap="square" lIns="0" tIns="0" rIns="0" bIns="0" rtlCol="0" anchor="ctr"/>
           <a:lstStyle/>
           <a:p>
-            <a:pPr marL="0" indent="0">
+            <a:pPr indent="0" marL="0">
               <a:buNone/>
             </a:pPr>
             <a:r>
@@ -10208,7 +10215,7 @@
           <a:bodyPr wrap="square" lIns="0" tIns="0" rIns="0" bIns="0" rtlCol="0" anchor="ctr"/>
           <a:lstStyle/>
           <a:p>
-            <a:pPr marL="0" indent="0">
+            <a:pPr indent="0" marL="0">
               <a:buNone/>
             </a:pPr>
             <a:r>
@@ -10245,20 +10252,13 @@
           </a:solidFill>
           <a:ln/>
           <a:effectLst>
-            <a:outerShdw blurRad="50800" dist="25400" dir="8100000" algn="bl" rotWithShape="0">
+            <a:outerShdw sx="100000" sy="100000" kx="0" ky="0" algn="bl" rotWithShape="0" blurRad="50800" dist="25400" dir="8100000">
               <a:srgbClr val="000000">
                 <a:alpha val="20000"/>
               </a:srgbClr>
             </a:outerShdw>
           </a:effectLst>
         </p:spPr>
-        <p:txBody>
-          <a:bodyPr/>
-          <a:lstStyle/>
-          <a:p>
-            <a:endParaRPr lang="en-US"/>
-          </a:p>
-        </p:txBody>
       </p:sp>
       <p:sp>
         <p:nvSpPr>
@@ -10281,7 +10281,7 @@
           <a:bodyPr wrap="square" lIns="0" tIns="0" rIns="0" bIns="0" rtlCol="0" anchor="ctr"/>
           <a:lstStyle/>
           <a:p>
-            <a:pPr marL="0" indent="0">
+            <a:pPr indent="0" marL="0">
               <a:buNone/>
             </a:pPr>
             <a:r>
@@ -10320,7 +10320,7 @@
           <a:bodyPr wrap="square" lIns="0" tIns="0" rIns="0" bIns="0" rtlCol="0" anchor="ctr"/>
           <a:lstStyle/>
           <a:p>
-            <a:pPr marL="0" indent="0">
+            <a:pPr indent="0" marL="0">
               <a:buNone/>
             </a:pPr>
             <a:r>
@@ -10359,7 +10359,7 @@
           <a:bodyPr wrap="square" lIns="0" tIns="0" rIns="0" bIns="0" rtlCol="0" anchor="ctr"/>
           <a:lstStyle/>
           <a:p>
-            <a:pPr marL="0" indent="0">
+            <a:pPr indent="0" marL="0">
               <a:buNone/>
             </a:pPr>
             <a:r>
@@ -10398,7 +10398,7 @@
           <a:bodyPr wrap="square" lIns="0" tIns="0" rIns="0" bIns="0" rtlCol="0" anchor="ctr"/>
           <a:lstStyle/>
           <a:p>
-            <a:pPr marL="0" indent="0">
+            <a:pPr indent="0" marL="0">
               <a:buNone/>
             </a:pPr>
             <a:r>
@@ -10437,7 +10437,7 @@
           <a:bodyPr wrap="square" lIns="0" tIns="0" rIns="0" bIns="0" rtlCol="0" anchor="ctr"/>
           <a:lstStyle/>
           <a:p>
-            <a:pPr marL="0" indent="0">
+            <a:pPr indent="0" marL="0">
               <a:buNone/>
             </a:pPr>
             <a:r>
@@ -10476,7 +10476,7 @@
           <a:bodyPr wrap="square" lIns="0" tIns="0" rIns="0" bIns="0" rtlCol="0" anchor="ctr"/>
           <a:lstStyle/>
           <a:p>
-            <a:pPr marL="0" indent="0">
+            <a:pPr indent="0" marL="0">
               <a:buNone/>
             </a:pPr>
             <a:r>
@@ -10513,20 +10513,13 @@
           </a:solidFill>
           <a:ln/>
           <a:effectLst>
-            <a:outerShdw blurRad="50800" dist="25400" dir="8100000" algn="bl" rotWithShape="0">
+            <a:outerShdw sx="100000" sy="100000" kx="0" ky="0" algn="bl" rotWithShape="0" blurRad="50800" dist="25400" dir="8100000">
               <a:srgbClr val="000000">
                 <a:alpha val="20000"/>
               </a:srgbClr>
             </a:outerShdw>
           </a:effectLst>
         </p:spPr>
-        <p:txBody>
-          <a:bodyPr/>
-          <a:lstStyle/>
-          <a:p>
-            <a:endParaRPr lang="en-US"/>
-          </a:p>
-        </p:txBody>
       </p:sp>
       <p:sp>
         <p:nvSpPr>
@@ -10549,7 +10542,7 @@
           <a:bodyPr wrap="square" lIns="0" tIns="0" rIns="0" bIns="0" rtlCol="0" anchor="ctr"/>
           <a:lstStyle/>
           <a:p>
-            <a:pPr marL="0" indent="0">
+            <a:pPr indent="0" marL="0">
               <a:buNone/>
             </a:pPr>
             <a:r>
@@ -10588,7 +10581,7 @@
           <a:bodyPr wrap="square" lIns="0" tIns="0" rIns="0" bIns="0" rtlCol="0" anchor="ctr"/>
           <a:lstStyle/>
           <a:p>
-            <a:pPr marL="0" indent="0">
+            <a:pPr indent="0" marL="0">
               <a:buNone/>
             </a:pPr>
             <a:r>
@@ -10627,7 +10620,7 @@
           <a:bodyPr wrap="square" lIns="0" tIns="0" rIns="0" bIns="0" rtlCol="0" anchor="ctr"/>
           <a:lstStyle/>
           <a:p>
-            <a:pPr marL="0" indent="0">
+            <a:pPr indent="0" marL="0">
               <a:buNone/>
             </a:pPr>
             <a:r>
@@ -10666,7 +10659,7 @@
           <a:bodyPr wrap="square" lIns="0" tIns="0" rIns="0" bIns="0" rtlCol="0" anchor="ctr"/>
           <a:lstStyle/>
           <a:p>
-            <a:pPr marL="0" indent="0">
+            <a:pPr indent="0" marL="0">
               <a:buNone/>
             </a:pPr>
             <a:r>
@@ -10705,7 +10698,7 @@
           <a:bodyPr wrap="square" lIns="0" tIns="0" rIns="0" bIns="0" rtlCol="0" anchor="ctr"/>
           <a:lstStyle/>
           <a:p>
-            <a:pPr marL="0" indent="0">
+            <a:pPr indent="0" marL="0">
               <a:buNone/>
             </a:pPr>
             <a:r>
@@ -10744,7 +10737,7 @@
           <a:bodyPr wrap="square" lIns="0" tIns="0" rIns="0" bIns="0" rtlCol="0" anchor="ctr"/>
           <a:lstStyle/>
           <a:p>
-            <a:pPr marL="0" indent="0">
+            <a:pPr indent="0" marL="0">
               <a:buNone/>
             </a:pPr>
             <a:r>
@@ -10781,20 +10774,13 @@
           </a:solidFill>
           <a:ln/>
           <a:effectLst>
-            <a:outerShdw blurRad="50800" dist="25400" dir="8100000" algn="bl" rotWithShape="0">
+            <a:outerShdw sx="100000" sy="100000" kx="0" ky="0" algn="bl" rotWithShape="0" blurRad="50800" dist="25400" dir="8100000">
               <a:srgbClr val="000000">
                 <a:alpha val="20000"/>
               </a:srgbClr>
             </a:outerShdw>
           </a:effectLst>
         </p:spPr>
-        <p:txBody>
-          <a:bodyPr/>
-          <a:lstStyle/>
-          <a:p>
-            <a:endParaRPr lang="en-US"/>
-          </a:p>
-        </p:txBody>
       </p:sp>
       <p:sp>
         <p:nvSpPr>
@@ -10817,7 +10803,7 @@
           <a:bodyPr wrap="square" lIns="0" tIns="0" rIns="0" bIns="0" rtlCol="0" anchor="ctr"/>
           <a:lstStyle/>
           <a:p>
-            <a:pPr marL="0" indent="0">
+            <a:pPr indent="0" marL="0">
               <a:buNone/>
             </a:pPr>
             <a:r>
@@ -10856,7 +10842,7 @@
           <a:bodyPr wrap="square" rtlCol="0" anchor="ctr"/>
           <a:lstStyle/>
           <a:p>
-            <a:pPr marL="0" indent="0">
+            <a:pPr indent="0" marL="0">
               <a:buNone/>
             </a:pPr>
             <a:r>
@@ -10873,13 +10859,13 @@
             <a:endParaRPr lang="en-US" sz="1600" dirty="0"/>
           </a:p>
           <a:p>
-            <a:pPr marL="0" indent="0">
+            <a:pPr indent="0" marL="0">
               <a:buNone/>
             </a:pPr>
             <a:endParaRPr lang="en-US" sz="1600" dirty="0"/>
           </a:p>
           <a:p>
-            <a:pPr marL="0" indent="0">
+            <a:pPr indent="0" marL="0">
               <a:buNone/>
             </a:pPr>
             <a:r>
@@ -10913,7 +10899,6 @@
         <a:solidFill>
           <a:srgbClr val="131B2E"/>
         </a:solidFill>
-        <a:effectLst/>
       </p:bgPr>
     </p:bg>
     <p:spTree>
@@ -10949,13 +10934,6 @@
           </a:solidFill>
           <a:ln/>
         </p:spPr>
-        <p:txBody>
-          <a:bodyPr/>
-          <a:lstStyle/>
-          <a:p>
-            <a:endParaRPr lang="en-US"/>
-          </a:p>
-        </p:txBody>
       </p:sp>
       <p:sp>
         <p:nvSpPr>
@@ -10978,7 +10956,7 @@
           <a:bodyPr wrap="square" lIns="0" tIns="0" rIns="0" bIns="0" rtlCol="0" anchor="ctr"/>
           <a:lstStyle/>
           <a:p>
-            <a:pPr marL="0" indent="0">
+            <a:pPr indent="0" marL="0">
               <a:buNone/>
             </a:pPr>
             <a:r>
@@ -11017,7 +10995,7 @@
           <a:bodyPr wrap="square" lIns="0" tIns="0" rIns="0" bIns="0" rtlCol="0" anchor="ctr"/>
           <a:lstStyle/>
           <a:p>
-            <a:pPr marL="0" indent="0">
+            <a:pPr indent="0" marL="0">
               <a:buNone/>
             </a:pPr>
             <a:r>
@@ -11056,7 +11034,7 @@
           <a:bodyPr wrap="square" lIns="0" tIns="0" rIns="0" bIns="0" rtlCol="0" anchor="ctr"/>
           <a:lstStyle/>
           <a:p>
-            <a:pPr marL="0" indent="0">
+            <a:pPr indent="0" marL="0">
               <a:buNone/>
             </a:pPr>
             <a:r>
@@ -11093,13 +11071,6 @@
           </a:solidFill>
           <a:ln/>
         </p:spPr>
-        <p:txBody>
-          <a:bodyPr/>
-          <a:lstStyle/>
-          <a:p>
-            <a:endParaRPr lang="en-US"/>
-          </a:p>
-        </p:txBody>
       </p:sp>
       <p:sp>
         <p:nvSpPr>
@@ -11122,7 +11093,7 @@
           <a:bodyPr wrap="square" lIns="0" tIns="0" rIns="0" bIns="0" rtlCol="0" anchor="ctr"/>
           <a:lstStyle/>
           <a:p>
-            <a:pPr marL="0" indent="0">
+            <a:pPr indent="0" marL="0">
               <a:buNone/>
             </a:pPr>
             <a:r>
@@ -11161,7 +11132,7 @@
           <a:bodyPr wrap="square" lIns="0" tIns="0" rIns="0" bIns="0" rtlCol="0" anchor="ctr"/>
           <a:lstStyle/>
           <a:p>
-            <a:pPr marL="0" indent="0">
+            <a:pPr indent="0" marL="0">
               <a:buNone/>
             </a:pPr>
             <a:r>
@@ -11198,13 +11169,6 @@
           </a:solidFill>
           <a:ln/>
         </p:spPr>
-        <p:txBody>
-          <a:bodyPr/>
-          <a:lstStyle/>
-          <a:p>
-            <a:endParaRPr lang="en-US"/>
-          </a:p>
-        </p:txBody>
       </p:sp>
       <p:sp>
         <p:nvSpPr>
@@ -11227,7 +11191,7 @@
           <a:bodyPr wrap="square" lIns="0" tIns="0" rIns="0" bIns="0" rtlCol="0" anchor="ctr"/>
           <a:lstStyle/>
           <a:p>
-            <a:pPr marL="0" indent="0">
+            <a:pPr indent="0" marL="0">
               <a:buNone/>
             </a:pPr>
             <a:r>
@@ -11266,7 +11230,7 @@
           <a:bodyPr wrap="square" lIns="0" tIns="0" rIns="0" bIns="0" rtlCol="0" anchor="ctr"/>
           <a:lstStyle/>
           <a:p>
-            <a:pPr marL="0" indent="0">
+            <a:pPr indent="0" marL="0">
               <a:buNone/>
             </a:pPr>
             <a:r>
@@ -11303,13 +11267,6 @@
           </a:solidFill>
           <a:ln/>
         </p:spPr>
-        <p:txBody>
-          <a:bodyPr/>
-          <a:lstStyle/>
-          <a:p>
-            <a:endParaRPr lang="en-US"/>
-          </a:p>
-        </p:txBody>
       </p:sp>
       <p:sp>
         <p:nvSpPr>
@@ -11332,7 +11289,7 @@
           <a:bodyPr wrap="square" lIns="0" tIns="0" rIns="0" bIns="0" rtlCol="0" anchor="ctr"/>
           <a:lstStyle/>
           <a:p>
-            <a:pPr marL="0" indent="0">
+            <a:pPr indent="0" marL="0">
               <a:buNone/>
             </a:pPr>
             <a:r>
@@ -11371,7 +11328,7 @@
           <a:bodyPr wrap="square" lIns="0" tIns="0" rIns="0" bIns="0" rtlCol="0" anchor="ctr"/>
           <a:lstStyle/>
           <a:p>
-            <a:pPr marL="0" indent="0">
+            <a:pPr indent="0" marL="0">
               <a:buNone/>
             </a:pPr>
             <a:r>
@@ -11410,7 +11367,7 @@
           <a:bodyPr wrap="square" lIns="0" tIns="0" rIns="0" bIns="0" rtlCol="0" anchor="ctr"/>
           <a:lstStyle/>
           <a:p>
-            <a:pPr marL="0" indent="0">
+            <a:pPr indent="0" marL="0">
               <a:buNone/>
             </a:pPr>
             <a:r>
@@ -11447,13 +11404,6 @@
           </a:solidFill>
           <a:ln/>
         </p:spPr>
-        <p:txBody>
-          <a:bodyPr/>
-          <a:lstStyle/>
-          <a:p>
-            <a:endParaRPr lang="en-US"/>
-          </a:p>
-        </p:txBody>
       </p:sp>
       <p:sp>
         <p:nvSpPr>
@@ -11476,7 +11426,7 @@
           <a:bodyPr wrap="square" lIns="0" tIns="0" rIns="0" bIns="0" rtlCol="0" anchor="ctr"/>
           <a:lstStyle/>
           <a:p>
-            <a:pPr marL="0" indent="0">
+            <a:pPr indent="0" marL="0">
               <a:buNone/>
             </a:pPr>
             <a:r>
@@ -11515,7 +11465,7 @@
           <a:bodyPr wrap="square" lIns="0" tIns="0" rIns="0" bIns="0" rtlCol="0" anchor="ctr"/>
           <a:lstStyle/>
           <a:p>
-            <a:pPr marL="0" indent="0">
+            <a:pPr indent="0" marL="0">
               <a:buNone/>
             </a:pPr>
             <a:r>
@@ -11552,13 +11502,6 @@
           </a:solidFill>
           <a:ln/>
         </p:spPr>
-        <p:txBody>
-          <a:bodyPr/>
-          <a:lstStyle/>
-          <a:p>
-            <a:endParaRPr lang="en-US"/>
-          </a:p>
-        </p:txBody>
       </p:sp>
       <p:sp>
         <p:nvSpPr>
@@ -11581,7 +11524,7 @@
           <a:bodyPr wrap="square" lIns="0" tIns="0" rIns="0" bIns="0" rtlCol="0" anchor="ctr"/>
           <a:lstStyle/>
           <a:p>
-            <a:pPr marL="0" indent="0">
+            <a:pPr indent="0" marL="0">
               <a:buNone/>
             </a:pPr>
             <a:r>
@@ -11620,7 +11563,7 @@
           <a:bodyPr wrap="square" lIns="0" tIns="0" rIns="0" bIns="0" rtlCol="0" anchor="ctr"/>
           <a:lstStyle/>
           <a:p>
-            <a:pPr marL="0" indent="0">
+            <a:pPr indent="0" marL="0">
               <a:buNone/>
             </a:pPr>
             <a:r>
@@ -11657,13 +11600,6 @@
           </a:solidFill>
           <a:ln/>
         </p:spPr>
-        <p:txBody>
-          <a:bodyPr/>
-          <a:lstStyle/>
-          <a:p>
-            <a:endParaRPr lang="en-US"/>
-          </a:p>
-        </p:txBody>
       </p:sp>
       <p:sp>
         <p:nvSpPr>
@@ -11686,7 +11622,7 @@
           <a:bodyPr wrap="square" lIns="0" tIns="0" rIns="0" bIns="0" rtlCol="0" anchor="ctr"/>
           <a:lstStyle/>
           <a:p>
-            <a:pPr marL="0" indent="0">
+            <a:pPr indent="0" marL="0">
               <a:buNone/>
             </a:pPr>
             <a:r>
@@ -11725,7 +11661,7 @@
           <a:bodyPr wrap="square" lIns="0" tIns="0" rIns="0" bIns="0" rtlCol="0" anchor="ctr"/>
           <a:lstStyle/>
           <a:p>
-            <a:pPr marL="0" indent="0">
+            <a:pPr indent="0" marL="0">
               <a:buNone/>
             </a:pPr>
             <a:r>
@@ -11762,13 +11698,6 @@
           </a:solidFill>
           <a:ln/>
         </p:spPr>
-        <p:txBody>
-          <a:bodyPr/>
-          <a:lstStyle/>
-          <a:p>
-            <a:endParaRPr lang="en-US"/>
-          </a:p>
-        </p:txBody>
       </p:sp>
       <p:sp>
         <p:nvSpPr>
@@ -11791,7 +11720,7 @@
           <a:bodyPr wrap="square" lIns="0" tIns="0" rIns="0" bIns="0" rtlCol="0" anchor="ctr"/>
           <a:lstStyle/>
           <a:p>
-            <a:pPr marL="0" indent="0">
+            <a:pPr indent="0" marL="0">
               <a:buNone/>
             </a:pPr>
             <a:r>
@@ -11830,7 +11759,7 @@
           <a:bodyPr wrap="square" lIns="0" tIns="0" rIns="0" bIns="0" rtlCol="0" anchor="ctr"/>
           <a:lstStyle/>
           <a:p>
-            <a:pPr marL="0" indent="0">
+            <a:pPr indent="0" marL="0">
               <a:buNone/>
             </a:pPr>
             <a:r>
@@ -11864,7 +11793,6 @@
         <a:solidFill>
           <a:srgbClr val="131B2E"/>
         </a:solidFill>
-        <a:effectLst/>
       </p:bgPr>
     </p:bg>
     <p:spTree>
@@ -11900,13 +11828,6 @@
           </a:solidFill>
           <a:ln/>
         </p:spPr>
-        <p:txBody>
-          <a:bodyPr/>
-          <a:lstStyle/>
-          <a:p>
-            <a:endParaRPr lang="en-US"/>
-          </a:p>
-        </p:txBody>
       </p:sp>
       <p:sp>
         <p:nvSpPr>
@@ -11929,7 +11850,7 @@
           <a:bodyPr wrap="square" lIns="0" tIns="0" rIns="0" bIns="0" rtlCol="0" anchor="ctr"/>
           <a:lstStyle/>
           <a:p>
-            <a:pPr marL="0" indent="0">
+            <a:pPr indent="0" marL="0">
               <a:buNone/>
             </a:pPr>
             <a:r>
@@ -11968,7 +11889,7 @@
           <a:bodyPr wrap="square" lIns="0" tIns="0" rIns="0" bIns="0" rtlCol="0" anchor="ctr"/>
           <a:lstStyle/>
           <a:p>
-            <a:pPr marL="0" indent="0">
+            <a:pPr indent="0" marL="0">
               <a:buNone/>
             </a:pPr>
             <a:r>
@@ -12007,7 +11928,7 @@
           <a:bodyPr wrap="square" lIns="0" tIns="0" rIns="0" bIns="0" rtlCol="0" anchor="t"/>
           <a:lstStyle/>
           <a:p>
-            <a:pPr marL="0" indent="0">
+            <a:pPr indent="0" marL="0">
               <a:buNone/>
             </a:pPr>
             <a:r>
@@ -12024,7 +11945,7 @@
             <a:endParaRPr lang="en-US" sz="1600" dirty="0"/>
           </a:p>
           <a:p>
-            <a:pPr marL="0" indent="0">
+            <a:pPr indent="0" marL="0">
               <a:buNone/>
             </a:pPr>
             <a:r>
@@ -12041,13 +11962,13 @@
             <a:endParaRPr lang="en-US" sz="1600" dirty="0"/>
           </a:p>
           <a:p>
-            <a:pPr marL="0" indent="0">
+            <a:pPr indent="0" marL="0">
               <a:buNone/>
             </a:pPr>
             <a:endParaRPr lang="en-US" sz="1600" dirty="0"/>
           </a:p>
           <a:p>
-            <a:pPr marL="0" indent="0">
+            <a:pPr indent="0" marL="0">
               <a:buNone/>
             </a:pPr>
             <a:r>
@@ -12064,7 +11985,7 @@
             <a:endParaRPr lang="en-US" sz="1600" dirty="0"/>
           </a:p>
           <a:p>
-            <a:pPr marL="0" indent="0">
+            <a:pPr indent="0" marL="0">
               <a:buNone/>
             </a:pPr>
             <a:r>
@@ -12081,13 +12002,13 @@
             <a:endParaRPr lang="en-US" sz="1600" dirty="0"/>
           </a:p>
           <a:p>
-            <a:pPr marL="0" indent="0">
+            <a:pPr indent="0" marL="0">
               <a:buNone/>
             </a:pPr>
             <a:endParaRPr lang="en-US" sz="1600" dirty="0"/>
           </a:p>
           <a:p>
-            <a:pPr marL="0" indent="0">
+            <a:pPr indent="0" marL="0">
               <a:buNone/>
             </a:pPr>
             <a:r>
@@ -12104,7 +12025,7 @@
             <a:endParaRPr lang="en-US" sz="1600" dirty="0"/>
           </a:p>
           <a:p>
-            <a:pPr marL="0" indent="0">
+            <a:pPr indent="0" marL="0">
               <a:buNone/>
             </a:pPr>
             <a:r>
@@ -12141,20 +12062,13 @@
           </a:solidFill>
           <a:ln/>
           <a:effectLst>
-            <a:outerShdw blurRad="50800" dist="25400" dir="8100000" algn="bl" rotWithShape="0">
+            <a:outerShdw sx="100000" sy="100000" kx="0" ky="0" algn="bl" rotWithShape="0" blurRad="50800" dist="25400" dir="8100000">
               <a:srgbClr val="000000">
                 <a:alpha val="20000"/>
               </a:srgbClr>
             </a:outerShdw>
           </a:effectLst>
         </p:spPr>
-        <p:txBody>
-          <a:bodyPr/>
-          <a:lstStyle/>
-          <a:p>
-            <a:endParaRPr lang="en-US"/>
-          </a:p>
-        </p:txBody>
       </p:sp>
       <p:sp>
         <p:nvSpPr>
@@ -12177,7 +12091,7 @@
           <a:bodyPr wrap="square" rtlCol="0" anchor="ctr"/>
           <a:lstStyle/>
           <a:p>
-            <a:pPr marL="0" indent="0" algn="ctr">
+            <a:pPr algn="ctr" indent="0" marL="0">
               <a:buNone/>
             </a:pPr>
             <a:r>
@@ -12194,7 +12108,7 @@
             <a:endParaRPr lang="en-US" sz="1600" dirty="0"/>
           </a:p>
           <a:p>
-            <a:pPr marL="0" indent="0" algn="ctr">
+            <a:pPr algn="ctr" indent="0" marL="0">
               <a:buNone/>
             </a:pPr>
             <a:r>
@@ -12231,13 +12145,6 @@
           </a:solidFill>
           <a:ln/>
         </p:spPr>
-        <p:txBody>
-          <a:bodyPr/>
-          <a:lstStyle/>
-          <a:p>
-            <a:endParaRPr lang="en-US"/>
-          </a:p>
-        </p:txBody>
       </p:sp>
       <p:sp>
         <p:nvSpPr>
@@ -12260,7 +12167,7 @@
           <a:bodyPr wrap="square" rtlCol="0" anchor="ctr"/>
           <a:lstStyle/>
           <a:p>
-            <a:pPr marL="0" indent="0" algn="ctr">
+            <a:pPr algn="ctr" indent="0" marL="0">
               <a:buNone/>
             </a:pPr>
             <a:r>
@@ -12294,7 +12201,6 @@
         <a:solidFill>
           <a:srgbClr val="131B2E"/>
         </a:solidFill>
-        <a:effectLst/>
       </p:bgPr>
     </p:bg>
     <p:spTree>
@@ -12330,13 +12236,6 @@
           </a:solidFill>
           <a:ln/>
         </p:spPr>
-        <p:txBody>
-          <a:bodyPr/>
-          <a:lstStyle/>
-          <a:p>
-            <a:endParaRPr lang="en-US"/>
-          </a:p>
-        </p:txBody>
       </p:sp>
       <p:sp>
         <p:nvSpPr>
@@ -12359,7 +12258,7 @@
           <a:bodyPr wrap="square" lIns="0" tIns="0" rIns="0" bIns="0" rtlCol="0" anchor="ctr"/>
           <a:lstStyle/>
           <a:p>
-            <a:pPr marL="0" indent="0">
+            <a:pPr indent="0" marL="0">
               <a:buNone/>
             </a:pPr>
             <a:r>
@@ -12398,7 +12297,7 @@
           <a:bodyPr wrap="square" lIns="0" tIns="0" rIns="0" bIns="0" rtlCol="0" anchor="ctr"/>
           <a:lstStyle/>
           <a:p>
-            <a:pPr marL="0" indent="0">
+            <a:pPr indent="0" marL="0">
               <a:buNone/>
             </a:pPr>
             <a:r>
@@ -12435,13 +12334,6 @@
           </a:solidFill>
           <a:ln/>
         </p:spPr>
-        <p:txBody>
-          <a:bodyPr/>
-          <a:lstStyle/>
-          <a:p>
-            <a:endParaRPr lang="en-US"/>
-          </a:p>
-        </p:txBody>
       </p:sp>
       <p:sp>
         <p:nvSpPr>
@@ -12464,7 +12356,7 @@
           <a:bodyPr wrap="square" lIns="0" tIns="0" rIns="0" bIns="0" rtlCol="0" anchor="ctr"/>
           <a:lstStyle/>
           <a:p>
-            <a:pPr marL="0" indent="0">
+            <a:pPr indent="0" marL="0">
               <a:buNone/>
             </a:pPr>
             <a:r>
@@ -12503,7 +12395,7 @@
           <a:bodyPr wrap="square" lIns="0" tIns="0" rIns="0" bIns="0" rtlCol="0" anchor="ctr"/>
           <a:lstStyle/>
           <a:p>
-            <a:pPr marL="0" indent="0">
+            <a:pPr indent="0" marL="0">
               <a:buNone/>
             </a:pPr>
             <a:r>
@@ -12540,13 +12432,6 @@
           </a:solidFill>
           <a:ln/>
         </p:spPr>
-        <p:txBody>
-          <a:bodyPr/>
-          <a:lstStyle/>
-          <a:p>
-            <a:endParaRPr lang="en-US"/>
-          </a:p>
-        </p:txBody>
       </p:sp>
       <p:sp>
         <p:nvSpPr>
@@ -12569,7 +12454,7 @@
           <a:bodyPr wrap="square" lIns="0" tIns="0" rIns="0" bIns="0" rtlCol="0" anchor="ctr"/>
           <a:lstStyle/>
           <a:p>
-            <a:pPr marL="0" indent="0">
+            <a:pPr indent="0" marL="0">
               <a:buNone/>
             </a:pPr>
             <a:r>
@@ -12608,7 +12493,7 @@
           <a:bodyPr wrap="square" lIns="0" tIns="0" rIns="0" bIns="0" rtlCol="0" anchor="ctr"/>
           <a:lstStyle/>
           <a:p>
-            <a:pPr marL="0" indent="0">
+            <a:pPr indent="0" marL="0">
               <a:buNone/>
             </a:pPr>
             <a:r>
@@ -12645,13 +12530,6 @@
           </a:solidFill>
           <a:ln/>
         </p:spPr>
-        <p:txBody>
-          <a:bodyPr/>
-          <a:lstStyle/>
-          <a:p>
-            <a:endParaRPr lang="en-US"/>
-          </a:p>
-        </p:txBody>
       </p:sp>
       <p:sp>
         <p:nvSpPr>
@@ -12674,7 +12552,7 @@
           <a:bodyPr wrap="square" lIns="0" tIns="0" rIns="0" bIns="0" rtlCol="0" anchor="ctr"/>
           <a:lstStyle/>
           <a:p>
-            <a:pPr marL="0" indent="0">
+            <a:pPr indent="0" marL="0">
               <a:buNone/>
             </a:pPr>
             <a:r>
@@ -12713,7 +12591,7 @@
           <a:bodyPr wrap="square" lIns="0" tIns="0" rIns="0" bIns="0" rtlCol="0" anchor="ctr"/>
           <a:lstStyle/>
           <a:p>
-            <a:pPr marL="0" indent="0">
+            <a:pPr indent="0" marL="0">
               <a:buNone/>
             </a:pPr>
             <a:r>
@@ -12750,13 +12628,6 @@
           </a:solidFill>
           <a:ln/>
         </p:spPr>
-        <p:txBody>
-          <a:bodyPr/>
-          <a:lstStyle/>
-          <a:p>
-            <a:endParaRPr lang="en-US"/>
-          </a:p>
-        </p:txBody>
       </p:sp>
       <p:sp>
         <p:nvSpPr>
@@ -12779,7 +12650,7 @@
           <a:bodyPr wrap="square" lIns="0" tIns="0" rIns="0" bIns="0" rtlCol="0" anchor="ctr"/>
           <a:lstStyle/>
           <a:p>
-            <a:pPr marL="0" indent="0">
+            <a:pPr indent="0" marL="0">
               <a:buNone/>
             </a:pPr>
             <a:r>
@@ -12818,7 +12689,7 @@
           <a:bodyPr wrap="square" lIns="0" tIns="0" rIns="0" bIns="0" rtlCol="0" anchor="ctr"/>
           <a:lstStyle/>
           <a:p>
-            <a:pPr marL="0" indent="0">
+            <a:pPr indent="0" marL="0">
               <a:buNone/>
             </a:pPr>
             <a:r>
@@ -12855,13 +12726,6 @@
           </a:solidFill>
           <a:ln/>
         </p:spPr>
-        <p:txBody>
-          <a:bodyPr/>
-          <a:lstStyle/>
-          <a:p>
-            <a:endParaRPr lang="en-US"/>
-          </a:p>
-        </p:txBody>
       </p:sp>
       <p:sp>
         <p:nvSpPr>
@@ -12884,7 +12748,7 @@
           <a:bodyPr wrap="square" lIns="0" tIns="0" rIns="0" bIns="0" rtlCol="0" anchor="ctr"/>
           <a:lstStyle/>
           <a:p>
-            <a:pPr marL="0" indent="0">
+            <a:pPr indent="0" marL="0">
               <a:buNone/>
             </a:pPr>
             <a:r>
@@ -12923,7 +12787,7 @@
           <a:bodyPr wrap="square" lIns="0" tIns="0" rIns="0" bIns="0" rtlCol="0" anchor="ctr"/>
           <a:lstStyle/>
           <a:p>
-            <a:pPr marL="0" indent="0">
+            <a:pPr indent="0" marL="0">
               <a:buNone/>
             </a:pPr>
             <a:r>
@@ -12960,13 +12824,6 @@
           </a:solidFill>
           <a:ln/>
         </p:spPr>
-        <p:txBody>
-          <a:bodyPr/>
-          <a:lstStyle/>
-          <a:p>
-            <a:endParaRPr lang="en-US"/>
-          </a:p>
-        </p:txBody>
       </p:sp>
       <p:sp>
         <p:nvSpPr>
@@ -12989,7 +12846,7 @@
           <a:bodyPr wrap="square" rtlCol="0" anchor="ctr"/>
           <a:lstStyle/>
           <a:p>
-            <a:pPr marL="0" indent="0" algn="ctr">
+            <a:pPr algn="ctr" indent="0" marL="0">
               <a:buNone/>
             </a:pPr>
             <a:r>
@@ -13023,7 +12880,6 @@
         <a:solidFill>
           <a:srgbClr val="131B2E"/>
         </a:solidFill>
-        <a:effectLst/>
       </p:bgPr>
     </p:bg>
     <p:spTree>
@@ -13059,13 +12915,6 @@
           </a:solidFill>
           <a:ln/>
         </p:spPr>
-        <p:txBody>
-          <a:bodyPr/>
-          <a:lstStyle/>
-          <a:p>
-            <a:endParaRPr lang="en-US"/>
-          </a:p>
-        </p:txBody>
       </p:sp>
       <p:sp>
         <p:nvSpPr>
@@ -13086,13 +12935,6 @@
           </a:solidFill>
           <a:ln/>
         </p:spPr>
-        <p:txBody>
-          <a:bodyPr/>
-          <a:lstStyle/>
-          <a:p>
-            <a:endParaRPr lang="en-US"/>
-          </a:p>
-        </p:txBody>
       </p:sp>
       <p:sp>
         <p:nvSpPr>
@@ -13115,7 +12957,7 @@
           <a:bodyPr wrap="square" rtlCol="0" anchor="ctr"/>
           <a:lstStyle/>
           <a:p>
-            <a:pPr marL="0" indent="0" algn="ctr">
+            <a:pPr algn="ctr" indent="0" marL="0">
               <a:buNone/>
             </a:pPr>
             <a:r>
@@ -13154,7 +12996,7 @@
           <a:bodyPr wrap="square" rtlCol="0" anchor="ctr"/>
           <a:lstStyle/>
           <a:p>
-            <a:pPr marL="0" indent="0" algn="ctr">
+            <a:pPr algn="ctr" indent="0" marL="0">
               <a:buNone/>
             </a:pPr>
             <a:r>
@@ -13193,7 +13035,7 @@
           <a:bodyPr wrap="square" rtlCol="0" anchor="ctr"/>
           <a:lstStyle/>
           <a:p>
-            <a:pPr marL="0" indent="0" algn="ctr">
+            <a:pPr algn="ctr" indent="0" marL="0">
               <a:buNone/>
             </a:pPr>
             <a:r>
@@ -13210,7 +13052,7 @@
             <a:endParaRPr lang="en-US" sz="1500" dirty="0"/>
           </a:p>
           <a:p>
-            <a:pPr marL="0" indent="0" algn="ctr">
+            <a:pPr algn="ctr" indent="0" marL="0">
               <a:buNone/>
             </a:pPr>
             <a:r>
@@ -13244,7 +13086,6 @@
         <a:solidFill>
           <a:srgbClr val="131B2E"/>
         </a:solidFill>
-        <a:effectLst/>
       </p:bgPr>
     </p:bg>
     <p:spTree>
@@ -13280,13 +13121,6 @@
           </a:solidFill>
           <a:ln/>
         </p:spPr>
-        <p:txBody>
-          <a:bodyPr/>
-          <a:lstStyle/>
-          <a:p>
-            <a:endParaRPr lang="en-US"/>
-          </a:p>
-        </p:txBody>
       </p:sp>
       <p:sp>
         <p:nvSpPr>
@@ -13309,7 +13143,7 @@
           <a:bodyPr wrap="square" lIns="0" tIns="0" rIns="0" bIns="0" rtlCol="0" anchor="ctr"/>
           <a:lstStyle/>
           <a:p>
-            <a:pPr marL="0" indent="0">
+            <a:pPr indent="0" marL="0">
               <a:buNone/>
             </a:pPr>
             <a:r>
@@ -13348,7 +13182,7 @@
           <a:bodyPr wrap="square" lIns="0" tIns="0" rIns="0" bIns="0" rtlCol="0" anchor="ctr"/>
           <a:lstStyle/>
           <a:p>
-            <a:pPr marL="0" indent="0">
+            <a:pPr indent="0" marL="0">
               <a:buNone/>
             </a:pPr>
             <a:r>
@@ -13387,7 +13221,7 @@
           <a:bodyPr wrap="square" lIns="0" tIns="0" rIns="0" bIns="0" rtlCol="0" anchor="ctr"/>
           <a:lstStyle/>
           <a:p>
-            <a:pPr marL="0" indent="0">
+            <a:pPr indent="0" marL="0">
               <a:buNone/>
             </a:pPr>
             <a:r>
@@ -13401,6 +13235,9 @@
               </a:rPr>
               <a:t>Dice + Cross-Entropy loss </a:t>
             </a:r>
+            <a:pPr indent="0" marL="0">
+              <a:buNone/>
+            </a:pPr>
             <a:r>
               <a:rPr lang="en-US" sz="1700" dirty="0">
                 <a:solidFill>
@@ -13415,13 +13252,13 @@
             <a:endParaRPr lang="en-US" sz="1700" dirty="0"/>
           </a:p>
           <a:p>
-            <a:pPr marL="0" indent="0">
+            <a:pPr indent="0" marL="0">
               <a:buNone/>
             </a:pPr>
             <a:endParaRPr lang="en-US" sz="1700" dirty="0"/>
           </a:p>
           <a:p>
-            <a:pPr marL="0" indent="0">
+            <a:pPr indent="0" marL="0">
               <a:buNone/>
             </a:pPr>
             <a:r>
@@ -13435,6 +13272,9 @@
               </a:rPr>
               <a:t>A segmentation can have high Dice (0.87) </a:t>
             </a:r>
+            <a:pPr indent="0" marL="0">
+              <a:buNone/>
+            </a:pPr>
             <a:r>
               <a:rPr lang="en-US" sz="1700" dirty="0">
                 <a:solidFill>
@@ -13449,13 +13289,13 @@
             <a:endParaRPr lang="en-US" sz="1700" dirty="0"/>
           </a:p>
           <a:p>
-            <a:pPr marL="0" indent="0">
+            <a:pPr indent="0" marL="0">
               <a:buNone/>
             </a:pPr>
             <a:endParaRPr lang="en-US" sz="1700" dirty="0"/>
           </a:p>
           <a:p>
-            <a:pPr marL="0" indent="0">
+            <a:pPr indent="0" marL="0">
               <a:buNone/>
             </a:pPr>
             <a:r>
@@ -13469,6 +13309,9 @@
               </a:rPr>
               <a:t>Aggregate metrics </a:t>
             </a:r>
+            <a:pPr indent="0" marL="0">
+              <a:buNone/>
+            </a:pPr>
             <a:r>
               <a:rPr lang="en-US" sz="1700" dirty="0">
                 <a:solidFill>
@@ -13503,20 +13346,13 @@
           </a:solidFill>
           <a:ln/>
           <a:effectLst>
-            <a:outerShdw blurRad="50800" dist="25400" dir="8100000" algn="bl" rotWithShape="0">
+            <a:outerShdw sx="100000" sy="100000" kx="0" ky="0" algn="bl" rotWithShape="0" blurRad="50800" dist="25400" dir="8100000">
               <a:srgbClr val="000000">
                 <a:alpha val="20000"/>
               </a:srgbClr>
             </a:outerShdw>
           </a:effectLst>
         </p:spPr>
-        <p:txBody>
-          <a:bodyPr/>
-          <a:lstStyle/>
-          <a:p>
-            <a:endParaRPr lang="en-US"/>
-          </a:p>
-        </p:txBody>
       </p:sp>
       <p:sp>
         <p:nvSpPr>
@@ -13539,7 +13375,7 @@
           <a:bodyPr wrap="square" rtlCol="0" anchor="ctr"/>
           <a:lstStyle/>
           <a:p>
-            <a:pPr marL="0" indent="0">
+            <a:pPr indent="0" marL="0">
               <a:buNone/>
             </a:pPr>
             <a:r>
@@ -13578,7 +13414,7 @@
           <a:bodyPr wrap="square" rtlCol="0" anchor="ctr"/>
           <a:lstStyle/>
           <a:p>
-            <a:pPr marL="0" indent="0">
+            <a:pPr indent="0" marL="0">
               <a:buNone/>
             </a:pPr>
             <a:r>
@@ -13592,6 +13428,9 @@
               </a:rPr>
               <a:t>Global DSC: 0.87   </a:t>
             </a:r>
+            <a:pPr indent="0" marL="0">
+              <a:buNone/>
+            </a:pPr>
             <a:r>
               <a:rPr lang="en-US" sz="1800" b="1" dirty="0">
                 <a:solidFill>
@@ -13601,7 +13440,21 @@
                 <a:ea typeface="Calibri" pitchFamily="34" charset="-122"/>
                 <a:cs typeface="Calibri" pitchFamily="34" charset="-120"/>
               </a:rPr>
-              <a:t>R-Pcom DSC: 0.42   L-ACA DSC: 0.46</a:t>
+              <a:t>R-Pcom DSC: 0.42   </a:t>
+            </a:r>
+            <a:pPr indent="0" marL="0">
+              <a:buNone/>
+            </a:pPr>
+            <a:r>
+              <a:rPr lang="en-US" sz="1800" b="1" dirty="0">
+                <a:solidFill>
+                  <a:srgbClr val="EF4444"/>
+                </a:solidFill>
+                <a:latin typeface="Calibri" pitchFamily="34" charset="0"/>
+                <a:ea typeface="Calibri" pitchFamily="34" charset="-122"/>
+                <a:cs typeface="Calibri" pitchFamily="34" charset="-120"/>
+              </a:rPr>
+              <a:t>L-ACA DSC: 0.46</a:t>
             </a:r>
             <a:endParaRPr lang="en-US" sz="1800" dirty="0"/>
           </a:p>
@@ -13623,7 +13476,6 @@
         <a:solidFill>
           <a:srgbClr val="131B2E"/>
         </a:solidFill>
-        <a:effectLst/>
       </p:bgPr>
     </p:bg>
     <p:spTree>
@@ -13659,13 +13511,6 @@
           </a:solidFill>
           <a:ln/>
         </p:spPr>
-        <p:txBody>
-          <a:bodyPr/>
-          <a:lstStyle/>
-          <a:p>
-            <a:endParaRPr lang="en-US"/>
-          </a:p>
-        </p:txBody>
       </p:sp>
       <p:sp>
         <p:nvSpPr>
@@ -13688,7 +13533,7 @@
           <a:bodyPr wrap="square" lIns="0" tIns="0" rIns="0" bIns="0" rtlCol="0" anchor="ctr"/>
           <a:lstStyle/>
           <a:p>
-            <a:pPr marL="0" indent="0">
+            <a:pPr indent="0" marL="0">
               <a:buNone/>
             </a:pPr>
             <a:r>
@@ -13727,7 +13572,7 @@
           <a:bodyPr wrap="square" lIns="0" tIns="0" rIns="0" bIns="0" rtlCol="0" anchor="ctr"/>
           <a:lstStyle/>
           <a:p>
-            <a:pPr marL="0" indent="0">
+            <a:pPr indent="0" marL="0">
               <a:buNone/>
             </a:pPr>
             <a:r>
@@ -13764,20 +13609,13 @@
           </a:solidFill>
           <a:ln/>
           <a:effectLst>
-            <a:outerShdw blurRad="50800" dist="25400" dir="8100000" algn="bl" rotWithShape="0">
+            <a:outerShdw sx="100000" sy="100000" kx="0" ky="0" algn="bl" rotWithShape="0" blurRad="50800" dist="25400" dir="8100000">
               <a:srgbClr val="000000">
                 <a:alpha val="20000"/>
               </a:srgbClr>
             </a:outerShdw>
           </a:effectLst>
         </p:spPr>
-        <p:txBody>
-          <a:bodyPr/>
-          <a:lstStyle/>
-          <a:p>
-            <a:endParaRPr lang="en-US"/>
-          </a:p>
-        </p:txBody>
       </p:sp>
       <p:sp>
         <p:nvSpPr>
@@ -13800,7 +13638,7 @@
           <a:bodyPr wrap="square" lIns="0" tIns="0" rIns="0" bIns="0" rtlCol="0" anchor="ctr"/>
           <a:lstStyle/>
           <a:p>
-            <a:pPr marL="0" indent="0">
+            <a:pPr indent="0" marL="0">
               <a:buNone/>
             </a:pPr>
             <a:r>
@@ -13839,7 +13677,7 @@
           <a:bodyPr wrap="square" lIns="0" tIns="0" rIns="0" bIns="0" rtlCol="0" anchor="ctr"/>
           <a:lstStyle/>
           <a:p>
-            <a:pPr marL="0" indent="0">
+            <a:pPr indent="0" marL="0">
               <a:buNone/>
             </a:pPr>
             <a:r>
@@ -13856,7 +13694,7 @@
             <a:endParaRPr lang="en-US" sz="1500" dirty="0"/>
           </a:p>
           <a:p>
-            <a:pPr marL="0" indent="0">
+            <a:pPr indent="0" marL="0">
               <a:buNone/>
             </a:pPr>
             <a:r>
@@ -13873,13 +13711,13 @@
             <a:endParaRPr lang="en-US" sz="1500" dirty="0"/>
           </a:p>
           <a:p>
-            <a:pPr marL="0" indent="0">
+            <a:pPr indent="0" marL="0">
               <a:buNone/>
             </a:pPr>
             <a:endParaRPr lang="en-US" sz="1500" dirty="0"/>
           </a:p>
           <a:p>
-            <a:pPr marL="0" indent="0">
+            <a:pPr indent="0" marL="0">
               <a:buNone/>
             </a:pPr>
             <a:r>
@@ -13896,7 +13734,7 @@
             <a:endParaRPr lang="en-US" sz="1500" dirty="0"/>
           </a:p>
           <a:p>
-            <a:pPr marL="0" indent="0">
+            <a:pPr indent="0" marL="0">
               <a:buNone/>
             </a:pPr>
             <a:r>
@@ -13913,13 +13751,13 @@
             <a:endParaRPr lang="en-US" sz="1500" dirty="0"/>
           </a:p>
           <a:p>
-            <a:pPr marL="0" indent="0">
+            <a:pPr indent="0" marL="0">
               <a:buNone/>
             </a:pPr>
             <a:endParaRPr lang="en-US" sz="1500" dirty="0"/>
           </a:p>
           <a:p>
-            <a:pPr marL="0" indent="0">
+            <a:pPr indent="0" marL="0">
               <a:buNone/>
             </a:pPr>
             <a:r>
@@ -13936,7 +13774,7 @@
             <a:endParaRPr lang="en-US" sz="1500" dirty="0"/>
           </a:p>
           <a:p>
-            <a:pPr marL="0" indent="0">
+            <a:pPr indent="0" marL="0">
               <a:buNone/>
             </a:pPr>
             <a:r>
@@ -13973,20 +13811,13 @@
           </a:solidFill>
           <a:ln/>
           <a:effectLst>
-            <a:outerShdw blurRad="50800" dist="25400" dir="8100000" algn="bl" rotWithShape="0">
+            <a:outerShdw sx="100000" sy="100000" kx="0" ky="0" algn="bl" rotWithShape="0" blurRad="50800" dist="25400" dir="8100000">
               <a:srgbClr val="000000">
                 <a:alpha val="20000"/>
               </a:srgbClr>
             </a:outerShdw>
           </a:effectLst>
         </p:spPr>
-        <p:txBody>
-          <a:bodyPr/>
-          <a:lstStyle/>
-          <a:p>
-            <a:endParaRPr lang="en-US"/>
-          </a:p>
-        </p:txBody>
       </p:sp>
       <p:sp>
         <p:nvSpPr>
@@ -14009,7 +13840,7 @@
           <a:bodyPr wrap="square" lIns="0" tIns="0" rIns="0" bIns="0" rtlCol="0" anchor="ctr"/>
           <a:lstStyle/>
           <a:p>
-            <a:pPr marL="0" indent="0">
+            <a:pPr indent="0" marL="0">
               <a:buNone/>
             </a:pPr>
             <a:r>
@@ -14046,13 +13877,6 @@
           </a:solidFill>
           <a:ln/>
         </p:spPr>
-        <p:txBody>
-          <a:bodyPr/>
-          <a:lstStyle/>
-          <a:p>
-            <a:endParaRPr lang="en-US"/>
-          </a:p>
-        </p:txBody>
       </p:sp>
       <p:sp>
         <p:nvSpPr>
@@ -14075,7 +13899,7 @@
           <a:bodyPr wrap="square" lIns="0" tIns="0" rIns="0" bIns="0" rtlCol="0" anchor="ctr"/>
           <a:lstStyle/>
           <a:p>
-            <a:pPr marL="0" indent="0">
+            <a:pPr indent="0" marL="0">
               <a:buNone/>
             </a:pPr>
             <a:r>
@@ -14114,7 +13938,7 @@
           <a:bodyPr wrap="square" lIns="0" tIns="0" rIns="0" bIns="0" rtlCol="0" anchor="ctr"/>
           <a:lstStyle/>
           <a:p>
-            <a:pPr marL="0" indent="0">
+            <a:pPr indent="0" marL="0">
               <a:buNone/>
             </a:pPr>
             <a:r>
@@ -14151,13 +13975,6 @@
           </a:solidFill>
           <a:ln/>
         </p:spPr>
-        <p:txBody>
-          <a:bodyPr/>
-          <a:lstStyle/>
-          <a:p>
-            <a:endParaRPr lang="en-US"/>
-          </a:p>
-        </p:txBody>
       </p:sp>
       <p:sp>
         <p:nvSpPr>
@@ -14180,7 +13997,7 @@
           <a:bodyPr wrap="square" lIns="0" tIns="0" rIns="0" bIns="0" rtlCol="0" anchor="ctr"/>
           <a:lstStyle/>
           <a:p>
-            <a:pPr marL="0" indent="0">
+            <a:pPr indent="0" marL="0">
               <a:buNone/>
             </a:pPr>
             <a:r>
@@ -14219,7 +14036,7 @@
           <a:bodyPr wrap="square" lIns="0" tIns="0" rIns="0" bIns="0" rtlCol="0" anchor="ctr"/>
           <a:lstStyle/>
           <a:p>
-            <a:pPr marL="0" indent="0">
+            <a:pPr indent="0" marL="0">
               <a:buNone/>
             </a:pPr>
             <a:r>
@@ -14256,13 +14073,6 @@
           </a:solidFill>
           <a:ln/>
         </p:spPr>
-        <p:txBody>
-          <a:bodyPr/>
-          <a:lstStyle/>
-          <a:p>
-            <a:endParaRPr lang="en-US"/>
-          </a:p>
-        </p:txBody>
       </p:sp>
       <p:sp>
         <p:nvSpPr>
@@ -14285,7 +14095,7 @@
           <a:bodyPr wrap="square" lIns="0" tIns="0" rIns="0" bIns="0" rtlCol="0" anchor="ctr"/>
           <a:lstStyle/>
           <a:p>
-            <a:pPr marL="0" indent="0">
+            <a:pPr indent="0" marL="0">
               <a:buNone/>
             </a:pPr>
             <a:r>
@@ -14324,7 +14134,7 @@
           <a:bodyPr wrap="square" lIns="0" tIns="0" rIns="0" bIns="0" rtlCol="0" anchor="ctr"/>
           <a:lstStyle/>
           <a:p>
-            <a:pPr marL="0" indent="0">
+            <a:pPr indent="0" marL="0">
               <a:buNone/>
             </a:pPr>
             <a:r>
@@ -14361,13 +14171,6 @@
           </a:solidFill>
           <a:ln/>
         </p:spPr>
-        <p:txBody>
-          <a:bodyPr/>
-          <a:lstStyle/>
-          <a:p>
-            <a:endParaRPr lang="en-US"/>
-          </a:p>
-        </p:txBody>
       </p:sp>
       <p:sp>
         <p:nvSpPr>
@@ -14390,7 +14193,7 @@
           <a:bodyPr wrap="square" lIns="0" tIns="0" rIns="0" bIns="0" rtlCol="0" anchor="ctr"/>
           <a:lstStyle/>
           <a:p>
-            <a:pPr marL="0" indent="0">
+            <a:pPr indent="0" marL="0">
               <a:buNone/>
             </a:pPr>
             <a:r>
@@ -14429,7 +14232,7 @@
           <a:bodyPr wrap="square" lIns="0" tIns="0" rIns="0" bIns="0" rtlCol="0" anchor="ctr"/>
           <a:lstStyle/>
           <a:p>
-            <a:pPr marL="0" indent="0">
+            <a:pPr indent="0" marL="0">
               <a:buNone/>
             </a:pPr>
             <a:r>
@@ -14463,7 +14266,6 @@
         <a:solidFill>
           <a:srgbClr val="131B2E"/>
         </a:solidFill>
-        <a:effectLst/>
       </p:bgPr>
     </p:bg>
     <p:spTree>
@@ -14499,13 +14301,6 @@
           </a:solidFill>
           <a:ln/>
         </p:spPr>
-        <p:txBody>
-          <a:bodyPr/>
-          <a:lstStyle/>
-          <a:p>
-            <a:endParaRPr lang="en-US"/>
-          </a:p>
-        </p:txBody>
       </p:sp>
       <p:sp>
         <p:nvSpPr>
@@ -14528,7 +14323,7 @@
           <a:bodyPr wrap="square" lIns="0" tIns="0" rIns="0" bIns="0" rtlCol="0" anchor="ctr"/>
           <a:lstStyle/>
           <a:p>
-            <a:pPr marL="0" indent="0">
+            <a:pPr indent="0" marL="0">
               <a:buNone/>
             </a:pPr>
             <a:r>
@@ -14567,7 +14362,7 @@
           <a:bodyPr wrap="square" lIns="0" tIns="0" rIns="0" bIns="0" rtlCol="0" anchor="ctr"/>
           <a:lstStyle/>
           <a:p>
-            <a:pPr marL="0" indent="0">
+            <a:pPr indent="0" marL="0">
               <a:buNone/>
             </a:pPr>
             <a:r>
@@ -14604,20 +14399,13 @@
           </a:solidFill>
           <a:ln/>
           <a:effectLst>
-            <a:outerShdw blurRad="50800" dist="25400" dir="8100000" algn="bl" rotWithShape="0">
+            <a:outerShdw sx="100000" sy="100000" kx="0" ky="0" algn="bl" rotWithShape="0" blurRad="50800" dist="25400" dir="8100000">
               <a:srgbClr val="000000">
                 <a:alpha val="20000"/>
               </a:srgbClr>
             </a:outerShdw>
           </a:effectLst>
         </p:spPr>
-        <p:txBody>
-          <a:bodyPr/>
-          <a:lstStyle/>
-          <a:p>
-            <a:endParaRPr lang="en-US"/>
-          </a:p>
-        </p:txBody>
       </p:sp>
       <p:sp>
         <p:nvSpPr>
@@ -14640,7 +14428,7 @@
           <a:bodyPr wrap="square" lIns="0" tIns="0" rIns="0" bIns="0" rtlCol="0" anchor="ctr"/>
           <a:lstStyle/>
           <a:p>
-            <a:pPr marL="0" indent="0">
+            <a:pPr indent="0" marL="0">
               <a:buNone/>
             </a:pPr>
             <a:r>
@@ -14679,7 +14467,7 @@
           <a:bodyPr wrap="square" lIns="0" tIns="0" rIns="0" bIns="0" rtlCol="0" anchor="ctr"/>
           <a:lstStyle/>
           <a:p>
-            <a:pPr marL="0" indent="0">
+            <a:pPr indent="0" marL="0">
               <a:buNone/>
             </a:pPr>
             <a:r>
@@ -14718,7 +14506,7 @@
           <a:bodyPr wrap="square" lIns="0" tIns="0" rIns="0" bIns="0" rtlCol="0" anchor="ctr"/>
           <a:lstStyle/>
           <a:p>
-            <a:pPr marL="0" indent="0">
+            <a:pPr indent="0" marL="0">
               <a:buNone/>
             </a:pPr>
             <a:r>
@@ -14757,7 +14545,7 @@
           <a:bodyPr wrap="square" lIns="0" tIns="0" rIns="0" bIns="0" rtlCol="0" anchor="ctr"/>
           <a:lstStyle/>
           <a:p>
-            <a:pPr marL="0" indent="0">
+            <a:pPr indent="0" marL="0">
               <a:buNone/>
             </a:pPr>
             <a:r>
@@ -14796,7 +14584,7 @@
           <a:bodyPr wrap="square" lIns="0" tIns="0" rIns="0" bIns="0" rtlCol="0" anchor="ctr"/>
           <a:lstStyle/>
           <a:p>
-            <a:pPr marL="0" indent="0">
+            <a:pPr indent="0" marL="0">
               <a:buNone/>
             </a:pPr>
             <a:r>
@@ -14835,7 +14623,7 @@
           <a:bodyPr wrap="square" lIns="0" tIns="0" rIns="0" bIns="0" rtlCol="0" anchor="ctr"/>
           <a:lstStyle/>
           <a:p>
-            <a:pPr marL="0" indent="0">
+            <a:pPr indent="0" marL="0">
               <a:buNone/>
             </a:pPr>
             <a:r>
@@ -14874,7 +14662,7 @@
           <a:bodyPr wrap="square" lIns="0" tIns="0" rIns="0" bIns="0" rtlCol="0" anchor="ctr"/>
           <a:lstStyle/>
           <a:p>
-            <a:pPr marL="0" indent="0">
+            <a:pPr indent="0" marL="0">
               <a:buNone/>
             </a:pPr>
             <a:r>
@@ -14911,20 +14699,13 @@
           </a:solidFill>
           <a:ln/>
           <a:effectLst>
-            <a:outerShdw blurRad="50800" dist="25400" dir="8100000" algn="bl" rotWithShape="0">
+            <a:outerShdw sx="100000" sy="100000" kx="0" ky="0" algn="bl" rotWithShape="0" blurRad="50800" dist="25400" dir="8100000">
               <a:srgbClr val="000000">
                 <a:alpha val="20000"/>
               </a:srgbClr>
             </a:outerShdw>
           </a:effectLst>
         </p:spPr>
-        <p:txBody>
-          <a:bodyPr/>
-          <a:lstStyle/>
-          <a:p>
-            <a:endParaRPr lang="en-US"/>
-          </a:p>
-        </p:txBody>
       </p:sp>
       <p:sp>
         <p:nvSpPr>
@@ -14947,7 +14728,7 @@
           <a:bodyPr wrap="square" lIns="0" tIns="0" rIns="0" bIns="0" rtlCol="0" anchor="ctr"/>
           <a:lstStyle/>
           <a:p>
-            <a:pPr marL="0" indent="0">
+            <a:pPr indent="0" marL="0">
               <a:buNone/>
             </a:pPr>
             <a:r>
@@ -14986,7 +14767,7 @@
           <a:bodyPr wrap="square" lIns="0" tIns="0" rIns="0" bIns="0" rtlCol="0" anchor="ctr"/>
           <a:lstStyle/>
           <a:p>
-            <a:pPr marL="0" indent="0">
+            <a:pPr indent="0" marL="0">
               <a:buNone/>
             </a:pPr>
             <a:r>
@@ -15025,7 +14806,7 @@
           <a:bodyPr wrap="square" lIns="0" tIns="0" rIns="0" bIns="0" rtlCol="0" anchor="ctr"/>
           <a:lstStyle/>
           <a:p>
-            <a:pPr marL="0" indent="0">
+            <a:pPr indent="0" marL="0">
               <a:buNone/>
             </a:pPr>
             <a:r>
@@ -15064,7 +14845,7 @@
           <a:bodyPr wrap="square" lIns="0" tIns="0" rIns="0" bIns="0" rtlCol="0" anchor="ctr"/>
           <a:lstStyle/>
           <a:p>
-            <a:pPr marL="0" indent="0">
+            <a:pPr indent="0" marL="0">
               <a:buNone/>
             </a:pPr>
             <a:r>
@@ -15103,7 +14884,7 @@
           <a:bodyPr wrap="square" lIns="0" tIns="0" rIns="0" bIns="0" rtlCol="0" anchor="ctr"/>
           <a:lstStyle/>
           <a:p>
-            <a:pPr marL="0" indent="0">
+            <a:pPr indent="0" marL="0">
               <a:buNone/>
             </a:pPr>
             <a:r>
@@ -15142,7 +14923,7 @@
           <a:bodyPr wrap="square" lIns="0" tIns="0" rIns="0" bIns="0" rtlCol="0" anchor="ctr"/>
           <a:lstStyle/>
           <a:p>
-            <a:pPr marL="0" indent="0">
+            <a:pPr indent="0" marL="0">
               <a:buNone/>
             </a:pPr>
             <a:r>
@@ -15181,7 +14962,7 @@
           <a:bodyPr wrap="square" lIns="0" tIns="0" rIns="0" bIns="0" rtlCol="0" anchor="ctr"/>
           <a:lstStyle/>
           <a:p>
-            <a:pPr marL="0" indent="0">
+            <a:pPr indent="0" marL="0">
               <a:buNone/>
             </a:pPr>
             <a:r>
@@ -15220,7 +15001,7 @@
           <a:bodyPr wrap="square" lIns="0" tIns="0" rIns="0" bIns="0" rtlCol="0" anchor="ctr"/>
           <a:lstStyle/>
           <a:p>
-            <a:pPr marL="0" indent="0">
+            <a:pPr indent="0" marL="0">
               <a:buNone/>
             </a:pPr>
             <a:r>
@@ -15259,7 +15040,7 @@
           <a:bodyPr wrap="square" lIns="0" tIns="0" rIns="0" bIns="0" rtlCol="0" anchor="ctr"/>
           <a:lstStyle/>
           <a:p>
-            <a:pPr marL="0" indent="0">
+            <a:pPr indent="0" marL="0">
               <a:buNone/>
             </a:pPr>
             <a:r>
@@ -15298,7 +15079,7 @@
           <a:bodyPr wrap="square" lIns="0" tIns="0" rIns="0" bIns="0" rtlCol="0" anchor="ctr"/>
           <a:lstStyle/>
           <a:p>
-            <a:pPr marL="0" indent="0">
+            <a:pPr indent="0" marL="0">
               <a:buNone/>
             </a:pPr>
             <a:r>
@@ -15335,20 +15116,13 @@
           </a:solidFill>
           <a:ln/>
           <a:effectLst>
-            <a:outerShdw blurRad="50800" dist="25400" dir="8100000" algn="bl" rotWithShape="0">
+            <a:outerShdw sx="100000" sy="100000" kx="0" ky="0" algn="bl" rotWithShape="0" blurRad="50800" dist="25400" dir="8100000">
               <a:srgbClr val="000000">
                 <a:alpha val="20000"/>
               </a:srgbClr>
             </a:outerShdw>
           </a:effectLst>
         </p:spPr>
-        <p:txBody>
-          <a:bodyPr/>
-          <a:lstStyle/>
-          <a:p>
-            <a:endParaRPr lang="en-US"/>
-          </a:p>
-        </p:txBody>
       </p:sp>
       <p:sp>
         <p:nvSpPr>
@@ -15371,7 +15145,7 @@
           <a:bodyPr wrap="square" lIns="0" tIns="0" rIns="0" bIns="0" rtlCol="0" anchor="ctr"/>
           <a:lstStyle/>
           <a:p>
-            <a:pPr marL="0" indent="0">
+            <a:pPr indent="0" marL="0">
               <a:buNone/>
             </a:pPr>
             <a:r>
@@ -15410,7 +15184,7 @@
           <a:bodyPr wrap="square" lIns="0" tIns="0" rIns="0" bIns="0" rtlCol="0" anchor="ctr"/>
           <a:lstStyle/>
           <a:p>
-            <a:pPr marL="0" indent="0">
+            <a:pPr indent="0" marL="0">
               <a:buNone/>
             </a:pPr>
             <a:r>
@@ -15449,7 +15223,7 @@
           <a:bodyPr wrap="square" lIns="0" tIns="0" rIns="0" bIns="0" rtlCol="0" anchor="ctr"/>
           <a:lstStyle/>
           <a:p>
-            <a:pPr marL="0" indent="0">
+            <a:pPr indent="0" marL="0">
               <a:buNone/>
             </a:pPr>
             <a:r>
@@ -15488,7 +15262,7 @@
           <a:bodyPr wrap="square" lIns="0" tIns="0" rIns="0" bIns="0" rtlCol="0" anchor="ctr"/>
           <a:lstStyle/>
           <a:p>
-            <a:pPr marL="0" indent="0">
+            <a:pPr indent="0" marL="0">
               <a:buNone/>
             </a:pPr>
             <a:r>
@@ -15527,7 +15301,7 @@
           <a:bodyPr wrap="square" lIns="0" tIns="0" rIns="0" bIns="0" rtlCol="0" anchor="ctr"/>
           <a:lstStyle/>
           <a:p>
-            <a:pPr marL="0" indent="0">
+            <a:pPr indent="0" marL="0">
               <a:buNone/>
             </a:pPr>
             <a:r>
@@ -15566,7 +15340,7 @@
           <a:bodyPr wrap="square" lIns="0" tIns="0" rIns="0" bIns="0" rtlCol="0" anchor="ctr"/>
           <a:lstStyle/>
           <a:p>
-            <a:pPr marL="0" indent="0">
+            <a:pPr indent="0" marL="0">
               <a:buNone/>
             </a:pPr>
             <a:r>
@@ -15605,7 +15379,7 @@
           <a:bodyPr wrap="square" lIns="0" tIns="0" rIns="0" bIns="0" rtlCol="0" anchor="ctr"/>
           <a:lstStyle/>
           <a:p>
-            <a:pPr marL="0" indent="0">
+            <a:pPr indent="0" marL="0">
               <a:buNone/>
             </a:pPr>
             <a:r>
@@ -15644,7 +15418,7 @@
           <a:bodyPr wrap="square" lIns="0" tIns="0" rIns="0" bIns="0" rtlCol="0" anchor="ctr"/>
           <a:lstStyle/>
           <a:p>
-            <a:pPr marL="0" indent="0">
+            <a:pPr indent="0" marL="0">
               <a:buNone/>
             </a:pPr>
             <a:r>
@@ -15683,7 +15457,7 @@
           <a:bodyPr wrap="square" lIns="0" tIns="0" rIns="0" bIns="0" rtlCol="0" anchor="ctr"/>
           <a:lstStyle/>
           <a:p>
-            <a:pPr marL="0" indent="0">
+            <a:pPr indent="0" marL="0">
               <a:buNone/>
             </a:pPr>
             <a:r>
@@ -15722,7 +15496,7 @@
           <a:bodyPr wrap="square" lIns="0" tIns="0" rIns="0" bIns="0" rtlCol="0" anchor="ctr"/>
           <a:lstStyle/>
           <a:p>
-            <a:pPr marL="0" indent="0">
+            <a:pPr indent="0" marL="0">
               <a:buNone/>
             </a:pPr>
             <a:r>
@@ -15759,13 +15533,6 @@
           </a:solidFill>
           <a:ln/>
         </p:spPr>
-        <p:txBody>
-          <a:bodyPr/>
-          <a:lstStyle/>
-          <a:p>
-            <a:endParaRPr lang="en-US"/>
-          </a:p>
-        </p:txBody>
       </p:sp>
       <p:sp>
         <p:nvSpPr>
@@ -15788,7 +15555,7 @@
           <a:bodyPr wrap="square" rtlCol="0" anchor="ctr"/>
           <a:lstStyle/>
           <a:p>
-            <a:pPr marL="0" indent="0" algn="ctr">
+            <a:pPr algn="ctr" indent="0" marL="0">
               <a:buNone/>
             </a:pPr>
             <a:r>
@@ -15822,7 +15589,6 @@
         <a:solidFill>
           <a:srgbClr val="131B2E"/>
         </a:solidFill>
-        <a:effectLst/>
       </p:bgPr>
     </p:bg>
     <p:spTree>
@@ -15858,13 +15624,6 @@
           </a:solidFill>
           <a:ln/>
         </p:spPr>
-        <p:txBody>
-          <a:bodyPr/>
-          <a:lstStyle/>
-          <a:p>
-            <a:endParaRPr lang="en-US"/>
-          </a:p>
-        </p:txBody>
       </p:sp>
       <p:sp>
         <p:nvSpPr>
@@ -15887,7 +15646,7 @@
           <a:bodyPr wrap="square" lIns="0" tIns="0" rIns="0" bIns="0" rtlCol="0" anchor="ctr"/>
           <a:lstStyle/>
           <a:p>
-            <a:pPr marL="0" indent="0">
+            <a:pPr indent="0" marL="0">
               <a:buNone/>
             </a:pPr>
             <a:r>
@@ -15926,7 +15685,7 @@
           <a:bodyPr wrap="square" lIns="0" tIns="0" rIns="0" bIns="0" rtlCol="0" anchor="ctr"/>
           <a:lstStyle/>
           <a:p>
-            <a:pPr marL="0" indent="0">
+            <a:pPr indent="0" marL="0">
               <a:buNone/>
             </a:pPr>
             <a:r>
@@ -15963,20 +15722,13 @@
           </a:solidFill>
           <a:ln/>
           <a:effectLst>
-            <a:outerShdw blurRad="50800" dist="25400" dir="8100000" algn="bl" rotWithShape="0">
+            <a:outerShdw sx="100000" sy="100000" kx="0" ky="0" algn="bl" rotWithShape="0" blurRad="50800" dist="25400" dir="8100000">
               <a:srgbClr val="000000">
                 <a:alpha val="20000"/>
               </a:srgbClr>
             </a:outerShdw>
           </a:effectLst>
         </p:spPr>
-        <p:txBody>
-          <a:bodyPr/>
-          <a:lstStyle/>
-          <a:p>
-            <a:endParaRPr lang="en-US"/>
-          </a:p>
-        </p:txBody>
       </p:sp>
       <p:sp>
         <p:nvSpPr>
@@ -15999,7 +15751,7 @@
           <a:bodyPr wrap="square" lIns="0" tIns="0" rIns="0" bIns="0" rtlCol="0" anchor="ctr"/>
           <a:lstStyle/>
           <a:p>
-            <a:pPr marL="0" indent="0">
+            <a:pPr indent="0" marL="0">
               <a:buNone/>
             </a:pPr>
             <a:r>
@@ -16038,7 +15790,7 @@
           <a:bodyPr wrap="square" lIns="0" tIns="0" rIns="0" bIns="0" rtlCol="0" anchor="ctr"/>
           <a:lstStyle/>
           <a:p>
-            <a:pPr marL="0" indent="0">
+            <a:pPr indent="0" marL="0">
               <a:buNone/>
             </a:pPr>
             <a:r>
@@ -16055,7 +15807,7 @@
             <a:endParaRPr lang="en-US" sz="2000" dirty="0"/>
           </a:p>
           <a:p>
-            <a:pPr marL="0" indent="0">
+            <a:pPr indent="0" marL="0">
               <a:buNone/>
             </a:pPr>
             <a:r>
@@ -16092,20 +15844,13 @@
           </a:solidFill>
           <a:ln/>
           <a:effectLst>
-            <a:outerShdw blurRad="50800" dist="25400" dir="8100000" algn="bl" rotWithShape="0">
+            <a:outerShdw sx="100000" sy="100000" kx="0" ky="0" algn="bl" rotWithShape="0" blurRad="50800" dist="25400" dir="8100000">
               <a:srgbClr val="000000">
                 <a:alpha val="20000"/>
               </a:srgbClr>
             </a:outerShdw>
           </a:effectLst>
         </p:spPr>
-        <p:txBody>
-          <a:bodyPr/>
-          <a:lstStyle/>
-          <a:p>
-            <a:endParaRPr lang="en-US"/>
-          </a:p>
-        </p:txBody>
       </p:sp>
       <p:sp>
         <p:nvSpPr>
@@ -16128,7 +15873,7 @@
           <a:bodyPr wrap="square" lIns="0" tIns="0" rIns="0" bIns="0" rtlCol="0" anchor="ctr"/>
           <a:lstStyle/>
           <a:p>
-            <a:pPr marL="0" indent="0">
+            <a:pPr indent="0" marL="0">
               <a:buNone/>
             </a:pPr>
             <a:r>
@@ -16167,7 +15912,7 @@
           <a:bodyPr wrap="square" lIns="0" tIns="0" rIns="0" bIns="0" rtlCol="0" anchor="ctr"/>
           <a:lstStyle/>
           <a:p>
-            <a:pPr marL="0" indent="0">
+            <a:pPr indent="0" marL="0">
               <a:buNone/>
             </a:pPr>
             <a:r>
@@ -16206,7 +15951,7 @@
           <a:bodyPr wrap="square" lIns="0" tIns="0" rIns="0" bIns="0" rtlCol="0" anchor="ctr"/>
           <a:lstStyle/>
           <a:p>
-            <a:pPr marL="0" indent="0">
+            <a:pPr indent="0" marL="0">
               <a:buNone/>
             </a:pPr>
             <a:r>
@@ -16223,7 +15968,7 @@
             <a:endParaRPr lang="en-US" sz="1300" dirty="0"/>
           </a:p>
           <a:p>
-            <a:pPr marL="0" indent="0">
+            <a:pPr indent="0" marL="0">
               <a:buNone/>
             </a:pPr>
             <a:r>
@@ -16260,20 +16005,13 @@
           </a:solidFill>
           <a:ln/>
           <a:effectLst>
-            <a:outerShdw blurRad="50800" dist="25400" dir="8100000" algn="bl" rotWithShape="0">
+            <a:outerShdw sx="100000" sy="100000" kx="0" ky="0" algn="bl" rotWithShape="0" blurRad="50800" dist="25400" dir="8100000">
               <a:srgbClr val="000000">
                 <a:alpha val="20000"/>
               </a:srgbClr>
             </a:outerShdw>
           </a:effectLst>
         </p:spPr>
-        <p:txBody>
-          <a:bodyPr/>
-          <a:lstStyle/>
-          <a:p>
-            <a:endParaRPr lang="en-US"/>
-          </a:p>
-        </p:txBody>
       </p:sp>
       <p:sp>
         <p:nvSpPr>
@@ -16296,7 +16034,7 @@
           <a:bodyPr wrap="square" lIns="0" tIns="0" rIns="0" bIns="0" rtlCol="0" anchor="ctr"/>
           <a:lstStyle/>
           <a:p>
-            <a:pPr marL="0" indent="0">
+            <a:pPr indent="0" marL="0">
               <a:buNone/>
             </a:pPr>
             <a:r>
@@ -16335,7 +16073,7 @@
           <a:bodyPr wrap="square" lIns="0" tIns="0" rIns="0" bIns="0" rtlCol="0" anchor="ctr"/>
           <a:lstStyle/>
           <a:p>
-            <a:pPr marL="0" indent="0">
+            <a:pPr indent="0" marL="0">
               <a:buNone/>
             </a:pPr>
             <a:r>
@@ -16374,7 +16112,7 @@
           <a:bodyPr wrap="square" lIns="0" tIns="0" rIns="0" bIns="0" rtlCol="0" anchor="ctr"/>
           <a:lstStyle/>
           <a:p>
-            <a:pPr marL="0" indent="0">
+            <a:pPr indent="0" marL="0">
               <a:buNone/>
             </a:pPr>
             <a:r>
@@ -16391,7 +16129,7 @@
             <a:endParaRPr lang="en-US" sz="1300" dirty="0"/>
           </a:p>
           <a:p>
-            <a:pPr marL="0" indent="0">
+            <a:pPr indent="0" marL="0">
               <a:buNone/>
             </a:pPr>
             <a:r>
@@ -16428,20 +16166,13 @@
           </a:solidFill>
           <a:ln/>
           <a:effectLst>
-            <a:outerShdw blurRad="50800" dist="25400" dir="8100000" algn="bl" rotWithShape="0">
+            <a:outerShdw sx="100000" sy="100000" kx="0" ky="0" algn="bl" rotWithShape="0" blurRad="50800" dist="25400" dir="8100000">
               <a:srgbClr val="000000">
                 <a:alpha val="20000"/>
               </a:srgbClr>
             </a:outerShdw>
           </a:effectLst>
         </p:spPr>
-        <p:txBody>
-          <a:bodyPr/>
-          <a:lstStyle/>
-          <a:p>
-            <a:endParaRPr lang="en-US"/>
-          </a:p>
-        </p:txBody>
       </p:sp>
       <p:sp>
         <p:nvSpPr>
@@ -16464,7 +16195,7 @@
           <a:bodyPr wrap="square" lIns="0" tIns="0" rIns="0" bIns="0" rtlCol="0" anchor="ctr"/>
           <a:lstStyle/>
           <a:p>
-            <a:pPr marL="0" indent="0">
+            <a:pPr indent="0" marL="0">
               <a:buNone/>
             </a:pPr>
             <a:r>
@@ -16503,7 +16234,7 @@
           <a:bodyPr wrap="square" lIns="0" tIns="0" rIns="0" bIns="0" rtlCol="0" anchor="ctr"/>
           <a:lstStyle/>
           <a:p>
-            <a:pPr marL="0" indent="0">
+            <a:pPr indent="0" marL="0">
               <a:buNone/>
             </a:pPr>
             <a:r>
@@ -16542,7 +16273,7 @@
           <a:bodyPr wrap="square" lIns="0" tIns="0" rIns="0" bIns="0" rtlCol="0" anchor="ctr"/>
           <a:lstStyle/>
           <a:p>
-            <a:pPr marL="0" indent="0">
+            <a:pPr indent="0" marL="0">
               <a:buNone/>
             </a:pPr>
             <a:r>
@@ -16559,7 +16290,7 @@
             <a:endParaRPr lang="en-US" sz="1300" dirty="0"/>
           </a:p>
           <a:p>
-            <a:pPr marL="0" indent="0">
+            <a:pPr indent="0" marL="0">
               <a:buNone/>
             </a:pPr>
             <a:r>
@@ -16598,7 +16329,7 @@
           <a:bodyPr wrap="square" rtlCol="0" anchor="ctr"/>
           <a:lstStyle/>
           <a:p>
-            <a:pPr marL="0" indent="0" algn="ctr">
+            <a:pPr algn="ctr" indent="0" marL="0">
               <a:buNone/>
             </a:pPr>
             <a:r>
@@ -16632,7 +16363,6 @@
         <a:solidFill>
           <a:srgbClr val="131B2E"/>
         </a:solidFill>
-        <a:effectLst/>
       </p:bgPr>
     </p:bg>
     <p:spTree>
@@ -16668,13 +16398,6 @@
           </a:solidFill>
           <a:ln/>
         </p:spPr>
-        <p:txBody>
-          <a:bodyPr/>
-          <a:lstStyle/>
-          <a:p>
-            <a:endParaRPr lang="en-US"/>
-          </a:p>
-        </p:txBody>
       </p:sp>
       <p:sp>
         <p:nvSpPr>
@@ -16697,7 +16420,7 @@
           <a:bodyPr wrap="square" lIns="0" tIns="0" rIns="0" bIns="0" rtlCol="0" anchor="ctr"/>
           <a:lstStyle/>
           <a:p>
-            <a:pPr marL="0" indent="0">
+            <a:pPr indent="0" marL="0">
               <a:buNone/>
             </a:pPr>
             <a:r>
@@ -16736,7 +16459,7 @@
           <a:bodyPr wrap="square" lIns="0" tIns="0" rIns="0" bIns="0" rtlCol="0" anchor="ctr"/>
           <a:lstStyle/>
           <a:p>
-            <a:pPr marL="0" indent="0">
+            <a:pPr indent="0" marL="0">
               <a:buNone/>
             </a:pPr>
             <a:r>
@@ -16773,20 +16496,13 @@
           </a:solidFill>
           <a:ln/>
           <a:effectLst>
-            <a:outerShdw blurRad="50800" dist="25400" dir="8100000" algn="bl" rotWithShape="0">
+            <a:outerShdw sx="100000" sy="100000" kx="0" ky="0" algn="bl" rotWithShape="0" blurRad="50800" dist="25400" dir="8100000">
               <a:srgbClr val="000000">
                 <a:alpha val="20000"/>
               </a:srgbClr>
             </a:outerShdw>
           </a:effectLst>
         </p:spPr>
-        <p:txBody>
-          <a:bodyPr/>
-          <a:lstStyle/>
-          <a:p>
-            <a:endParaRPr lang="en-US"/>
-          </a:p>
-        </p:txBody>
       </p:sp>
       <p:sp>
         <p:nvSpPr>
@@ -16809,7 +16525,7 @@
           <a:bodyPr wrap="square" lIns="0" tIns="0" rIns="0" bIns="0" rtlCol="0" anchor="ctr"/>
           <a:lstStyle/>
           <a:p>
-            <a:pPr marL="0" indent="0">
+            <a:pPr indent="0" marL="0">
               <a:buNone/>
             </a:pPr>
             <a:r>
@@ -16848,7 +16564,7 @@
           <a:bodyPr wrap="square" lIns="0" tIns="0" rIns="0" bIns="0" rtlCol="0" anchor="ctr"/>
           <a:lstStyle/>
           <a:p>
-            <a:pPr marL="0" indent="0">
+            <a:pPr indent="0" marL="0">
               <a:buNone/>
             </a:pPr>
             <a:r>
@@ -16887,7 +16603,7 @@
           <a:bodyPr wrap="square" lIns="0" tIns="0" rIns="0" bIns="0" rtlCol="0" anchor="ctr"/>
           <a:lstStyle/>
           <a:p>
-            <a:pPr marL="0" indent="0">
+            <a:pPr indent="0" marL="0">
               <a:buNone/>
             </a:pPr>
             <a:r>
@@ -16926,7 +16642,7 @@
           <a:bodyPr wrap="square" lIns="0" tIns="0" rIns="0" bIns="0" rtlCol="0" anchor="ctr"/>
           <a:lstStyle/>
           <a:p>
-            <a:pPr marL="0" indent="0">
+            <a:pPr indent="0" marL="0">
               <a:buNone/>
             </a:pPr>
             <a:r>
@@ -16965,7 +16681,7 @@
           <a:bodyPr wrap="square" lIns="0" tIns="0" rIns="0" bIns="0" rtlCol="0" anchor="ctr"/>
           <a:lstStyle/>
           <a:p>
-            <a:pPr marL="0" indent="0">
+            <a:pPr indent="0" marL="0">
               <a:buNone/>
             </a:pPr>
             <a:r>
@@ -17004,7 +16720,7 @@
           <a:bodyPr wrap="square" lIns="0" tIns="0" rIns="0" bIns="0" rtlCol="0" anchor="ctr"/>
           <a:lstStyle/>
           <a:p>
-            <a:pPr marL="0" indent="0">
+            <a:pPr indent="0" marL="0">
               <a:buNone/>
             </a:pPr>
             <a:r>
@@ -17043,7 +16759,7 @@
           <a:bodyPr wrap="square" lIns="0" tIns="0" rIns="0" bIns="0" rtlCol="0" anchor="ctr"/>
           <a:lstStyle/>
           <a:p>
-            <a:pPr marL="0" indent="0">
+            <a:pPr indent="0" marL="0">
               <a:buNone/>
             </a:pPr>
             <a:r>
@@ -17082,7 +16798,7 @@
           <a:bodyPr wrap="square" lIns="0" tIns="0" rIns="0" bIns="0" rtlCol="0" anchor="ctr"/>
           <a:lstStyle/>
           <a:p>
-            <a:pPr marL="0" indent="0">
+            <a:pPr indent="0" marL="0">
               <a:buNone/>
             </a:pPr>
             <a:r>
@@ -17121,7 +16837,7 @@
           <a:bodyPr wrap="square" lIns="0" tIns="0" rIns="0" bIns="0" rtlCol="0" anchor="ctr"/>
           <a:lstStyle/>
           <a:p>
-            <a:pPr marL="0" indent="0">
+            <a:pPr indent="0" marL="0">
               <a:buNone/>
             </a:pPr>
             <a:r>
@@ -17160,7 +16876,7 @@
           <a:bodyPr wrap="square" lIns="0" tIns="0" rIns="0" bIns="0" rtlCol="0" anchor="ctr"/>
           <a:lstStyle/>
           <a:p>
-            <a:pPr marL="0" indent="0">
+            <a:pPr indent="0" marL="0">
               <a:buNone/>
             </a:pPr>
             <a:r>
@@ -17199,7 +16915,7 @@
           <a:bodyPr wrap="square" lIns="0" tIns="0" rIns="0" bIns="0" rtlCol="0" anchor="ctr"/>
           <a:lstStyle/>
           <a:p>
-            <a:pPr marL="0" indent="0">
+            <a:pPr indent="0" marL="0">
               <a:buNone/>
             </a:pPr>
             <a:r>
@@ -17238,7 +16954,7 @@
           <a:bodyPr wrap="square" lIns="0" tIns="0" rIns="0" bIns="0" rtlCol="0" anchor="ctr"/>
           <a:lstStyle/>
           <a:p>
-            <a:pPr marL="0" indent="0">
+            <a:pPr indent="0" marL="0">
               <a:buNone/>
             </a:pPr>
             <a:r>
@@ -17275,20 +16991,13 @@
           </a:solidFill>
           <a:ln/>
           <a:effectLst>
-            <a:outerShdw blurRad="50800" dist="25400" dir="8100000" algn="bl" rotWithShape="0">
+            <a:outerShdw sx="100000" sy="100000" kx="0" ky="0" algn="bl" rotWithShape="0" blurRad="50800" dist="25400" dir="8100000">
               <a:srgbClr val="000000">
                 <a:alpha val="20000"/>
               </a:srgbClr>
             </a:outerShdw>
           </a:effectLst>
         </p:spPr>
-        <p:txBody>
-          <a:bodyPr/>
-          <a:lstStyle/>
-          <a:p>
-            <a:endParaRPr lang="en-US"/>
-          </a:p>
-        </p:txBody>
       </p:sp>
       <p:sp>
         <p:nvSpPr>
@@ -17311,7 +17020,7 @@
           <a:bodyPr wrap="square" lIns="0" tIns="0" rIns="0" bIns="0" rtlCol="0" anchor="ctr"/>
           <a:lstStyle/>
           <a:p>
-            <a:pPr marL="0" indent="0">
+            <a:pPr indent="0" marL="0">
               <a:buNone/>
             </a:pPr>
             <a:r>
@@ -17350,7 +17059,7 @@
           <a:bodyPr wrap="square" lIns="0" tIns="0" rIns="0" bIns="0" rtlCol="0" anchor="ctr"/>
           <a:lstStyle/>
           <a:p>
-            <a:pPr marL="0" indent="0">
+            <a:pPr indent="0" marL="0">
               <a:buNone/>
             </a:pPr>
             <a:r>
@@ -17389,7 +17098,7 @@
           <a:bodyPr wrap="square" lIns="0" tIns="0" rIns="0" bIns="0" rtlCol="0" anchor="ctr"/>
           <a:lstStyle/>
           <a:p>
-            <a:pPr marL="0" indent="0">
+            <a:pPr indent="0" marL="0">
               <a:buNone/>
             </a:pPr>
             <a:r>
@@ -17428,7 +17137,7 @@
           <a:bodyPr wrap="square" lIns="0" tIns="0" rIns="0" bIns="0" rtlCol="0" anchor="ctr"/>
           <a:lstStyle/>
           <a:p>
-            <a:pPr marL="0" indent="0">
+            <a:pPr indent="0" marL="0">
               <a:buNone/>
             </a:pPr>
             <a:r>
@@ -17467,7 +17176,7 @@
           <a:bodyPr wrap="square" lIns="0" tIns="0" rIns="0" bIns="0" rtlCol="0" anchor="ctr"/>
           <a:lstStyle/>
           <a:p>
-            <a:pPr marL="0" indent="0">
+            <a:pPr indent="0" marL="0">
               <a:buNone/>
             </a:pPr>
             <a:r>
@@ -17506,7 +17215,7 @@
           <a:bodyPr wrap="square" lIns="0" tIns="0" rIns="0" bIns="0" rtlCol="0" anchor="ctr"/>
           <a:lstStyle/>
           <a:p>
-            <a:pPr marL="0" indent="0">
+            <a:pPr indent="0" marL="0">
               <a:buNone/>
             </a:pPr>
             <a:r>
@@ -17545,7 +17254,7 @@
           <a:bodyPr wrap="square" lIns="0" tIns="0" rIns="0" bIns="0" rtlCol="0" anchor="ctr"/>
           <a:lstStyle/>
           <a:p>
-            <a:pPr marL="0" indent="0">
+            <a:pPr indent="0" marL="0">
               <a:buNone/>
             </a:pPr>
             <a:r>
@@ -17584,7 +17293,7 @@
           <a:bodyPr wrap="square" lIns="0" tIns="0" rIns="0" bIns="0" rtlCol="0" anchor="ctr"/>
           <a:lstStyle/>
           <a:p>
-            <a:pPr marL="0" indent="0">
+            <a:pPr indent="0" marL="0">
               <a:buNone/>
             </a:pPr>
             <a:r>
@@ -17623,7 +17332,7 @@
           <a:bodyPr wrap="square" lIns="0" tIns="0" rIns="0" bIns="0" rtlCol="0" anchor="ctr"/>
           <a:lstStyle/>
           <a:p>
-            <a:pPr marL="0" indent="0">
+            <a:pPr indent="0" marL="0">
               <a:buNone/>
             </a:pPr>
             <a:r>
@@ -17662,7 +17371,7 @@
           <a:bodyPr wrap="square" lIns="0" tIns="0" rIns="0" bIns="0" rtlCol="0" anchor="ctr"/>
           <a:lstStyle/>
           <a:p>
-            <a:pPr marL="0" indent="0">
+            <a:pPr indent="0" marL="0">
               <a:buNone/>
             </a:pPr>
             <a:r>
@@ -17701,7 +17410,7 @@
           <a:bodyPr wrap="square" lIns="0" tIns="0" rIns="0" bIns="0" rtlCol="0" anchor="ctr"/>
           <a:lstStyle/>
           <a:p>
-            <a:pPr marL="0" indent="0">
+            <a:pPr indent="0" marL="0">
               <a:buNone/>
             </a:pPr>
             <a:r>
@@ -17740,7 +17449,7 @@
           <a:bodyPr wrap="square" lIns="0" tIns="0" rIns="0" bIns="0" rtlCol="0" anchor="ctr"/>
           <a:lstStyle/>
           <a:p>
-            <a:pPr marL="0" indent="0">
+            <a:pPr indent="0" marL="0">
               <a:buNone/>
             </a:pPr>
             <a:r>
@@ -17774,7 +17483,6 @@
         <a:solidFill>
           <a:srgbClr val="131B2E"/>
         </a:solidFill>
-        <a:effectLst/>
       </p:bgPr>
     </p:bg>
     <p:spTree>
@@ -17810,13 +17518,6 @@
           </a:solidFill>
           <a:ln/>
         </p:spPr>
-        <p:txBody>
-          <a:bodyPr/>
-          <a:lstStyle/>
-          <a:p>
-            <a:endParaRPr lang="en-US"/>
-          </a:p>
-        </p:txBody>
       </p:sp>
       <p:sp>
         <p:nvSpPr>
@@ -17839,7 +17540,7 @@
           <a:bodyPr wrap="square" lIns="0" tIns="0" rIns="0" bIns="0" rtlCol="0" anchor="ctr"/>
           <a:lstStyle/>
           <a:p>
-            <a:pPr marL="0" indent="0">
+            <a:pPr indent="0" marL="0">
               <a:buNone/>
             </a:pPr>
             <a:r>
@@ -17878,7 +17579,7 @@
           <a:bodyPr wrap="square" lIns="0" tIns="0" rIns="0" bIns="0" rtlCol="0" anchor="ctr"/>
           <a:lstStyle/>
           <a:p>
-            <a:pPr marL="0" indent="0">
+            <a:pPr indent="0" marL="0">
               <a:buNone/>
             </a:pPr>
             <a:r>
@@ -17898,22 +17599,22 @@
       </p:sp>
       <p:pic>
         <p:nvPicPr>
-          <p:cNvPr id="5" name="Image 0" descr="/sessions/sweet-quirky-clarke/mnt/CTA Seg V2/report/figures/unet3d_architecture.png"/>
+          <p:cNvPr id="5" name="Image 0" descr="/sessions/sweet-quirky-clarke/mnt/CTA Seg V2/report/figures_v2/unet3d_architecture.png">    </p:cNvPr>
           <p:cNvPicPr>
             <a:picLocks noChangeAspect="1"/>
           </p:cNvPicPr>
           <p:nvPr/>
         </p:nvPicPr>
         <p:blipFill>
-          <a:blip r:embed="rId3"/>
+          <a:blip r:embed="rId1"/>
           <a:stretch>
             <a:fillRect/>
           </a:stretch>
         </p:blipFill>
         <p:spPr>
           <a:xfrm>
-            <a:off x="274320" y="1280160"/>
-            <a:ext cx="5943600" cy="4114800"/>
+            <a:off x="182880" y="1188720"/>
+            <a:ext cx="6400800" cy="3657600"/>
           </a:xfrm>
           <a:prstGeom prst="rect">
             <a:avLst/>
@@ -17939,13 +17640,6 @@
           </a:solidFill>
           <a:ln/>
         </p:spPr>
-        <p:txBody>
-          <a:bodyPr/>
-          <a:lstStyle/>
-          <a:p>
-            <a:endParaRPr lang="en-US"/>
-          </a:p>
-        </p:txBody>
       </p:sp>
       <p:sp>
         <p:nvSpPr>
@@ -17968,7 +17662,7 @@
           <a:bodyPr wrap="square" lIns="0" tIns="0" rIns="0" bIns="0" rtlCol="0" anchor="ctr"/>
           <a:lstStyle/>
           <a:p>
-            <a:pPr marL="0" indent="0">
+            <a:pPr indent="0" marL="0">
               <a:buNone/>
             </a:pPr>
             <a:r>
@@ -18007,7 +17701,7 @@
           <a:bodyPr wrap="square" lIns="0" tIns="0" rIns="0" bIns="0" rtlCol="0" anchor="ctr"/>
           <a:lstStyle/>
           <a:p>
-            <a:pPr marL="0" indent="0">
+            <a:pPr indent="0" marL="0">
               <a:buNone/>
             </a:pPr>
             <a:r>
@@ -18044,13 +17738,6 @@
           </a:solidFill>
           <a:ln/>
         </p:spPr>
-        <p:txBody>
-          <a:bodyPr/>
-          <a:lstStyle/>
-          <a:p>
-            <a:endParaRPr lang="en-US"/>
-          </a:p>
-        </p:txBody>
       </p:sp>
       <p:sp>
         <p:nvSpPr>
@@ -18073,7 +17760,7 @@
           <a:bodyPr wrap="square" lIns="0" tIns="0" rIns="0" bIns="0" rtlCol="0" anchor="ctr"/>
           <a:lstStyle/>
           <a:p>
-            <a:pPr marL="0" indent="0">
+            <a:pPr indent="0" marL="0">
               <a:buNone/>
             </a:pPr>
             <a:r>
@@ -18112,7 +17799,7 @@
           <a:bodyPr wrap="square" lIns="0" tIns="0" rIns="0" bIns="0" rtlCol="0" anchor="ctr"/>
           <a:lstStyle/>
           <a:p>
-            <a:pPr marL="0" indent="0">
+            <a:pPr indent="0" marL="0">
               <a:buNone/>
             </a:pPr>
             <a:r>
@@ -18149,13 +17836,6 @@
           </a:solidFill>
           <a:ln/>
         </p:spPr>
-        <p:txBody>
-          <a:bodyPr/>
-          <a:lstStyle/>
-          <a:p>
-            <a:endParaRPr lang="en-US"/>
-          </a:p>
-        </p:txBody>
       </p:sp>
       <p:sp>
         <p:nvSpPr>
@@ -18178,7 +17858,7 @@
           <a:bodyPr wrap="square" lIns="0" tIns="0" rIns="0" bIns="0" rtlCol="0" anchor="ctr"/>
           <a:lstStyle/>
           <a:p>
-            <a:pPr marL="0" indent="0">
+            <a:pPr indent="0" marL="0">
               <a:buNone/>
             </a:pPr>
             <a:r>
@@ -18217,7 +17897,7 @@
           <a:bodyPr wrap="square" lIns="0" tIns="0" rIns="0" bIns="0" rtlCol="0" anchor="ctr"/>
           <a:lstStyle/>
           <a:p>
-            <a:pPr marL="0" indent="0">
+            <a:pPr indent="0" marL="0">
               <a:buNone/>
             </a:pPr>
             <a:r>
@@ -18254,13 +17934,6 @@
           </a:solidFill>
           <a:ln/>
         </p:spPr>
-        <p:txBody>
-          <a:bodyPr/>
-          <a:lstStyle/>
-          <a:p>
-            <a:endParaRPr lang="en-US"/>
-          </a:p>
-        </p:txBody>
       </p:sp>
       <p:sp>
         <p:nvSpPr>
@@ -18283,7 +17956,7 @@
           <a:bodyPr wrap="square" lIns="0" tIns="0" rIns="0" bIns="0" rtlCol="0" anchor="ctr"/>
           <a:lstStyle/>
           <a:p>
-            <a:pPr marL="0" indent="0">
+            <a:pPr indent="0" marL="0">
               <a:buNone/>
             </a:pPr>
             <a:r>
@@ -18322,7 +17995,7 @@
           <a:bodyPr wrap="square" lIns="0" tIns="0" rIns="0" bIns="0" rtlCol="0" anchor="ctr"/>
           <a:lstStyle/>
           <a:p>
-            <a:pPr marL="0" indent="0">
+            <a:pPr indent="0" marL="0">
               <a:buNone/>
             </a:pPr>
             <a:r>
@@ -18359,13 +18032,6 @@
           </a:solidFill>
           <a:ln/>
         </p:spPr>
-        <p:txBody>
-          <a:bodyPr/>
-          <a:lstStyle/>
-          <a:p>
-            <a:endParaRPr lang="en-US"/>
-          </a:p>
-        </p:txBody>
       </p:sp>
       <p:sp>
         <p:nvSpPr>
@@ -18388,7 +18054,7 @@
           <a:bodyPr wrap="square" lIns="0" tIns="0" rIns="0" bIns="0" rtlCol="0" anchor="ctr"/>
           <a:lstStyle/>
           <a:p>
-            <a:pPr marL="0" indent="0">
+            <a:pPr indent="0" marL="0">
               <a:buNone/>
             </a:pPr>
             <a:r>
@@ -18427,7 +18093,7 @@
           <a:bodyPr wrap="square" lIns="0" tIns="0" rIns="0" bIns="0" rtlCol="0" anchor="ctr"/>
           <a:lstStyle/>
           <a:p>
-            <a:pPr marL="0" indent="0">
+            <a:pPr indent="0" marL="0">
               <a:buNone/>
             </a:pPr>
             <a:r>
@@ -18464,13 +18130,6 @@
           </a:solidFill>
           <a:ln/>
         </p:spPr>
-        <p:txBody>
-          <a:bodyPr/>
-          <a:lstStyle/>
-          <a:p>
-            <a:endParaRPr lang="en-US"/>
-          </a:p>
-        </p:txBody>
       </p:sp>
       <p:sp>
         <p:nvSpPr>
@@ -18493,7 +18152,7 @@
           <a:bodyPr wrap="square" lIns="0" tIns="0" rIns="0" bIns="0" rtlCol="0" anchor="ctr"/>
           <a:lstStyle/>
           <a:p>
-            <a:pPr marL="0" indent="0">
+            <a:pPr indent="0" marL="0">
               <a:buNone/>
             </a:pPr>
             <a:r>
@@ -18532,7 +18191,7 @@
           <a:bodyPr wrap="square" lIns="0" tIns="0" rIns="0" bIns="0" rtlCol="0" anchor="ctr"/>
           <a:lstStyle/>
           <a:p>
-            <a:pPr marL="0" indent="0">
+            <a:pPr indent="0" marL="0">
               <a:buNone/>
             </a:pPr>
             <a:r>
@@ -18569,13 +18228,6 @@
           </a:solidFill>
           <a:ln/>
         </p:spPr>
-        <p:txBody>
-          <a:bodyPr/>
-          <a:lstStyle/>
-          <a:p>
-            <a:endParaRPr lang="en-US"/>
-          </a:p>
-        </p:txBody>
       </p:sp>
       <p:sp>
         <p:nvSpPr>
@@ -18598,7 +18250,7 @@
           <a:bodyPr wrap="square" lIns="0" tIns="0" rIns="0" bIns="0" rtlCol="0" anchor="ctr"/>
           <a:lstStyle/>
           <a:p>
-            <a:pPr marL="0" indent="0">
+            <a:pPr indent="0" marL="0">
               <a:buNone/>
             </a:pPr>
             <a:r>
@@ -18637,7 +18289,7 @@
           <a:bodyPr wrap="square" lIns="0" tIns="0" rIns="0" bIns="0" rtlCol="0" anchor="ctr"/>
           <a:lstStyle/>
           <a:p>
-            <a:pPr marL="0" indent="0">
+            <a:pPr indent="0" marL="0">
               <a:buNone/>
             </a:pPr>
             <a:r>
@@ -18674,13 +18326,6 @@
           </a:solidFill>
           <a:ln/>
         </p:spPr>
-        <p:txBody>
-          <a:bodyPr/>
-          <a:lstStyle/>
-          <a:p>
-            <a:endParaRPr lang="en-US"/>
-          </a:p>
-        </p:txBody>
       </p:sp>
       <p:sp>
         <p:nvSpPr>
@@ -18703,7 +18348,7 @@
           <a:bodyPr wrap="square" rtlCol="0" anchor="ctr"/>
           <a:lstStyle/>
           <a:p>
-            <a:pPr marL="0" indent="0" algn="ctr">
+            <a:pPr algn="ctr" indent="0" marL="0">
               <a:buNone/>
             </a:pPr>
             <a:r>
@@ -18737,7 +18382,6 @@
         <a:solidFill>
           <a:srgbClr val="131B2E"/>
         </a:solidFill>
-        <a:effectLst/>
       </p:bgPr>
     </p:bg>
     <p:spTree>
@@ -18773,13 +18417,6 @@
           </a:solidFill>
           <a:ln/>
         </p:spPr>
-        <p:txBody>
-          <a:bodyPr/>
-          <a:lstStyle/>
-          <a:p>
-            <a:endParaRPr lang="en-US"/>
-          </a:p>
-        </p:txBody>
       </p:sp>
       <p:sp>
         <p:nvSpPr>
@@ -18802,7 +18439,7 @@
           <a:bodyPr wrap="square" lIns="0" tIns="0" rIns="0" bIns="0" rtlCol="0" anchor="ctr"/>
           <a:lstStyle/>
           <a:p>
-            <a:pPr marL="0" indent="0">
+            <a:pPr indent="0" marL="0">
               <a:buNone/>
             </a:pPr>
             <a:r>
@@ -18841,7 +18478,7 @@
           <a:bodyPr wrap="square" lIns="0" tIns="0" rIns="0" bIns="0" rtlCol="0" anchor="ctr"/>
           <a:lstStyle/>
           <a:p>
-            <a:pPr marL="0" indent="0">
+            <a:pPr indent="0" marL="0">
               <a:buNone/>
             </a:pPr>
             <a:r>
@@ -18878,20 +18515,13 @@
           </a:solidFill>
           <a:ln/>
           <a:effectLst>
-            <a:outerShdw blurRad="50800" dist="25400" dir="8100000" algn="bl" rotWithShape="0">
+            <a:outerShdw sx="100000" sy="100000" kx="0" ky="0" algn="bl" rotWithShape="0" blurRad="50800" dist="25400" dir="8100000">
               <a:srgbClr val="000000">
                 <a:alpha val="20000"/>
               </a:srgbClr>
             </a:outerShdw>
           </a:effectLst>
         </p:spPr>
-        <p:txBody>
-          <a:bodyPr/>
-          <a:lstStyle/>
-          <a:p>
-            <a:endParaRPr lang="en-US"/>
-          </a:p>
-        </p:txBody>
       </p:sp>
       <p:sp>
         <p:nvSpPr>
@@ -18914,7 +18544,7 @@
           <a:bodyPr wrap="square" lIns="0" tIns="0" rIns="0" bIns="0" rtlCol="0" anchor="ctr"/>
           <a:lstStyle/>
           <a:p>
-            <a:pPr marL="0" indent="0">
+            <a:pPr indent="0" marL="0">
               <a:buNone/>
             </a:pPr>
             <a:r>
@@ -18951,13 +18581,6 @@
           </a:solidFill>
           <a:ln/>
         </p:spPr>
-        <p:txBody>
-          <a:bodyPr/>
-          <a:lstStyle/>
-          <a:p>
-            <a:endParaRPr lang="en-US"/>
-          </a:p>
-        </p:txBody>
       </p:sp>
       <p:sp>
         <p:nvSpPr>
@@ -18980,7 +18603,7 @@
           <a:bodyPr wrap="square" rtlCol="0" anchor="ctr"/>
           <a:lstStyle/>
           <a:p>
-            <a:pPr marL="0" indent="0" algn="ctr">
+            <a:pPr algn="ctr" indent="0" marL="0">
               <a:buNone/>
             </a:pPr>
             <a:r>
@@ -18994,6 +18617,9 @@
               </a:rPr>
               <a:t>L</a:t>
             </a:r>
+            <a:pPr algn="ctr" indent="0" marL="0">
+              <a:buNone/>
+            </a:pPr>
             <a:r>
               <a:rPr lang="en-US" sz="1200" dirty="0">
                 <a:solidFill>
@@ -19005,6 +18631,9 @@
               </a:rPr>
               <a:t>Dice</a:t>
             </a:r>
+            <a:pPr algn="ctr" indent="0" marL="0">
+              <a:buNone/>
+            </a:pPr>
             <a:r>
               <a:rPr lang="en-US" sz="1800" dirty="0">
                 <a:solidFill>
@@ -19016,6 +18645,9 @@
               </a:rPr>
               <a:t> = 1 − </a:t>
             </a:r>
+            <a:pPr algn="ctr" indent="0" marL="0">
+              <a:buNone/>
+            </a:pPr>
             <a:r>
               <a:rPr lang="en-US" sz="1600" dirty="0">
                 <a:solidFill>
@@ -19027,6 +18659,9 @@
               </a:rPr>
               <a:t>2 ∑ pᵢ · gᵢ + ε</a:t>
             </a:r>
+            <a:pPr algn="ctr" indent="0" marL="0">
+              <a:buNone/>
+            </a:pPr>
             <a:r>
               <a:rPr lang="en-US" sz="1800" dirty="0">
                 <a:solidFill>
@@ -19038,6 +18673,9 @@
               </a:rPr>
               <a:t> / </a:t>
             </a:r>
+            <a:pPr algn="ctr" indent="0" marL="0">
+              <a:buNone/>
+            </a:pPr>
             <a:r>
               <a:rPr lang="en-US" sz="1600" dirty="0">
                 <a:solidFill>
@@ -19074,7 +18712,7 @@
           <a:bodyPr wrap="square" lIns="0" tIns="0" rIns="0" bIns="0" rtlCol="0" anchor="ctr"/>
           <a:lstStyle/>
           <a:p>
-            <a:pPr marL="0" indent="0">
+            <a:pPr indent="0" marL="0">
               <a:buNone/>
             </a:pPr>
             <a:r>
@@ -19091,7 +18729,7 @@
             <a:endParaRPr lang="en-US" sz="1200" dirty="0"/>
           </a:p>
           <a:p>
-            <a:pPr marL="0" indent="0">
+            <a:pPr indent="0" marL="0">
               <a:buNone/>
             </a:pPr>
             <a:r>
@@ -19108,7 +18746,7 @@
             <a:endParaRPr lang="en-US" sz="1200" dirty="0"/>
           </a:p>
           <a:p>
-            <a:pPr marL="0" indent="0">
+            <a:pPr indent="0" marL="0">
               <a:buNone/>
             </a:pPr>
             <a:r>
@@ -19147,7 +18785,7 @@
           <a:bodyPr wrap="square" lIns="0" tIns="0" rIns="0" bIns="0" rtlCol="0" anchor="ctr"/>
           <a:lstStyle/>
           <a:p>
-            <a:pPr marL="0" indent="0">
+            <a:pPr indent="0" marL="0">
               <a:buNone/>
             </a:pPr>
             <a:r>
@@ -19184,20 +18822,13 @@
           </a:solidFill>
           <a:ln/>
           <a:effectLst>
-            <a:outerShdw blurRad="50800" dist="25400" dir="8100000" algn="bl" rotWithShape="0">
+            <a:outerShdw sx="100000" sy="100000" kx="0" ky="0" algn="bl" rotWithShape="0" blurRad="50800" dist="25400" dir="8100000">
               <a:srgbClr val="000000">
                 <a:alpha val="20000"/>
               </a:srgbClr>
             </a:outerShdw>
           </a:effectLst>
         </p:spPr>
-        <p:txBody>
-          <a:bodyPr/>
-          <a:lstStyle/>
-          <a:p>
-            <a:endParaRPr lang="en-US"/>
-          </a:p>
-        </p:txBody>
       </p:sp>
       <p:sp>
         <p:nvSpPr>
@@ -19220,7 +18851,7 @@
           <a:bodyPr wrap="square" lIns="0" tIns="0" rIns="0" bIns="0" rtlCol="0" anchor="ctr"/>
           <a:lstStyle/>
           <a:p>
-            <a:pPr marL="0" indent="0">
+            <a:pPr indent="0" marL="0">
               <a:buNone/>
             </a:pPr>
             <a:r>
@@ -19257,13 +18888,6 @@
           </a:solidFill>
           <a:ln/>
         </p:spPr>
-        <p:txBody>
-          <a:bodyPr/>
-          <a:lstStyle/>
-          <a:p>
-            <a:endParaRPr lang="en-US"/>
-          </a:p>
-        </p:txBody>
       </p:sp>
       <p:sp>
         <p:nvSpPr>
@@ -19286,7 +18910,7 @@
           <a:bodyPr wrap="square" rtlCol="0" anchor="ctr"/>
           <a:lstStyle/>
           <a:p>
-            <a:pPr marL="0" indent="0" algn="ctr">
+            <a:pPr algn="ctr" indent="0" marL="0">
               <a:buNone/>
             </a:pPr>
             <a:r>
@@ -19300,6 +18924,9 @@
               </a:rPr>
               <a:t>L</a:t>
             </a:r>
+            <a:pPr algn="ctr" indent="0" marL="0">
+              <a:buNone/>
+            </a:pPr>
             <a:r>
               <a:rPr lang="en-US" sz="1200" dirty="0">
                 <a:solidFill>
@@ -19311,6 +18938,9 @@
               </a:rPr>
               <a:t>CE</a:t>
             </a:r>
+            <a:pPr algn="ctr" indent="0" marL="0">
+              <a:buNone/>
+            </a:pPr>
             <a:r>
               <a:rPr lang="en-US" sz="1800" dirty="0">
                 <a:solidFill>
@@ -19347,7 +18977,7 @@
           <a:bodyPr wrap="square" lIns="0" tIns="0" rIns="0" bIns="0" rtlCol="0" anchor="ctr"/>
           <a:lstStyle/>
           <a:p>
-            <a:pPr marL="0" indent="0">
+            <a:pPr indent="0" marL="0">
               <a:buNone/>
             </a:pPr>
             <a:r>
@@ -19384,13 +19014,6 @@
           </a:solidFill>
           <a:ln/>
         </p:spPr>
-        <p:txBody>
-          <a:bodyPr/>
-          <a:lstStyle/>
-          <a:p>
-            <a:endParaRPr lang="en-US"/>
-          </a:p>
-        </p:txBody>
       </p:sp>
       <p:sp>
         <p:nvSpPr>
@@ -19413,7 +19036,7 @@
           <a:bodyPr wrap="square" rtlCol="0" anchor="ctr"/>
           <a:lstStyle/>
           <a:p>
-            <a:pPr marL="0" indent="0" algn="ctr">
+            <a:pPr algn="ctr" indent="0" marL="0">
               <a:buNone/>
             </a:pPr>
             <a:r>
@@ -19427,6 +19050,9 @@
               </a:rPr>
               <a:t>L</a:t>
             </a:r>
+            <a:pPr algn="ctr" indent="0" marL="0">
+              <a:buNone/>
+            </a:pPr>
             <a:r>
               <a:rPr lang="en-US" sz="1100" dirty="0">
                 <a:solidFill>
@@ -19438,6 +19064,9 @@
               </a:rPr>
               <a:t>base</a:t>
             </a:r>
+            <a:pPr algn="ctr" indent="0" marL="0">
+              <a:buNone/>
+            </a:pPr>
             <a:r>
               <a:rPr lang="en-US" sz="1700" dirty="0">
                 <a:solidFill>
@@ -19449,6 +19078,9 @@
               </a:rPr>
               <a:t> = L</a:t>
             </a:r>
+            <a:pPr algn="ctr" indent="0" marL="0">
+              <a:buNone/>
+            </a:pPr>
             <a:r>
               <a:rPr lang="en-US" sz="1100" dirty="0">
                 <a:solidFill>
@@ -19460,6 +19092,9 @@
               </a:rPr>
               <a:t>CE</a:t>
             </a:r>
+            <a:pPr algn="ctr" indent="0" marL="0">
+              <a:buNone/>
+            </a:pPr>
             <a:r>
               <a:rPr lang="en-US" sz="1700" dirty="0">
                 <a:solidFill>
@@ -19471,6 +19106,9 @@
               </a:rPr>
               <a:t> + L</a:t>
             </a:r>
+            <a:pPr algn="ctr" indent="0" marL="0">
+              <a:buNone/>
+            </a:pPr>
             <a:r>
               <a:rPr lang="en-US" sz="1100" dirty="0">
                 <a:solidFill>
@@ -19505,13 +19143,6 @@
           </a:solidFill>
           <a:ln/>
         </p:spPr>
-        <p:txBody>
-          <a:bodyPr/>
-          <a:lstStyle/>
-          <a:p>
-            <a:endParaRPr lang="en-US"/>
-          </a:p>
-        </p:txBody>
       </p:sp>
       <p:sp>
         <p:nvSpPr>
@@ -19534,7 +19165,7 @@
           <a:bodyPr wrap="square" rtlCol="0" anchor="ctr"/>
           <a:lstStyle/>
           <a:p>
-            <a:pPr marL="0" indent="0" algn="ctr">
+            <a:pPr algn="ctr" indent="0" marL="0">
               <a:buNone/>
             </a:pPr>
             <a:r>
@@ -19853,319 +19484,4 @@
     </a:ext>
   </a:extLst>
 </a:theme>
-</file>
-
-<file path=ppt/theme/theme2.xml><?xml version="1.0" encoding="utf-8"?>
-<a:theme xmlns:a="http://schemas.openxmlformats.org/drawingml/2006/main" name="Office Theme">
-  <a:themeElements>
-    <a:clrScheme name="Office">
-      <a:dk1>
-        <a:sysClr val="windowText" lastClr="000000"/>
-      </a:dk1>
-      <a:lt1>
-        <a:sysClr val="window" lastClr="FFFFFF"/>
-      </a:lt1>
-      <a:dk2>
-        <a:srgbClr val="0E2841"/>
-      </a:dk2>
-      <a:lt2>
-        <a:srgbClr val="E8E8E8"/>
-      </a:lt2>
-      <a:accent1>
-        <a:srgbClr val="156082"/>
-      </a:accent1>
-      <a:accent2>
-        <a:srgbClr val="E97132"/>
-      </a:accent2>
-      <a:accent3>
-        <a:srgbClr val="196B24"/>
-      </a:accent3>
-      <a:accent4>
-        <a:srgbClr val="0F9ED5"/>
-      </a:accent4>
-      <a:accent5>
-        <a:srgbClr val="A02B93"/>
-      </a:accent5>
-      <a:accent6>
-        <a:srgbClr val="4EA72E"/>
-      </a:accent6>
-      <a:hlink>
-        <a:srgbClr val="467886"/>
-      </a:hlink>
-      <a:folHlink>
-        <a:srgbClr val="96607D"/>
-      </a:folHlink>
-    </a:clrScheme>
-    <a:fontScheme name="Office">
-      <a:majorFont>
-        <a:latin typeface="Aptos Display" panose="02110004020202020204"/>
-        <a:ea typeface=""/>
-        <a:cs typeface=""/>
-        <a:font script="Jpan" typeface="游ゴシック Light"/>
-        <a:font script="Hang" typeface="맑은 고딕"/>
-        <a:font script="Hans" typeface="等线 Light"/>
-        <a:font script="Hant" typeface="新細明體"/>
-        <a:font script="Arab" typeface="Times New Roman"/>
-        <a:font script="Hebr" typeface="Times New Roman"/>
-        <a:font script="Thai" typeface="Angsana New"/>
-        <a:font script="Ethi" typeface="Nyala"/>
-        <a:font script="Beng" typeface="Vrinda"/>
-        <a:font script="Gujr" typeface="Shruti"/>
-        <a:font script="Khmr" typeface="MoolBoran"/>
-        <a:font script="Knda" typeface="Tunga"/>
-        <a:font script="Guru" typeface="Raavi"/>
-        <a:font script="Cans" typeface="Euphemia"/>
-        <a:font script="Cher" typeface="Plantagenet Cherokee"/>
-        <a:font script="Yiii" typeface="Microsoft Yi Baiti"/>
-        <a:font script="Tibt" typeface="Microsoft Himalaya"/>
-        <a:font script="Thaa" typeface="MV Boli"/>
-        <a:font script="Deva" typeface="Mangal"/>
-        <a:font script="Telu" typeface="Gautami"/>
-        <a:font script="Taml" typeface="Latha"/>
-        <a:font script="Syrc" typeface="Estrangelo Edessa"/>
-        <a:font script="Orya" typeface="Kalinga"/>
-        <a:font script="Mlym" typeface="Kartika"/>
-        <a:font script="Laoo" typeface="DokChampa"/>
-        <a:font script="Sinh" typeface="Iskoola Pota"/>
-        <a:font script="Mong" typeface="Mongolian Baiti"/>
-        <a:font script="Viet" typeface="Times New Roman"/>
-        <a:font script="Uigh" typeface="Microsoft Uighur"/>
-        <a:font script="Geor" typeface="Sylfaen"/>
-        <a:font script="Armn" typeface="Arial"/>
-        <a:font script="Bugi" typeface="Leelawadee UI"/>
-        <a:font script="Bopo" typeface="Microsoft JhengHei"/>
-        <a:font script="Java" typeface="Javanese Text"/>
-        <a:font script="Lisu" typeface="Segoe UI"/>
-        <a:font script="Mymr" typeface="Myanmar Text"/>
-        <a:font script="Nkoo" typeface="Ebrima"/>
-        <a:font script="Olck" typeface="Nirmala UI"/>
-        <a:font script="Osma" typeface="Ebrima"/>
-        <a:font script="Phag" typeface="Phagspa"/>
-        <a:font script="Syrn" typeface="Estrangelo Edessa"/>
-        <a:font script="Syrj" typeface="Estrangelo Edessa"/>
-        <a:font script="Syre" typeface="Estrangelo Edessa"/>
-        <a:font script="Sora" typeface="Nirmala UI"/>
-        <a:font script="Tale" typeface="Microsoft Tai Le"/>
-        <a:font script="Talu" typeface="Microsoft New Tai Lue"/>
-        <a:font script="Tfng" typeface="Ebrima"/>
-      </a:majorFont>
-      <a:minorFont>
-        <a:latin typeface="Aptos" panose="02110004020202020204"/>
-        <a:ea typeface=""/>
-        <a:cs typeface=""/>
-        <a:font script="Jpan" typeface="游ゴシック"/>
-        <a:font script="Hang" typeface="맑은 고딕"/>
-        <a:font script="Hans" typeface="等线"/>
-        <a:font script="Hant" typeface="新細明體"/>
-        <a:font script="Arab" typeface="Arial"/>
-        <a:font script="Hebr" typeface="Arial"/>
-        <a:font script="Thai" typeface="Cordia New"/>
-        <a:font script="Ethi" typeface="Nyala"/>
-        <a:font script="Beng" typeface="Vrinda"/>
-        <a:font script="Gujr" typeface="Shruti"/>
-        <a:font script="Khmr" typeface="DaunPenh"/>
-        <a:font script="Knda" typeface="Tunga"/>
-        <a:font script="Guru" typeface="Raavi"/>
-        <a:font script="Cans" typeface="Euphemia"/>
-        <a:font script="Cher" typeface="Plantagenet Cherokee"/>
-        <a:font script="Yiii" typeface="Microsoft Yi Baiti"/>
-        <a:font script="Tibt" typeface="Microsoft Himalaya"/>
-        <a:font script="Thaa" typeface="MV Boli"/>
-        <a:font script="Deva" typeface="Mangal"/>
-        <a:font script="Telu" typeface="Gautami"/>
-        <a:font script="Taml" typeface="Latha"/>
-        <a:font script="Syrc" typeface="Estrangelo Edessa"/>
-        <a:font script="Orya" typeface="Kalinga"/>
-        <a:font script="Mlym" typeface="Kartika"/>
-        <a:font script="Laoo" typeface="DokChampa"/>
-        <a:font script="Sinh" typeface="Iskoola Pota"/>
-        <a:font script="Mong" typeface="Mongolian Baiti"/>
-        <a:font script="Viet" typeface="Arial"/>
-        <a:font script="Uigh" typeface="Microsoft Uighur"/>
-        <a:font script="Geor" typeface="Sylfaen"/>
-        <a:font script="Armn" typeface="Arial"/>
-        <a:font script="Bugi" typeface="Leelawadee UI"/>
-        <a:font script="Bopo" typeface="Microsoft JhengHei"/>
-        <a:font script="Java" typeface="Javanese Text"/>
-        <a:font script="Lisu" typeface="Segoe UI"/>
-        <a:font script="Mymr" typeface="Myanmar Text"/>
-        <a:font script="Nkoo" typeface="Ebrima"/>
-        <a:font script="Olck" typeface="Nirmala UI"/>
-        <a:font script="Osma" typeface="Ebrima"/>
-        <a:font script="Phag" typeface="Phagspa"/>
-        <a:font script="Syrn" typeface="Estrangelo Edessa"/>
-        <a:font script="Syrj" typeface="Estrangelo Edessa"/>
-        <a:font script="Syre" typeface="Estrangelo Edessa"/>
-        <a:font script="Sora" typeface="Nirmala UI"/>
-        <a:font script="Tale" typeface="Microsoft Tai Le"/>
-        <a:font script="Talu" typeface="Microsoft New Tai Lue"/>
-        <a:font script="Tfng" typeface="Ebrima"/>
-      </a:minorFont>
-    </a:fontScheme>
-    <a:fmtScheme name="Office">
-      <a:fillStyleLst>
-        <a:solidFill>
-          <a:schemeClr val="phClr"/>
-        </a:solidFill>
-        <a:gradFill rotWithShape="1">
-          <a:gsLst>
-            <a:gs pos="0">
-              <a:schemeClr val="phClr">
-                <a:lumMod val="110000"/>
-                <a:satMod val="105000"/>
-                <a:tint val="67000"/>
-              </a:schemeClr>
-            </a:gs>
-            <a:gs pos="50000">
-              <a:schemeClr val="phClr">
-                <a:lumMod val="105000"/>
-                <a:satMod val="103000"/>
-                <a:tint val="73000"/>
-              </a:schemeClr>
-            </a:gs>
-            <a:gs pos="100000">
-              <a:schemeClr val="phClr">
-                <a:lumMod val="105000"/>
-                <a:satMod val="109000"/>
-                <a:tint val="81000"/>
-              </a:schemeClr>
-            </a:gs>
-          </a:gsLst>
-          <a:lin ang="5400000" scaled="0"/>
-        </a:gradFill>
-        <a:gradFill rotWithShape="1">
-          <a:gsLst>
-            <a:gs pos="0">
-              <a:schemeClr val="phClr">
-                <a:satMod val="103000"/>
-                <a:lumMod val="102000"/>
-                <a:tint val="94000"/>
-              </a:schemeClr>
-            </a:gs>
-            <a:gs pos="50000">
-              <a:schemeClr val="phClr">
-                <a:satMod val="110000"/>
-                <a:lumMod val="100000"/>
-                <a:shade val="100000"/>
-              </a:schemeClr>
-            </a:gs>
-            <a:gs pos="100000">
-              <a:schemeClr val="phClr">
-                <a:lumMod val="99000"/>
-                <a:satMod val="120000"/>
-                <a:shade val="78000"/>
-              </a:schemeClr>
-            </a:gs>
-          </a:gsLst>
-          <a:lin ang="5400000" scaled="0"/>
-        </a:gradFill>
-      </a:fillStyleLst>
-      <a:lnStyleLst>
-        <a:ln w="12700" cap="flat" cmpd="sng" algn="ctr">
-          <a:solidFill>
-            <a:schemeClr val="phClr"/>
-          </a:solidFill>
-          <a:prstDash val="solid"/>
-          <a:miter lim="800000"/>
-        </a:ln>
-        <a:ln w="19050" cap="flat" cmpd="sng" algn="ctr">
-          <a:solidFill>
-            <a:schemeClr val="phClr"/>
-          </a:solidFill>
-          <a:prstDash val="solid"/>
-          <a:miter lim="800000"/>
-        </a:ln>
-        <a:ln w="25400" cap="flat" cmpd="sng" algn="ctr">
-          <a:solidFill>
-            <a:schemeClr val="phClr"/>
-          </a:solidFill>
-          <a:prstDash val="solid"/>
-          <a:miter lim="800000"/>
-        </a:ln>
-      </a:lnStyleLst>
-      <a:effectStyleLst>
-        <a:effectStyle>
-          <a:effectLst/>
-        </a:effectStyle>
-        <a:effectStyle>
-          <a:effectLst/>
-        </a:effectStyle>
-        <a:effectStyle>
-          <a:effectLst>
-            <a:outerShdw blurRad="57150" dist="19050" dir="5400000" algn="ctr" rotWithShape="0">
-              <a:srgbClr val="000000">
-                <a:alpha val="63000"/>
-              </a:srgbClr>
-            </a:outerShdw>
-          </a:effectLst>
-        </a:effectStyle>
-      </a:effectStyleLst>
-      <a:bgFillStyleLst>
-        <a:solidFill>
-          <a:schemeClr val="phClr"/>
-        </a:solidFill>
-        <a:solidFill>
-          <a:schemeClr val="phClr">
-            <a:tint val="95000"/>
-            <a:satMod val="170000"/>
-          </a:schemeClr>
-        </a:solidFill>
-        <a:gradFill rotWithShape="1">
-          <a:gsLst>
-            <a:gs pos="0">
-              <a:schemeClr val="phClr">
-                <a:tint val="93000"/>
-                <a:satMod val="150000"/>
-                <a:shade val="98000"/>
-                <a:lumMod val="102000"/>
-              </a:schemeClr>
-            </a:gs>
-            <a:gs pos="50000">
-              <a:schemeClr val="phClr">
-                <a:tint val="98000"/>
-                <a:satMod val="130000"/>
-                <a:shade val="90000"/>
-                <a:lumMod val="103000"/>
-              </a:schemeClr>
-            </a:gs>
-            <a:gs pos="100000">
-              <a:schemeClr val="phClr">
-                <a:shade val="63000"/>
-                <a:satMod val="120000"/>
-              </a:schemeClr>
-            </a:gs>
-          </a:gsLst>
-          <a:lin ang="5400000" scaled="0"/>
-        </a:gradFill>
-      </a:bgFillStyleLst>
-    </a:fmtScheme>
-  </a:themeElements>
-  <a:objectDefaults>
-    <a:lnDef>
-      <a:spPr/>
-      <a:bodyPr/>
-      <a:lstStyle/>
-      <a:style>
-        <a:lnRef idx="2">
-          <a:schemeClr val="accent1"/>
-        </a:lnRef>
-        <a:fillRef idx="0">
-          <a:schemeClr val="accent1"/>
-        </a:fillRef>
-        <a:effectRef idx="1">
-          <a:schemeClr val="accent1"/>
-        </a:effectRef>
-        <a:fontRef idx="minor">
-          <a:schemeClr val="tx1"/>
-        </a:fontRef>
-      </a:style>
-    </a:lnDef>
-  </a:objectDefaults>
-  <a:extraClrSchemeLst/>
-  <a:extLst>
-    <a:ext uri="{05A4C25C-085E-4340-85A3-A5531E510DB2}">
-      <thm15:themeFamily xmlns:thm15="http://schemas.microsoft.com/office/thememl/2012/main" name="Office Theme" id="{2E142A2C-CD16-42D6-873A-C26D2A0506FA}" vid="{1BDDFF52-6CD6-40A5-AB3C-68EB2F1E4D0A}"/>
-    </a:ext>
-  </a:extLst>
-</a:theme>
 </file>
--- a/vessel_seg_v2/CTA Seg V2/report/presentation_v2.pptx
+++ b/vessel_seg_v2/CTA Seg V2/report/presentation_v2.pptx
@@ -4483,7 +4483,7 @@
         </p:nvGraphicFramePr>
         <p:xfrm>
           <a:off x="822960" y="5760720"/>
-          <a:ext cx="10424160" cy="640080"/>
+          <a:ext cx="10515600" cy="1036320"/>
         </p:xfrm>
         <a:graphic>
           <a:graphicData uri="http://schemas.openxmlformats.org/drawingml/2006/table">
@@ -6618,7 +6618,7 @@
         </p:nvSpPr>
         <p:spPr>
           <a:xfrm>
-            <a:off x="548640" y="6217920"/>
+            <a:off x="548640" y="6199632"/>
             <a:ext cx="10972800" cy="457200"/>
           </a:xfrm>
           <a:prstGeom prst="rect">
@@ -7893,7 +7893,7 @@
         </p:nvGraphicFramePr>
         <p:xfrm>
           <a:off x="6858000" y="3383280"/>
-          <a:ext cx="4572000" cy="1371600"/>
+          <a:ext cx="4114800" cy="1371600"/>
         </p:xfrm>
         <a:graphic>
           <a:graphicData uri="http://schemas.openxmlformats.org/drawingml/2006/table">
@@ -16735,7 +16735,7 @@
         </p:nvSpPr>
         <p:spPr>
           <a:xfrm>
-            <a:off x="548640" y="1371600"/>
+            <a:off x="556846" y="1371600"/>
             <a:ext cx="5303520" cy="4754880"/>
           </a:xfrm>
           <a:prstGeom prst="rect">
@@ -17885,7 +17885,7 @@
         </p:blipFill>
         <p:spPr>
           <a:xfrm>
-            <a:off x="182880" y="1188720"/>
+            <a:off x="475957" y="1234440"/>
             <a:ext cx="6400800" cy="3657600"/>
           </a:xfrm>
           <a:prstGeom prst="rect">
